--- a/Presentations/Thesis Update(first case)- 04-03-2026.pptx
+++ b/Presentations/Thesis Update(first case)- 04-03-2026.pptx
@@ -5,10 +5,10 @@
     <p:sldMasterId id="2147483648" r:id="rId1"/>
   </p:sldMasterIdLst>
   <p:notesMasterIdLst>
-    <p:notesMasterId r:id="rId22"/>
+    <p:notesMasterId r:id="rId23"/>
   </p:notesMasterIdLst>
   <p:handoutMasterIdLst>
-    <p:handoutMasterId r:id="rId23"/>
+    <p:handoutMasterId r:id="rId24"/>
   </p:handoutMasterIdLst>
   <p:sldIdLst>
     <p:sldId id="271" r:id="rId2"/>
@@ -16,28 +16,29 @@
     <p:sldId id="266" r:id="rId4"/>
     <p:sldId id="268" r:id="rId5"/>
     <p:sldId id="269" r:id="rId6"/>
-    <p:sldId id="270" r:id="rId7"/>
-    <p:sldId id="289" r:id="rId8"/>
-    <p:sldId id="264" r:id="rId9"/>
-    <p:sldId id="265" r:id="rId10"/>
-    <p:sldId id="274" r:id="rId11"/>
-    <p:sldId id="276" r:id="rId12"/>
-    <p:sldId id="277" r:id="rId13"/>
-    <p:sldId id="288" r:id="rId14"/>
-    <p:sldId id="281" r:id="rId15"/>
-    <p:sldId id="280" r:id="rId16"/>
-    <p:sldId id="290" r:id="rId17"/>
-    <p:sldId id="275" r:id="rId18"/>
-    <p:sldId id="279" r:id="rId19"/>
-    <p:sldId id="278" r:id="rId20"/>
-    <p:sldId id="267" r:id="rId21"/>
+    <p:sldId id="292" r:id="rId7"/>
+    <p:sldId id="270" r:id="rId8"/>
+    <p:sldId id="289" r:id="rId9"/>
+    <p:sldId id="264" r:id="rId10"/>
+    <p:sldId id="265" r:id="rId11"/>
+    <p:sldId id="274" r:id="rId12"/>
+    <p:sldId id="276" r:id="rId13"/>
+    <p:sldId id="293" r:id="rId14"/>
+    <p:sldId id="291" r:id="rId15"/>
+    <p:sldId id="275" r:id="rId16"/>
+    <p:sldId id="281" r:id="rId17"/>
+    <p:sldId id="280" r:id="rId18"/>
+    <p:sldId id="290" r:id="rId19"/>
+    <p:sldId id="279" r:id="rId20"/>
+    <p:sldId id="278" r:id="rId21"/>
+    <p:sldId id="267" r:id="rId22"/>
   </p:sldIdLst>
   <p:sldSz cx="14630400" cy="8229600"/>
   <p:notesSz cx="8229600" cy="14630400"/>
   <p:embeddedFontLst>
     <p:embeddedFont>
       <p:font typeface="Cambria Math" panose="02040503050406030204" pitchFamily="18" charset="0"/>
-      <p:regular r:id="rId24"/>
+      <p:regular r:id="rId25"/>
     </p:embeddedFont>
   </p:embeddedFontLst>
   <p:defaultTextStyle>
@@ -1687,6 +1688,353 @@
           <a:chExt cx="0" cy="0"/>
         </a:xfrm>
       </p:grpSpPr>
+      <p:sp>
+        <p:nvSpPr>
+          <p:cNvPr id="5" name="Shape 4">
+            <a:extLst>
+              <a:ext uri="{FF2B5EF4-FFF2-40B4-BE49-F238E27FC236}">
+                <a16:creationId xmlns:a16="http://schemas.microsoft.com/office/drawing/2014/main" id="{01E4604A-A2F2-75F3-0A53-CA6CEEF5588D}"/>
+              </a:ext>
+            </a:extLst>
+          </p:cNvPr>
+          <p:cNvSpPr/>
+          <p:nvPr/>
+        </p:nvSpPr>
+        <p:spPr>
+          <a:xfrm>
+            <a:off x="1252800" y="2697493"/>
+            <a:ext cx="6608494" cy="3522054"/>
+          </a:xfrm>
+          <a:prstGeom prst="roundRect">
+            <a:avLst>
+              <a:gd name="adj" fmla="val 4335"/>
+            </a:avLst>
+          </a:prstGeom>
+          <a:solidFill>
+            <a:srgbClr val="D2DDF9"/>
+          </a:solidFill>
+          <a:ln/>
+        </p:spPr>
+        <p:txBody>
+          <a:bodyPr/>
+          <a:lstStyle/>
+          <a:p>
+            <a:endParaRPr lang="de-DE">
+              <a:latin typeface="Arial" panose="020B0604020202020204" pitchFamily="34" charset="0"/>
+              <a:cs typeface="Arial" panose="020B0604020202020204" pitchFamily="34" charset="0"/>
+            </a:endParaRPr>
+          </a:p>
+        </p:txBody>
+      </p:sp>
+      <p:sp>
+        <p:nvSpPr>
+          <p:cNvPr id="2" name="Text 1">
+            <a:extLst>
+              <a:ext uri="{FF2B5EF4-FFF2-40B4-BE49-F238E27FC236}">
+                <a16:creationId xmlns:a16="http://schemas.microsoft.com/office/drawing/2014/main" id="{C62DF92F-1163-B150-A05D-661A035DACD9}"/>
+              </a:ext>
+            </a:extLst>
+          </p:cNvPr>
+          <p:cNvSpPr/>
+          <p:nvPr/>
+        </p:nvSpPr>
+        <p:spPr>
+          <a:xfrm>
+            <a:off x="1483201" y="2600711"/>
+            <a:ext cx="6127200" cy="3715618"/>
+          </a:xfrm>
+          <a:prstGeom prst="rect">
+            <a:avLst/>
+          </a:prstGeom>
+          <a:noFill/>
+          <a:ln/>
+        </p:spPr>
+        <p:txBody>
+          <a:bodyPr wrap="none" lIns="0" tIns="0" rIns="0" bIns="0" rtlCol="0" anchor="t"/>
+          <a:lstStyle/>
+          <a:p>
+            <a:pPr marL="0" indent="0" algn="l">
+              <a:lnSpc>
+                <a:spcPts val="2850"/>
+              </a:lnSpc>
+              <a:buNone/>
+            </a:pPr>
+            <a:endParaRPr lang="en-US" sz="1750" dirty="0">
+              <a:latin typeface="Arial" panose="020B0604020202020204" pitchFamily="34" charset="0"/>
+              <a:ea typeface="Heebo" pitchFamily="34" charset="-122"/>
+              <a:cs typeface="Arial" panose="020B0604020202020204" pitchFamily="34" charset="0"/>
+            </a:endParaRPr>
+          </a:p>
+          <a:p>
+            <a:pPr marL="0" indent="0" algn="l">
+              <a:lnSpc>
+                <a:spcPts val="2850"/>
+              </a:lnSpc>
+              <a:buNone/>
+            </a:pPr>
+            <a:r>
+              <a:rPr lang="en-US" sz="2400" b="1" dirty="0">
+                <a:latin typeface="Arial" panose="020B0604020202020204" pitchFamily="34" charset="0"/>
+                <a:ea typeface="Heebo" pitchFamily="34" charset="-122"/>
+                <a:cs typeface="Arial" panose="020B0604020202020204" pitchFamily="34" charset="0"/>
+              </a:rPr>
+              <a:t>Strengths:</a:t>
+            </a:r>
+          </a:p>
+          <a:p>
+            <a:pPr marL="285750" indent="-285750" algn="l">
+              <a:lnSpc>
+                <a:spcPts val="2850"/>
+              </a:lnSpc>
+              <a:buFont typeface="Arial" panose="020B0604020202020204" pitchFamily="34" charset="0"/>
+              <a:buChar char="•"/>
+            </a:pPr>
+            <a:r>
+              <a:rPr lang="en-US" dirty="0">
+                <a:latin typeface="Arial" panose="020B0604020202020204" pitchFamily="34" charset="0"/>
+                <a:ea typeface="Heebo" pitchFamily="34" charset="-122"/>
+                <a:cs typeface="Arial" panose="020B0604020202020204" pitchFamily="34" charset="0"/>
+              </a:rPr>
+              <a:t>31/32 runs (96%) achieved near-optimal performance</a:t>
+            </a:r>
+          </a:p>
+          <a:p>
+            <a:pPr marL="285750" indent="-285750" algn="l">
+              <a:lnSpc>
+                <a:spcPts val="2850"/>
+              </a:lnSpc>
+              <a:buFont typeface="Arial" panose="020B0604020202020204" pitchFamily="34" charset="0"/>
+              <a:buChar char="•"/>
+            </a:pPr>
+            <a:r>
+              <a:rPr lang="en-US" dirty="0">
+                <a:latin typeface="Arial" panose="020B0604020202020204" pitchFamily="34" charset="0"/>
+                <a:ea typeface="Heebo" pitchFamily="34" charset="-122"/>
+                <a:cs typeface="Arial" panose="020B0604020202020204" pitchFamily="34" charset="0"/>
+              </a:rPr>
+              <a:t>Stable and consistent learning behavior</a:t>
+            </a:r>
+          </a:p>
+          <a:p>
+            <a:pPr marL="285750" indent="-285750" algn="l">
+              <a:lnSpc>
+                <a:spcPts val="2850"/>
+              </a:lnSpc>
+              <a:buFont typeface="Arial" panose="020B0604020202020204" pitchFamily="34" charset="0"/>
+              <a:buChar char="•"/>
+            </a:pPr>
+            <a:r>
+              <a:rPr lang="en-US" dirty="0">
+                <a:latin typeface="Arial" panose="020B0604020202020204" pitchFamily="34" charset="0"/>
+                <a:ea typeface="Heebo" pitchFamily="34" charset="-122"/>
+                <a:cs typeface="Arial" panose="020B0604020202020204" pitchFamily="34" charset="0"/>
+              </a:rPr>
+              <a:t>Model is robust to random initialization</a:t>
+            </a:r>
+          </a:p>
+          <a:p>
+            <a:pPr marL="0" indent="0" algn="l">
+              <a:lnSpc>
+                <a:spcPts val="2850"/>
+              </a:lnSpc>
+              <a:buNone/>
+            </a:pPr>
+            <a:endParaRPr lang="en-US" sz="1750" dirty="0">
+              <a:latin typeface="Arial" panose="020B0604020202020204" pitchFamily="34" charset="0"/>
+              <a:ea typeface="Heebo" pitchFamily="34" charset="-122"/>
+              <a:cs typeface="Arial" panose="020B0604020202020204" pitchFamily="34" charset="0"/>
+            </a:endParaRPr>
+          </a:p>
+          <a:p>
+            <a:pPr marL="0" indent="0" algn="l">
+              <a:lnSpc>
+                <a:spcPts val="2850"/>
+              </a:lnSpc>
+              <a:buNone/>
+            </a:pPr>
+            <a:r>
+              <a:rPr lang="en-US" sz="2400" b="1" dirty="0">
+                <a:latin typeface="Arial" panose="020B0604020202020204" pitchFamily="34" charset="0"/>
+                <a:ea typeface="Heebo" pitchFamily="34" charset="-122"/>
+                <a:cs typeface="Arial" panose="020B0604020202020204" pitchFamily="34" charset="0"/>
+              </a:rPr>
+              <a:t>Weaknesses:</a:t>
+            </a:r>
+          </a:p>
+          <a:p>
+            <a:pPr marL="285750" indent="-285750" algn="l">
+              <a:lnSpc>
+                <a:spcPts val="2850"/>
+              </a:lnSpc>
+              <a:buFont typeface="Arial" panose="020B0604020202020204" pitchFamily="34" charset="0"/>
+              <a:buChar char="•"/>
+            </a:pPr>
+            <a:r>
+              <a:rPr lang="en-US" dirty="0">
+                <a:latin typeface="Arial" panose="020B0604020202020204" pitchFamily="34" charset="0"/>
+                <a:ea typeface="Heebo" pitchFamily="34" charset="-122"/>
+                <a:cs typeface="Arial" panose="020B0604020202020204" pitchFamily="34" charset="0"/>
+              </a:rPr>
+              <a:t>4% chance of suboptimal convergence (1 outliers)</a:t>
+            </a:r>
+          </a:p>
+          <a:p>
+            <a:pPr marL="285750" indent="-285750" algn="l">
+              <a:lnSpc>
+                <a:spcPts val="2850"/>
+              </a:lnSpc>
+              <a:buFont typeface="Arial" panose="020B0604020202020204" pitchFamily="34" charset="0"/>
+              <a:buChar char="•"/>
+            </a:pPr>
+            <a:r>
+              <a:rPr lang="en-US" dirty="0">
+                <a:latin typeface="Arial" panose="020B0604020202020204" pitchFamily="34" charset="0"/>
+                <a:ea typeface="Heebo" pitchFamily="34" charset="-122"/>
+                <a:cs typeface="Arial" panose="020B0604020202020204" pitchFamily="34" charset="0"/>
+              </a:rPr>
+              <a:t>Optimality of the learned policy cannot be guaranteed</a:t>
+            </a:r>
+          </a:p>
+        </p:txBody>
+      </p:sp>
+      <p:sp>
+        <p:nvSpPr>
+          <p:cNvPr id="3" name="TextBox 2">
+            <a:extLst>
+              <a:ext uri="{FF2B5EF4-FFF2-40B4-BE49-F238E27FC236}">
+                <a16:creationId xmlns:a16="http://schemas.microsoft.com/office/drawing/2014/main" id="{F520DBB0-400F-6963-5E18-A67AA7D3E61D}"/>
+              </a:ext>
+            </a:extLst>
+          </p:cNvPr>
+          <p:cNvSpPr txBox="1"/>
+          <p:nvPr/>
+        </p:nvSpPr>
+        <p:spPr>
+          <a:xfrm>
+            <a:off x="1252800" y="634032"/>
+            <a:ext cx="8510400" cy="461665"/>
+          </a:xfrm>
+          <a:prstGeom prst="rect">
+            <a:avLst/>
+          </a:prstGeom>
+          <a:noFill/>
+        </p:spPr>
+        <p:txBody>
+          <a:bodyPr wrap="square" rtlCol="0">
+            <a:spAutoFit/>
+          </a:bodyPr>
+          <a:lstStyle/>
+          <a:p>
+            <a:r>
+              <a:rPr lang="en-US" sz="2400" b="1" i="0" dirty="0">
+                <a:effectLst/>
+                <a:latin typeface="Arial" panose="020B0604020202020204" pitchFamily="34" charset="0"/>
+                <a:cs typeface="Arial" panose="020B0604020202020204" pitchFamily="34" charset="0"/>
+              </a:rPr>
+              <a:t>Analysis of RL Battery Optimization Box Plot (32 Runs)</a:t>
+            </a:r>
+            <a:endParaRPr lang="de-DE" sz="2400" dirty="0">
+              <a:latin typeface="Arial" panose="020B0604020202020204" pitchFamily="34" charset="0"/>
+              <a:cs typeface="Arial" panose="020B0604020202020204" pitchFamily="34" charset="0"/>
+            </a:endParaRPr>
+          </a:p>
+        </p:txBody>
+      </p:sp>
+      <p:sp>
+        <p:nvSpPr>
+          <p:cNvPr id="4" name="TextBox 3">
+            <a:extLst>
+              <a:ext uri="{FF2B5EF4-FFF2-40B4-BE49-F238E27FC236}">
+                <a16:creationId xmlns:a16="http://schemas.microsoft.com/office/drawing/2014/main" id="{DC33ECBD-FB5C-26D7-0EBE-F0CD0278B8AA}"/>
+              </a:ext>
+            </a:extLst>
+          </p:cNvPr>
+          <p:cNvSpPr txBox="1"/>
+          <p:nvPr/>
+        </p:nvSpPr>
+        <p:spPr>
+          <a:xfrm>
+            <a:off x="1252800" y="1304257"/>
+            <a:ext cx="10021132" cy="923330"/>
+          </a:xfrm>
+          <a:prstGeom prst="rect">
+            <a:avLst/>
+          </a:prstGeom>
+          <a:noFill/>
+        </p:spPr>
+        <p:txBody>
+          <a:bodyPr wrap="square" rtlCol="0">
+            <a:spAutoFit/>
+          </a:bodyPr>
+          <a:lstStyle/>
+          <a:p>
+            <a:r>
+              <a:rPr lang="en-US" dirty="0"/>
+              <a:t>The linear learning rate schedule performs best because it achieves the lowest median cost and maintains a tight distribution across runs, indicating stable and reliable convergence. The linear decay allows large updates during early exploration and smaller updates for fine policy refinement later in training.</a:t>
+            </a:r>
+            <a:endParaRPr lang="de-DE" dirty="0"/>
+          </a:p>
+        </p:txBody>
+      </p:sp>
+      <p:sp>
+        <p:nvSpPr>
+          <p:cNvPr id="7" name="Slide Number Placeholder 6">
+            <a:extLst>
+              <a:ext uri="{FF2B5EF4-FFF2-40B4-BE49-F238E27FC236}">
+                <a16:creationId xmlns:a16="http://schemas.microsoft.com/office/drawing/2014/main" id="{CB67F05D-BF83-0E4E-252C-F73DCCA6881F}"/>
+              </a:ext>
+            </a:extLst>
+          </p:cNvPr>
+          <p:cNvSpPr>
+            <a:spLocks noGrp="1"/>
+          </p:cNvSpPr>
+          <p:nvPr>
+            <p:ph type="sldNum" sz="quarter" idx="10"/>
+          </p:nvPr>
+        </p:nvSpPr>
+        <p:spPr/>
+        <p:txBody>
+          <a:bodyPr/>
+          <a:lstStyle/>
+          <a:p>
+            <a:fld id="{A02D9A9C-251E-4686-914B-47E3F39F30D8}" type="slidenum">
+              <a:rPr lang="de-DE" smtClean="0"/>
+              <a:t>10</a:t>
+            </a:fld>
+            <a:endParaRPr lang="de-DE"/>
+          </a:p>
+        </p:txBody>
+      </p:sp>
+    </p:spTree>
+    <p:extLst>
+      <p:ext uri="{BB962C8B-B14F-4D97-AF65-F5344CB8AC3E}">
+        <p14:creationId xmlns:p14="http://schemas.microsoft.com/office/powerpoint/2010/main" val="3161864785"/>
+      </p:ext>
+    </p:extLst>
+  </p:cSld>
+  <p:clrMapOvr>
+    <a:masterClrMapping/>
+  </p:clrMapOvr>
+</p:sld>
+</file>
+
+<file path=ppt/slides/slide11.xml><?xml version="1.0" encoding="utf-8"?>
+<p:sld xmlns:a="http://schemas.openxmlformats.org/drawingml/2006/main" xmlns:r="http://schemas.openxmlformats.org/officeDocument/2006/relationships" xmlns:p="http://schemas.openxmlformats.org/presentationml/2006/main">
+  <p:cSld>
+    <p:spTree>
+      <p:nvGrpSpPr>
+        <p:cNvPr id="1" name=""/>
+        <p:cNvGrpSpPr/>
+        <p:nvPr/>
+      </p:nvGrpSpPr>
+      <p:grpSpPr>
+        <a:xfrm>
+          <a:off x="0" y="0"/>
+          <a:ext cx="0" cy="0"/>
+          <a:chOff x="0" y="0"/>
+          <a:chExt cx="0" cy="0"/>
+        </a:xfrm>
+      </p:grpSpPr>
       <p:pic>
         <p:nvPicPr>
           <p:cNvPr id="3" name="Picture 2">
@@ -1818,7 +2166,7 @@
           <a:p>
             <a:fld id="{A02D9A9C-251E-4686-914B-47E3F39F30D8}" type="slidenum">
               <a:rPr lang="de-DE" smtClean="0"/>
-              <a:t>10</a:t>
+              <a:t>11</a:t>
             </a:fld>
             <a:endParaRPr lang="de-DE"/>
           </a:p>
@@ -1837,7 +2185,7 @@
 </p:sld>
 </file>
 
-<file path=ppt/slides/slide11.xml><?xml version="1.0" encoding="utf-8"?>
+<file path=ppt/slides/slide12.xml><?xml version="1.0" encoding="utf-8"?>
 <p:sld xmlns:a="http://schemas.openxmlformats.org/drawingml/2006/main" xmlns:r="http://schemas.openxmlformats.org/officeDocument/2006/relationships" xmlns:p="http://schemas.openxmlformats.org/presentationml/2006/main">
   <p:cSld>
     <p:spTree>
@@ -1915,7 +2263,7 @@
           <a:p>
             <a:fld id="{A02D9A9C-251E-4686-914B-47E3F39F30D8}" type="slidenum">
               <a:rPr lang="de-DE" smtClean="0"/>
-              <a:t>11</a:t>
+              <a:t>12</a:t>
             </a:fld>
             <a:endParaRPr lang="de-DE"/>
           </a:p>
@@ -2222,153 +2570,6 @@
 </p:sld>
 </file>
 
-<file path=ppt/slides/slide12.xml><?xml version="1.0" encoding="utf-8"?>
-<p:sld xmlns:a="http://schemas.openxmlformats.org/drawingml/2006/main" xmlns:r="http://schemas.openxmlformats.org/officeDocument/2006/relationships" xmlns:p="http://schemas.openxmlformats.org/presentationml/2006/main">
-  <p:cSld>
-    <p:spTree>
-      <p:nvGrpSpPr>
-        <p:cNvPr id="1" name=""/>
-        <p:cNvGrpSpPr/>
-        <p:nvPr/>
-      </p:nvGrpSpPr>
-      <p:grpSpPr>
-        <a:xfrm>
-          <a:off x="0" y="0"/>
-          <a:ext cx="0" cy="0"/>
-          <a:chOff x="0" y="0"/>
-          <a:chExt cx="0" cy="0"/>
-        </a:xfrm>
-      </p:grpSpPr>
-      <p:sp>
-        <p:nvSpPr>
-          <p:cNvPr id="2" name="Slide Number Placeholder 1">
-            <a:extLst>
-              <a:ext uri="{FF2B5EF4-FFF2-40B4-BE49-F238E27FC236}">
-                <a16:creationId xmlns:a16="http://schemas.microsoft.com/office/drawing/2014/main" id="{FD487D02-6950-31EE-9075-CE462E154503}"/>
-              </a:ext>
-            </a:extLst>
-          </p:cNvPr>
-          <p:cNvSpPr>
-            <a:spLocks noGrp="1"/>
-          </p:cNvSpPr>
-          <p:nvPr>
-            <p:ph type="sldNum" sz="quarter" idx="10"/>
-          </p:nvPr>
-        </p:nvSpPr>
-        <p:spPr/>
-        <p:txBody>
-          <a:bodyPr/>
-          <a:lstStyle/>
-          <a:p>
-            <a:fld id="{A02D9A9C-251E-4686-914B-47E3F39F30D8}" type="slidenum">
-              <a:rPr lang="de-DE" smtClean="0"/>
-              <a:t>12</a:t>
-            </a:fld>
-            <a:endParaRPr lang="de-DE"/>
-          </a:p>
-        </p:txBody>
-      </p:sp>
-      <p:pic>
-        <p:nvPicPr>
-          <p:cNvPr id="10" name="Picture 9">
-            <a:extLst>
-              <a:ext uri="{FF2B5EF4-FFF2-40B4-BE49-F238E27FC236}">
-                <a16:creationId xmlns:a16="http://schemas.microsoft.com/office/drawing/2014/main" id="{07CFE9B8-CD85-6E70-E03E-89C4731022DE}"/>
-              </a:ext>
-            </a:extLst>
-          </p:cNvPr>
-          <p:cNvPicPr>
-            <a:picLocks noChangeAspect="1"/>
-          </p:cNvPicPr>
-          <p:nvPr/>
-        </p:nvPicPr>
-        <p:blipFill>
-          <a:blip r:embed="rId2"/>
-          <a:stretch>
-            <a:fillRect/>
-          </a:stretch>
-        </p:blipFill>
-        <p:spPr>
-          <a:xfrm>
-            <a:off x="3881063" y="1095697"/>
-            <a:ext cx="6868274" cy="6868274"/>
-          </a:xfrm>
-          <a:prstGeom prst="rect">
-            <a:avLst/>
-          </a:prstGeom>
-        </p:spPr>
-      </p:pic>
-      <p:sp>
-        <p:nvSpPr>
-          <p:cNvPr id="11" name="TextBox 10">
-            <a:extLst>
-              <a:ext uri="{FF2B5EF4-FFF2-40B4-BE49-F238E27FC236}">
-                <a16:creationId xmlns:a16="http://schemas.microsoft.com/office/drawing/2014/main" id="{F3027F4B-361D-A062-F5BF-7B4E7ED5E83E}"/>
-              </a:ext>
-            </a:extLst>
-          </p:cNvPr>
-          <p:cNvSpPr txBox="1"/>
-          <p:nvPr/>
-        </p:nvSpPr>
-        <p:spPr>
-          <a:xfrm>
-            <a:off x="1252800" y="634032"/>
-            <a:ext cx="9223200" cy="461665"/>
-          </a:xfrm>
-          <a:prstGeom prst="rect">
-            <a:avLst/>
-          </a:prstGeom>
-          <a:noFill/>
-        </p:spPr>
-        <p:txBody>
-          <a:bodyPr wrap="square" rtlCol="0">
-            <a:spAutoFit/>
-          </a:bodyPr>
-          <a:lstStyle/>
-          <a:p>
-            <a:r>
-              <a:rPr lang="en-US" sz="2400" b="1" i="0" dirty="0">
-                <a:effectLst/>
-                <a:latin typeface="Arial" panose="020B0604020202020204" pitchFamily="34" charset="0"/>
-                <a:cs typeface="Arial" panose="020B0604020202020204" pitchFamily="34" charset="0"/>
-              </a:rPr>
-              <a:t>Multiple Runs: </a:t>
-            </a:r>
-            <a:r>
-              <a:rPr lang="en-US" sz="2400" b="1" dirty="0">
-                <a:latin typeface="Arial" panose="020B0604020202020204" pitchFamily="34" charset="0"/>
-                <a:cs typeface="Arial" panose="020B0604020202020204" pitchFamily="34" charset="0"/>
-              </a:rPr>
-              <a:t>Inference</a:t>
-            </a:r>
-            <a:r>
-              <a:rPr lang="en-US" sz="2400" b="1" i="0" dirty="0">
-                <a:effectLst/>
-                <a:latin typeface="Arial" panose="020B0604020202020204" pitchFamily="34" charset="0"/>
-                <a:cs typeface="Arial" panose="020B0604020202020204" pitchFamily="34" charset="0"/>
-              </a:rPr>
-              <a:t> Performance Comparison(reward 1)</a:t>
-            </a:r>
-            <a:endParaRPr lang="de-DE" sz="2400" dirty="0">
-              <a:latin typeface="Arial" panose="020B0604020202020204" pitchFamily="34" charset="0"/>
-              <a:cs typeface="Arial" panose="020B0604020202020204" pitchFamily="34" charset="0"/>
-            </a:endParaRPr>
-          </a:p>
-        </p:txBody>
-      </p:sp>
-    </p:spTree>
-    <p:extLst>
-      <p:ext uri="{BB962C8B-B14F-4D97-AF65-F5344CB8AC3E}">
-        <p14:creationId xmlns:p14="http://schemas.microsoft.com/office/powerpoint/2010/main" val="3881202395"/>
-      </p:ext>
-    </p:extLst>
-  </p:cSld>
-  <p:clrMapOvr>
-    <a:masterClrMapping/>
-  </p:clrMapOvr>
-</p:sld>
-</file>
-
 <file path=ppt/slides/slide13.xml><?xml version="1.0" encoding="utf-8"?>
 <p:sld xmlns:a="http://schemas.openxmlformats.org/drawingml/2006/main" xmlns:r="http://schemas.openxmlformats.org/officeDocument/2006/relationships" xmlns:p="http://schemas.openxmlformats.org/presentationml/2006/main">
   <p:cSld>
@@ -2391,7 +2592,7 @@
           <p:cNvPr id="2" name="Slide Number Placeholder 1">
             <a:extLst>
               <a:ext uri="{FF2B5EF4-FFF2-40B4-BE49-F238E27FC236}">
-                <a16:creationId xmlns:a16="http://schemas.microsoft.com/office/drawing/2014/main" id="{DF6C40E9-89F7-5FA5-96B2-B61769A7075E}"/>
+                <a16:creationId xmlns:a16="http://schemas.microsoft.com/office/drawing/2014/main" id="{0EFD8683-0C60-B51C-39B0-886FFC7863F1}"/>
               </a:ext>
             </a:extLst>
           </p:cNvPr>
@@ -2420,7 +2621,7 @@
           <p:cNvPr id="4" name="Picture 3">
             <a:extLst>
               <a:ext uri="{FF2B5EF4-FFF2-40B4-BE49-F238E27FC236}">
-                <a16:creationId xmlns:a16="http://schemas.microsoft.com/office/drawing/2014/main" id="{79DB60A6-A8E7-DEC7-B095-BD655360E24C}"/>
+                <a16:creationId xmlns:a16="http://schemas.microsoft.com/office/drawing/2014/main" id="{F02F8BFA-7B03-0F03-335C-4F562268FCA6}"/>
               </a:ext>
             </a:extLst>
           </p:cNvPr>
@@ -2437,8 +2638,8 @@
         </p:blipFill>
         <p:spPr>
           <a:xfrm>
-            <a:off x="3768047" y="1023777"/>
-            <a:ext cx="6981290" cy="6981290"/>
+            <a:off x="796247" y="1442803"/>
+            <a:ext cx="13037906" cy="5343994"/>
           </a:xfrm>
           <a:prstGeom prst="rect">
             <a:avLst/>
@@ -2447,10 +2648,10 @@
       </p:pic>
       <p:sp>
         <p:nvSpPr>
-          <p:cNvPr id="6" name="TextBox 5">
-            <a:extLst>
-              <a:ext uri="{FF2B5EF4-FFF2-40B4-BE49-F238E27FC236}">
-                <a16:creationId xmlns:a16="http://schemas.microsoft.com/office/drawing/2014/main" id="{F233CB88-E26B-260D-8442-0829B9912B85}"/>
+          <p:cNvPr id="5" name="TextBox 4">
+            <a:extLst>
+              <a:ext uri="{FF2B5EF4-FFF2-40B4-BE49-F238E27FC236}">
+                <a16:creationId xmlns:a16="http://schemas.microsoft.com/office/drawing/2014/main" id="{4D03FD8E-AE43-26D7-EDED-65C8456F852D}"/>
               </a:ext>
             </a:extLst>
           </p:cNvPr>
@@ -2459,8 +2660,8 @@
         </p:nvSpPr>
         <p:spPr>
           <a:xfrm>
-            <a:off x="1252800" y="634032"/>
-            <a:ext cx="9223200" cy="461665"/>
+            <a:off x="4419503" y="6933146"/>
+            <a:ext cx="5791394" cy="338554"/>
           </a:xfrm>
           <a:prstGeom prst="rect">
             <a:avLst/>
@@ -2468,52 +2669,23 @@
           <a:noFill/>
         </p:spPr>
         <p:txBody>
-          <a:bodyPr wrap="square" rtlCol="0">
+          <a:bodyPr wrap="none" rtlCol="0">
             <a:spAutoFit/>
           </a:bodyPr>
           <a:lstStyle/>
           <a:p>
             <a:r>
-              <a:rPr lang="en-US" sz="2400" b="1" i="0" dirty="0">
-                <a:effectLst/>
-                <a:latin typeface="Arial" panose="020B0604020202020204" pitchFamily="34" charset="0"/>
-                <a:cs typeface="Arial" panose="020B0604020202020204" pitchFamily="34" charset="0"/>
-              </a:rPr>
-              <a:t>Multiple Runs: </a:t>
-            </a:r>
-            <a:r>
-              <a:rPr lang="en-US" sz="2400" b="1" dirty="0">
-                <a:latin typeface="Arial" panose="020B0604020202020204" pitchFamily="34" charset="0"/>
-                <a:cs typeface="Arial" panose="020B0604020202020204" pitchFamily="34" charset="0"/>
-              </a:rPr>
-              <a:t>Inference</a:t>
-            </a:r>
-            <a:r>
-              <a:rPr lang="en-US" sz="2400" b="1" i="0" dirty="0">
-                <a:effectLst/>
-                <a:latin typeface="Arial" panose="020B0604020202020204" pitchFamily="34" charset="0"/>
-                <a:cs typeface="Arial" panose="020B0604020202020204" pitchFamily="34" charset="0"/>
-              </a:rPr>
-              <a:t> Performance Comparison</a:t>
-            </a:r>
-            <a:r>
-              <a:rPr lang="en-US" sz="2400" b="1" dirty="0">
-                <a:latin typeface="Arial" panose="020B0604020202020204" pitchFamily="34" charset="0"/>
-                <a:cs typeface="Arial" panose="020B0604020202020204" pitchFamily="34" charset="0"/>
-              </a:rPr>
-              <a:t> (reward 2)</a:t>
-            </a:r>
-            <a:endParaRPr lang="de-DE" sz="2400" dirty="0">
-              <a:latin typeface="Arial" panose="020B0604020202020204" pitchFamily="34" charset="0"/>
-              <a:cs typeface="Arial" panose="020B0604020202020204" pitchFamily="34" charset="0"/>
-            </a:endParaRPr>
+              <a:rPr lang="en-US" sz="1600" dirty="0"/>
+              <a:t>Fig: Visualization of system dynamics and control for one trajectory.</a:t>
+            </a:r>
+            <a:endParaRPr lang="de-DE" sz="1600" dirty="0"/>
           </a:p>
         </p:txBody>
       </p:sp>
     </p:spTree>
     <p:extLst>
       <p:ext uri="{BB962C8B-B14F-4D97-AF65-F5344CB8AC3E}">
-        <p14:creationId xmlns:p14="http://schemas.microsoft.com/office/powerpoint/2010/main" val="241529522"/>
+        <p14:creationId xmlns:p14="http://schemas.microsoft.com/office/powerpoint/2010/main" val="3753974211"/>
       </p:ext>
     </p:extLst>
   </p:cSld>
@@ -2545,7 +2717,7 @@
           <p:cNvPr id="2" name="Slide Number Placeholder 1">
             <a:extLst>
               <a:ext uri="{FF2B5EF4-FFF2-40B4-BE49-F238E27FC236}">
-                <a16:creationId xmlns:a16="http://schemas.microsoft.com/office/drawing/2014/main" id="{C4B959B7-EFE5-32A3-50D9-D1DB5967DAFC}"/>
+                <a16:creationId xmlns:a16="http://schemas.microsoft.com/office/drawing/2014/main" id="{FD487D02-6950-31EE-9075-CE462E154503}"/>
               </a:ext>
             </a:extLst>
           </p:cNvPr>
@@ -2569,12 +2741,70 @@
           </a:p>
         </p:txBody>
       </p:sp>
+      <p:sp>
+        <p:nvSpPr>
+          <p:cNvPr id="11" name="TextBox 10">
+            <a:extLst>
+              <a:ext uri="{FF2B5EF4-FFF2-40B4-BE49-F238E27FC236}">
+                <a16:creationId xmlns:a16="http://schemas.microsoft.com/office/drawing/2014/main" id="{F3027F4B-361D-A062-F5BF-7B4E7ED5E83E}"/>
+              </a:ext>
+            </a:extLst>
+          </p:cNvPr>
+          <p:cNvSpPr txBox="1"/>
+          <p:nvPr/>
+        </p:nvSpPr>
+        <p:spPr>
+          <a:xfrm>
+            <a:off x="954850" y="172367"/>
+            <a:ext cx="9223200" cy="461665"/>
+          </a:xfrm>
+          <a:prstGeom prst="rect">
+            <a:avLst/>
+          </a:prstGeom>
+          <a:noFill/>
+        </p:spPr>
+        <p:txBody>
+          <a:bodyPr wrap="square" rtlCol="0">
+            <a:spAutoFit/>
+          </a:bodyPr>
+          <a:lstStyle/>
+          <a:p>
+            <a:r>
+              <a:rPr lang="en-US" sz="2400" b="1" i="0" dirty="0">
+                <a:effectLst/>
+                <a:latin typeface="Arial" panose="020B0604020202020204" pitchFamily="34" charset="0"/>
+                <a:cs typeface="Arial" panose="020B0604020202020204" pitchFamily="34" charset="0"/>
+              </a:rPr>
+              <a:t>Multiple Runs: </a:t>
+            </a:r>
+            <a:r>
+              <a:rPr lang="en-US" sz="2400" b="1" dirty="0">
+                <a:latin typeface="Arial" panose="020B0604020202020204" pitchFamily="34" charset="0"/>
+                <a:cs typeface="Arial" panose="020B0604020202020204" pitchFamily="34" charset="0"/>
+              </a:rPr>
+              <a:t>Inference</a:t>
+            </a:r>
+            <a:r>
+              <a:rPr lang="en-US" sz="2400" b="1" i="0" dirty="0">
+                <a:effectLst/>
+                <a:latin typeface="Arial" panose="020B0604020202020204" pitchFamily="34" charset="0"/>
+                <a:cs typeface="Arial" panose="020B0604020202020204" pitchFamily="34" charset="0"/>
+              </a:rPr>
+              <a:t> Performance Comparison</a:t>
+            </a:r>
+            <a:endParaRPr lang="de-DE" sz="2400" dirty="0">
+              <a:latin typeface="Arial" panose="020B0604020202020204" pitchFamily="34" charset="0"/>
+              <a:cs typeface="Arial" panose="020B0604020202020204" pitchFamily="34" charset="0"/>
+            </a:endParaRPr>
+          </a:p>
+        </p:txBody>
+      </p:sp>
       <p:pic>
         <p:nvPicPr>
-          <p:cNvPr id="6" name="Picture 5">
-            <a:extLst>
-              <a:ext uri="{FF2B5EF4-FFF2-40B4-BE49-F238E27FC236}">
-                <a16:creationId xmlns:a16="http://schemas.microsoft.com/office/drawing/2014/main" id="{782C1992-3888-5B47-2E82-A8334E0B851C}"/>
+          <p:cNvPr id="9" name="Picture 8">
+            <a:extLst>
+              <a:ext uri="{FF2B5EF4-FFF2-40B4-BE49-F238E27FC236}">
+                <a16:creationId xmlns:a16="http://schemas.microsoft.com/office/drawing/2014/main" id="{3928F39F-A005-F729-AF8B-736F686388C0}"/>
               </a:ext>
             </a:extLst>
           </p:cNvPr>
@@ -2591,199 +2821,18 @@
         </p:blipFill>
         <p:spPr>
           <a:xfrm>
-            <a:off x="1242165" y="1040481"/>
-            <a:ext cx="12146070" cy="4963218"/>
+            <a:off x="2148740" y="1027365"/>
+            <a:ext cx="10332919" cy="6606130"/>
           </a:xfrm>
           <a:prstGeom prst="rect">
             <a:avLst/>
           </a:prstGeom>
         </p:spPr>
       </p:pic>
-      <p:sp>
-        <p:nvSpPr>
-          <p:cNvPr id="3" name="TextBox 2">
-            <a:extLst>
-              <a:ext uri="{FF2B5EF4-FFF2-40B4-BE49-F238E27FC236}">
-                <a16:creationId xmlns:a16="http://schemas.microsoft.com/office/drawing/2014/main" id="{080535F2-175F-9034-9D06-C073EEBDCAD8}"/>
-              </a:ext>
-            </a:extLst>
-          </p:cNvPr>
-          <p:cNvSpPr txBox="1"/>
-          <p:nvPr/>
-        </p:nvSpPr>
-        <p:spPr>
-          <a:xfrm>
-            <a:off x="1979017" y="6316238"/>
-            <a:ext cx="10672365" cy="1477328"/>
-          </a:xfrm>
-          <a:prstGeom prst="rect">
-            <a:avLst/>
-          </a:prstGeom>
-          <a:noFill/>
-        </p:spPr>
-        <p:txBody>
-          <a:bodyPr wrap="square" rtlCol="0">
-            <a:spAutoFit/>
-          </a:bodyPr>
-          <a:lstStyle/>
-          <a:p>
-            <a:r>
-              <a:rPr lang="en-US" dirty="0"/>
-              <a:t>Fig: Illustration of the investigated industrial energy conversion system for electrified steam generation. The system consists of a HTHP, a TES and a SG, where the HTHP is powered by electricity from a wind turbine or the power grid. The HTHP uses waste heat air stream as a heat source and enables charging and discharging of the TES via an intermediate thermal oil stream. Furthermore, constant heat demand for the steam consumer factory must be satisfied.</a:t>
-            </a:r>
-            <a:endParaRPr lang="de-DE" dirty="0"/>
-          </a:p>
-        </p:txBody>
-      </p:sp>
-      <p:sp>
-        <p:nvSpPr>
-          <p:cNvPr id="4" name="Text 0">
-            <a:extLst>
-              <a:ext uri="{FF2B5EF4-FFF2-40B4-BE49-F238E27FC236}">
-                <a16:creationId xmlns:a16="http://schemas.microsoft.com/office/drawing/2014/main" id="{DE957822-0B68-9DDF-98AA-CFF17F293EF2}"/>
-              </a:ext>
-            </a:extLst>
-          </p:cNvPr>
-          <p:cNvSpPr/>
-          <p:nvPr/>
-        </p:nvSpPr>
-        <p:spPr>
-          <a:xfrm>
-            <a:off x="994906" y="578615"/>
-            <a:ext cx="9858256" cy="485775"/>
-          </a:xfrm>
-          <a:prstGeom prst="rect">
-            <a:avLst/>
-          </a:prstGeom>
-          <a:noFill/>
-          <a:ln/>
-        </p:spPr>
-        <p:txBody>
-          <a:bodyPr wrap="none" lIns="0" tIns="0" rIns="0" bIns="0" rtlCol="0" anchor="t"/>
-          <a:lstStyle>
-            <a:defPPr>
-              <a:defRPr lang="de-DE"/>
-            </a:defPPr>
-            <a:lvl1pPr marL="0" algn="l" defTabSz="914400" rtl="0" eaLnBrk="1" latinLnBrk="0" hangingPunct="1">
-              <a:defRPr sz="1800" kern="1200">
-                <a:solidFill>
-                  <a:schemeClr val="tx1"/>
-                </a:solidFill>
-                <a:latin typeface="+mn-lt"/>
-                <a:ea typeface="+mn-ea"/>
-                <a:cs typeface="+mn-cs"/>
-              </a:defRPr>
-            </a:lvl1pPr>
-            <a:lvl2pPr marL="457200" algn="l" defTabSz="914400" rtl="0" eaLnBrk="1" latinLnBrk="0" hangingPunct="1">
-              <a:defRPr sz="1800" kern="1200">
-                <a:solidFill>
-                  <a:schemeClr val="tx1"/>
-                </a:solidFill>
-                <a:latin typeface="+mn-lt"/>
-                <a:ea typeface="+mn-ea"/>
-                <a:cs typeface="+mn-cs"/>
-              </a:defRPr>
-            </a:lvl2pPr>
-            <a:lvl3pPr marL="914400" algn="l" defTabSz="914400" rtl="0" eaLnBrk="1" latinLnBrk="0" hangingPunct="1">
-              <a:defRPr sz="1800" kern="1200">
-                <a:solidFill>
-                  <a:schemeClr val="tx1"/>
-                </a:solidFill>
-                <a:latin typeface="+mn-lt"/>
-                <a:ea typeface="+mn-ea"/>
-                <a:cs typeface="+mn-cs"/>
-              </a:defRPr>
-            </a:lvl3pPr>
-            <a:lvl4pPr marL="1371600" algn="l" defTabSz="914400" rtl="0" eaLnBrk="1" latinLnBrk="0" hangingPunct="1">
-              <a:defRPr sz="1800" kern="1200">
-                <a:solidFill>
-                  <a:schemeClr val="tx1"/>
-                </a:solidFill>
-                <a:latin typeface="+mn-lt"/>
-                <a:ea typeface="+mn-ea"/>
-                <a:cs typeface="+mn-cs"/>
-              </a:defRPr>
-            </a:lvl4pPr>
-            <a:lvl5pPr marL="1828800" algn="l" defTabSz="914400" rtl="0" eaLnBrk="1" latinLnBrk="0" hangingPunct="1">
-              <a:defRPr sz="1800" kern="1200">
-                <a:solidFill>
-                  <a:schemeClr val="tx1"/>
-                </a:solidFill>
-                <a:latin typeface="+mn-lt"/>
-                <a:ea typeface="+mn-ea"/>
-                <a:cs typeface="+mn-cs"/>
-              </a:defRPr>
-            </a:lvl5pPr>
-            <a:lvl6pPr marL="2286000" algn="l" defTabSz="914400" rtl="0" eaLnBrk="1" latinLnBrk="0" hangingPunct="1">
-              <a:defRPr sz="1800" kern="1200">
-                <a:solidFill>
-                  <a:schemeClr val="tx1"/>
-                </a:solidFill>
-                <a:latin typeface="+mn-lt"/>
-                <a:ea typeface="+mn-ea"/>
-                <a:cs typeface="+mn-cs"/>
-              </a:defRPr>
-            </a:lvl6pPr>
-            <a:lvl7pPr marL="2743200" algn="l" defTabSz="914400" rtl="0" eaLnBrk="1" latinLnBrk="0" hangingPunct="1">
-              <a:defRPr sz="1800" kern="1200">
-                <a:solidFill>
-                  <a:schemeClr val="tx1"/>
-                </a:solidFill>
-                <a:latin typeface="+mn-lt"/>
-                <a:ea typeface="+mn-ea"/>
-                <a:cs typeface="+mn-cs"/>
-              </a:defRPr>
-            </a:lvl7pPr>
-            <a:lvl8pPr marL="3200400" algn="l" defTabSz="914400" rtl="0" eaLnBrk="1" latinLnBrk="0" hangingPunct="1">
-              <a:defRPr sz="1800" kern="1200">
-                <a:solidFill>
-                  <a:schemeClr val="tx1"/>
-                </a:solidFill>
-                <a:latin typeface="+mn-lt"/>
-                <a:ea typeface="+mn-ea"/>
-                <a:cs typeface="+mn-cs"/>
-              </a:defRPr>
-            </a:lvl8pPr>
-            <a:lvl9pPr marL="3657600" algn="l" defTabSz="914400" rtl="0" eaLnBrk="1" latinLnBrk="0" hangingPunct="1">
-              <a:defRPr sz="1800" kern="1200">
-                <a:solidFill>
-                  <a:schemeClr val="tx1"/>
-                </a:solidFill>
-                <a:latin typeface="+mn-lt"/>
-                <a:ea typeface="+mn-ea"/>
-                <a:cs typeface="+mn-cs"/>
-              </a:defRPr>
-            </a:lvl9pPr>
-          </a:lstStyle>
-          <a:p>
-            <a:pPr marL="0" indent="0" algn="l">
-              <a:lnSpc>
-                <a:spcPts val="3800"/>
-              </a:lnSpc>
-              <a:buNone/>
-            </a:pPr>
-            <a:r>
-              <a:rPr lang="en-US" sz="3600" dirty="0">
-                <a:solidFill>
-                  <a:srgbClr val="1B1B27"/>
-                </a:solidFill>
-                <a:latin typeface="Arial" panose="020B0604020202020204" pitchFamily="34" charset="0"/>
-                <a:ea typeface="Alexandria" pitchFamily="34" charset="-122"/>
-                <a:cs typeface="Arial" panose="020B0604020202020204" pitchFamily="34" charset="0"/>
-              </a:rPr>
-              <a:t>Cookie Factory </a:t>
-            </a:r>
-            <a:endParaRPr lang="en-US" sz="3600" dirty="0">
-              <a:latin typeface="Arial" panose="020B0604020202020204" pitchFamily="34" charset="0"/>
-              <a:cs typeface="Arial" panose="020B0604020202020204" pitchFamily="34" charset="0"/>
-            </a:endParaRPr>
-          </a:p>
-        </p:txBody>
-      </p:sp>
     </p:spTree>
     <p:extLst>
       <p:ext uri="{BB962C8B-B14F-4D97-AF65-F5344CB8AC3E}">
-        <p14:creationId xmlns:p14="http://schemas.microsoft.com/office/powerpoint/2010/main" val="2043040984"/>
+        <p14:creationId xmlns:p14="http://schemas.microsoft.com/office/powerpoint/2010/main" val="281696326"/>
       </p:ext>
     </p:extLst>
   </p:cSld>
@@ -2812,10 +2861,106 @@
       </p:grpSpPr>
       <p:sp>
         <p:nvSpPr>
-          <p:cNvPr id="2" name="Slide Number Placeholder 1">
-            <a:extLst>
-              <a:ext uri="{FF2B5EF4-FFF2-40B4-BE49-F238E27FC236}">
-                <a16:creationId xmlns:a16="http://schemas.microsoft.com/office/drawing/2014/main" id="{9A840C5A-C840-A584-A219-DBDFF7A5300B}"/>
+          <p:cNvPr id="2" name="Text 0">
+            <a:extLst>
+              <a:ext uri="{FF2B5EF4-FFF2-40B4-BE49-F238E27FC236}">
+                <a16:creationId xmlns:a16="http://schemas.microsoft.com/office/drawing/2014/main" id="{5E9BDF97-2CEC-5516-F91C-C69A562E04EA}"/>
+              </a:ext>
+            </a:extLst>
+          </p:cNvPr>
+          <p:cNvSpPr/>
+          <p:nvPr/>
+        </p:nvSpPr>
+        <p:spPr>
+          <a:xfrm>
+            <a:off x="793790" y="2643307"/>
+            <a:ext cx="13042821" cy="2126456"/>
+          </a:xfrm>
+          <a:prstGeom prst="rect">
+            <a:avLst/>
+          </a:prstGeom>
+          <a:noFill/>
+          <a:ln/>
+        </p:spPr>
+        <p:txBody>
+          <a:bodyPr wrap="none" lIns="0" tIns="0" rIns="0" bIns="0" rtlCol="0" anchor="t"/>
+          <a:lstStyle/>
+          <a:p>
+            <a:pPr marL="0" indent="0" algn="l">
+              <a:lnSpc>
+                <a:spcPts val="16700"/>
+              </a:lnSpc>
+              <a:buNone/>
+            </a:pPr>
+            <a:r>
+              <a:rPr lang="en-US" sz="13350" dirty="0">
+                <a:latin typeface="Arial" panose="020B0604020202020204" pitchFamily="34" charset="0"/>
+                <a:ea typeface="Crimson Pro Semi Bold" pitchFamily="34" charset="-122"/>
+                <a:cs typeface="Arial" panose="020B0604020202020204" pitchFamily="34" charset="0"/>
+              </a:rPr>
+              <a:t>Thank You!</a:t>
+            </a:r>
+            <a:endParaRPr lang="en-US" sz="13350" dirty="0">
+              <a:latin typeface="Arial" panose="020B0604020202020204" pitchFamily="34" charset="0"/>
+              <a:cs typeface="Arial" panose="020B0604020202020204" pitchFamily="34" charset="0"/>
+            </a:endParaRPr>
+          </a:p>
+        </p:txBody>
+      </p:sp>
+      <p:sp>
+        <p:nvSpPr>
+          <p:cNvPr id="3" name="Text 1">
+            <a:extLst>
+              <a:ext uri="{FF2B5EF4-FFF2-40B4-BE49-F238E27FC236}">
+                <a16:creationId xmlns:a16="http://schemas.microsoft.com/office/drawing/2014/main" id="{162051C1-87FA-AC88-FEC3-B65825AC80B1}"/>
+              </a:ext>
+            </a:extLst>
+          </p:cNvPr>
+          <p:cNvSpPr/>
+          <p:nvPr/>
+        </p:nvSpPr>
+        <p:spPr>
+          <a:xfrm>
+            <a:off x="793790" y="5223391"/>
+            <a:ext cx="13042821" cy="362903"/>
+          </a:xfrm>
+          <a:prstGeom prst="rect">
+            <a:avLst/>
+          </a:prstGeom>
+          <a:noFill/>
+          <a:ln/>
+        </p:spPr>
+        <p:txBody>
+          <a:bodyPr wrap="none" lIns="0" tIns="0" rIns="0" bIns="0" rtlCol="0" anchor="t"/>
+          <a:lstStyle/>
+          <a:p>
+            <a:pPr marL="0" indent="0" algn="l">
+              <a:lnSpc>
+                <a:spcPts val="2850"/>
+              </a:lnSpc>
+              <a:buNone/>
+            </a:pPr>
+            <a:r>
+              <a:rPr lang="en-US" sz="1750" dirty="0">
+                <a:latin typeface="Arial" panose="020B0604020202020204" pitchFamily="34" charset="0"/>
+                <a:ea typeface="Heebo" pitchFamily="34" charset="-122"/>
+                <a:cs typeface="Arial" panose="020B0604020202020204" pitchFamily="34" charset="0"/>
+              </a:rPr>
+              <a:t>I appreciate your time and attention.</a:t>
+            </a:r>
+            <a:endParaRPr lang="en-US" sz="1750" dirty="0">
+              <a:latin typeface="Arial" panose="020B0604020202020204" pitchFamily="34" charset="0"/>
+              <a:cs typeface="Arial" panose="020B0604020202020204" pitchFamily="34" charset="0"/>
+            </a:endParaRPr>
+          </a:p>
+        </p:txBody>
+      </p:sp>
+      <p:sp>
+        <p:nvSpPr>
+          <p:cNvPr id="5" name="Slide Number Placeholder 4">
+            <a:extLst>
+              <a:ext uri="{FF2B5EF4-FFF2-40B4-BE49-F238E27FC236}">
+                <a16:creationId xmlns:a16="http://schemas.microsoft.com/office/drawing/2014/main" id="{09EA9E87-DD33-F803-A787-B1528EFB82A4}"/>
               </a:ext>
             </a:extLst>
           </p:cNvPr>
@@ -2834,6 +2979,335 @@
             <a:fld id="{A02D9A9C-251E-4686-914B-47E3F39F30D8}" type="slidenum">
               <a:rPr lang="de-DE" smtClean="0"/>
               <a:t>15</a:t>
+            </a:fld>
+            <a:endParaRPr lang="de-DE"/>
+          </a:p>
+        </p:txBody>
+      </p:sp>
+    </p:spTree>
+    <p:extLst>
+      <p:ext uri="{BB962C8B-B14F-4D97-AF65-F5344CB8AC3E}">
+        <p14:creationId xmlns:p14="http://schemas.microsoft.com/office/powerpoint/2010/main" val="3645203461"/>
+      </p:ext>
+    </p:extLst>
+  </p:cSld>
+  <p:clrMapOvr>
+    <a:masterClrMapping/>
+  </p:clrMapOvr>
+</p:sld>
+</file>
+
+<file path=ppt/slides/slide16.xml><?xml version="1.0" encoding="utf-8"?>
+<p:sld xmlns:a="http://schemas.openxmlformats.org/drawingml/2006/main" xmlns:r="http://schemas.openxmlformats.org/officeDocument/2006/relationships" xmlns:p="http://schemas.openxmlformats.org/presentationml/2006/main" show="0">
+  <p:cSld>
+    <p:spTree>
+      <p:nvGrpSpPr>
+        <p:cNvPr id="1" name=""/>
+        <p:cNvGrpSpPr/>
+        <p:nvPr/>
+      </p:nvGrpSpPr>
+      <p:grpSpPr>
+        <a:xfrm>
+          <a:off x="0" y="0"/>
+          <a:ext cx="0" cy="0"/>
+          <a:chOff x="0" y="0"/>
+          <a:chExt cx="0" cy="0"/>
+        </a:xfrm>
+      </p:grpSpPr>
+      <p:sp>
+        <p:nvSpPr>
+          <p:cNvPr id="2" name="Slide Number Placeholder 1">
+            <a:extLst>
+              <a:ext uri="{FF2B5EF4-FFF2-40B4-BE49-F238E27FC236}">
+                <a16:creationId xmlns:a16="http://schemas.microsoft.com/office/drawing/2014/main" id="{C4B959B7-EFE5-32A3-50D9-D1DB5967DAFC}"/>
+              </a:ext>
+            </a:extLst>
+          </p:cNvPr>
+          <p:cNvSpPr>
+            <a:spLocks noGrp="1"/>
+          </p:cNvSpPr>
+          <p:nvPr>
+            <p:ph type="sldNum" sz="quarter" idx="10"/>
+          </p:nvPr>
+        </p:nvSpPr>
+        <p:spPr/>
+        <p:txBody>
+          <a:bodyPr/>
+          <a:lstStyle/>
+          <a:p>
+            <a:fld id="{A02D9A9C-251E-4686-914B-47E3F39F30D8}" type="slidenum">
+              <a:rPr lang="de-DE" smtClean="0"/>
+              <a:t>16</a:t>
+            </a:fld>
+            <a:endParaRPr lang="de-DE"/>
+          </a:p>
+        </p:txBody>
+      </p:sp>
+      <p:pic>
+        <p:nvPicPr>
+          <p:cNvPr id="6" name="Picture 5">
+            <a:extLst>
+              <a:ext uri="{FF2B5EF4-FFF2-40B4-BE49-F238E27FC236}">
+                <a16:creationId xmlns:a16="http://schemas.microsoft.com/office/drawing/2014/main" id="{782C1992-3888-5B47-2E82-A8334E0B851C}"/>
+              </a:ext>
+            </a:extLst>
+          </p:cNvPr>
+          <p:cNvPicPr>
+            <a:picLocks noChangeAspect="1"/>
+          </p:cNvPicPr>
+          <p:nvPr/>
+        </p:nvPicPr>
+        <p:blipFill>
+          <a:blip r:embed="rId2"/>
+          <a:stretch>
+            <a:fillRect/>
+          </a:stretch>
+        </p:blipFill>
+        <p:spPr>
+          <a:xfrm>
+            <a:off x="1242165" y="1040481"/>
+            <a:ext cx="12146070" cy="4963218"/>
+          </a:xfrm>
+          <a:prstGeom prst="rect">
+            <a:avLst/>
+          </a:prstGeom>
+        </p:spPr>
+      </p:pic>
+      <p:sp>
+        <p:nvSpPr>
+          <p:cNvPr id="3" name="TextBox 2">
+            <a:extLst>
+              <a:ext uri="{FF2B5EF4-FFF2-40B4-BE49-F238E27FC236}">
+                <a16:creationId xmlns:a16="http://schemas.microsoft.com/office/drawing/2014/main" id="{080535F2-175F-9034-9D06-C073EEBDCAD8}"/>
+              </a:ext>
+            </a:extLst>
+          </p:cNvPr>
+          <p:cNvSpPr txBox="1"/>
+          <p:nvPr/>
+        </p:nvSpPr>
+        <p:spPr>
+          <a:xfrm>
+            <a:off x="1979017" y="6316238"/>
+            <a:ext cx="10672365" cy="1477328"/>
+          </a:xfrm>
+          <a:prstGeom prst="rect">
+            <a:avLst/>
+          </a:prstGeom>
+          <a:noFill/>
+        </p:spPr>
+        <p:txBody>
+          <a:bodyPr wrap="square" rtlCol="0">
+            <a:spAutoFit/>
+          </a:bodyPr>
+          <a:lstStyle/>
+          <a:p>
+            <a:r>
+              <a:rPr lang="en-US" dirty="0"/>
+              <a:t>Fig: Illustration of the investigated industrial energy conversion system for electrified steam generation. The system consists of a HTHP, a TES and a SG, where the HTHP is powered by electricity from a wind turbine or the power grid. The HTHP uses waste heat air stream as a heat source and enables charging and discharging of the TES via an intermediate thermal oil stream. Furthermore, constant heat demand for the steam consumer factory must be satisfied.</a:t>
+            </a:r>
+            <a:endParaRPr lang="de-DE" dirty="0"/>
+          </a:p>
+        </p:txBody>
+      </p:sp>
+      <p:sp>
+        <p:nvSpPr>
+          <p:cNvPr id="4" name="Text 0">
+            <a:extLst>
+              <a:ext uri="{FF2B5EF4-FFF2-40B4-BE49-F238E27FC236}">
+                <a16:creationId xmlns:a16="http://schemas.microsoft.com/office/drawing/2014/main" id="{DE957822-0B68-9DDF-98AA-CFF17F293EF2}"/>
+              </a:ext>
+            </a:extLst>
+          </p:cNvPr>
+          <p:cNvSpPr/>
+          <p:nvPr/>
+        </p:nvSpPr>
+        <p:spPr>
+          <a:xfrm>
+            <a:off x="994906" y="578615"/>
+            <a:ext cx="9858256" cy="485775"/>
+          </a:xfrm>
+          <a:prstGeom prst="rect">
+            <a:avLst/>
+          </a:prstGeom>
+          <a:noFill/>
+          <a:ln/>
+        </p:spPr>
+        <p:txBody>
+          <a:bodyPr wrap="none" lIns="0" tIns="0" rIns="0" bIns="0" rtlCol="0" anchor="t"/>
+          <a:lstStyle>
+            <a:defPPr>
+              <a:defRPr lang="de-DE"/>
+            </a:defPPr>
+            <a:lvl1pPr marL="0" algn="l" defTabSz="914400" rtl="0" eaLnBrk="1" latinLnBrk="0" hangingPunct="1">
+              <a:defRPr sz="1800" kern="1200">
+                <a:solidFill>
+                  <a:schemeClr val="tx1"/>
+                </a:solidFill>
+                <a:latin typeface="+mn-lt"/>
+                <a:ea typeface="+mn-ea"/>
+                <a:cs typeface="+mn-cs"/>
+              </a:defRPr>
+            </a:lvl1pPr>
+            <a:lvl2pPr marL="457200" algn="l" defTabSz="914400" rtl="0" eaLnBrk="1" latinLnBrk="0" hangingPunct="1">
+              <a:defRPr sz="1800" kern="1200">
+                <a:solidFill>
+                  <a:schemeClr val="tx1"/>
+                </a:solidFill>
+                <a:latin typeface="+mn-lt"/>
+                <a:ea typeface="+mn-ea"/>
+                <a:cs typeface="+mn-cs"/>
+              </a:defRPr>
+            </a:lvl2pPr>
+            <a:lvl3pPr marL="914400" algn="l" defTabSz="914400" rtl="0" eaLnBrk="1" latinLnBrk="0" hangingPunct="1">
+              <a:defRPr sz="1800" kern="1200">
+                <a:solidFill>
+                  <a:schemeClr val="tx1"/>
+                </a:solidFill>
+                <a:latin typeface="+mn-lt"/>
+                <a:ea typeface="+mn-ea"/>
+                <a:cs typeface="+mn-cs"/>
+              </a:defRPr>
+            </a:lvl3pPr>
+            <a:lvl4pPr marL="1371600" algn="l" defTabSz="914400" rtl="0" eaLnBrk="1" latinLnBrk="0" hangingPunct="1">
+              <a:defRPr sz="1800" kern="1200">
+                <a:solidFill>
+                  <a:schemeClr val="tx1"/>
+                </a:solidFill>
+                <a:latin typeface="+mn-lt"/>
+                <a:ea typeface="+mn-ea"/>
+                <a:cs typeface="+mn-cs"/>
+              </a:defRPr>
+            </a:lvl4pPr>
+            <a:lvl5pPr marL="1828800" algn="l" defTabSz="914400" rtl="0" eaLnBrk="1" latinLnBrk="0" hangingPunct="1">
+              <a:defRPr sz="1800" kern="1200">
+                <a:solidFill>
+                  <a:schemeClr val="tx1"/>
+                </a:solidFill>
+                <a:latin typeface="+mn-lt"/>
+                <a:ea typeface="+mn-ea"/>
+                <a:cs typeface="+mn-cs"/>
+              </a:defRPr>
+            </a:lvl5pPr>
+            <a:lvl6pPr marL="2286000" algn="l" defTabSz="914400" rtl="0" eaLnBrk="1" latinLnBrk="0" hangingPunct="1">
+              <a:defRPr sz="1800" kern="1200">
+                <a:solidFill>
+                  <a:schemeClr val="tx1"/>
+                </a:solidFill>
+                <a:latin typeface="+mn-lt"/>
+                <a:ea typeface="+mn-ea"/>
+                <a:cs typeface="+mn-cs"/>
+              </a:defRPr>
+            </a:lvl6pPr>
+            <a:lvl7pPr marL="2743200" algn="l" defTabSz="914400" rtl="0" eaLnBrk="1" latinLnBrk="0" hangingPunct="1">
+              <a:defRPr sz="1800" kern="1200">
+                <a:solidFill>
+                  <a:schemeClr val="tx1"/>
+                </a:solidFill>
+                <a:latin typeface="+mn-lt"/>
+                <a:ea typeface="+mn-ea"/>
+                <a:cs typeface="+mn-cs"/>
+              </a:defRPr>
+            </a:lvl7pPr>
+            <a:lvl8pPr marL="3200400" algn="l" defTabSz="914400" rtl="0" eaLnBrk="1" latinLnBrk="0" hangingPunct="1">
+              <a:defRPr sz="1800" kern="1200">
+                <a:solidFill>
+                  <a:schemeClr val="tx1"/>
+                </a:solidFill>
+                <a:latin typeface="+mn-lt"/>
+                <a:ea typeface="+mn-ea"/>
+                <a:cs typeface="+mn-cs"/>
+              </a:defRPr>
+            </a:lvl8pPr>
+            <a:lvl9pPr marL="3657600" algn="l" defTabSz="914400" rtl="0" eaLnBrk="1" latinLnBrk="0" hangingPunct="1">
+              <a:defRPr sz="1800" kern="1200">
+                <a:solidFill>
+                  <a:schemeClr val="tx1"/>
+                </a:solidFill>
+                <a:latin typeface="+mn-lt"/>
+                <a:ea typeface="+mn-ea"/>
+                <a:cs typeface="+mn-cs"/>
+              </a:defRPr>
+            </a:lvl9pPr>
+          </a:lstStyle>
+          <a:p>
+            <a:pPr marL="0" indent="0" algn="l">
+              <a:lnSpc>
+                <a:spcPts val="3800"/>
+              </a:lnSpc>
+              <a:buNone/>
+            </a:pPr>
+            <a:r>
+              <a:rPr lang="en-US" sz="3600" dirty="0">
+                <a:solidFill>
+                  <a:srgbClr val="1B1B27"/>
+                </a:solidFill>
+                <a:latin typeface="Arial" panose="020B0604020202020204" pitchFamily="34" charset="0"/>
+                <a:ea typeface="Alexandria" pitchFamily="34" charset="-122"/>
+                <a:cs typeface="Arial" panose="020B0604020202020204" pitchFamily="34" charset="0"/>
+              </a:rPr>
+              <a:t>Cookie Factory </a:t>
+            </a:r>
+            <a:endParaRPr lang="en-US" sz="3600" dirty="0">
+              <a:latin typeface="Arial" panose="020B0604020202020204" pitchFamily="34" charset="0"/>
+              <a:cs typeface="Arial" panose="020B0604020202020204" pitchFamily="34" charset="0"/>
+            </a:endParaRPr>
+          </a:p>
+        </p:txBody>
+      </p:sp>
+    </p:spTree>
+    <p:extLst>
+      <p:ext uri="{BB962C8B-B14F-4D97-AF65-F5344CB8AC3E}">
+        <p14:creationId xmlns:p14="http://schemas.microsoft.com/office/powerpoint/2010/main" val="2043040984"/>
+      </p:ext>
+    </p:extLst>
+  </p:cSld>
+  <p:clrMapOvr>
+    <a:masterClrMapping/>
+  </p:clrMapOvr>
+</p:sld>
+</file>
+
+<file path=ppt/slides/slide17.xml><?xml version="1.0" encoding="utf-8"?>
+<p:sld xmlns:a="http://schemas.openxmlformats.org/drawingml/2006/main" xmlns:r="http://schemas.openxmlformats.org/officeDocument/2006/relationships" xmlns:p="http://schemas.openxmlformats.org/presentationml/2006/main" show="0">
+  <p:cSld>
+    <p:spTree>
+      <p:nvGrpSpPr>
+        <p:cNvPr id="1" name=""/>
+        <p:cNvGrpSpPr/>
+        <p:nvPr/>
+      </p:nvGrpSpPr>
+      <p:grpSpPr>
+        <a:xfrm>
+          <a:off x="0" y="0"/>
+          <a:ext cx="0" cy="0"/>
+          <a:chOff x="0" y="0"/>
+          <a:chExt cx="0" cy="0"/>
+        </a:xfrm>
+      </p:grpSpPr>
+      <p:sp>
+        <p:nvSpPr>
+          <p:cNvPr id="2" name="Slide Number Placeholder 1">
+            <a:extLst>
+              <a:ext uri="{FF2B5EF4-FFF2-40B4-BE49-F238E27FC236}">
+                <a16:creationId xmlns:a16="http://schemas.microsoft.com/office/drawing/2014/main" id="{9A840C5A-C840-A584-A219-DBDFF7A5300B}"/>
+              </a:ext>
+            </a:extLst>
+          </p:cNvPr>
+          <p:cNvSpPr>
+            <a:spLocks noGrp="1"/>
+          </p:cNvSpPr>
+          <p:nvPr>
+            <p:ph type="sldNum" sz="quarter" idx="10"/>
+          </p:nvPr>
+        </p:nvSpPr>
+        <p:spPr/>
+        <p:txBody>
+          <a:bodyPr/>
+          <a:lstStyle/>
+          <a:p>
+            <a:fld id="{A02D9A9C-251E-4686-914B-47E3F39F30D8}" type="slidenum">
+              <a:rPr lang="de-DE" smtClean="0"/>
+              <a:t>17</a:t>
             </a:fld>
             <a:endParaRPr lang="de-DE"/>
           </a:p>
@@ -3066,8 +3540,8 @@
 </p:sld>
 </file>
 
-<file path=ppt/slides/slide16.xml><?xml version="1.0" encoding="utf-8"?>
-<p:sld xmlns:a="http://schemas.openxmlformats.org/drawingml/2006/main" xmlns:r="http://schemas.openxmlformats.org/officeDocument/2006/relationships" xmlns:p="http://schemas.openxmlformats.org/presentationml/2006/main">
+<file path=ppt/slides/slide18.xml><?xml version="1.0" encoding="utf-8"?>
+<p:sld xmlns:a="http://schemas.openxmlformats.org/drawingml/2006/main" xmlns:r="http://schemas.openxmlformats.org/officeDocument/2006/relationships" xmlns:p="http://schemas.openxmlformats.org/presentationml/2006/main" show="0">
   <p:cSld>
     <p:spTree>
       <p:nvGrpSpPr>
@@ -3109,7 +3583,7 @@
                 <a:latin typeface="Arial" panose="020B0604020202020204" pitchFamily="34" charset="0"/>
                 <a:cs typeface="Arial" panose="020B0604020202020204" pitchFamily="34" charset="0"/>
               </a:rPr>
-              <a:t>16</a:t>
+              <a:t>18</a:t>
             </a:fld>
             <a:endParaRPr lang="de-DE">
               <a:latin typeface="Arial" panose="020B0604020202020204" pitchFamily="34" charset="0"/>
@@ -3785,162 +4259,7 @@
 </p:sld>
 </file>
 
-<file path=ppt/slides/slide17.xml><?xml version="1.0" encoding="utf-8"?>
-<p:sld xmlns:a="http://schemas.openxmlformats.org/drawingml/2006/main" xmlns:r="http://schemas.openxmlformats.org/officeDocument/2006/relationships" xmlns:p="http://schemas.openxmlformats.org/presentationml/2006/main">
-  <p:cSld>
-    <p:spTree>
-      <p:nvGrpSpPr>
-        <p:cNvPr id="1" name=""/>
-        <p:cNvGrpSpPr/>
-        <p:nvPr/>
-      </p:nvGrpSpPr>
-      <p:grpSpPr>
-        <a:xfrm>
-          <a:off x="0" y="0"/>
-          <a:ext cx="0" cy="0"/>
-          <a:chOff x="0" y="0"/>
-          <a:chExt cx="0" cy="0"/>
-        </a:xfrm>
-      </p:grpSpPr>
-      <p:sp>
-        <p:nvSpPr>
-          <p:cNvPr id="2" name="Text 0">
-            <a:extLst>
-              <a:ext uri="{FF2B5EF4-FFF2-40B4-BE49-F238E27FC236}">
-                <a16:creationId xmlns:a16="http://schemas.microsoft.com/office/drawing/2014/main" id="{5E9BDF97-2CEC-5516-F91C-C69A562E04EA}"/>
-              </a:ext>
-            </a:extLst>
-          </p:cNvPr>
-          <p:cNvSpPr/>
-          <p:nvPr/>
-        </p:nvSpPr>
-        <p:spPr>
-          <a:xfrm>
-            <a:off x="793790" y="2643307"/>
-            <a:ext cx="13042821" cy="2126456"/>
-          </a:xfrm>
-          <a:prstGeom prst="rect">
-            <a:avLst/>
-          </a:prstGeom>
-          <a:noFill/>
-          <a:ln/>
-        </p:spPr>
-        <p:txBody>
-          <a:bodyPr wrap="none" lIns="0" tIns="0" rIns="0" bIns="0" rtlCol="0" anchor="t"/>
-          <a:lstStyle/>
-          <a:p>
-            <a:pPr marL="0" indent="0" algn="l">
-              <a:lnSpc>
-                <a:spcPts val="16700"/>
-              </a:lnSpc>
-              <a:buNone/>
-            </a:pPr>
-            <a:r>
-              <a:rPr lang="en-US" sz="13350" dirty="0">
-                <a:latin typeface="Arial" panose="020B0604020202020204" pitchFamily="34" charset="0"/>
-                <a:ea typeface="Crimson Pro Semi Bold" pitchFamily="34" charset="-122"/>
-                <a:cs typeface="Arial" panose="020B0604020202020204" pitchFamily="34" charset="0"/>
-              </a:rPr>
-              <a:t>Thank You!</a:t>
-            </a:r>
-            <a:endParaRPr lang="en-US" sz="13350" dirty="0">
-              <a:latin typeface="Arial" panose="020B0604020202020204" pitchFamily="34" charset="0"/>
-              <a:cs typeface="Arial" panose="020B0604020202020204" pitchFamily="34" charset="0"/>
-            </a:endParaRPr>
-          </a:p>
-        </p:txBody>
-      </p:sp>
-      <p:sp>
-        <p:nvSpPr>
-          <p:cNvPr id="3" name="Text 1">
-            <a:extLst>
-              <a:ext uri="{FF2B5EF4-FFF2-40B4-BE49-F238E27FC236}">
-                <a16:creationId xmlns:a16="http://schemas.microsoft.com/office/drawing/2014/main" id="{162051C1-87FA-AC88-FEC3-B65825AC80B1}"/>
-              </a:ext>
-            </a:extLst>
-          </p:cNvPr>
-          <p:cNvSpPr/>
-          <p:nvPr/>
-        </p:nvSpPr>
-        <p:spPr>
-          <a:xfrm>
-            <a:off x="793790" y="5223391"/>
-            <a:ext cx="13042821" cy="362903"/>
-          </a:xfrm>
-          <a:prstGeom prst="rect">
-            <a:avLst/>
-          </a:prstGeom>
-          <a:noFill/>
-          <a:ln/>
-        </p:spPr>
-        <p:txBody>
-          <a:bodyPr wrap="none" lIns="0" tIns="0" rIns="0" bIns="0" rtlCol="0" anchor="t"/>
-          <a:lstStyle/>
-          <a:p>
-            <a:pPr marL="0" indent="0" algn="l">
-              <a:lnSpc>
-                <a:spcPts val="2850"/>
-              </a:lnSpc>
-              <a:buNone/>
-            </a:pPr>
-            <a:r>
-              <a:rPr lang="en-US" sz="1750" dirty="0">
-                <a:latin typeface="Arial" panose="020B0604020202020204" pitchFamily="34" charset="0"/>
-                <a:ea typeface="Heebo" pitchFamily="34" charset="-122"/>
-                <a:cs typeface="Arial" panose="020B0604020202020204" pitchFamily="34" charset="0"/>
-              </a:rPr>
-              <a:t>I appreciate your time and attention.</a:t>
-            </a:r>
-            <a:endParaRPr lang="en-US" sz="1750" dirty="0">
-              <a:latin typeface="Arial" panose="020B0604020202020204" pitchFamily="34" charset="0"/>
-              <a:cs typeface="Arial" panose="020B0604020202020204" pitchFamily="34" charset="0"/>
-            </a:endParaRPr>
-          </a:p>
-        </p:txBody>
-      </p:sp>
-      <p:sp>
-        <p:nvSpPr>
-          <p:cNvPr id="5" name="Slide Number Placeholder 4">
-            <a:extLst>
-              <a:ext uri="{FF2B5EF4-FFF2-40B4-BE49-F238E27FC236}">
-                <a16:creationId xmlns:a16="http://schemas.microsoft.com/office/drawing/2014/main" id="{09EA9E87-DD33-F803-A787-B1528EFB82A4}"/>
-              </a:ext>
-            </a:extLst>
-          </p:cNvPr>
-          <p:cNvSpPr>
-            <a:spLocks noGrp="1"/>
-          </p:cNvSpPr>
-          <p:nvPr>
-            <p:ph type="sldNum" sz="quarter" idx="10"/>
-          </p:nvPr>
-        </p:nvSpPr>
-        <p:spPr/>
-        <p:txBody>
-          <a:bodyPr/>
-          <a:lstStyle/>
-          <a:p>
-            <a:fld id="{A02D9A9C-251E-4686-914B-47E3F39F30D8}" type="slidenum">
-              <a:rPr lang="de-DE" smtClean="0"/>
-              <a:t>17</a:t>
-            </a:fld>
-            <a:endParaRPr lang="de-DE"/>
-          </a:p>
-        </p:txBody>
-      </p:sp>
-    </p:spTree>
-    <p:extLst>
-      <p:ext uri="{BB962C8B-B14F-4D97-AF65-F5344CB8AC3E}">
-        <p14:creationId xmlns:p14="http://schemas.microsoft.com/office/powerpoint/2010/main" val="3645203461"/>
-      </p:ext>
-    </p:extLst>
-  </p:cSld>
-  <p:clrMapOvr>
-    <a:masterClrMapping/>
-  </p:clrMapOvr>
-</p:sld>
-</file>
-
-<file path=ppt/slides/slide18.xml><?xml version="1.0" encoding="utf-8"?>
+<file path=ppt/slides/slide19.xml><?xml version="1.0" encoding="utf-8"?>
 <p:sld xmlns:a="http://schemas.openxmlformats.org/drawingml/2006/main" xmlns:r="http://schemas.openxmlformats.org/officeDocument/2006/relationships" xmlns:p="http://schemas.openxmlformats.org/presentationml/2006/main" show="0">
   <p:cSld>
     <p:spTree>
@@ -3980,7 +4299,7 @@
           <a:p>
             <a:fld id="{A02D9A9C-251E-4686-914B-47E3F39F30D8}" type="slidenum">
               <a:rPr lang="de-DE" smtClean="0"/>
-              <a:t>18</a:t>
+              <a:t>19</a:t>
             </a:fld>
             <a:endParaRPr lang="de-DE"/>
           </a:p>
@@ -4079,195 +4398,6 @@
     <p:extLst>
       <p:ext uri="{BB962C8B-B14F-4D97-AF65-F5344CB8AC3E}">
         <p14:creationId xmlns:p14="http://schemas.microsoft.com/office/powerpoint/2010/main" val="216380118"/>
-      </p:ext>
-    </p:extLst>
-  </p:cSld>
-  <p:clrMapOvr>
-    <a:masterClrMapping/>
-  </p:clrMapOvr>
-</p:sld>
-</file>
-
-<file path=ppt/slides/slide19.xml><?xml version="1.0" encoding="utf-8"?>
-<p:sld xmlns:a="http://schemas.openxmlformats.org/drawingml/2006/main" xmlns:r="http://schemas.openxmlformats.org/officeDocument/2006/relationships" xmlns:p="http://schemas.openxmlformats.org/presentationml/2006/main" show="0">
-  <p:cSld>
-    <p:spTree>
-      <p:nvGrpSpPr>
-        <p:cNvPr id="1" name=""/>
-        <p:cNvGrpSpPr/>
-        <p:nvPr/>
-      </p:nvGrpSpPr>
-      <p:grpSpPr>
-        <a:xfrm>
-          <a:off x="0" y="0"/>
-          <a:ext cx="0" cy="0"/>
-          <a:chOff x="0" y="0"/>
-          <a:chExt cx="0" cy="0"/>
-        </a:xfrm>
-      </p:grpSpPr>
-      <p:sp>
-        <p:nvSpPr>
-          <p:cNvPr id="2" name="Slide Number Placeholder 1">
-            <a:extLst>
-              <a:ext uri="{FF2B5EF4-FFF2-40B4-BE49-F238E27FC236}">
-                <a16:creationId xmlns:a16="http://schemas.microsoft.com/office/drawing/2014/main" id="{F22F2BCC-B6B0-7E98-E4DC-ADAA9C788C5C}"/>
-              </a:ext>
-            </a:extLst>
-          </p:cNvPr>
-          <p:cNvSpPr>
-            <a:spLocks noGrp="1"/>
-          </p:cNvSpPr>
-          <p:nvPr>
-            <p:ph type="sldNum" sz="quarter" idx="10"/>
-          </p:nvPr>
-        </p:nvSpPr>
-        <p:spPr/>
-        <p:txBody>
-          <a:bodyPr/>
-          <a:lstStyle/>
-          <a:p>
-            <a:fld id="{A02D9A9C-251E-4686-914B-47E3F39F30D8}" type="slidenum">
-              <a:rPr lang="de-DE" smtClean="0"/>
-              <a:t>19</a:t>
-            </a:fld>
-            <a:endParaRPr lang="de-DE"/>
-          </a:p>
-        </p:txBody>
-      </p:sp>
-      <p:pic>
-        <p:nvPicPr>
-          <p:cNvPr id="6" name="Picture 5">
-            <a:extLst>
-              <a:ext uri="{FF2B5EF4-FFF2-40B4-BE49-F238E27FC236}">
-                <a16:creationId xmlns:a16="http://schemas.microsoft.com/office/drawing/2014/main" id="{9483616A-B819-1459-0E49-CA739B8687DD}"/>
-              </a:ext>
-            </a:extLst>
-          </p:cNvPr>
-          <p:cNvPicPr>
-            <a:picLocks noChangeAspect="1"/>
-          </p:cNvPicPr>
-          <p:nvPr/>
-        </p:nvPicPr>
-        <p:blipFill>
-          <a:blip r:embed="rId2"/>
-          <a:stretch>
-            <a:fillRect/>
-          </a:stretch>
-        </p:blipFill>
-        <p:spPr>
-          <a:xfrm>
-            <a:off x="3357687" y="2086501"/>
-            <a:ext cx="7915026" cy="4056597"/>
-          </a:xfrm>
-          <a:prstGeom prst="rect">
-            <a:avLst/>
-          </a:prstGeom>
-        </p:spPr>
-      </p:pic>
-      <p:cxnSp>
-        <p:nvCxnSpPr>
-          <p:cNvPr id="8" name="Straight Arrow Connector 7">
-            <a:extLst>
-              <a:ext uri="{FF2B5EF4-FFF2-40B4-BE49-F238E27FC236}">
-                <a16:creationId xmlns:a16="http://schemas.microsoft.com/office/drawing/2014/main" id="{9AC30367-5094-6F91-AB07-0F004FB116BD}"/>
-              </a:ext>
-            </a:extLst>
-          </p:cNvPr>
-          <p:cNvCxnSpPr>
-            <a:cxnSpLocks/>
-          </p:cNvCxnSpPr>
-          <p:nvPr/>
-        </p:nvCxnSpPr>
-        <p:spPr>
-          <a:xfrm flipV="1">
-            <a:off x="1160980" y="4161035"/>
-            <a:ext cx="2270589" cy="739739"/>
-          </a:xfrm>
-          <a:prstGeom prst="straightConnector1">
-            <a:avLst/>
-          </a:prstGeom>
-          <a:ln w="38100">
-            <a:tailEnd type="triangle"/>
-          </a:ln>
-        </p:spPr>
-        <p:style>
-          <a:lnRef idx="1">
-            <a:schemeClr val="accent6"/>
-          </a:lnRef>
-          <a:fillRef idx="0">
-            <a:schemeClr val="accent6"/>
-          </a:fillRef>
-          <a:effectRef idx="0">
-            <a:schemeClr val="accent6"/>
-          </a:effectRef>
-          <a:fontRef idx="minor">
-            <a:schemeClr val="tx1"/>
-          </a:fontRef>
-        </p:style>
-      </p:cxnSp>
-      <p:sp>
-        <p:nvSpPr>
-          <p:cNvPr id="13" name="TextBox 12">
-            <a:extLst>
-              <a:ext uri="{FF2B5EF4-FFF2-40B4-BE49-F238E27FC236}">
-                <a16:creationId xmlns:a16="http://schemas.microsoft.com/office/drawing/2014/main" id="{4C7EFE59-B507-A217-C4AC-C4629E6BBE9D}"/>
-              </a:ext>
-            </a:extLst>
-          </p:cNvPr>
-          <p:cNvSpPr txBox="1"/>
-          <p:nvPr/>
-        </p:nvSpPr>
-        <p:spPr>
-          <a:xfrm>
-            <a:off x="1252800" y="634032"/>
-            <a:ext cx="9223200" cy="461665"/>
-          </a:xfrm>
-          <a:prstGeom prst="rect">
-            <a:avLst/>
-          </a:prstGeom>
-          <a:noFill/>
-        </p:spPr>
-        <p:txBody>
-          <a:bodyPr wrap="square" rtlCol="0">
-            <a:spAutoFit/>
-          </a:bodyPr>
-          <a:lstStyle/>
-          <a:p>
-            <a:r>
-              <a:rPr lang="de-DE" sz="2400" dirty="0" err="1">
-                <a:latin typeface="Arial" panose="020B0604020202020204" pitchFamily="34" charset="0"/>
-                <a:cs typeface="Arial" panose="020B0604020202020204" pitchFamily="34" charset="0"/>
-              </a:rPr>
-              <a:t>Reward</a:t>
-            </a:r>
-            <a:r>
-              <a:rPr lang="de-DE" sz="2400" dirty="0">
-                <a:latin typeface="Arial" panose="020B0604020202020204" pitchFamily="34" charset="0"/>
-                <a:cs typeface="Arial" panose="020B0604020202020204" pitchFamily="34" charset="0"/>
-              </a:rPr>
-              <a:t> Shaping- </a:t>
-            </a:r>
-            <a:r>
-              <a:rPr lang="de-DE" sz="2400" dirty="0" err="1">
-                <a:latin typeface="Arial" panose="020B0604020202020204" pitchFamily="34" charset="0"/>
-                <a:cs typeface="Arial" panose="020B0604020202020204" pitchFamily="34" charset="0"/>
-              </a:rPr>
-              <a:t>reward</a:t>
-            </a:r>
-            <a:r>
-              <a:rPr lang="de-DE" sz="2400" dirty="0">
-                <a:latin typeface="Arial" panose="020B0604020202020204" pitchFamily="34" charset="0"/>
-                <a:cs typeface="Arial" panose="020B0604020202020204" pitchFamily="34" charset="0"/>
-              </a:rPr>
-              <a:t> 2</a:t>
-            </a:r>
-          </a:p>
-        </p:txBody>
-      </p:sp>
-    </p:spTree>
-    <p:extLst>
-      <p:ext uri="{BB962C8B-B14F-4D97-AF65-F5344CB8AC3E}">
-        <p14:creationId xmlns:p14="http://schemas.microsoft.com/office/powerpoint/2010/main" val="1609710947"/>
       </p:ext>
     </p:extLst>
   </p:cSld>
@@ -6169,6 +6299,195 @@
       </p:grpSpPr>
       <p:sp>
         <p:nvSpPr>
+          <p:cNvPr id="2" name="Slide Number Placeholder 1">
+            <a:extLst>
+              <a:ext uri="{FF2B5EF4-FFF2-40B4-BE49-F238E27FC236}">
+                <a16:creationId xmlns:a16="http://schemas.microsoft.com/office/drawing/2014/main" id="{F22F2BCC-B6B0-7E98-E4DC-ADAA9C788C5C}"/>
+              </a:ext>
+            </a:extLst>
+          </p:cNvPr>
+          <p:cNvSpPr>
+            <a:spLocks noGrp="1"/>
+          </p:cNvSpPr>
+          <p:nvPr>
+            <p:ph type="sldNum" sz="quarter" idx="10"/>
+          </p:nvPr>
+        </p:nvSpPr>
+        <p:spPr/>
+        <p:txBody>
+          <a:bodyPr/>
+          <a:lstStyle/>
+          <a:p>
+            <a:fld id="{A02D9A9C-251E-4686-914B-47E3F39F30D8}" type="slidenum">
+              <a:rPr lang="de-DE" smtClean="0"/>
+              <a:t>20</a:t>
+            </a:fld>
+            <a:endParaRPr lang="de-DE"/>
+          </a:p>
+        </p:txBody>
+      </p:sp>
+      <p:pic>
+        <p:nvPicPr>
+          <p:cNvPr id="6" name="Picture 5">
+            <a:extLst>
+              <a:ext uri="{FF2B5EF4-FFF2-40B4-BE49-F238E27FC236}">
+                <a16:creationId xmlns:a16="http://schemas.microsoft.com/office/drawing/2014/main" id="{9483616A-B819-1459-0E49-CA739B8687DD}"/>
+              </a:ext>
+            </a:extLst>
+          </p:cNvPr>
+          <p:cNvPicPr>
+            <a:picLocks noChangeAspect="1"/>
+          </p:cNvPicPr>
+          <p:nvPr/>
+        </p:nvPicPr>
+        <p:blipFill>
+          <a:blip r:embed="rId2"/>
+          <a:stretch>
+            <a:fillRect/>
+          </a:stretch>
+        </p:blipFill>
+        <p:spPr>
+          <a:xfrm>
+            <a:off x="3357687" y="2086501"/>
+            <a:ext cx="7915026" cy="4056597"/>
+          </a:xfrm>
+          <a:prstGeom prst="rect">
+            <a:avLst/>
+          </a:prstGeom>
+        </p:spPr>
+      </p:pic>
+      <p:cxnSp>
+        <p:nvCxnSpPr>
+          <p:cNvPr id="8" name="Straight Arrow Connector 7">
+            <a:extLst>
+              <a:ext uri="{FF2B5EF4-FFF2-40B4-BE49-F238E27FC236}">
+                <a16:creationId xmlns:a16="http://schemas.microsoft.com/office/drawing/2014/main" id="{9AC30367-5094-6F91-AB07-0F004FB116BD}"/>
+              </a:ext>
+            </a:extLst>
+          </p:cNvPr>
+          <p:cNvCxnSpPr>
+            <a:cxnSpLocks/>
+          </p:cNvCxnSpPr>
+          <p:nvPr/>
+        </p:nvCxnSpPr>
+        <p:spPr>
+          <a:xfrm flipV="1">
+            <a:off x="1160980" y="4161035"/>
+            <a:ext cx="2270589" cy="739739"/>
+          </a:xfrm>
+          <a:prstGeom prst="straightConnector1">
+            <a:avLst/>
+          </a:prstGeom>
+          <a:ln w="38100">
+            <a:tailEnd type="triangle"/>
+          </a:ln>
+        </p:spPr>
+        <p:style>
+          <a:lnRef idx="1">
+            <a:schemeClr val="accent6"/>
+          </a:lnRef>
+          <a:fillRef idx="0">
+            <a:schemeClr val="accent6"/>
+          </a:fillRef>
+          <a:effectRef idx="0">
+            <a:schemeClr val="accent6"/>
+          </a:effectRef>
+          <a:fontRef idx="minor">
+            <a:schemeClr val="tx1"/>
+          </a:fontRef>
+        </p:style>
+      </p:cxnSp>
+      <p:sp>
+        <p:nvSpPr>
+          <p:cNvPr id="13" name="TextBox 12">
+            <a:extLst>
+              <a:ext uri="{FF2B5EF4-FFF2-40B4-BE49-F238E27FC236}">
+                <a16:creationId xmlns:a16="http://schemas.microsoft.com/office/drawing/2014/main" id="{4C7EFE59-B507-A217-C4AC-C4629E6BBE9D}"/>
+              </a:ext>
+            </a:extLst>
+          </p:cNvPr>
+          <p:cNvSpPr txBox="1"/>
+          <p:nvPr/>
+        </p:nvSpPr>
+        <p:spPr>
+          <a:xfrm>
+            <a:off x="1252800" y="634032"/>
+            <a:ext cx="9223200" cy="461665"/>
+          </a:xfrm>
+          <a:prstGeom prst="rect">
+            <a:avLst/>
+          </a:prstGeom>
+          <a:noFill/>
+        </p:spPr>
+        <p:txBody>
+          <a:bodyPr wrap="square" rtlCol="0">
+            <a:spAutoFit/>
+          </a:bodyPr>
+          <a:lstStyle/>
+          <a:p>
+            <a:r>
+              <a:rPr lang="de-DE" sz="2400" dirty="0" err="1">
+                <a:latin typeface="Arial" panose="020B0604020202020204" pitchFamily="34" charset="0"/>
+                <a:cs typeface="Arial" panose="020B0604020202020204" pitchFamily="34" charset="0"/>
+              </a:rPr>
+              <a:t>Reward</a:t>
+            </a:r>
+            <a:r>
+              <a:rPr lang="de-DE" sz="2400" dirty="0">
+                <a:latin typeface="Arial" panose="020B0604020202020204" pitchFamily="34" charset="0"/>
+                <a:cs typeface="Arial" panose="020B0604020202020204" pitchFamily="34" charset="0"/>
+              </a:rPr>
+              <a:t> Shaping- </a:t>
+            </a:r>
+            <a:r>
+              <a:rPr lang="de-DE" sz="2400" dirty="0" err="1">
+                <a:latin typeface="Arial" panose="020B0604020202020204" pitchFamily="34" charset="0"/>
+                <a:cs typeface="Arial" panose="020B0604020202020204" pitchFamily="34" charset="0"/>
+              </a:rPr>
+              <a:t>reward</a:t>
+            </a:r>
+            <a:r>
+              <a:rPr lang="de-DE" sz="2400" dirty="0">
+                <a:latin typeface="Arial" panose="020B0604020202020204" pitchFamily="34" charset="0"/>
+                <a:cs typeface="Arial" panose="020B0604020202020204" pitchFamily="34" charset="0"/>
+              </a:rPr>
+              <a:t> 2</a:t>
+            </a:r>
+          </a:p>
+        </p:txBody>
+      </p:sp>
+    </p:spTree>
+    <p:extLst>
+      <p:ext uri="{BB962C8B-B14F-4D97-AF65-F5344CB8AC3E}">
+        <p14:creationId xmlns:p14="http://schemas.microsoft.com/office/powerpoint/2010/main" val="1609710947"/>
+      </p:ext>
+    </p:extLst>
+  </p:cSld>
+  <p:clrMapOvr>
+    <a:masterClrMapping/>
+  </p:clrMapOvr>
+</p:sld>
+</file>
+
+<file path=ppt/slides/slide21.xml><?xml version="1.0" encoding="utf-8"?>
+<p:sld xmlns:a="http://schemas.openxmlformats.org/drawingml/2006/main" xmlns:r="http://schemas.openxmlformats.org/officeDocument/2006/relationships" xmlns:p="http://schemas.openxmlformats.org/presentationml/2006/main" show="0">
+  <p:cSld>
+    <p:spTree>
+      <p:nvGrpSpPr>
+        <p:cNvPr id="1" name=""/>
+        <p:cNvGrpSpPr/>
+        <p:nvPr/>
+      </p:nvGrpSpPr>
+      <p:grpSpPr>
+        <a:xfrm>
+          <a:off x="0" y="0"/>
+          <a:ext cx="0" cy="0"/>
+          <a:chOff x="0" y="0"/>
+          <a:chExt cx="0" cy="0"/>
+        </a:xfrm>
+      </p:grpSpPr>
+      <p:sp>
+        <p:nvSpPr>
           <p:cNvPr id="3" name="TextBox 2">
             <a:extLst>
               <a:ext uri="{FF2B5EF4-FFF2-40B4-BE49-F238E27FC236}">
@@ -6575,7 +6894,7 @@
           <a:p>
             <a:fld id="{A02D9A9C-251E-4686-914B-47E3F39F30D8}" type="slidenum">
               <a:rPr lang="de-DE" smtClean="0"/>
-              <a:t>20</a:t>
+              <a:t>21</a:t>
             </a:fld>
             <a:endParaRPr lang="de-DE"/>
           </a:p>
@@ -14809,6 +15128,290 @@
       </p:grpSpPr>
       <p:sp>
         <p:nvSpPr>
+          <p:cNvPr id="2" name="Slide Number Placeholder 1">
+            <a:extLst>
+              <a:ext uri="{FF2B5EF4-FFF2-40B4-BE49-F238E27FC236}">
+                <a16:creationId xmlns:a16="http://schemas.microsoft.com/office/drawing/2014/main" id="{BAA48312-B207-E549-5CFC-D8A89C9494D5}"/>
+              </a:ext>
+            </a:extLst>
+          </p:cNvPr>
+          <p:cNvSpPr>
+            <a:spLocks noGrp="1"/>
+          </p:cNvSpPr>
+          <p:nvPr>
+            <p:ph type="sldNum" sz="quarter" idx="10"/>
+          </p:nvPr>
+        </p:nvSpPr>
+        <p:spPr/>
+        <p:txBody>
+          <a:bodyPr/>
+          <a:lstStyle/>
+          <a:p>
+            <a:fld id="{A02D9A9C-251E-4686-914B-47E3F39F30D8}" type="slidenum">
+              <a:rPr lang="de-DE" smtClean="0">
+                <a:latin typeface="Arial" panose="020B0604020202020204" pitchFamily="34" charset="0"/>
+                <a:cs typeface="Arial" panose="020B0604020202020204" pitchFamily="34" charset="0"/>
+              </a:rPr>
+              <a:t>6</a:t>
+            </a:fld>
+            <a:endParaRPr lang="de-DE">
+              <a:latin typeface="Arial" panose="020B0604020202020204" pitchFamily="34" charset="0"/>
+              <a:cs typeface="Arial" panose="020B0604020202020204" pitchFamily="34" charset="0"/>
+            </a:endParaRPr>
+          </a:p>
+        </p:txBody>
+      </p:sp>
+      <p:pic>
+        <p:nvPicPr>
+          <p:cNvPr id="6" name="Picture 5">
+            <a:extLst>
+              <a:ext uri="{FF2B5EF4-FFF2-40B4-BE49-F238E27FC236}">
+                <a16:creationId xmlns:a16="http://schemas.microsoft.com/office/drawing/2014/main" id="{EE407536-61E1-7C66-0652-74EE0BE26B55}"/>
+              </a:ext>
+            </a:extLst>
+          </p:cNvPr>
+          <p:cNvPicPr>
+            <a:picLocks noChangeAspect="1"/>
+          </p:cNvPicPr>
+          <p:nvPr/>
+        </p:nvPicPr>
+        <p:blipFill>
+          <a:blip r:embed="rId2"/>
+          <a:stretch>
+            <a:fillRect/>
+          </a:stretch>
+        </p:blipFill>
+        <p:spPr>
+          <a:xfrm>
+            <a:off x="339050" y="4499349"/>
+            <a:ext cx="6480000" cy="3389722"/>
+          </a:xfrm>
+          <a:prstGeom prst="rect">
+            <a:avLst/>
+          </a:prstGeom>
+        </p:spPr>
+      </p:pic>
+      <p:pic>
+        <p:nvPicPr>
+          <p:cNvPr id="8" name="Picture 7">
+            <a:extLst>
+              <a:ext uri="{FF2B5EF4-FFF2-40B4-BE49-F238E27FC236}">
+                <a16:creationId xmlns:a16="http://schemas.microsoft.com/office/drawing/2014/main" id="{356F4251-F1C0-634C-97EE-B65EEEFE1EBD}"/>
+              </a:ext>
+            </a:extLst>
+          </p:cNvPr>
+          <p:cNvPicPr>
+            <a:picLocks noChangeAspect="1"/>
+          </p:cNvPicPr>
+          <p:nvPr/>
+        </p:nvPicPr>
+        <p:blipFill>
+          <a:blip r:embed="rId3"/>
+          <a:stretch>
+            <a:fillRect/>
+          </a:stretch>
+        </p:blipFill>
+        <p:spPr>
+          <a:xfrm>
+            <a:off x="339050" y="863051"/>
+            <a:ext cx="6480000" cy="3126211"/>
+          </a:xfrm>
+          <a:prstGeom prst="rect">
+            <a:avLst/>
+          </a:prstGeom>
+        </p:spPr>
+      </p:pic>
+      <p:pic>
+        <p:nvPicPr>
+          <p:cNvPr id="12" name="Picture 11">
+            <a:extLst>
+              <a:ext uri="{FF2B5EF4-FFF2-40B4-BE49-F238E27FC236}">
+                <a16:creationId xmlns:a16="http://schemas.microsoft.com/office/drawing/2014/main" id="{D483F423-DA30-766A-EADC-E01E0515071D}"/>
+              </a:ext>
+            </a:extLst>
+          </p:cNvPr>
+          <p:cNvPicPr>
+            <a:picLocks noChangeAspect="1"/>
+          </p:cNvPicPr>
+          <p:nvPr/>
+        </p:nvPicPr>
+        <p:blipFill>
+          <a:blip r:embed="rId4"/>
+          <a:stretch>
+            <a:fillRect/>
+          </a:stretch>
+        </p:blipFill>
+        <p:spPr>
+          <a:xfrm>
+            <a:off x="7315200" y="1109627"/>
+            <a:ext cx="6902573" cy="6408000"/>
+          </a:xfrm>
+          <a:prstGeom prst="rect">
+            <a:avLst/>
+          </a:prstGeom>
+        </p:spPr>
+      </p:pic>
+      <p:sp>
+        <p:nvSpPr>
+          <p:cNvPr id="13" name="TextBox 12">
+            <a:extLst>
+              <a:ext uri="{FF2B5EF4-FFF2-40B4-BE49-F238E27FC236}">
+                <a16:creationId xmlns:a16="http://schemas.microsoft.com/office/drawing/2014/main" id="{AFBC365D-07E4-5BE3-D31F-A690855F1A89}"/>
+              </a:ext>
+            </a:extLst>
+          </p:cNvPr>
+          <p:cNvSpPr txBox="1"/>
+          <p:nvPr/>
+        </p:nvSpPr>
+        <p:spPr>
+          <a:xfrm>
+            <a:off x="787591" y="3958844"/>
+            <a:ext cx="6031459" cy="276999"/>
+          </a:xfrm>
+          <a:prstGeom prst="rect">
+            <a:avLst/>
+          </a:prstGeom>
+          <a:noFill/>
+        </p:spPr>
+        <p:txBody>
+          <a:bodyPr wrap="none" rtlCol="0">
+            <a:spAutoFit/>
+          </a:bodyPr>
+          <a:lstStyle/>
+          <a:p>
+            <a:r>
+              <a:rPr lang="en-US" sz="1200" b="0" i="0" dirty="0">
+                <a:effectLst/>
+                <a:latin typeface="Arial" panose="020B0604020202020204" pitchFamily="34" charset="0"/>
+                <a:cs typeface="Arial" panose="020B0604020202020204" pitchFamily="34" charset="0"/>
+              </a:rPr>
+              <a:t>Fig. 1: Charging and discharging activation gates with a small deadband around u = 0.</a:t>
+            </a:r>
+            <a:endParaRPr lang="de-DE" sz="1200" dirty="0">
+              <a:latin typeface="Arial" panose="020B0604020202020204" pitchFamily="34" charset="0"/>
+              <a:cs typeface="Arial" panose="020B0604020202020204" pitchFamily="34" charset="0"/>
+            </a:endParaRPr>
+          </a:p>
+        </p:txBody>
+      </p:sp>
+      <p:sp>
+        <p:nvSpPr>
+          <p:cNvPr id="14" name="TextBox 13">
+            <a:extLst>
+              <a:ext uri="{FF2B5EF4-FFF2-40B4-BE49-F238E27FC236}">
+                <a16:creationId xmlns:a16="http://schemas.microsoft.com/office/drawing/2014/main" id="{9904FD2E-D79B-B2AF-FC2F-8F254FD3FFB5}"/>
+              </a:ext>
+            </a:extLst>
+          </p:cNvPr>
+          <p:cNvSpPr txBox="1"/>
+          <p:nvPr/>
+        </p:nvSpPr>
+        <p:spPr>
+          <a:xfrm>
+            <a:off x="7895596" y="7494995"/>
+            <a:ext cx="6163419" cy="276999"/>
+          </a:xfrm>
+          <a:prstGeom prst="rect">
+            <a:avLst/>
+          </a:prstGeom>
+          <a:noFill/>
+        </p:spPr>
+        <p:txBody>
+          <a:bodyPr wrap="none" rtlCol="0">
+            <a:spAutoFit/>
+          </a:bodyPr>
+          <a:lstStyle/>
+          <a:p>
+            <a:r>
+              <a:rPr lang="en-US" sz="1200" b="0" i="0" dirty="0">
+                <a:effectLst/>
+                <a:latin typeface="Arial" panose="020B0604020202020204" pitchFamily="34" charset="0"/>
+                <a:cs typeface="Arial" panose="020B0604020202020204" pitchFamily="34" charset="0"/>
+              </a:rPr>
+              <a:t>Fig. 3: SOC boundary behavior, suppressing discharge near empty and charge near full.</a:t>
+            </a:r>
+            <a:endParaRPr lang="de-DE" sz="1200" dirty="0">
+              <a:latin typeface="Arial" panose="020B0604020202020204" pitchFamily="34" charset="0"/>
+              <a:cs typeface="Arial" panose="020B0604020202020204" pitchFamily="34" charset="0"/>
+            </a:endParaRPr>
+          </a:p>
+        </p:txBody>
+      </p:sp>
+      <p:sp>
+        <p:nvSpPr>
+          <p:cNvPr id="15" name="TextBox 14">
+            <a:extLst>
+              <a:ext uri="{FF2B5EF4-FFF2-40B4-BE49-F238E27FC236}">
+                <a16:creationId xmlns:a16="http://schemas.microsoft.com/office/drawing/2014/main" id="{91E8537B-9D1B-5D9B-91A9-6CE1E75ED4BF}"/>
+              </a:ext>
+            </a:extLst>
+          </p:cNvPr>
+          <p:cNvSpPr txBox="1"/>
+          <p:nvPr/>
+        </p:nvSpPr>
+        <p:spPr>
+          <a:xfrm>
+            <a:off x="1339494" y="7835210"/>
+            <a:ext cx="4479111" cy="261610"/>
+          </a:xfrm>
+          <a:prstGeom prst="rect">
+            <a:avLst/>
+          </a:prstGeom>
+          <a:noFill/>
+        </p:spPr>
+        <p:txBody>
+          <a:bodyPr wrap="none" rtlCol="0">
+            <a:spAutoFit/>
+          </a:bodyPr>
+          <a:lstStyle/>
+          <a:p>
+            <a:r>
+              <a:rPr lang="en-US" sz="1100" b="0" i="0" dirty="0">
+                <a:effectLst/>
+                <a:latin typeface="Arial" panose="020B0604020202020204" pitchFamily="34" charset="0"/>
+                <a:cs typeface="Arial" panose="020B0604020202020204" pitchFamily="34" charset="0"/>
+              </a:rPr>
+              <a:t>Fig. 2: Effect of k and epsilon on gate sharpness and threshold shift.</a:t>
+            </a:r>
+            <a:endParaRPr lang="de-DE" sz="1100" dirty="0">
+              <a:latin typeface="Arial" panose="020B0604020202020204" pitchFamily="34" charset="0"/>
+              <a:cs typeface="Arial" panose="020B0604020202020204" pitchFamily="34" charset="0"/>
+            </a:endParaRPr>
+          </a:p>
+        </p:txBody>
+      </p:sp>
+    </p:spTree>
+    <p:extLst>
+      <p:ext uri="{BB962C8B-B14F-4D97-AF65-F5344CB8AC3E}">
+        <p14:creationId xmlns:p14="http://schemas.microsoft.com/office/powerpoint/2010/main" val="986550675"/>
+      </p:ext>
+    </p:extLst>
+  </p:cSld>
+  <p:clrMapOvr>
+    <a:masterClrMapping/>
+  </p:clrMapOvr>
+</p:sld>
+</file>
+
+<file path=ppt/slides/slide7.xml><?xml version="1.0" encoding="utf-8"?>
+<p:sld xmlns:a="http://schemas.openxmlformats.org/drawingml/2006/main" xmlns:r="http://schemas.openxmlformats.org/officeDocument/2006/relationships" xmlns:p="http://schemas.openxmlformats.org/presentationml/2006/main">
+  <p:cSld>
+    <p:spTree>
+      <p:nvGrpSpPr>
+        <p:cNvPr id="1" name=""/>
+        <p:cNvGrpSpPr/>
+        <p:nvPr/>
+      </p:nvGrpSpPr>
+      <p:grpSpPr>
+        <a:xfrm>
+          <a:off x="0" y="0"/>
+          <a:ext cx="0" cy="0"/>
+          <a:chOff x="0" y="0"/>
+          <a:chExt cx="0" cy="0"/>
+        </a:xfrm>
+      </p:grpSpPr>
+      <p:sp>
+        <p:nvSpPr>
           <p:cNvPr id="17" name="Shape 4">
             <a:extLst>
               <a:ext uri="{FF2B5EF4-FFF2-40B4-BE49-F238E27FC236}">
@@ -16656,7 +17259,7 @@
           <a:p>
             <a:fld id="{A02D9A9C-251E-4686-914B-47E3F39F30D8}" type="slidenum">
               <a:rPr lang="de-DE" smtClean="0"/>
-              <a:t>6</a:t>
+              <a:t>7</a:t>
             </a:fld>
             <a:endParaRPr lang="de-DE"/>
           </a:p>
@@ -16675,7 +17278,7 @@
 </p:sld>
 </file>
 
-<file path=ppt/slides/slide7.xml><?xml version="1.0" encoding="utf-8"?>
+<file path=ppt/slides/slide8.xml><?xml version="1.0" encoding="utf-8"?>
 <p:sld xmlns:a="http://schemas.openxmlformats.org/drawingml/2006/main" xmlns:r="http://schemas.openxmlformats.org/officeDocument/2006/relationships" xmlns:p="http://schemas.openxmlformats.org/presentationml/2006/main">
   <p:cSld>
     <p:spTree>
@@ -16718,7 +17321,7 @@
                 <a:latin typeface="Arial" panose="020B0604020202020204" pitchFamily="34" charset="0"/>
                 <a:cs typeface="Arial" panose="020B0604020202020204" pitchFamily="34" charset="0"/>
               </a:rPr>
-              <a:t>7</a:t>
+              <a:t>8</a:t>
             </a:fld>
             <a:endParaRPr lang="de-DE">
               <a:latin typeface="Arial" panose="020B0604020202020204" pitchFamily="34" charset="0"/>
@@ -17848,7 +18451,7 @@
 </p:sld>
 </file>
 
-<file path=ppt/slides/slide8.xml><?xml version="1.0" encoding="utf-8"?>
+<file path=ppt/slides/slide9.xml><?xml version="1.0" encoding="utf-8"?>
 <p:sld xmlns:a="http://schemas.openxmlformats.org/drawingml/2006/main" xmlns:r="http://schemas.openxmlformats.org/officeDocument/2006/relationships" xmlns:p="http://schemas.openxmlformats.org/presentationml/2006/main">
   <p:cSld>
     <p:spTree>
@@ -18025,7 +18628,7 @@
           <a:p>
             <a:fld id="{A02D9A9C-251E-4686-914B-47E3F39F30D8}" type="slidenum">
               <a:rPr lang="de-DE" smtClean="0"/>
-              <a:t>8</a:t>
+              <a:t>9</a:t>
             </a:fld>
             <a:endParaRPr lang="de-DE"/>
           </a:p>
@@ -18065,353 +18668,6 @@
     <p:extLst>
       <p:ext uri="{BB962C8B-B14F-4D97-AF65-F5344CB8AC3E}">
         <p14:creationId xmlns:p14="http://schemas.microsoft.com/office/powerpoint/2010/main" val="444764384"/>
-      </p:ext>
-    </p:extLst>
-  </p:cSld>
-  <p:clrMapOvr>
-    <a:masterClrMapping/>
-  </p:clrMapOvr>
-</p:sld>
-</file>
-
-<file path=ppt/slides/slide9.xml><?xml version="1.0" encoding="utf-8"?>
-<p:sld xmlns:a="http://schemas.openxmlformats.org/drawingml/2006/main" xmlns:r="http://schemas.openxmlformats.org/officeDocument/2006/relationships" xmlns:p="http://schemas.openxmlformats.org/presentationml/2006/main">
-  <p:cSld>
-    <p:spTree>
-      <p:nvGrpSpPr>
-        <p:cNvPr id="1" name=""/>
-        <p:cNvGrpSpPr/>
-        <p:nvPr/>
-      </p:nvGrpSpPr>
-      <p:grpSpPr>
-        <a:xfrm>
-          <a:off x="0" y="0"/>
-          <a:ext cx="0" cy="0"/>
-          <a:chOff x="0" y="0"/>
-          <a:chExt cx="0" cy="0"/>
-        </a:xfrm>
-      </p:grpSpPr>
-      <p:sp>
-        <p:nvSpPr>
-          <p:cNvPr id="5" name="Shape 4">
-            <a:extLst>
-              <a:ext uri="{FF2B5EF4-FFF2-40B4-BE49-F238E27FC236}">
-                <a16:creationId xmlns:a16="http://schemas.microsoft.com/office/drawing/2014/main" id="{01E4604A-A2F2-75F3-0A53-CA6CEEF5588D}"/>
-              </a:ext>
-            </a:extLst>
-          </p:cNvPr>
-          <p:cNvSpPr/>
-          <p:nvPr/>
-        </p:nvSpPr>
-        <p:spPr>
-          <a:xfrm>
-            <a:off x="1252800" y="2697493"/>
-            <a:ext cx="6608494" cy="3522054"/>
-          </a:xfrm>
-          <a:prstGeom prst="roundRect">
-            <a:avLst>
-              <a:gd name="adj" fmla="val 4335"/>
-            </a:avLst>
-          </a:prstGeom>
-          <a:solidFill>
-            <a:srgbClr val="D2DDF9"/>
-          </a:solidFill>
-          <a:ln/>
-        </p:spPr>
-        <p:txBody>
-          <a:bodyPr/>
-          <a:lstStyle/>
-          <a:p>
-            <a:endParaRPr lang="de-DE">
-              <a:latin typeface="Arial" panose="020B0604020202020204" pitchFamily="34" charset="0"/>
-              <a:cs typeface="Arial" panose="020B0604020202020204" pitchFamily="34" charset="0"/>
-            </a:endParaRPr>
-          </a:p>
-        </p:txBody>
-      </p:sp>
-      <p:sp>
-        <p:nvSpPr>
-          <p:cNvPr id="2" name="Text 1">
-            <a:extLst>
-              <a:ext uri="{FF2B5EF4-FFF2-40B4-BE49-F238E27FC236}">
-                <a16:creationId xmlns:a16="http://schemas.microsoft.com/office/drawing/2014/main" id="{C62DF92F-1163-B150-A05D-661A035DACD9}"/>
-              </a:ext>
-            </a:extLst>
-          </p:cNvPr>
-          <p:cNvSpPr/>
-          <p:nvPr/>
-        </p:nvSpPr>
-        <p:spPr>
-          <a:xfrm>
-            <a:off x="1483201" y="2600711"/>
-            <a:ext cx="6127200" cy="3715618"/>
-          </a:xfrm>
-          <a:prstGeom prst="rect">
-            <a:avLst/>
-          </a:prstGeom>
-          <a:noFill/>
-          <a:ln/>
-        </p:spPr>
-        <p:txBody>
-          <a:bodyPr wrap="none" lIns="0" tIns="0" rIns="0" bIns="0" rtlCol="0" anchor="t"/>
-          <a:lstStyle/>
-          <a:p>
-            <a:pPr marL="0" indent="0" algn="l">
-              <a:lnSpc>
-                <a:spcPts val="2850"/>
-              </a:lnSpc>
-              <a:buNone/>
-            </a:pPr>
-            <a:endParaRPr lang="en-US" sz="1750" dirty="0">
-              <a:latin typeface="Arial" panose="020B0604020202020204" pitchFamily="34" charset="0"/>
-              <a:ea typeface="Heebo" pitchFamily="34" charset="-122"/>
-              <a:cs typeface="Arial" panose="020B0604020202020204" pitchFamily="34" charset="0"/>
-            </a:endParaRPr>
-          </a:p>
-          <a:p>
-            <a:pPr marL="0" indent="0" algn="l">
-              <a:lnSpc>
-                <a:spcPts val="2850"/>
-              </a:lnSpc>
-              <a:buNone/>
-            </a:pPr>
-            <a:r>
-              <a:rPr lang="en-US" sz="2400" b="1" dirty="0">
-                <a:latin typeface="Arial" panose="020B0604020202020204" pitchFamily="34" charset="0"/>
-                <a:ea typeface="Heebo" pitchFamily="34" charset="-122"/>
-                <a:cs typeface="Arial" panose="020B0604020202020204" pitchFamily="34" charset="0"/>
-              </a:rPr>
-              <a:t>Strengths:</a:t>
-            </a:r>
-          </a:p>
-          <a:p>
-            <a:pPr marL="285750" indent="-285750" algn="l">
-              <a:lnSpc>
-                <a:spcPts val="2850"/>
-              </a:lnSpc>
-              <a:buFont typeface="Arial" panose="020B0604020202020204" pitchFamily="34" charset="0"/>
-              <a:buChar char="•"/>
-            </a:pPr>
-            <a:r>
-              <a:rPr lang="en-US" dirty="0">
-                <a:latin typeface="Arial" panose="020B0604020202020204" pitchFamily="34" charset="0"/>
-                <a:ea typeface="Heebo" pitchFamily="34" charset="-122"/>
-                <a:cs typeface="Arial" panose="020B0604020202020204" pitchFamily="34" charset="0"/>
-              </a:rPr>
-              <a:t>31/32 runs (96%) achieved near-optimal performance</a:t>
-            </a:r>
-          </a:p>
-          <a:p>
-            <a:pPr marL="285750" indent="-285750" algn="l">
-              <a:lnSpc>
-                <a:spcPts val="2850"/>
-              </a:lnSpc>
-              <a:buFont typeface="Arial" panose="020B0604020202020204" pitchFamily="34" charset="0"/>
-              <a:buChar char="•"/>
-            </a:pPr>
-            <a:r>
-              <a:rPr lang="en-US" dirty="0">
-                <a:latin typeface="Arial" panose="020B0604020202020204" pitchFamily="34" charset="0"/>
-                <a:ea typeface="Heebo" pitchFamily="34" charset="-122"/>
-                <a:cs typeface="Arial" panose="020B0604020202020204" pitchFamily="34" charset="0"/>
-              </a:rPr>
-              <a:t>Stable and consistent learning behavior</a:t>
-            </a:r>
-          </a:p>
-          <a:p>
-            <a:pPr marL="285750" indent="-285750" algn="l">
-              <a:lnSpc>
-                <a:spcPts val="2850"/>
-              </a:lnSpc>
-              <a:buFont typeface="Arial" panose="020B0604020202020204" pitchFamily="34" charset="0"/>
-              <a:buChar char="•"/>
-            </a:pPr>
-            <a:r>
-              <a:rPr lang="en-US" dirty="0">
-                <a:latin typeface="Arial" panose="020B0604020202020204" pitchFamily="34" charset="0"/>
-                <a:ea typeface="Heebo" pitchFamily="34" charset="-122"/>
-                <a:cs typeface="Arial" panose="020B0604020202020204" pitchFamily="34" charset="0"/>
-              </a:rPr>
-              <a:t>Model is robust to random initialization</a:t>
-            </a:r>
-          </a:p>
-          <a:p>
-            <a:pPr marL="0" indent="0" algn="l">
-              <a:lnSpc>
-                <a:spcPts val="2850"/>
-              </a:lnSpc>
-              <a:buNone/>
-            </a:pPr>
-            <a:endParaRPr lang="en-US" sz="1750" dirty="0">
-              <a:latin typeface="Arial" panose="020B0604020202020204" pitchFamily="34" charset="0"/>
-              <a:ea typeface="Heebo" pitchFamily="34" charset="-122"/>
-              <a:cs typeface="Arial" panose="020B0604020202020204" pitchFamily="34" charset="0"/>
-            </a:endParaRPr>
-          </a:p>
-          <a:p>
-            <a:pPr marL="0" indent="0" algn="l">
-              <a:lnSpc>
-                <a:spcPts val="2850"/>
-              </a:lnSpc>
-              <a:buNone/>
-            </a:pPr>
-            <a:r>
-              <a:rPr lang="en-US" sz="2400" b="1" dirty="0">
-                <a:latin typeface="Arial" panose="020B0604020202020204" pitchFamily="34" charset="0"/>
-                <a:ea typeface="Heebo" pitchFamily="34" charset="-122"/>
-                <a:cs typeface="Arial" panose="020B0604020202020204" pitchFamily="34" charset="0"/>
-              </a:rPr>
-              <a:t>Weaknesses:</a:t>
-            </a:r>
-          </a:p>
-          <a:p>
-            <a:pPr marL="285750" indent="-285750" algn="l">
-              <a:lnSpc>
-                <a:spcPts val="2850"/>
-              </a:lnSpc>
-              <a:buFont typeface="Arial" panose="020B0604020202020204" pitchFamily="34" charset="0"/>
-              <a:buChar char="•"/>
-            </a:pPr>
-            <a:r>
-              <a:rPr lang="en-US" dirty="0">
-                <a:latin typeface="Arial" panose="020B0604020202020204" pitchFamily="34" charset="0"/>
-                <a:ea typeface="Heebo" pitchFamily="34" charset="-122"/>
-                <a:cs typeface="Arial" panose="020B0604020202020204" pitchFamily="34" charset="0"/>
-              </a:rPr>
-              <a:t>4% chance of suboptimal convergence (1 outliers)</a:t>
-            </a:r>
-          </a:p>
-          <a:p>
-            <a:pPr marL="285750" indent="-285750" algn="l">
-              <a:lnSpc>
-                <a:spcPts val="2850"/>
-              </a:lnSpc>
-              <a:buFont typeface="Arial" panose="020B0604020202020204" pitchFamily="34" charset="0"/>
-              <a:buChar char="•"/>
-            </a:pPr>
-            <a:r>
-              <a:rPr lang="en-US" dirty="0">
-                <a:latin typeface="Arial" panose="020B0604020202020204" pitchFamily="34" charset="0"/>
-                <a:ea typeface="Heebo" pitchFamily="34" charset="-122"/>
-                <a:cs typeface="Arial" panose="020B0604020202020204" pitchFamily="34" charset="0"/>
-              </a:rPr>
-              <a:t>Optimality of the learned policy cannot be guaranteed</a:t>
-            </a:r>
-          </a:p>
-        </p:txBody>
-      </p:sp>
-      <p:sp>
-        <p:nvSpPr>
-          <p:cNvPr id="3" name="TextBox 2">
-            <a:extLst>
-              <a:ext uri="{FF2B5EF4-FFF2-40B4-BE49-F238E27FC236}">
-                <a16:creationId xmlns:a16="http://schemas.microsoft.com/office/drawing/2014/main" id="{F520DBB0-400F-6963-5E18-A67AA7D3E61D}"/>
-              </a:ext>
-            </a:extLst>
-          </p:cNvPr>
-          <p:cNvSpPr txBox="1"/>
-          <p:nvPr/>
-        </p:nvSpPr>
-        <p:spPr>
-          <a:xfrm>
-            <a:off x="1252800" y="634032"/>
-            <a:ext cx="8510400" cy="461665"/>
-          </a:xfrm>
-          <a:prstGeom prst="rect">
-            <a:avLst/>
-          </a:prstGeom>
-          <a:noFill/>
-        </p:spPr>
-        <p:txBody>
-          <a:bodyPr wrap="square" rtlCol="0">
-            <a:spAutoFit/>
-          </a:bodyPr>
-          <a:lstStyle/>
-          <a:p>
-            <a:r>
-              <a:rPr lang="en-US" sz="2400" b="1" i="0" dirty="0">
-                <a:effectLst/>
-                <a:latin typeface="Arial" panose="020B0604020202020204" pitchFamily="34" charset="0"/>
-                <a:cs typeface="Arial" panose="020B0604020202020204" pitchFamily="34" charset="0"/>
-              </a:rPr>
-              <a:t>Analysis of RL Battery Optimization Box Plot (32 Runs)</a:t>
-            </a:r>
-            <a:endParaRPr lang="de-DE" sz="2400" dirty="0">
-              <a:latin typeface="Arial" panose="020B0604020202020204" pitchFamily="34" charset="0"/>
-              <a:cs typeface="Arial" panose="020B0604020202020204" pitchFamily="34" charset="0"/>
-            </a:endParaRPr>
-          </a:p>
-        </p:txBody>
-      </p:sp>
-      <p:sp>
-        <p:nvSpPr>
-          <p:cNvPr id="4" name="TextBox 3">
-            <a:extLst>
-              <a:ext uri="{FF2B5EF4-FFF2-40B4-BE49-F238E27FC236}">
-                <a16:creationId xmlns:a16="http://schemas.microsoft.com/office/drawing/2014/main" id="{DC33ECBD-FB5C-26D7-0EBE-F0CD0278B8AA}"/>
-              </a:ext>
-            </a:extLst>
-          </p:cNvPr>
-          <p:cNvSpPr txBox="1"/>
-          <p:nvPr/>
-        </p:nvSpPr>
-        <p:spPr>
-          <a:xfrm>
-            <a:off x="1252800" y="1304257"/>
-            <a:ext cx="10021132" cy="923330"/>
-          </a:xfrm>
-          <a:prstGeom prst="rect">
-            <a:avLst/>
-          </a:prstGeom>
-          <a:noFill/>
-        </p:spPr>
-        <p:txBody>
-          <a:bodyPr wrap="square" rtlCol="0">
-            <a:spAutoFit/>
-          </a:bodyPr>
-          <a:lstStyle/>
-          <a:p>
-            <a:r>
-              <a:rPr lang="en-US" dirty="0"/>
-              <a:t>The linear learning rate schedule performs best because it achieves the lowest median cost and maintains a tight distribution across runs, indicating stable and reliable convergence. The linear decay allows large updates during early exploration and smaller updates for fine policy refinement later in training.</a:t>
-            </a:r>
-            <a:endParaRPr lang="de-DE" dirty="0"/>
-          </a:p>
-        </p:txBody>
-      </p:sp>
-      <p:sp>
-        <p:nvSpPr>
-          <p:cNvPr id="7" name="Slide Number Placeholder 6">
-            <a:extLst>
-              <a:ext uri="{FF2B5EF4-FFF2-40B4-BE49-F238E27FC236}">
-                <a16:creationId xmlns:a16="http://schemas.microsoft.com/office/drawing/2014/main" id="{CB67F05D-BF83-0E4E-252C-F73DCCA6881F}"/>
-              </a:ext>
-            </a:extLst>
-          </p:cNvPr>
-          <p:cNvSpPr>
-            <a:spLocks noGrp="1"/>
-          </p:cNvSpPr>
-          <p:nvPr>
-            <p:ph type="sldNum" sz="quarter" idx="10"/>
-          </p:nvPr>
-        </p:nvSpPr>
-        <p:spPr/>
-        <p:txBody>
-          <a:bodyPr/>
-          <a:lstStyle/>
-          <a:p>
-            <a:fld id="{A02D9A9C-251E-4686-914B-47E3F39F30D8}" type="slidenum">
-              <a:rPr lang="de-DE" smtClean="0"/>
-              <a:t>9</a:t>
-            </a:fld>
-            <a:endParaRPr lang="de-DE"/>
-          </a:p>
-        </p:txBody>
-      </p:sp>
-    </p:spTree>
-    <p:extLst>
-      <p:ext uri="{BB962C8B-B14F-4D97-AF65-F5344CB8AC3E}">
-        <p14:creationId xmlns:p14="http://schemas.microsoft.com/office/powerpoint/2010/main" val="3161864785"/>
       </p:ext>
     </p:extLst>
   </p:cSld>

--- a/Presentations/Thesis Update(first case)- 04-03-2026.pptx
+++ b/Presentations/Thesis Update(first case)- 04-03-2026.pptx
@@ -5,10 +5,10 @@
     <p:sldMasterId id="2147483648" r:id="rId1"/>
   </p:sldMasterIdLst>
   <p:notesMasterIdLst>
-    <p:notesMasterId r:id="rId23"/>
+    <p:notesMasterId r:id="rId28"/>
   </p:notesMasterIdLst>
   <p:handoutMasterIdLst>
-    <p:handoutMasterId r:id="rId24"/>
+    <p:handoutMasterId r:id="rId29"/>
   </p:handoutMasterIdLst>
   <p:sldIdLst>
     <p:sldId id="271" r:id="rId2"/>
@@ -17,28 +17,40 @@
     <p:sldId id="268" r:id="rId5"/>
     <p:sldId id="269" r:id="rId6"/>
     <p:sldId id="292" r:id="rId7"/>
-    <p:sldId id="270" r:id="rId8"/>
-    <p:sldId id="289" r:id="rId9"/>
-    <p:sldId id="264" r:id="rId10"/>
-    <p:sldId id="265" r:id="rId11"/>
-    <p:sldId id="274" r:id="rId12"/>
-    <p:sldId id="276" r:id="rId13"/>
-    <p:sldId id="293" r:id="rId14"/>
-    <p:sldId id="291" r:id="rId15"/>
-    <p:sldId id="275" r:id="rId16"/>
-    <p:sldId id="281" r:id="rId17"/>
-    <p:sldId id="280" r:id="rId18"/>
-    <p:sldId id="290" r:id="rId19"/>
-    <p:sldId id="279" r:id="rId20"/>
-    <p:sldId id="278" r:id="rId21"/>
-    <p:sldId id="267" r:id="rId22"/>
+    <p:sldId id="294" r:id="rId8"/>
+    <p:sldId id="270" r:id="rId9"/>
+    <p:sldId id="289" r:id="rId10"/>
+    <p:sldId id="264" r:id="rId11"/>
+    <p:sldId id="265" r:id="rId12"/>
+    <p:sldId id="274" r:id="rId13"/>
+    <p:sldId id="276" r:id="rId14"/>
+    <p:sldId id="295" r:id="rId15"/>
+    <p:sldId id="293" r:id="rId16"/>
+    <p:sldId id="297" r:id="rId17"/>
+    <p:sldId id="296" r:id="rId18"/>
+    <p:sldId id="298" r:id="rId19"/>
+    <p:sldId id="291" r:id="rId20"/>
+    <p:sldId id="275" r:id="rId21"/>
+    <p:sldId id="281" r:id="rId22"/>
+    <p:sldId id="280" r:id="rId23"/>
+    <p:sldId id="290" r:id="rId24"/>
+    <p:sldId id="279" r:id="rId25"/>
+    <p:sldId id="278" r:id="rId26"/>
+    <p:sldId id="267" r:id="rId27"/>
   </p:sldIdLst>
   <p:sldSz cx="14630400" cy="8229600"/>
   <p:notesSz cx="8229600" cy="14630400"/>
   <p:embeddedFontLst>
     <p:embeddedFont>
       <p:font typeface="Cambria Math" panose="02040503050406030204" pitchFamily="18" charset="0"/>
-      <p:regular r:id="rId25"/>
+      <p:regular r:id="rId30"/>
+    </p:embeddedFont>
+    <p:embeddedFont>
+      <p:font typeface="Consolas" panose="020B0609020204030204" pitchFamily="49" charset="0"/>
+      <p:regular r:id="rId31"/>
+      <p:bold r:id="rId32"/>
+      <p:italic r:id="rId33"/>
+      <p:boldItalic r:id="rId34"/>
     </p:embeddedFont>
   </p:embeddedFontLst>
   <p:defaultTextStyle>
@@ -238,7 +250,7 @@
           <a:p>
             <a:fld id="{B11A94B5-C042-41C2-9501-1FF964BA33BC}" type="datetimeFigureOut">
               <a:rPr lang="de-DE" smtClean="0"/>
-              <a:t>01.06.2026</a:t>
+              <a:t>24.06.2026</a:t>
             </a:fld>
             <a:endParaRPr lang="de-DE"/>
           </a:p>
@@ -1690,219 +1702,10 @@
       </p:grpSpPr>
       <p:sp>
         <p:nvSpPr>
-          <p:cNvPr id="5" name="Shape 4">
-            <a:extLst>
-              <a:ext uri="{FF2B5EF4-FFF2-40B4-BE49-F238E27FC236}">
-                <a16:creationId xmlns:a16="http://schemas.microsoft.com/office/drawing/2014/main" id="{01E4604A-A2F2-75F3-0A53-CA6CEEF5588D}"/>
-              </a:ext>
-            </a:extLst>
-          </p:cNvPr>
-          <p:cNvSpPr/>
-          <p:nvPr/>
-        </p:nvSpPr>
-        <p:spPr>
-          <a:xfrm>
-            <a:off x="1252800" y="2697493"/>
-            <a:ext cx="6608494" cy="3522054"/>
-          </a:xfrm>
-          <a:prstGeom prst="roundRect">
-            <a:avLst>
-              <a:gd name="adj" fmla="val 4335"/>
-            </a:avLst>
-          </a:prstGeom>
-          <a:solidFill>
-            <a:srgbClr val="D2DDF9"/>
-          </a:solidFill>
-          <a:ln/>
-        </p:spPr>
-        <p:txBody>
-          <a:bodyPr/>
-          <a:lstStyle/>
-          <a:p>
-            <a:endParaRPr lang="de-DE">
-              <a:latin typeface="Arial" panose="020B0604020202020204" pitchFamily="34" charset="0"/>
-              <a:cs typeface="Arial" panose="020B0604020202020204" pitchFamily="34" charset="0"/>
-            </a:endParaRPr>
-          </a:p>
-        </p:txBody>
-      </p:sp>
-      <p:sp>
-        <p:nvSpPr>
-          <p:cNvPr id="2" name="Text 1">
-            <a:extLst>
-              <a:ext uri="{FF2B5EF4-FFF2-40B4-BE49-F238E27FC236}">
-                <a16:creationId xmlns:a16="http://schemas.microsoft.com/office/drawing/2014/main" id="{C62DF92F-1163-B150-A05D-661A035DACD9}"/>
-              </a:ext>
-            </a:extLst>
-          </p:cNvPr>
-          <p:cNvSpPr/>
-          <p:nvPr/>
-        </p:nvSpPr>
-        <p:spPr>
-          <a:xfrm>
-            <a:off x="1483201" y="2600711"/>
-            <a:ext cx="6127200" cy="3715618"/>
-          </a:xfrm>
-          <a:prstGeom prst="rect">
-            <a:avLst/>
-          </a:prstGeom>
-          <a:noFill/>
-          <a:ln/>
-        </p:spPr>
-        <p:txBody>
-          <a:bodyPr wrap="none" lIns="0" tIns="0" rIns="0" bIns="0" rtlCol="0" anchor="t"/>
-          <a:lstStyle/>
-          <a:p>
-            <a:pPr marL="0" indent="0" algn="l">
-              <a:lnSpc>
-                <a:spcPts val="2850"/>
-              </a:lnSpc>
-              <a:buNone/>
-            </a:pPr>
-            <a:endParaRPr lang="en-US" sz="1750" dirty="0">
-              <a:latin typeface="Arial" panose="020B0604020202020204" pitchFamily="34" charset="0"/>
-              <a:ea typeface="Heebo" pitchFamily="34" charset="-122"/>
-              <a:cs typeface="Arial" panose="020B0604020202020204" pitchFamily="34" charset="0"/>
-            </a:endParaRPr>
-          </a:p>
-          <a:p>
-            <a:pPr marL="0" indent="0" algn="l">
-              <a:lnSpc>
-                <a:spcPts val="2850"/>
-              </a:lnSpc>
-              <a:buNone/>
-            </a:pPr>
-            <a:r>
-              <a:rPr lang="en-US" sz="2400" b="1" dirty="0">
-                <a:latin typeface="Arial" panose="020B0604020202020204" pitchFamily="34" charset="0"/>
-                <a:ea typeface="Heebo" pitchFamily="34" charset="-122"/>
-                <a:cs typeface="Arial" panose="020B0604020202020204" pitchFamily="34" charset="0"/>
-              </a:rPr>
-              <a:t>Strengths:</a:t>
-            </a:r>
-          </a:p>
-          <a:p>
-            <a:pPr marL="285750" indent="-285750" algn="l">
-              <a:lnSpc>
-                <a:spcPts val="2850"/>
-              </a:lnSpc>
-              <a:buFont typeface="Arial" panose="020B0604020202020204" pitchFamily="34" charset="0"/>
-              <a:buChar char="•"/>
-            </a:pPr>
-            <a:r>
-              <a:rPr lang="en-US" dirty="0">
-                <a:latin typeface="Arial" panose="020B0604020202020204" pitchFamily="34" charset="0"/>
-                <a:ea typeface="Heebo" pitchFamily="34" charset="-122"/>
-                <a:cs typeface="Arial" panose="020B0604020202020204" pitchFamily="34" charset="0"/>
-              </a:rPr>
-              <a:t>31/32 runs (96%) achieved near-optimal performance</a:t>
-            </a:r>
-          </a:p>
-          <a:p>
-            <a:pPr marL="285750" indent="-285750" algn="l">
-              <a:lnSpc>
-                <a:spcPts val="2850"/>
-              </a:lnSpc>
-              <a:buFont typeface="Arial" panose="020B0604020202020204" pitchFamily="34" charset="0"/>
-              <a:buChar char="•"/>
-            </a:pPr>
-            <a:r>
-              <a:rPr lang="en-US" dirty="0">
-                <a:latin typeface="Arial" panose="020B0604020202020204" pitchFamily="34" charset="0"/>
-                <a:ea typeface="Heebo" pitchFamily="34" charset="-122"/>
-                <a:cs typeface="Arial" panose="020B0604020202020204" pitchFamily="34" charset="0"/>
-              </a:rPr>
-              <a:t>Stable and consistent learning behavior</a:t>
-            </a:r>
-          </a:p>
-          <a:p>
-            <a:pPr marL="285750" indent="-285750" algn="l">
-              <a:lnSpc>
-                <a:spcPts val="2850"/>
-              </a:lnSpc>
-              <a:buFont typeface="Arial" panose="020B0604020202020204" pitchFamily="34" charset="0"/>
-              <a:buChar char="•"/>
-            </a:pPr>
-            <a:r>
-              <a:rPr lang="en-US" dirty="0">
-                <a:latin typeface="Arial" panose="020B0604020202020204" pitchFamily="34" charset="0"/>
-                <a:ea typeface="Heebo" pitchFamily="34" charset="-122"/>
-                <a:cs typeface="Arial" panose="020B0604020202020204" pitchFamily="34" charset="0"/>
-              </a:rPr>
-              <a:t>Model is robust to random initialization</a:t>
-            </a:r>
-          </a:p>
-          <a:p>
-            <a:pPr marL="0" indent="0" algn="l">
-              <a:lnSpc>
-                <a:spcPts val="2850"/>
-              </a:lnSpc>
-              <a:buNone/>
-            </a:pPr>
-            <a:endParaRPr lang="en-US" sz="1750" dirty="0">
-              <a:latin typeface="Arial" panose="020B0604020202020204" pitchFamily="34" charset="0"/>
-              <a:ea typeface="Heebo" pitchFamily="34" charset="-122"/>
-              <a:cs typeface="Arial" panose="020B0604020202020204" pitchFamily="34" charset="0"/>
-            </a:endParaRPr>
-          </a:p>
-          <a:p>
-            <a:pPr marL="0" indent="0" algn="l">
-              <a:lnSpc>
-                <a:spcPts val="2850"/>
-              </a:lnSpc>
-              <a:buNone/>
-            </a:pPr>
-            <a:r>
-              <a:rPr lang="en-US" sz="2400" b="1" dirty="0">
-                <a:latin typeface="Arial" panose="020B0604020202020204" pitchFamily="34" charset="0"/>
-                <a:ea typeface="Heebo" pitchFamily="34" charset="-122"/>
-                <a:cs typeface="Arial" panose="020B0604020202020204" pitchFamily="34" charset="0"/>
-              </a:rPr>
-              <a:t>Weaknesses:</a:t>
-            </a:r>
-          </a:p>
-          <a:p>
-            <a:pPr marL="285750" indent="-285750" algn="l">
-              <a:lnSpc>
-                <a:spcPts val="2850"/>
-              </a:lnSpc>
-              <a:buFont typeface="Arial" panose="020B0604020202020204" pitchFamily="34" charset="0"/>
-              <a:buChar char="•"/>
-            </a:pPr>
-            <a:r>
-              <a:rPr lang="en-US" dirty="0">
-                <a:latin typeface="Arial" panose="020B0604020202020204" pitchFamily="34" charset="0"/>
-                <a:ea typeface="Heebo" pitchFamily="34" charset="-122"/>
-                <a:cs typeface="Arial" panose="020B0604020202020204" pitchFamily="34" charset="0"/>
-              </a:rPr>
-              <a:t>4% chance of suboptimal convergence (1 outliers)</a:t>
-            </a:r>
-          </a:p>
-          <a:p>
-            <a:pPr marL="285750" indent="-285750" algn="l">
-              <a:lnSpc>
-                <a:spcPts val="2850"/>
-              </a:lnSpc>
-              <a:buFont typeface="Arial" panose="020B0604020202020204" pitchFamily="34" charset="0"/>
-              <a:buChar char="•"/>
-            </a:pPr>
-            <a:r>
-              <a:rPr lang="en-US" dirty="0">
-                <a:latin typeface="Arial" panose="020B0604020202020204" pitchFamily="34" charset="0"/>
-                <a:ea typeface="Heebo" pitchFamily="34" charset="-122"/>
-                <a:cs typeface="Arial" panose="020B0604020202020204" pitchFamily="34" charset="0"/>
-              </a:rPr>
-              <a:t>Optimality of the learned policy cannot be guaranteed</a:t>
-            </a:r>
-          </a:p>
-        </p:txBody>
-      </p:sp>
-      <p:sp>
-        <p:nvSpPr>
-          <p:cNvPr id="3" name="TextBox 2">
-            <a:extLst>
-              <a:ext uri="{FF2B5EF4-FFF2-40B4-BE49-F238E27FC236}">
-                <a16:creationId xmlns:a16="http://schemas.microsoft.com/office/drawing/2014/main" id="{F520DBB0-400F-6963-5E18-A67AA7D3E61D}"/>
+          <p:cNvPr id="5" name="TextBox 4">
+            <a:extLst>
+              <a:ext uri="{FF2B5EF4-FFF2-40B4-BE49-F238E27FC236}">
+                <a16:creationId xmlns:a16="http://schemas.microsoft.com/office/drawing/2014/main" id="{CF4E0541-4C20-369B-A2DC-C7A49F11D4EB}"/>
               </a:ext>
             </a:extLst>
           </p:cNvPr>
@@ -1945,7 +1748,7 @@
           <p:cNvPr id="4" name="TextBox 3">
             <a:extLst>
               <a:ext uri="{FF2B5EF4-FFF2-40B4-BE49-F238E27FC236}">
-                <a16:creationId xmlns:a16="http://schemas.microsoft.com/office/drawing/2014/main" id="{DC33ECBD-FB5C-26D7-0EBE-F0CD0278B8AA}"/>
+                <a16:creationId xmlns:a16="http://schemas.microsoft.com/office/drawing/2014/main" id="{F5CDAD08-B60C-704E-5A81-EB6F890CE8F3}"/>
               </a:ext>
             </a:extLst>
           </p:cNvPr>
@@ -1954,8 +1757,8 @@
         </p:nvSpPr>
         <p:spPr>
           <a:xfrm>
-            <a:off x="1252800" y="1304257"/>
-            <a:ext cx="10021132" cy="923330"/>
+            <a:off x="5162400" y="6889200"/>
+            <a:ext cx="4795200" cy="923330"/>
           </a:xfrm>
           <a:prstGeom prst="rect">
             <a:avLst/>
@@ -1970,18 +1773,76 @@
           <a:p>
             <a:r>
               <a:rPr lang="en-US" dirty="0"/>
-              <a:t>The linear learning rate schedule performs best because it achieves the lowest median cost and maintains a tight distribution across runs, indicating stable and reliable convergence. The linear decay allows large updates during early exploration and smaller updates for fine policy refinement later in training.</a:t>
-            </a:r>
-            <a:endParaRPr lang="de-DE" dirty="0"/>
+              <a:t>Fig.: Distribution of total cost from 32 RL models trained with identical hyperparameters and evaluated over the same time horizon.</a:t>
+            </a:r>
           </a:p>
         </p:txBody>
       </p:sp>
       <p:sp>
         <p:nvSpPr>
-          <p:cNvPr id="7" name="Slide Number Placeholder 6">
-            <a:extLst>
-              <a:ext uri="{FF2B5EF4-FFF2-40B4-BE49-F238E27FC236}">
-                <a16:creationId xmlns:a16="http://schemas.microsoft.com/office/drawing/2014/main" id="{CB67F05D-BF83-0E4E-252C-F73DCCA6881F}"/>
+          <p:cNvPr id="6" name="TextBox 5">
+            <a:extLst>
+              <a:ext uri="{FF2B5EF4-FFF2-40B4-BE49-F238E27FC236}">
+                <a16:creationId xmlns:a16="http://schemas.microsoft.com/office/drawing/2014/main" id="{6A508730-589C-B759-C491-7E80F65C4E93}"/>
+              </a:ext>
+            </a:extLst>
+          </p:cNvPr>
+          <p:cNvSpPr txBox="1"/>
+          <p:nvPr/>
+        </p:nvSpPr>
+        <p:spPr>
+          <a:xfrm>
+            <a:off x="10749600" y="7365976"/>
+            <a:ext cx="3910944" cy="338554"/>
+          </a:xfrm>
+          <a:prstGeom prst="rect">
+            <a:avLst/>
+          </a:prstGeom>
+          <a:noFill/>
+        </p:spPr>
+        <p:txBody>
+          <a:bodyPr wrap="square" rtlCol="0">
+            <a:spAutoFit/>
+          </a:bodyPr>
+          <a:lstStyle/>
+          <a:p>
+            <a:r>
+              <a:rPr lang="de-DE" sz="1600" dirty="0"/>
+              <a:t>* </a:t>
+            </a:r>
+            <a:r>
+              <a:rPr lang="de-DE" sz="1600" dirty="0" err="1"/>
+              <a:t>Mathematical</a:t>
+            </a:r>
+            <a:r>
+              <a:rPr lang="de-DE" sz="1600" dirty="0"/>
+              <a:t> </a:t>
+            </a:r>
+            <a:r>
+              <a:rPr lang="de-DE" sz="1600" dirty="0" err="1"/>
+              <a:t>Optimization</a:t>
+            </a:r>
+            <a:r>
+              <a:rPr lang="de-DE" sz="1600" dirty="0"/>
+              <a:t> </a:t>
+            </a:r>
+            <a:r>
+              <a:rPr lang="de-DE" sz="1600" dirty="0" err="1"/>
+              <a:t>Cost</a:t>
+            </a:r>
+            <a:r>
+              <a:rPr lang="de-DE" sz="1600" dirty="0"/>
+              <a:t>:  -10.12 €</a:t>
+            </a:r>
+          </a:p>
+        </p:txBody>
+      </p:sp>
+      <p:sp>
+        <p:nvSpPr>
+          <p:cNvPr id="8" name="Slide Number Placeholder 7">
+            <a:extLst>
+              <a:ext uri="{FF2B5EF4-FFF2-40B4-BE49-F238E27FC236}">
+                <a16:creationId xmlns:a16="http://schemas.microsoft.com/office/drawing/2014/main" id="{3679400A-F841-24FE-6153-DB33CCB19068}"/>
               </a:ext>
             </a:extLst>
           </p:cNvPr>
@@ -2005,10 +1866,40 @@
           </a:p>
         </p:txBody>
       </p:sp>
+      <p:pic>
+        <p:nvPicPr>
+          <p:cNvPr id="10" name="Picture 9">
+            <a:extLst>
+              <a:ext uri="{FF2B5EF4-FFF2-40B4-BE49-F238E27FC236}">
+                <a16:creationId xmlns:a16="http://schemas.microsoft.com/office/drawing/2014/main" id="{045EC1E4-49CC-0CCB-76AF-2C2FE37C2263}"/>
+              </a:ext>
+            </a:extLst>
+          </p:cNvPr>
+          <p:cNvPicPr>
+            <a:picLocks noChangeAspect="1"/>
+          </p:cNvPicPr>
+          <p:nvPr/>
+        </p:nvPicPr>
+        <p:blipFill>
+          <a:blip r:embed="rId2"/>
+          <a:stretch>
+            <a:fillRect/>
+          </a:stretch>
+        </p:blipFill>
+        <p:spPr>
+          <a:xfrm>
+            <a:off x="2908080" y="1419685"/>
+            <a:ext cx="7546320" cy="5390229"/>
+          </a:xfrm>
+          <a:prstGeom prst="rect">
+            <a:avLst/>
+          </a:prstGeom>
+        </p:spPr>
+      </p:pic>
     </p:spTree>
     <p:extLst>
       <p:ext uri="{BB962C8B-B14F-4D97-AF65-F5344CB8AC3E}">
-        <p14:creationId xmlns:p14="http://schemas.microsoft.com/office/powerpoint/2010/main" val="3161864785"/>
+        <p14:creationId xmlns:p14="http://schemas.microsoft.com/office/powerpoint/2010/main" val="444764384"/>
       </p:ext>
     </p:extLst>
   </p:cSld>
@@ -2035,41 +1926,221 @@
           <a:chExt cx="0" cy="0"/>
         </a:xfrm>
       </p:grpSpPr>
-      <p:pic>
-        <p:nvPicPr>
-          <p:cNvPr id="3" name="Picture 2">
-            <a:extLst>
-              <a:ext uri="{FF2B5EF4-FFF2-40B4-BE49-F238E27FC236}">
-                <a16:creationId xmlns:a16="http://schemas.microsoft.com/office/drawing/2014/main" id="{1FD72380-5DF0-D67E-173E-3C446309BDC0}"/>
-              </a:ext>
-            </a:extLst>
-          </p:cNvPr>
-          <p:cNvPicPr>
-            <a:picLocks noChangeAspect="1"/>
-          </p:cNvPicPr>
+      <p:sp>
+        <p:nvSpPr>
+          <p:cNvPr id="5" name="Shape 4">
+            <a:extLst>
+              <a:ext uri="{FF2B5EF4-FFF2-40B4-BE49-F238E27FC236}">
+                <a16:creationId xmlns:a16="http://schemas.microsoft.com/office/drawing/2014/main" id="{01E4604A-A2F2-75F3-0A53-CA6CEEF5588D}"/>
+              </a:ext>
+            </a:extLst>
+          </p:cNvPr>
+          <p:cNvSpPr/>
           <p:nvPr/>
-        </p:nvPicPr>
-        <p:blipFill>
-          <a:blip r:embed="rId2"/>
-          <a:srcRect l="491" t="2158" r="606" b="1248"/>
-          <a:stretch/>
-        </p:blipFill>
+        </p:nvSpPr>
         <p:spPr>
           <a:xfrm>
-            <a:off x="1152000" y="2342304"/>
-            <a:ext cx="12326400" cy="3544991"/>
+            <a:off x="1252800" y="2697493"/>
+            <a:ext cx="6608494" cy="3522054"/>
+          </a:xfrm>
+          <a:prstGeom prst="roundRect">
+            <a:avLst>
+              <a:gd name="adj" fmla="val 4335"/>
+            </a:avLst>
+          </a:prstGeom>
+          <a:solidFill>
+            <a:srgbClr val="D2DDF9"/>
+          </a:solidFill>
+          <a:ln/>
+        </p:spPr>
+        <p:txBody>
+          <a:bodyPr/>
+          <a:lstStyle/>
+          <a:p>
+            <a:endParaRPr lang="de-DE">
+              <a:latin typeface="Arial" panose="020B0604020202020204" pitchFamily="34" charset="0"/>
+              <a:cs typeface="Arial" panose="020B0604020202020204" pitchFamily="34" charset="0"/>
+            </a:endParaRPr>
+          </a:p>
+        </p:txBody>
+      </p:sp>
+      <p:sp>
+        <p:nvSpPr>
+          <p:cNvPr id="2" name="Text 1">
+            <a:extLst>
+              <a:ext uri="{FF2B5EF4-FFF2-40B4-BE49-F238E27FC236}">
+                <a16:creationId xmlns:a16="http://schemas.microsoft.com/office/drawing/2014/main" id="{C62DF92F-1163-B150-A05D-661A035DACD9}"/>
+              </a:ext>
+            </a:extLst>
+          </p:cNvPr>
+          <p:cNvSpPr/>
+          <p:nvPr/>
+        </p:nvSpPr>
+        <p:spPr>
+          <a:xfrm>
+            <a:off x="1483201" y="2600711"/>
+            <a:ext cx="6127200" cy="3715618"/>
           </a:xfrm>
           <a:prstGeom prst="rect">
             <a:avLst/>
           </a:prstGeom>
+          <a:noFill/>
+          <a:ln/>
         </p:spPr>
-      </p:pic>
+        <p:txBody>
+          <a:bodyPr wrap="none" lIns="0" tIns="0" rIns="0" bIns="0" rtlCol="0" anchor="t"/>
+          <a:lstStyle/>
+          <a:p>
+            <a:pPr marL="0" indent="0" algn="l">
+              <a:lnSpc>
+                <a:spcPts val="2850"/>
+              </a:lnSpc>
+              <a:buNone/>
+            </a:pPr>
+            <a:endParaRPr lang="en-US" sz="1750" dirty="0">
+              <a:latin typeface="Arial" panose="020B0604020202020204" pitchFamily="34" charset="0"/>
+              <a:ea typeface="Heebo" pitchFamily="34" charset="-122"/>
+              <a:cs typeface="Arial" panose="020B0604020202020204" pitchFamily="34" charset="0"/>
+            </a:endParaRPr>
+          </a:p>
+          <a:p>
+            <a:pPr marL="0" indent="0" algn="l">
+              <a:lnSpc>
+                <a:spcPts val="2850"/>
+              </a:lnSpc>
+              <a:buNone/>
+            </a:pPr>
+            <a:r>
+              <a:rPr lang="en-US" sz="2400" b="1" dirty="0">
+                <a:latin typeface="Arial" panose="020B0604020202020204" pitchFamily="34" charset="0"/>
+                <a:ea typeface="Heebo" pitchFamily="34" charset="-122"/>
+                <a:cs typeface="Arial" panose="020B0604020202020204" pitchFamily="34" charset="0"/>
+              </a:rPr>
+              <a:t>Strengths:</a:t>
+            </a:r>
+          </a:p>
+          <a:p>
+            <a:pPr marL="285750" indent="-285750" algn="l">
+              <a:lnSpc>
+                <a:spcPts val="2850"/>
+              </a:lnSpc>
+              <a:buFont typeface="Arial" panose="020B0604020202020204" pitchFamily="34" charset="0"/>
+              <a:buChar char="•"/>
+            </a:pPr>
+            <a:r>
+              <a:rPr lang="en-US" dirty="0">
+                <a:latin typeface="Arial" panose="020B0604020202020204" pitchFamily="34" charset="0"/>
+                <a:ea typeface="Heebo" pitchFamily="34" charset="-122"/>
+                <a:cs typeface="Arial" panose="020B0604020202020204" pitchFamily="34" charset="0"/>
+              </a:rPr>
+              <a:t>31/32 runs (96%) achieved near-optimal performance</a:t>
+            </a:r>
+          </a:p>
+          <a:p>
+            <a:pPr marL="285750" indent="-285750" algn="l">
+              <a:lnSpc>
+                <a:spcPts val="2850"/>
+              </a:lnSpc>
+              <a:buFont typeface="Arial" panose="020B0604020202020204" pitchFamily="34" charset="0"/>
+              <a:buChar char="•"/>
+            </a:pPr>
+            <a:r>
+              <a:rPr lang="en-US" dirty="0">
+                <a:latin typeface="Arial" panose="020B0604020202020204" pitchFamily="34" charset="0"/>
+                <a:ea typeface="Heebo" pitchFamily="34" charset="-122"/>
+                <a:cs typeface="Arial" panose="020B0604020202020204" pitchFamily="34" charset="0"/>
+              </a:rPr>
+              <a:t>Stable and consistent learning behavior</a:t>
+            </a:r>
+          </a:p>
+          <a:p>
+            <a:pPr marL="285750" indent="-285750" algn="l">
+              <a:lnSpc>
+                <a:spcPts val="2850"/>
+              </a:lnSpc>
+              <a:buFont typeface="Arial" panose="020B0604020202020204" pitchFamily="34" charset="0"/>
+              <a:buChar char="•"/>
+            </a:pPr>
+            <a:r>
+              <a:rPr lang="en-US" dirty="0">
+                <a:latin typeface="Arial" panose="020B0604020202020204" pitchFamily="34" charset="0"/>
+                <a:ea typeface="Heebo" pitchFamily="34" charset="-122"/>
+                <a:cs typeface="Arial" panose="020B0604020202020204" pitchFamily="34" charset="0"/>
+              </a:rPr>
+              <a:t>Model is robust to random initialization</a:t>
+            </a:r>
+          </a:p>
+          <a:p>
+            <a:pPr marL="0" indent="0" algn="l">
+              <a:lnSpc>
+                <a:spcPts val="2850"/>
+              </a:lnSpc>
+              <a:buNone/>
+            </a:pPr>
+            <a:endParaRPr lang="en-US" sz="1750" dirty="0">
+              <a:latin typeface="Arial" panose="020B0604020202020204" pitchFamily="34" charset="0"/>
+              <a:ea typeface="Heebo" pitchFamily="34" charset="-122"/>
+              <a:cs typeface="Arial" panose="020B0604020202020204" pitchFamily="34" charset="0"/>
+            </a:endParaRPr>
+          </a:p>
+          <a:p>
+            <a:pPr marL="0" indent="0" algn="l">
+              <a:lnSpc>
+                <a:spcPts val="2850"/>
+              </a:lnSpc>
+              <a:buNone/>
+            </a:pPr>
+            <a:r>
+              <a:rPr lang="en-US" sz="2400" b="1" dirty="0">
+                <a:latin typeface="Arial" panose="020B0604020202020204" pitchFamily="34" charset="0"/>
+                <a:ea typeface="Heebo" pitchFamily="34" charset="-122"/>
+                <a:cs typeface="Arial" panose="020B0604020202020204" pitchFamily="34" charset="0"/>
+              </a:rPr>
+              <a:t>Weaknesses:</a:t>
+            </a:r>
+          </a:p>
+          <a:p>
+            <a:pPr marL="285750" indent="-285750" algn="l">
+              <a:lnSpc>
+                <a:spcPts val="2850"/>
+              </a:lnSpc>
+              <a:buFont typeface="Arial" panose="020B0604020202020204" pitchFamily="34" charset="0"/>
+              <a:buChar char="•"/>
+            </a:pPr>
+            <a:r>
+              <a:rPr lang="en-US" dirty="0">
+                <a:latin typeface="Arial" panose="020B0604020202020204" pitchFamily="34" charset="0"/>
+                <a:ea typeface="Heebo" pitchFamily="34" charset="-122"/>
+                <a:cs typeface="Arial" panose="020B0604020202020204" pitchFamily="34" charset="0"/>
+              </a:rPr>
+              <a:t>4% chance of suboptimal convergence (1 outliers)</a:t>
+            </a:r>
+          </a:p>
+          <a:p>
+            <a:pPr marL="285750" indent="-285750" algn="l">
+              <a:lnSpc>
+                <a:spcPts val="2850"/>
+              </a:lnSpc>
+              <a:buFont typeface="Arial" panose="020B0604020202020204" pitchFamily="34" charset="0"/>
+              <a:buChar char="•"/>
+            </a:pPr>
+            <a:r>
+              <a:rPr lang="en-US" dirty="0">
+                <a:latin typeface="Arial" panose="020B0604020202020204" pitchFamily="34" charset="0"/>
+                <a:ea typeface="Heebo" pitchFamily="34" charset="-122"/>
+                <a:cs typeface="Arial" panose="020B0604020202020204" pitchFamily="34" charset="0"/>
+              </a:rPr>
+              <a:t>Optimality of the learned policy cannot be guaranteed</a:t>
+            </a:r>
+          </a:p>
+        </p:txBody>
+      </p:sp>
       <p:sp>
         <p:nvSpPr>
-          <p:cNvPr id="4" name="TextBox 3">
-            <a:extLst>
-              <a:ext uri="{FF2B5EF4-FFF2-40B4-BE49-F238E27FC236}">
-                <a16:creationId xmlns:a16="http://schemas.microsoft.com/office/drawing/2014/main" id="{81B785F4-E247-BA39-4A4D-8D2C841D2BCB}"/>
+          <p:cNvPr id="3" name="TextBox 2">
+            <a:extLst>
+              <a:ext uri="{FF2B5EF4-FFF2-40B4-BE49-F238E27FC236}">
+                <a16:creationId xmlns:a16="http://schemas.microsoft.com/office/drawing/2014/main" id="{F520DBB0-400F-6963-5E18-A67AA7D3E61D}"/>
               </a:ext>
             </a:extLst>
           </p:cNvPr>
@@ -2079,7 +2150,7 @@
         <p:spPr>
           <a:xfrm>
             <a:off x="1252800" y="634032"/>
-            <a:ext cx="9223200" cy="461665"/>
+            <a:ext cx="8510400" cy="461665"/>
           </a:xfrm>
           <a:prstGeom prst="rect">
             <a:avLst/>
@@ -2098,7 +2169,7 @@
                 <a:latin typeface="Arial" panose="020B0604020202020204" pitchFamily="34" charset="0"/>
                 <a:cs typeface="Arial" panose="020B0604020202020204" pitchFamily="34" charset="0"/>
               </a:rPr>
-              <a:t>Hyperparameter Tuning: Training Performance Comparison</a:t>
+              <a:t>Analysis of RL Battery Optimization Box Plot (32 Runs)</a:t>
             </a:r>
             <a:endParaRPr lang="de-DE" sz="2400" dirty="0">
               <a:latin typeface="Arial" panose="020B0604020202020204" pitchFamily="34" charset="0"/>
@@ -2109,10 +2180,10 @@
       </p:sp>
       <p:sp>
         <p:nvSpPr>
-          <p:cNvPr id="5" name="TextBox 4">
-            <a:extLst>
-              <a:ext uri="{FF2B5EF4-FFF2-40B4-BE49-F238E27FC236}">
-                <a16:creationId xmlns:a16="http://schemas.microsoft.com/office/drawing/2014/main" id="{A65A4DB6-10C0-3314-0EEE-EABDD99CE04E}"/>
+          <p:cNvPr id="4" name="TextBox 3">
+            <a:extLst>
+              <a:ext uri="{FF2B5EF4-FFF2-40B4-BE49-F238E27FC236}">
+                <a16:creationId xmlns:a16="http://schemas.microsoft.com/office/drawing/2014/main" id="{DC33ECBD-FB5C-26D7-0EBE-F0CD0278B8AA}"/>
               </a:ext>
             </a:extLst>
           </p:cNvPr>
@@ -2121,8 +2192,8 @@
         </p:nvSpPr>
         <p:spPr>
           <a:xfrm>
-            <a:off x="2413153" y="6029414"/>
-            <a:ext cx="9804094" cy="338554"/>
+            <a:off x="1252800" y="1304257"/>
+            <a:ext cx="10021132" cy="923330"/>
           </a:xfrm>
           <a:prstGeom prst="rect">
             <a:avLst/>
@@ -2130,16 +2201,16 @@
           <a:noFill/>
         </p:spPr>
         <p:txBody>
-          <a:bodyPr wrap="none" rtlCol="0">
+          <a:bodyPr wrap="square" rtlCol="0">
             <a:spAutoFit/>
           </a:bodyPr>
           <a:lstStyle/>
           <a:p>
             <a:r>
-              <a:rPr lang="en-US" sz="1600" dirty="0"/>
-              <a:t>Fig: Comparison of episode rewards across multiple SAC training runs with different hyperparameter configurations.</a:t>
-            </a:r>
-            <a:endParaRPr lang="de-DE" sz="1600" dirty="0"/>
+              <a:rPr lang="en-US" dirty="0"/>
+              <a:t>The linear learning rate schedule performs best because it achieves the lowest median cost and maintains a tight distribution across runs, indicating stable and reliable convergence. The linear decay allows large updates during early exploration and smaller updates for fine policy refinement later in training.</a:t>
+            </a:r>
+            <a:endParaRPr lang="de-DE" dirty="0"/>
           </a:p>
         </p:txBody>
       </p:sp>
@@ -2148,7 +2219,7 @@
           <p:cNvPr id="7" name="Slide Number Placeholder 6">
             <a:extLst>
               <a:ext uri="{FF2B5EF4-FFF2-40B4-BE49-F238E27FC236}">
-                <a16:creationId xmlns:a16="http://schemas.microsoft.com/office/drawing/2014/main" id="{EC754541-8172-F8AB-3ABD-29361CB9F933}"/>
+                <a16:creationId xmlns:a16="http://schemas.microsoft.com/office/drawing/2014/main" id="{CB67F05D-BF83-0E4E-252C-F73DCCA6881F}"/>
               </a:ext>
             </a:extLst>
           </p:cNvPr>
@@ -2175,7 +2246,7 @@
     </p:spTree>
     <p:extLst>
       <p:ext uri="{BB962C8B-B14F-4D97-AF65-F5344CB8AC3E}">
-        <p14:creationId xmlns:p14="http://schemas.microsoft.com/office/powerpoint/2010/main" val="143437196"/>
+        <p14:creationId xmlns:p14="http://schemas.microsoft.com/office/powerpoint/2010/main" val="3161864785"/>
       </p:ext>
     </p:extLst>
   </p:cSld>
@@ -2202,6 +2273,173 @@
           <a:chExt cx="0" cy="0"/>
         </a:xfrm>
       </p:grpSpPr>
+      <p:pic>
+        <p:nvPicPr>
+          <p:cNvPr id="3" name="Picture 2">
+            <a:extLst>
+              <a:ext uri="{FF2B5EF4-FFF2-40B4-BE49-F238E27FC236}">
+                <a16:creationId xmlns:a16="http://schemas.microsoft.com/office/drawing/2014/main" id="{1FD72380-5DF0-D67E-173E-3C446309BDC0}"/>
+              </a:ext>
+            </a:extLst>
+          </p:cNvPr>
+          <p:cNvPicPr>
+            <a:picLocks noChangeAspect="1"/>
+          </p:cNvPicPr>
+          <p:nvPr/>
+        </p:nvPicPr>
+        <p:blipFill>
+          <a:blip r:embed="rId2"/>
+          <a:srcRect l="491" t="2158" r="606" b="1248"/>
+          <a:stretch/>
+        </p:blipFill>
+        <p:spPr>
+          <a:xfrm>
+            <a:off x="1152000" y="2342304"/>
+            <a:ext cx="12326400" cy="3544991"/>
+          </a:xfrm>
+          <a:prstGeom prst="rect">
+            <a:avLst/>
+          </a:prstGeom>
+        </p:spPr>
+      </p:pic>
+      <p:sp>
+        <p:nvSpPr>
+          <p:cNvPr id="4" name="TextBox 3">
+            <a:extLst>
+              <a:ext uri="{FF2B5EF4-FFF2-40B4-BE49-F238E27FC236}">
+                <a16:creationId xmlns:a16="http://schemas.microsoft.com/office/drawing/2014/main" id="{81B785F4-E247-BA39-4A4D-8D2C841D2BCB}"/>
+              </a:ext>
+            </a:extLst>
+          </p:cNvPr>
+          <p:cNvSpPr txBox="1"/>
+          <p:nvPr/>
+        </p:nvSpPr>
+        <p:spPr>
+          <a:xfrm>
+            <a:off x="1252800" y="634032"/>
+            <a:ext cx="9223200" cy="461665"/>
+          </a:xfrm>
+          <a:prstGeom prst="rect">
+            <a:avLst/>
+          </a:prstGeom>
+          <a:noFill/>
+        </p:spPr>
+        <p:txBody>
+          <a:bodyPr wrap="square" rtlCol="0">
+            <a:spAutoFit/>
+          </a:bodyPr>
+          <a:lstStyle/>
+          <a:p>
+            <a:r>
+              <a:rPr lang="en-US" sz="2400" b="1" i="0" dirty="0">
+                <a:effectLst/>
+                <a:latin typeface="Arial" panose="020B0604020202020204" pitchFamily="34" charset="0"/>
+                <a:cs typeface="Arial" panose="020B0604020202020204" pitchFamily="34" charset="0"/>
+              </a:rPr>
+              <a:t>Hyperparameter Tuning: Training Performance Comparison</a:t>
+            </a:r>
+            <a:endParaRPr lang="de-DE" sz="2400" dirty="0">
+              <a:latin typeface="Arial" panose="020B0604020202020204" pitchFamily="34" charset="0"/>
+              <a:cs typeface="Arial" panose="020B0604020202020204" pitchFamily="34" charset="0"/>
+            </a:endParaRPr>
+          </a:p>
+        </p:txBody>
+      </p:sp>
+      <p:sp>
+        <p:nvSpPr>
+          <p:cNvPr id="5" name="TextBox 4">
+            <a:extLst>
+              <a:ext uri="{FF2B5EF4-FFF2-40B4-BE49-F238E27FC236}">
+                <a16:creationId xmlns:a16="http://schemas.microsoft.com/office/drawing/2014/main" id="{A65A4DB6-10C0-3314-0EEE-EABDD99CE04E}"/>
+              </a:ext>
+            </a:extLst>
+          </p:cNvPr>
+          <p:cNvSpPr txBox="1"/>
+          <p:nvPr/>
+        </p:nvSpPr>
+        <p:spPr>
+          <a:xfrm>
+            <a:off x="2413153" y="6029414"/>
+            <a:ext cx="9804094" cy="338554"/>
+          </a:xfrm>
+          <a:prstGeom prst="rect">
+            <a:avLst/>
+          </a:prstGeom>
+          <a:noFill/>
+        </p:spPr>
+        <p:txBody>
+          <a:bodyPr wrap="none" rtlCol="0">
+            <a:spAutoFit/>
+          </a:bodyPr>
+          <a:lstStyle/>
+          <a:p>
+            <a:r>
+              <a:rPr lang="en-US" sz="1600" dirty="0"/>
+              <a:t>Fig: Comparison of episode rewards across multiple SAC training runs with different hyperparameter configurations.</a:t>
+            </a:r>
+            <a:endParaRPr lang="de-DE" sz="1600" dirty="0"/>
+          </a:p>
+        </p:txBody>
+      </p:sp>
+      <p:sp>
+        <p:nvSpPr>
+          <p:cNvPr id="7" name="Slide Number Placeholder 6">
+            <a:extLst>
+              <a:ext uri="{FF2B5EF4-FFF2-40B4-BE49-F238E27FC236}">
+                <a16:creationId xmlns:a16="http://schemas.microsoft.com/office/drawing/2014/main" id="{EC754541-8172-F8AB-3ABD-29361CB9F933}"/>
+              </a:ext>
+            </a:extLst>
+          </p:cNvPr>
+          <p:cNvSpPr>
+            <a:spLocks noGrp="1"/>
+          </p:cNvSpPr>
+          <p:nvPr>
+            <p:ph type="sldNum" sz="quarter" idx="10"/>
+          </p:nvPr>
+        </p:nvSpPr>
+        <p:spPr/>
+        <p:txBody>
+          <a:bodyPr/>
+          <a:lstStyle/>
+          <a:p>
+            <a:fld id="{A02D9A9C-251E-4686-914B-47E3F39F30D8}" type="slidenum">
+              <a:rPr lang="de-DE" smtClean="0"/>
+              <a:t>12</a:t>
+            </a:fld>
+            <a:endParaRPr lang="de-DE"/>
+          </a:p>
+        </p:txBody>
+      </p:sp>
+    </p:spTree>
+    <p:extLst>
+      <p:ext uri="{BB962C8B-B14F-4D97-AF65-F5344CB8AC3E}">
+        <p14:creationId xmlns:p14="http://schemas.microsoft.com/office/powerpoint/2010/main" val="143437196"/>
+      </p:ext>
+    </p:extLst>
+  </p:cSld>
+  <p:clrMapOvr>
+    <a:masterClrMapping/>
+  </p:clrMapOvr>
+</p:sld>
+</file>
+
+<file path=ppt/slides/slide13.xml><?xml version="1.0" encoding="utf-8"?>
+<p:sld xmlns:a="http://schemas.openxmlformats.org/drawingml/2006/main" xmlns:r="http://schemas.openxmlformats.org/officeDocument/2006/relationships" xmlns:p="http://schemas.openxmlformats.org/presentationml/2006/main">
+  <p:cSld>
+    <p:spTree>
+      <p:nvGrpSpPr>
+        <p:cNvPr id="1" name=""/>
+        <p:cNvGrpSpPr/>
+        <p:nvPr/>
+      </p:nvGrpSpPr>
+      <p:grpSpPr>
+        <a:xfrm>
+          <a:off x="0" y="0"/>
+          <a:ext cx="0" cy="0"/>
+          <a:chOff x="0" y="0"/>
+          <a:chExt cx="0" cy="0"/>
+        </a:xfrm>
+      </p:grpSpPr>
       <p:sp>
         <p:nvSpPr>
           <p:cNvPr id="6" name="Shape 4">
@@ -2263,7 +2501,7 @@
           <a:p>
             <a:fld id="{A02D9A9C-251E-4686-914B-47E3F39F30D8}" type="slidenum">
               <a:rPr lang="de-DE" smtClean="0"/>
-              <a:t>12</a:t>
+              <a:t>13</a:t>
             </a:fld>
             <a:endParaRPr lang="de-DE"/>
           </a:p>
@@ -2570,131 +2808,6 @@
 </p:sld>
 </file>
 
-<file path=ppt/slides/slide13.xml><?xml version="1.0" encoding="utf-8"?>
-<p:sld xmlns:a="http://schemas.openxmlformats.org/drawingml/2006/main" xmlns:r="http://schemas.openxmlformats.org/officeDocument/2006/relationships" xmlns:p="http://schemas.openxmlformats.org/presentationml/2006/main">
-  <p:cSld>
-    <p:spTree>
-      <p:nvGrpSpPr>
-        <p:cNvPr id="1" name=""/>
-        <p:cNvGrpSpPr/>
-        <p:nvPr/>
-      </p:nvGrpSpPr>
-      <p:grpSpPr>
-        <a:xfrm>
-          <a:off x="0" y="0"/>
-          <a:ext cx="0" cy="0"/>
-          <a:chOff x="0" y="0"/>
-          <a:chExt cx="0" cy="0"/>
-        </a:xfrm>
-      </p:grpSpPr>
-      <p:sp>
-        <p:nvSpPr>
-          <p:cNvPr id="2" name="Slide Number Placeholder 1">
-            <a:extLst>
-              <a:ext uri="{FF2B5EF4-FFF2-40B4-BE49-F238E27FC236}">
-                <a16:creationId xmlns:a16="http://schemas.microsoft.com/office/drawing/2014/main" id="{0EFD8683-0C60-B51C-39B0-886FFC7863F1}"/>
-              </a:ext>
-            </a:extLst>
-          </p:cNvPr>
-          <p:cNvSpPr>
-            <a:spLocks noGrp="1"/>
-          </p:cNvSpPr>
-          <p:nvPr>
-            <p:ph type="sldNum" sz="quarter" idx="10"/>
-          </p:nvPr>
-        </p:nvSpPr>
-        <p:spPr/>
-        <p:txBody>
-          <a:bodyPr/>
-          <a:lstStyle/>
-          <a:p>
-            <a:fld id="{A02D9A9C-251E-4686-914B-47E3F39F30D8}" type="slidenum">
-              <a:rPr lang="de-DE" smtClean="0"/>
-              <a:t>13</a:t>
-            </a:fld>
-            <a:endParaRPr lang="de-DE"/>
-          </a:p>
-        </p:txBody>
-      </p:sp>
-      <p:pic>
-        <p:nvPicPr>
-          <p:cNvPr id="4" name="Picture 3">
-            <a:extLst>
-              <a:ext uri="{FF2B5EF4-FFF2-40B4-BE49-F238E27FC236}">
-                <a16:creationId xmlns:a16="http://schemas.microsoft.com/office/drawing/2014/main" id="{F02F8BFA-7B03-0F03-335C-4F562268FCA6}"/>
-              </a:ext>
-            </a:extLst>
-          </p:cNvPr>
-          <p:cNvPicPr>
-            <a:picLocks noChangeAspect="1"/>
-          </p:cNvPicPr>
-          <p:nvPr/>
-        </p:nvPicPr>
-        <p:blipFill>
-          <a:blip r:embed="rId2"/>
-          <a:stretch>
-            <a:fillRect/>
-          </a:stretch>
-        </p:blipFill>
-        <p:spPr>
-          <a:xfrm>
-            <a:off x="796247" y="1442803"/>
-            <a:ext cx="13037906" cy="5343994"/>
-          </a:xfrm>
-          <a:prstGeom prst="rect">
-            <a:avLst/>
-          </a:prstGeom>
-        </p:spPr>
-      </p:pic>
-      <p:sp>
-        <p:nvSpPr>
-          <p:cNvPr id="5" name="TextBox 4">
-            <a:extLst>
-              <a:ext uri="{FF2B5EF4-FFF2-40B4-BE49-F238E27FC236}">
-                <a16:creationId xmlns:a16="http://schemas.microsoft.com/office/drawing/2014/main" id="{4D03FD8E-AE43-26D7-EDED-65C8456F852D}"/>
-              </a:ext>
-            </a:extLst>
-          </p:cNvPr>
-          <p:cNvSpPr txBox="1"/>
-          <p:nvPr/>
-        </p:nvSpPr>
-        <p:spPr>
-          <a:xfrm>
-            <a:off x="4419503" y="6933146"/>
-            <a:ext cx="5791394" cy="338554"/>
-          </a:xfrm>
-          <a:prstGeom prst="rect">
-            <a:avLst/>
-          </a:prstGeom>
-          <a:noFill/>
-        </p:spPr>
-        <p:txBody>
-          <a:bodyPr wrap="none" rtlCol="0">
-            <a:spAutoFit/>
-          </a:bodyPr>
-          <a:lstStyle/>
-          <a:p>
-            <a:r>
-              <a:rPr lang="en-US" sz="1600" dirty="0"/>
-              <a:t>Fig: Visualization of system dynamics and control for one trajectory.</a:t>
-            </a:r>
-            <a:endParaRPr lang="de-DE" sz="1600" dirty="0"/>
-          </a:p>
-        </p:txBody>
-      </p:sp>
-    </p:spTree>
-    <p:extLst>
-      <p:ext uri="{BB962C8B-B14F-4D97-AF65-F5344CB8AC3E}">
-        <p14:creationId xmlns:p14="http://schemas.microsoft.com/office/powerpoint/2010/main" val="3753974211"/>
-      </p:ext>
-    </p:extLst>
-  </p:cSld>
-  <p:clrMapOvr>
-    <a:masterClrMapping/>
-  </p:clrMapOvr>
-</p:sld>
-</file>
-
 <file path=ppt/slides/slide14.xml><?xml version="1.0" encoding="utf-8"?>
 <p:sld xmlns:a="http://schemas.openxmlformats.org/drawingml/2006/main" xmlns:r="http://schemas.openxmlformats.org/officeDocument/2006/relationships" xmlns:p="http://schemas.openxmlformats.org/presentationml/2006/main">
   <p:cSld>
@@ -2717,7 +2830,7 @@
           <p:cNvPr id="2" name="Slide Number Placeholder 1">
             <a:extLst>
               <a:ext uri="{FF2B5EF4-FFF2-40B4-BE49-F238E27FC236}">
-                <a16:creationId xmlns:a16="http://schemas.microsoft.com/office/drawing/2014/main" id="{FD487D02-6950-31EE-9075-CE462E154503}"/>
+                <a16:creationId xmlns:a16="http://schemas.microsoft.com/office/drawing/2014/main" id="{0EFD8683-0C60-B51C-39B0-886FFC7863F1}"/>
               </a:ext>
             </a:extLst>
           </p:cNvPr>
@@ -2736,6 +2849,713 @@
             <a:fld id="{A02D9A9C-251E-4686-914B-47E3F39F30D8}" type="slidenum">
               <a:rPr lang="de-DE" smtClean="0"/>
               <a:t>14</a:t>
+            </a:fld>
+            <a:endParaRPr lang="de-DE"/>
+          </a:p>
+        </p:txBody>
+      </p:sp>
+      <p:sp>
+        <p:nvSpPr>
+          <p:cNvPr id="5" name="TextBox 4">
+            <a:extLst>
+              <a:ext uri="{FF2B5EF4-FFF2-40B4-BE49-F238E27FC236}">
+                <a16:creationId xmlns:a16="http://schemas.microsoft.com/office/drawing/2014/main" id="{4D03FD8E-AE43-26D7-EDED-65C8456F852D}"/>
+              </a:ext>
+            </a:extLst>
+          </p:cNvPr>
+          <p:cNvSpPr txBox="1"/>
+          <p:nvPr/>
+        </p:nvSpPr>
+        <p:spPr>
+          <a:xfrm>
+            <a:off x="4419503" y="6933146"/>
+            <a:ext cx="6691897" cy="338554"/>
+          </a:xfrm>
+          <a:prstGeom prst="rect">
+            <a:avLst/>
+          </a:prstGeom>
+          <a:noFill/>
+        </p:spPr>
+        <p:txBody>
+          <a:bodyPr wrap="none" rtlCol="0">
+            <a:spAutoFit/>
+          </a:bodyPr>
+          <a:lstStyle/>
+          <a:p>
+            <a:r>
+              <a:rPr lang="en-US" sz="1600" dirty="0"/>
+              <a:t>Fig: Visualization of system dynamics and control for one trajectory (real price).</a:t>
+            </a:r>
+            <a:endParaRPr lang="de-DE" sz="1600" dirty="0"/>
+          </a:p>
+        </p:txBody>
+      </p:sp>
+      <p:pic>
+        <p:nvPicPr>
+          <p:cNvPr id="4" name="Picture 3">
+            <a:extLst>
+              <a:ext uri="{FF2B5EF4-FFF2-40B4-BE49-F238E27FC236}">
+                <a16:creationId xmlns:a16="http://schemas.microsoft.com/office/drawing/2014/main" id="{F8B38FA4-D9DF-EE15-194D-1D56752D1567}"/>
+              </a:ext>
+            </a:extLst>
+          </p:cNvPr>
+          <p:cNvPicPr>
+            <a:picLocks noChangeAspect="1"/>
+          </p:cNvPicPr>
+          <p:nvPr/>
+        </p:nvPicPr>
+        <p:blipFill>
+          <a:blip r:embed="rId2"/>
+          <a:stretch>
+            <a:fillRect/>
+          </a:stretch>
+        </p:blipFill>
+        <p:spPr>
+          <a:xfrm>
+            <a:off x="1728204" y="1519422"/>
+            <a:ext cx="11173991" cy="5190755"/>
+          </a:xfrm>
+          <a:prstGeom prst="rect">
+            <a:avLst/>
+          </a:prstGeom>
+        </p:spPr>
+      </p:pic>
+    </p:spTree>
+    <p:extLst>
+      <p:ext uri="{BB962C8B-B14F-4D97-AF65-F5344CB8AC3E}">
+        <p14:creationId xmlns:p14="http://schemas.microsoft.com/office/powerpoint/2010/main" val="1895056488"/>
+      </p:ext>
+    </p:extLst>
+  </p:cSld>
+  <p:clrMapOvr>
+    <a:masterClrMapping/>
+  </p:clrMapOvr>
+</p:sld>
+</file>
+
+<file path=ppt/slides/slide15.xml><?xml version="1.0" encoding="utf-8"?>
+<p:sld xmlns:a="http://schemas.openxmlformats.org/drawingml/2006/main" xmlns:r="http://schemas.openxmlformats.org/officeDocument/2006/relationships" xmlns:p="http://schemas.openxmlformats.org/presentationml/2006/main">
+  <p:cSld>
+    <p:spTree>
+      <p:nvGrpSpPr>
+        <p:cNvPr id="1" name=""/>
+        <p:cNvGrpSpPr/>
+        <p:nvPr/>
+      </p:nvGrpSpPr>
+      <p:grpSpPr>
+        <a:xfrm>
+          <a:off x="0" y="0"/>
+          <a:ext cx="0" cy="0"/>
+          <a:chOff x="0" y="0"/>
+          <a:chExt cx="0" cy="0"/>
+        </a:xfrm>
+      </p:grpSpPr>
+      <p:sp>
+        <p:nvSpPr>
+          <p:cNvPr id="2" name="Slide Number Placeholder 1">
+            <a:extLst>
+              <a:ext uri="{FF2B5EF4-FFF2-40B4-BE49-F238E27FC236}">
+                <a16:creationId xmlns:a16="http://schemas.microsoft.com/office/drawing/2014/main" id="{0EFD8683-0C60-B51C-39B0-886FFC7863F1}"/>
+              </a:ext>
+            </a:extLst>
+          </p:cNvPr>
+          <p:cNvSpPr>
+            <a:spLocks noGrp="1"/>
+          </p:cNvSpPr>
+          <p:nvPr>
+            <p:ph type="sldNum" sz="quarter" idx="10"/>
+          </p:nvPr>
+        </p:nvSpPr>
+        <p:spPr/>
+        <p:txBody>
+          <a:bodyPr/>
+          <a:lstStyle/>
+          <a:p>
+            <a:fld id="{A02D9A9C-251E-4686-914B-47E3F39F30D8}" type="slidenum">
+              <a:rPr lang="de-DE" smtClean="0"/>
+              <a:t>15</a:t>
+            </a:fld>
+            <a:endParaRPr lang="de-DE"/>
+          </a:p>
+        </p:txBody>
+      </p:sp>
+      <p:sp>
+        <p:nvSpPr>
+          <p:cNvPr id="5" name="TextBox 4">
+            <a:extLst>
+              <a:ext uri="{FF2B5EF4-FFF2-40B4-BE49-F238E27FC236}">
+                <a16:creationId xmlns:a16="http://schemas.microsoft.com/office/drawing/2014/main" id="{4D03FD8E-AE43-26D7-EDED-65C8456F852D}"/>
+              </a:ext>
+            </a:extLst>
+          </p:cNvPr>
+          <p:cNvSpPr txBox="1"/>
+          <p:nvPr/>
+        </p:nvSpPr>
+        <p:spPr>
+          <a:xfrm>
+            <a:off x="4419503" y="6933146"/>
+            <a:ext cx="6920612" cy="338554"/>
+          </a:xfrm>
+          <a:prstGeom prst="rect">
+            <a:avLst/>
+          </a:prstGeom>
+          <a:noFill/>
+        </p:spPr>
+        <p:txBody>
+          <a:bodyPr wrap="none" rtlCol="0">
+            <a:spAutoFit/>
+          </a:bodyPr>
+          <a:lstStyle/>
+          <a:p>
+            <a:r>
+              <a:rPr lang="en-US" sz="1600" dirty="0"/>
+              <a:t>Fig: Visualization of system dynamics and control for one trajectory (price model).</a:t>
+            </a:r>
+            <a:endParaRPr lang="de-DE" sz="1600" dirty="0"/>
+          </a:p>
+        </p:txBody>
+      </p:sp>
+      <p:pic>
+        <p:nvPicPr>
+          <p:cNvPr id="6" name="Picture 5">
+            <a:extLst>
+              <a:ext uri="{FF2B5EF4-FFF2-40B4-BE49-F238E27FC236}">
+                <a16:creationId xmlns:a16="http://schemas.microsoft.com/office/drawing/2014/main" id="{C171226D-BB72-1EF3-8DB5-8205DEB0AAE9}"/>
+              </a:ext>
+            </a:extLst>
+          </p:cNvPr>
+          <p:cNvPicPr>
+            <a:picLocks noChangeAspect="1"/>
+          </p:cNvPicPr>
+          <p:nvPr/>
+        </p:nvPicPr>
+        <p:blipFill>
+          <a:blip r:embed="rId2"/>
+          <a:stretch>
+            <a:fillRect/>
+          </a:stretch>
+        </p:blipFill>
+        <p:spPr>
+          <a:xfrm>
+            <a:off x="1530393" y="1335640"/>
+            <a:ext cx="11569613" cy="5374537"/>
+          </a:xfrm>
+          <a:prstGeom prst="rect">
+            <a:avLst/>
+          </a:prstGeom>
+        </p:spPr>
+      </p:pic>
+    </p:spTree>
+    <p:extLst>
+      <p:ext uri="{BB962C8B-B14F-4D97-AF65-F5344CB8AC3E}">
+        <p14:creationId xmlns:p14="http://schemas.microsoft.com/office/powerpoint/2010/main" val="3753974211"/>
+      </p:ext>
+    </p:extLst>
+  </p:cSld>
+  <p:clrMapOvr>
+    <a:masterClrMapping/>
+  </p:clrMapOvr>
+</p:sld>
+</file>
+
+<file path=ppt/slides/slide16.xml><?xml version="1.0" encoding="utf-8"?>
+<p:sld xmlns:a="http://schemas.openxmlformats.org/drawingml/2006/main" xmlns:r="http://schemas.openxmlformats.org/officeDocument/2006/relationships" xmlns:p="http://schemas.openxmlformats.org/presentationml/2006/main">
+  <p:cSld>
+    <p:spTree>
+      <p:nvGrpSpPr>
+        <p:cNvPr id="1" name=""/>
+        <p:cNvGrpSpPr/>
+        <p:nvPr/>
+      </p:nvGrpSpPr>
+      <p:grpSpPr>
+        <a:xfrm>
+          <a:off x="0" y="0"/>
+          <a:ext cx="0" cy="0"/>
+          <a:chOff x="0" y="0"/>
+          <a:chExt cx="0" cy="0"/>
+        </a:xfrm>
+      </p:grpSpPr>
+      <p:sp>
+        <p:nvSpPr>
+          <p:cNvPr id="2" name="Slide Number Placeholder 1">
+            <a:extLst>
+              <a:ext uri="{FF2B5EF4-FFF2-40B4-BE49-F238E27FC236}">
+                <a16:creationId xmlns:a16="http://schemas.microsoft.com/office/drawing/2014/main" id="{0EFD8683-0C60-B51C-39B0-886FFC7863F1}"/>
+              </a:ext>
+            </a:extLst>
+          </p:cNvPr>
+          <p:cNvSpPr>
+            <a:spLocks noGrp="1"/>
+          </p:cNvSpPr>
+          <p:nvPr>
+            <p:ph type="sldNum" sz="quarter" idx="10"/>
+          </p:nvPr>
+        </p:nvSpPr>
+        <p:spPr/>
+        <p:txBody>
+          <a:bodyPr/>
+          <a:lstStyle/>
+          <a:p>
+            <a:fld id="{A02D9A9C-251E-4686-914B-47E3F39F30D8}" type="slidenum">
+              <a:rPr lang="de-DE" smtClean="0"/>
+              <a:t>16</a:t>
+            </a:fld>
+            <a:endParaRPr lang="de-DE"/>
+          </a:p>
+        </p:txBody>
+      </p:sp>
+      <p:sp>
+        <p:nvSpPr>
+          <p:cNvPr id="5" name="TextBox 4">
+            <a:extLst>
+              <a:ext uri="{FF2B5EF4-FFF2-40B4-BE49-F238E27FC236}">
+                <a16:creationId xmlns:a16="http://schemas.microsoft.com/office/drawing/2014/main" id="{4D03FD8E-AE43-26D7-EDED-65C8456F852D}"/>
+              </a:ext>
+            </a:extLst>
+          </p:cNvPr>
+          <p:cNvSpPr txBox="1"/>
+          <p:nvPr/>
+        </p:nvSpPr>
+        <p:spPr>
+          <a:xfrm>
+            <a:off x="4419503" y="6933146"/>
+            <a:ext cx="6920612" cy="338554"/>
+          </a:xfrm>
+          <a:prstGeom prst="rect">
+            <a:avLst/>
+          </a:prstGeom>
+          <a:noFill/>
+        </p:spPr>
+        <p:txBody>
+          <a:bodyPr wrap="none" rtlCol="0">
+            <a:spAutoFit/>
+          </a:bodyPr>
+          <a:lstStyle/>
+          <a:p>
+            <a:r>
+              <a:rPr lang="en-US" sz="1600" dirty="0"/>
+              <a:t>Fig: Visualization of system dynamics and control for one trajectory (price model).</a:t>
+            </a:r>
+            <a:endParaRPr lang="de-DE" sz="1600" dirty="0"/>
+          </a:p>
+        </p:txBody>
+      </p:sp>
+      <p:pic>
+        <p:nvPicPr>
+          <p:cNvPr id="4" name="Picture 3">
+            <a:extLst>
+              <a:ext uri="{FF2B5EF4-FFF2-40B4-BE49-F238E27FC236}">
+                <a16:creationId xmlns:a16="http://schemas.microsoft.com/office/drawing/2014/main" id="{6C8E1FE6-6BF7-47A1-2C25-6392473FF652}"/>
+              </a:ext>
+            </a:extLst>
+          </p:cNvPr>
+          <p:cNvPicPr>
+            <a:picLocks noChangeAspect="1"/>
+          </p:cNvPicPr>
+          <p:nvPr/>
+        </p:nvPicPr>
+        <p:blipFill>
+          <a:blip r:embed="rId2"/>
+          <a:stretch>
+            <a:fillRect/>
+          </a:stretch>
+        </p:blipFill>
+        <p:spPr>
+          <a:xfrm>
+            <a:off x="1728204" y="1519422"/>
+            <a:ext cx="11173991" cy="5190755"/>
+          </a:xfrm>
+          <a:prstGeom prst="rect">
+            <a:avLst/>
+          </a:prstGeom>
+        </p:spPr>
+      </p:pic>
+    </p:spTree>
+    <p:extLst>
+      <p:ext uri="{BB962C8B-B14F-4D97-AF65-F5344CB8AC3E}">
+        <p14:creationId xmlns:p14="http://schemas.microsoft.com/office/powerpoint/2010/main" val="2551178577"/>
+      </p:ext>
+    </p:extLst>
+  </p:cSld>
+  <p:clrMapOvr>
+    <a:masterClrMapping/>
+  </p:clrMapOvr>
+</p:sld>
+</file>
+
+<file path=ppt/slides/slide17.xml><?xml version="1.0" encoding="utf-8"?>
+<p:sld xmlns:a="http://schemas.openxmlformats.org/drawingml/2006/main" xmlns:r="http://schemas.openxmlformats.org/officeDocument/2006/relationships" xmlns:p="http://schemas.openxmlformats.org/presentationml/2006/main">
+  <p:cSld>
+    <p:spTree>
+      <p:nvGrpSpPr>
+        <p:cNvPr id="1" name=""/>
+        <p:cNvGrpSpPr/>
+        <p:nvPr/>
+      </p:nvGrpSpPr>
+      <p:grpSpPr>
+        <a:xfrm>
+          <a:off x="0" y="0"/>
+          <a:ext cx="0" cy="0"/>
+          <a:chOff x="0" y="0"/>
+          <a:chExt cx="0" cy="0"/>
+        </a:xfrm>
+      </p:grpSpPr>
+      <p:sp>
+        <p:nvSpPr>
+          <p:cNvPr id="2" name="Slide Number Placeholder 1">
+            <a:extLst>
+              <a:ext uri="{FF2B5EF4-FFF2-40B4-BE49-F238E27FC236}">
+                <a16:creationId xmlns:a16="http://schemas.microsoft.com/office/drawing/2014/main" id="{0EFD8683-0C60-B51C-39B0-886FFC7863F1}"/>
+              </a:ext>
+            </a:extLst>
+          </p:cNvPr>
+          <p:cNvSpPr>
+            <a:spLocks noGrp="1"/>
+          </p:cNvSpPr>
+          <p:nvPr>
+            <p:ph type="sldNum" sz="quarter" idx="10"/>
+          </p:nvPr>
+        </p:nvSpPr>
+        <p:spPr/>
+        <p:txBody>
+          <a:bodyPr/>
+          <a:lstStyle/>
+          <a:p>
+            <a:fld id="{A02D9A9C-251E-4686-914B-47E3F39F30D8}" type="slidenum">
+              <a:rPr lang="de-DE" smtClean="0"/>
+              <a:t>17</a:t>
+            </a:fld>
+            <a:endParaRPr lang="de-DE"/>
+          </a:p>
+        </p:txBody>
+      </p:sp>
+      <p:sp>
+        <p:nvSpPr>
+          <p:cNvPr id="5" name="TextBox 4">
+            <a:extLst>
+              <a:ext uri="{FF2B5EF4-FFF2-40B4-BE49-F238E27FC236}">
+                <a16:creationId xmlns:a16="http://schemas.microsoft.com/office/drawing/2014/main" id="{4D03FD8E-AE43-26D7-EDED-65C8456F852D}"/>
+              </a:ext>
+            </a:extLst>
+          </p:cNvPr>
+          <p:cNvSpPr txBox="1"/>
+          <p:nvPr/>
+        </p:nvSpPr>
+        <p:spPr>
+          <a:xfrm>
+            <a:off x="4419503" y="6933146"/>
+            <a:ext cx="5604548" cy="338554"/>
+          </a:xfrm>
+          <a:prstGeom prst="rect">
+            <a:avLst/>
+          </a:prstGeom>
+          <a:noFill/>
+        </p:spPr>
+        <p:txBody>
+          <a:bodyPr wrap="none" rtlCol="0">
+            <a:spAutoFit/>
+          </a:bodyPr>
+          <a:lstStyle/>
+          <a:p>
+            <a:r>
+              <a:rPr lang="en-US" sz="1600" dirty="0"/>
+              <a:t>Fig: Visualization of fix threshold for one trajectory (price model).</a:t>
+            </a:r>
+            <a:endParaRPr lang="de-DE" sz="1600" dirty="0"/>
+          </a:p>
+        </p:txBody>
+      </p:sp>
+      <p:pic>
+        <p:nvPicPr>
+          <p:cNvPr id="6" name="Picture 5">
+            <a:extLst>
+              <a:ext uri="{FF2B5EF4-FFF2-40B4-BE49-F238E27FC236}">
+                <a16:creationId xmlns:a16="http://schemas.microsoft.com/office/drawing/2014/main" id="{F6367104-7664-7580-576C-C718ADA50D6F}"/>
+              </a:ext>
+            </a:extLst>
+          </p:cNvPr>
+          <p:cNvPicPr>
+            <a:picLocks noChangeAspect="1"/>
+          </p:cNvPicPr>
+          <p:nvPr/>
+        </p:nvPicPr>
+        <p:blipFill>
+          <a:blip r:embed="rId2"/>
+          <a:stretch>
+            <a:fillRect/>
+          </a:stretch>
+        </p:blipFill>
+        <p:spPr>
+          <a:xfrm>
+            <a:off x="1903235" y="1124895"/>
+            <a:ext cx="11724431" cy="5446456"/>
+          </a:xfrm>
+          <a:prstGeom prst="rect">
+            <a:avLst/>
+          </a:prstGeom>
+        </p:spPr>
+      </p:pic>
+    </p:spTree>
+    <p:extLst>
+      <p:ext uri="{BB962C8B-B14F-4D97-AF65-F5344CB8AC3E}">
+        <p14:creationId xmlns:p14="http://schemas.microsoft.com/office/powerpoint/2010/main" val="1063839360"/>
+      </p:ext>
+    </p:extLst>
+  </p:cSld>
+  <p:clrMapOvr>
+    <a:masterClrMapping/>
+  </p:clrMapOvr>
+</p:sld>
+</file>
+
+<file path=ppt/slides/slide18.xml><?xml version="1.0" encoding="utf-8"?>
+<p:sld xmlns:a="http://schemas.openxmlformats.org/drawingml/2006/main" xmlns:r="http://schemas.openxmlformats.org/officeDocument/2006/relationships" xmlns:p="http://schemas.openxmlformats.org/presentationml/2006/main">
+  <p:cSld>
+    <p:spTree>
+      <p:nvGrpSpPr>
+        <p:cNvPr id="1" name=""/>
+        <p:cNvGrpSpPr/>
+        <p:nvPr/>
+      </p:nvGrpSpPr>
+      <p:grpSpPr>
+        <a:xfrm>
+          <a:off x="0" y="0"/>
+          <a:ext cx="0" cy="0"/>
+          <a:chOff x="0" y="0"/>
+          <a:chExt cx="0" cy="0"/>
+        </a:xfrm>
+      </p:grpSpPr>
+      <p:sp>
+        <p:nvSpPr>
+          <p:cNvPr id="2" name="Slide Number Placeholder 1">
+            <a:extLst>
+              <a:ext uri="{FF2B5EF4-FFF2-40B4-BE49-F238E27FC236}">
+                <a16:creationId xmlns:a16="http://schemas.microsoft.com/office/drawing/2014/main" id="{CB2AC9FB-E9AF-6316-D37A-9CD63414513C}"/>
+              </a:ext>
+            </a:extLst>
+          </p:cNvPr>
+          <p:cNvSpPr>
+            <a:spLocks noGrp="1"/>
+          </p:cNvSpPr>
+          <p:nvPr>
+            <p:ph type="sldNum" sz="quarter" idx="10"/>
+          </p:nvPr>
+        </p:nvSpPr>
+        <p:spPr/>
+        <p:txBody>
+          <a:bodyPr/>
+          <a:lstStyle/>
+          <a:p>
+            <a:fld id="{A02D9A9C-251E-4686-914B-47E3F39F30D8}" type="slidenum">
+              <a:rPr lang="de-DE" smtClean="0"/>
+              <a:t>18</a:t>
+            </a:fld>
+            <a:endParaRPr lang="de-DE"/>
+          </a:p>
+        </p:txBody>
+      </p:sp>
+      <p:pic>
+        <p:nvPicPr>
+          <p:cNvPr id="4" name="Picture 3">
+            <a:extLst>
+              <a:ext uri="{FF2B5EF4-FFF2-40B4-BE49-F238E27FC236}">
+                <a16:creationId xmlns:a16="http://schemas.microsoft.com/office/drawing/2014/main" id="{911C2ED2-C0B1-57D9-4E2F-99BE24FD3E33}"/>
+              </a:ext>
+            </a:extLst>
+          </p:cNvPr>
+          <p:cNvPicPr>
+            <a:picLocks noChangeAspect="1"/>
+          </p:cNvPicPr>
+          <p:nvPr/>
+        </p:nvPicPr>
+        <p:blipFill>
+          <a:blip r:embed="rId2"/>
+          <a:stretch>
+            <a:fillRect/>
+          </a:stretch>
+        </p:blipFill>
+        <p:spPr>
+          <a:xfrm>
+            <a:off x="876818" y="1639664"/>
+            <a:ext cx="6453374" cy="3657599"/>
+          </a:xfrm>
+          <a:prstGeom prst="rect">
+            <a:avLst/>
+          </a:prstGeom>
+        </p:spPr>
+      </p:pic>
+      <p:sp>
+        <p:nvSpPr>
+          <p:cNvPr id="5" name="TextBox 4">
+            <a:extLst>
+              <a:ext uri="{FF2B5EF4-FFF2-40B4-BE49-F238E27FC236}">
+                <a16:creationId xmlns:a16="http://schemas.microsoft.com/office/drawing/2014/main" id="{67602711-CB8B-01C0-B6F1-F26AF83B5227}"/>
+              </a:ext>
+            </a:extLst>
+          </p:cNvPr>
+          <p:cNvSpPr txBox="1"/>
+          <p:nvPr/>
+        </p:nvSpPr>
+        <p:spPr>
+          <a:xfrm>
+            <a:off x="2336803" y="5626307"/>
+            <a:ext cx="1766702" cy="369332"/>
+          </a:xfrm>
+          <a:prstGeom prst="rect">
+            <a:avLst/>
+          </a:prstGeom>
+          <a:noFill/>
+        </p:spPr>
+        <p:txBody>
+          <a:bodyPr wrap="none" rtlCol="0">
+            <a:spAutoFit/>
+          </a:bodyPr>
+          <a:lstStyle/>
+          <a:p>
+            <a:r>
+              <a:rPr lang="de-DE" dirty="0" err="1"/>
+              <a:t>Using</a:t>
+            </a:r>
+            <a:r>
+              <a:rPr lang="de-DE" dirty="0"/>
+              <a:t> SAC </a:t>
+            </a:r>
+            <a:r>
+              <a:rPr lang="de-DE" dirty="0" err="1"/>
+              <a:t>model</a:t>
+            </a:r>
+            <a:endParaRPr lang="de-DE" dirty="0"/>
+          </a:p>
+        </p:txBody>
+      </p:sp>
+      <p:pic>
+        <p:nvPicPr>
+          <p:cNvPr id="7" name="Picture 6">
+            <a:extLst>
+              <a:ext uri="{FF2B5EF4-FFF2-40B4-BE49-F238E27FC236}">
+                <a16:creationId xmlns:a16="http://schemas.microsoft.com/office/drawing/2014/main" id="{3EDE9565-195F-26A7-D9F4-286221153E2F}"/>
+              </a:ext>
+            </a:extLst>
+          </p:cNvPr>
+          <p:cNvPicPr>
+            <a:picLocks noChangeAspect="1"/>
+          </p:cNvPicPr>
+          <p:nvPr/>
+        </p:nvPicPr>
+        <p:blipFill>
+          <a:blip r:embed="rId3"/>
+          <a:stretch>
+            <a:fillRect/>
+          </a:stretch>
+        </p:blipFill>
+        <p:spPr>
+          <a:xfrm>
+            <a:off x="7678579" y="1654138"/>
+            <a:ext cx="6427840" cy="3643127"/>
+          </a:xfrm>
+          <a:prstGeom prst="rect">
+            <a:avLst/>
+          </a:prstGeom>
+        </p:spPr>
+      </p:pic>
+      <p:sp>
+        <p:nvSpPr>
+          <p:cNvPr id="8" name="TextBox 7">
+            <a:extLst>
+              <a:ext uri="{FF2B5EF4-FFF2-40B4-BE49-F238E27FC236}">
+                <a16:creationId xmlns:a16="http://schemas.microsoft.com/office/drawing/2014/main" id="{F587D677-0778-193E-A1F6-EBA404312E0D}"/>
+              </a:ext>
+            </a:extLst>
+          </p:cNvPr>
+          <p:cNvSpPr txBox="1"/>
+          <p:nvPr/>
+        </p:nvSpPr>
+        <p:spPr>
+          <a:xfrm>
+            <a:off x="9763596" y="5626307"/>
+            <a:ext cx="1779654" cy="369332"/>
+          </a:xfrm>
+          <a:prstGeom prst="rect">
+            <a:avLst/>
+          </a:prstGeom>
+          <a:noFill/>
+        </p:spPr>
+        <p:txBody>
+          <a:bodyPr wrap="none" rtlCol="0">
+            <a:spAutoFit/>
+          </a:bodyPr>
+          <a:lstStyle/>
+          <a:p>
+            <a:r>
+              <a:rPr lang="de-DE" dirty="0" err="1"/>
+              <a:t>Using</a:t>
+            </a:r>
+            <a:r>
+              <a:rPr lang="de-DE" dirty="0"/>
+              <a:t> TD3 </a:t>
+            </a:r>
+            <a:r>
+              <a:rPr lang="de-DE" dirty="0" err="1"/>
+              <a:t>model</a:t>
+            </a:r>
+            <a:endParaRPr lang="de-DE" dirty="0"/>
+          </a:p>
+        </p:txBody>
+      </p:sp>
+    </p:spTree>
+    <p:extLst>
+      <p:ext uri="{BB962C8B-B14F-4D97-AF65-F5344CB8AC3E}">
+        <p14:creationId xmlns:p14="http://schemas.microsoft.com/office/powerpoint/2010/main" val="4228018441"/>
+      </p:ext>
+    </p:extLst>
+  </p:cSld>
+  <p:clrMapOvr>
+    <a:masterClrMapping/>
+  </p:clrMapOvr>
+</p:sld>
+</file>
+
+<file path=ppt/slides/slide19.xml><?xml version="1.0" encoding="utf-8"?>
+<p:sld xmlns:a="http://schemas.openxmlformats.org/drawingml/2006/main" xmlns:r="http://schemas.openxmlformats.org/officeDocument/2006/relationships" xmlns:p="http://schemas.openxmlformats.org/presentationml/2006/main">
+  <p:cSld>
+    <p:spTree>
+      <p:nvGrpSpPr>
+        <p:cNvPr id="1" name=""/>
+        <p:cNvGrpSpPr/>
+        <p:nvPr/>
+      </p:nvGrpSpPr>
+      <p:grpSpPr>
+        <a:xfrm>
+          <a:off x="0" y="0"/>
+          <a:ext cx="0" cy="0"/>
+          <a:chOff x="0" y="0"/>
+          <a:chExt cx="0" cy="0"/>
+        </a:xfrm>
+      </p:grpSpPr>
+      <p:sp>
+        <p:nvSpPr>
+          <p:cNvPr id="2" name="Slide Number Placeholder 1">
+            <a:extLst>
+              <a:ext uri="{FF2B5EF4-FFF2-40B4-BE49-F238E27FC236}">
+                <a16:creationId xmlns:a16="http://schemas.microsoft.com/office/drawing/2014/main" id="{FD487D02-6950-31EE-9075-CE462E154503}"/>
+              </a:ext>
+            </a:extLst>
+          </p:cNvPr>
+          <p:cNvSpPr>
+            <a:spLocks noGrp="1"/>
+          </p:cNvSpPr>
+          <p:nvPr>
+            <p:ph type="sldNum" sz="quarter" idx="10"/>
+          </p:nvPr>
+        </p:nvSpPr>
+        <p:spPr/>
+        <p:txBody>
+          <a:bodyPr/>
+          <a:lstStyle/>
+          <a:p>
+            <a:fld id="{A02D9A9C-251E-4686-914B-47E3F39F30D8}" type="slidenum">
+              <a:rPr lang="de-DE" smtClean="0"/>
+              <a:t>19</a:t>
             </a:fld>
             <a:endParaRPr lang="de-DE"/>
           </a:p>
@@ -2842,7 +3662,7 @@
 </p:sld>
 </file>
 
-<file path=ppt/slides/slide15.xml><?xml version="1.0" encoding="utf-8"?>
+<file path=ppt/slides/slide2.xml><?xml version="1.0" encoding="utf-8"?>
 <p:sld xmlns:a="http://schemas.openxmlformats.org/drawingml/2006/main" xmlns:r="http://schemas.openxmlformats.org/officeDocument/2006/relationships" xmlns:p="http://schemas.openxmlformats.org/presentationml/2006/main">
   <p:cSld>
     <p:spTree>
@@ -2864,6 +3684,1879 @@
           <p:cNvPr id="2" name="Text 0">
             <a:extLst>
               <a:ext uri="{FF2B5EF4-FFF2-40B4-BE49-F238E27FC236}">
+                <a16:creationId xmlns:a16="http://schemas.microsoft.com/office/drawing/2014/main" id="{20334E38-ECDC-2251-1C9E-5E2E58818BC3}"/>
+              </a:ext>
+            </a:extLst>
+          </p:cNvPr>
+          <p:cNvSpPr/>
+          <p:nvPr/>
+        </p:nvSpPr>
+        <p:spPr>
+          <a:xfrm>
+            <a:off x="994906" y="578615"/>
+            <a:ext cx="9858256" cy="485775"/>
+          </a:xfrm>
+          <a:prstGeom prst="rect">
+            <a:avLst/>
+          </a:prstGeom>
+          <a:noFill/>
+          <a:ln/>
+        </p:spPr>
+        <p:txBody>
+          <a:bodyPr wrap="none" lIns="0" tIns="0" rIns="0" bIns="0" rtlCol="0" anchor="t"/>
+          <a:lstStyle>
+            <a:defPPr>
+              <a:defRPr lang="de-DE"/>
+            </a:defPPr>
+            <a:lvl1pPr marL="0" algn="l" defTabSz="914400" rtl="0" eaLnBrk="1" latinLnBrk="0" hangingPunct="1">
+              <a:defRPr sz="1800" kern="1200">
+                <a:solidFill>
+                  <a:schemeClr val="tx1"/>
+                </a:solidFill>
+                <a:latin typeface="+mn-lt"/>
+                <a:ea typeface="+mn-ea"/>
+                <a:cs typeface="+mn-cs"/>
+              </a:defRPr>
+            </a:lvl1pPr>
+            <a:lvl2pPr marL="457200" algn="l" defTabSz="914400" rtl="0" eaLnBrk="1" latinLnBrk="0" hangingPunct="1">
+              <a:defRPr sz="1800" kern="1200">
+                <a:solidFill>
+                  <a:schemeClr val="tx1"/>
+                </a:solidFill>
+                <a:latin typeface="+mn-lt"/>
+                <a:ea typeface="+mn-ea"/>
+                <a:cs typeface="+mn-cs"/>
+              </a:defRPr>
+            </a:lvl2pPr>
+            <a:lvl3pPr marL="914400" algn="l" defTabSz="914400" rtl="0" eaLnBrk="1" latinLnBrk="0" hangingPunct="1">
+              <a:defRPr sz="1800" kern="1200">
+                <a:solidFill>
+                  <a:schemeClr val="tx1"/>
+                </a:solidFill>
+                <a:latin typeface="+mn-lt"/>
+                <a:ea typeface="+mn-ea"/>
+                <a:cs typeface="+mn-cs"/>
+              </a:defRPr>
+            </a:lvl3pPr>
+            <a:lvl4pPr marL="1371600" algn="l" defTabSz="914400" rtl="0" eaLnBrk="1" latinLnBrk="0" hangingPunct="1">
+              <a:defRPr sz="1800" kern="1200">
+                <a:solidFill>
+                  <a:schemeClr val="tx1"/>
+                </a:solidFill>
+                <a:latin typeface="+mn-lt"/>
+                <a:ea typeface="+mn-ea"/>
+                <a:cs typeface="+mn-cs"/>
+              </a:defRPr>
+            </a:lvl4pPr>
+            <a:lvl5pPr marL="1828800" algn="l" defTabSz="914400" rtl="0" eaLnBrk="1" latinLnBrk="0" hangingPunct="1">
+              <a:defRPr sz="1800" kern="1200">
+                <a:solidFill>
+                  <a:schemeClr val="tx1"/>
+                </a:solidFill>
+                <a:latin typeface="+mn-lt"/>
+                <a:ea typeface="+mn-ea"/>
+                <a:cs typeface="+mn-cs"/>
+              </a:defRPr>
+            </a:lvl5pPr>
+            <a:lvl6pPr marL="2286000" algn="l" defTabSz="914400" rtl="0" eaLnBrk="1" latinLnBrk="0" hangingPunct="1">
+              <a:defRPr sz="1800" kern="1200">
+                <a:solidFill>
+                  <a:schemeClr val="tx1"/>
+                </a:solidFill>
+                <a:latin typeface="+mn-lt"/>
+                <a:ea typeface="+mn-ea"/>
+                <a:cs typeface="+mn-cs"/>
+              </a:defRPr>
+            </a:lvl6pPr>
+            <a:lvl7pPr marL="2743200" algn="l" defTabSz="914400" rtl="0" eaLnBrk="1" latinLnBrk="0" hangingPunct="1">
+              <a:defRPr sz="1800" kern="1200">
+                <a:solidFill>
+                  <a:schemeClr val="tx1"/>
+                </a:solidFill>
+                <a:latin typeface="+mn-lt"/>
+                <a:ea typeface="+mn-ea"/>
+                <a:cs typeface="+mn-cs"/>
+              </a:defRPr>
+            </a:lvl7pPr>
+            <a:lvl8pPr marL="3200400" algn="l" defTabSz="914400" rtl="0" eaLnBrk="1" latinLnBrk="0" hangingPunct="1">
+              <a:defRPr sz="1800" kern="1200">
+                <a:solidFill>
+                  <a:schemeClr val="tx1"/>
+                </a:solidFill>
+                <a:latin typeface="+mn-lt"/>
+                <a:ea typeface="+mn-ea"/>
+                <a:cs typeface="+mn-cs"/>
+              </a:defRPr>
+            </a:lvl8pPr>
+            <a:lvl9pPr marL="3657600" algn="l" defTabSz="914400" rtl="0" eaLnBrk="1" latinLnBrk="0" hangingPunct="1">
+              <a:defRPr sz="1800" kern="1200">
+                <a:solidFill>
+                  <a:schemeClr val="tx1"/>
+                </a:solidFill>
+                <a:latin typeface="+mn-lt"/>
+                <a:ea typeface="+mn-ea"/>
+                <a:cs typeface="+mn-cs"/>
+              </a:defRPr>
+            </a:lvl9pPr>
+          </a:lstStyle>
+          <a:p>
+            <a:pPr marL="0" indent="0" algn="l">
+              <a:lnSpc>
+                <a:spcPts val="3800"/>
+              </a:lnSpc>
+              <a:buNone/>
+            </a:pPr>
+            <a:r>
+              <a:rPr lang="en-US" sz="3600" dirty="0">
+                <a:solidFill>
+                  <a:srgbClr val="1B1B27"/>
+                </a:solidFill>
+                <a:latin typeface="Arial" panose="020B0604020202020204" pitchFamily="34" charset="0"/>
+                <a:ea typeface="Alexandria" pitchFamily="34" charset="-122"/>
+                <a:cs typeface="Arial" panose="020B0604020202020204" pitchFamily="34" charset="0"/>
+              </a:rPr>
+              <a:t>Battery Model Mathematical Formulation</a:t>
+            </a:r>
+            <a:endParaRPr lang="en-US" sz="3600" dirty="0">
+              <a:latin typeface="Arial" panose="020B0604020202020204" pitchFamily="34" charset="0"/>
+              <a:cs typeface="Arial" panose="020B0604020202020204" pitchFamily="34" charset="0"/>
+            </a:endParaRPr>
+          </a:p>
+        </p:txBody>
+      </p:sp>
+      <p:sp>
+        <p:nvSpPr>
+          <p:cNvPr id="30" name="Text 4">
+            <a:extLst>
+              <a:ext uri="{FF2B5EF4-FFF2-40B4-BE49-F238E27FC236}">
+                <a16:creationId xmlns:a16="http://schemas.microsoft.com/office/drawing/2014/main" id="{2005AAC9-6078-3B0F-B66D-D712A272CEB8}"/>
+              </a:ext>
+            </a:extLst>
+          </p:cNvPr>
+          <p:cNvSpPr/>
+          <p:nvPr/>
+        </p:nvSpPr>
+        <p:spPr>
+          <a:xfrm>
+            <a:off x="1047483" y="1469277"/>
+            <a:ext cx="2080736" cy="260152"/>
+          </a:xfrm>
+          <a:prstGeom prst="rect">
+            <a:avLst/>
+          </a:prstGeom>
+          <a:noFill/>
+          <a:ln/>
+        </p:spPr>
+        <p:txBody>
+          <a:bodyPr wrap="none" lIns="0" tIns="0" rIns="0" bIns="0" rtlCol="0" anchor="t"/>
+          <a:lstStyle>
+            <a:defPPr>
+              <a:defRPr lang="de-DE"/>
+            </a:defPPr>
+            <a:lvl1pPr marL="0" algn="l" defTabSz="914400" rtl="0" eaLnBrk="1" latinLnBrk="0" hangingPunct="1">
+              <a:defRPr sz="1800" kern="1200">
+                <a:solidFill>
+                  <a:schemeClr val="tx1"/>
+                </a:solidFill>
+                <a:latin typeface="+mn-lt"/>
+                <a:ea typeface="+mn-ea"/>
+                <a:cs typeface="+mn-cs"/>
+              </a:defRPr>
+            </a:lvl1pPr>
+            <a:lvl2pPr marL="457200" algn="l" defTabSz="914400" rtl="0" eaLnBrk="1" latinLnBrk="0" hangingPunct="1">
+              <a:defRPr sz="1800" kern="1200">
+                <a:solidFill>
+                  <a:schemeClr val="tx1"/>
+                </a:solidFill>
+                <a:latin typeface="+mn-lt"/>
+                <a:ea typeface="+mn-ea"/>
+                <a:cs typeface="+mn-cs"/>
+              </a:defRPr>
+            </a:lvl2pPr>
+            <a:lvl3pPr marL="914400" algn="l" defTabSz="914400" rtl="0" eaLnBrk="1" latinLnBrk="0" hangingPunct="1">
+              <a:defRPr sz="1800" kern="1200">
+                <a:solidFill>
+                  <a:schemeClr val="tx1"/>
+                </a:solidFill>
+                <a:latin typeface="+mn-lt"/>
+                <a:ea typeface="+mn-ea"/>
+                <a:cs typeface="+mn-cs"/>
+              </a:defRPr>
+            </a:lvl3pPr>
+            <a:lvl4pPr marL="1371600" algn="l" defTabSz="914400" rtl="0" eaLnBrk="1" latinLnBrk="0" hangingPunct="1">
+              <a:defRPr sz="1800" kern="1200">
+                <a:solidFill>
+                  <a:schemeClr val="tx1"/>
+                </a:solidFill>
+                <a:latin typeface="+mn-lt"/>
+                <a:ea typeface="+mn-ea"/>
+                <a:cs typeface="+mn-cs"/>
+              </a:defRPr>
+            </a:lvl4pPr>
+            <a:lvl5pPr marL="1828800" algn="l" defTabSz="914400" rtl="0" eaLnBrk="1" latinLnBrk="0" hangingPunct="1">
+              <a:defRPr sz="1800" kern="1200">
+                <a:solidFill>
+                  <a:schemeClr val="tx1"/>
+                </a:solidFill>
+                <a:latin typeface="+mn-lt"/>
+                <a:ea typeface="+mn-ea"/>
+                <a:cs typeface="+mn-cs"/>
+              </a:defRPr>
+            </a:lvl5pPr>
+            <a:lvl6pPr marL="2286000" algn="l" defTabSz="914400" rtl="0" eaLnBrk="1" latinLnBrk="0" hangingPunct="1">
+              <a:defRPr sz="1800" kern="1200">
+                <a:solidFill>
+                  <a:schemeClr val="tx1"/>
+                </a:solidFill>
+                <a:latin typeface="+mn-lt"/>
+                <a:ea typeface="+mn-ea"/>
+                <a:cs typeface="+mn-cs"/>
+              </a:defRPr>
+            </a:lvl6pPr>
+            <a:lvl7pPr marL="2743200" algn="l" defTabSz="914400" rtl="0" eaLnBrk="1" latinLnBrk="0" hangingPunct="1">
+              <a:defRPr sz="1800" kern="1200">
+                <a:solidFill>
+                  <a:schemeClr val="tx1"/>
+                </a:solidFill>
+                <a:latin typeface="+mn-lt"/>
+                <a:ea typeface="+mn-ea"/>
+                <a:cs typeface="+mn-cs"/>
+              </a:defRPr>
+            </a:lvl7pPr>
+            <a:lvl8pPr marL="3200400" algn="l" defTabSz="914400" rtl="0" eaLnBrk="1" latinLnBrk="0" hangingPunct="1">
+              <a:defRPr sz="1800" kern="1200">
+                <a:solidFill>
+                  <a:schemeClr val="tx1"/>
+                </a:solidFill>
+                <a:latin typeface="+mn-lt"/>
+                <a:ea typeface="+mn-ea"/>
+                <a:cs typeface="+mn-cs"/>
+              </a:defRPr>
+            </a:lvl8pPr>
+            <a:lvl9pPr marL="3657600" algn="l" defTabSz="914400" rtl="0" eaLnBrk="1" latinLnBrk="0" hangingPunct="1">
+              <a:defRPr sz="1800" kern="1200">
+                <a:solidFill>
+                  <a:schemeClr val="tx1"/>
+                </a:solidFill>
+                <a:latin typeface="+mn-lt"/>
+                <a:ea typeface="+mn-ea"/>
+                <a:cs typeface="+mn-cs"/>
+              </a:defRPr>
+            </a:lvl9pPr>
+          </a:lstStyle>
+          <a:p>
+            <a:pPr marL="0" indent="0" algn="l">
+              <a:lnSpc>
+                <a:spcPts val="2000"/>
+              </a:lnSpc>
+              <a:buNone/>
+            </a:pPr>
+            <a:r>
+              <a:rPr lang="en-US" b="1" dirty="0">
+                <a:solidFill>
+                  <a:srgbClr val="1B1B27"/>
+                </a:solidFill>
+                <a:latin typeface="Arial" panose="020B0604020202020204" pitchFamily="34" charset="0"/>
+                <a:ea typeface="Alexandria" pitchFamily="34" charset="-122"/>
+                <a:cs typeface="Arial" panose="020B0604020202020204" pitchFamily="34" charset="0"/>
+              </a:rPr>
+              <a:t>Objective Function</a:t>
+            </a:r>
+            <a:endParaRPr lang="en-US" b="1" dirty="0">
+              <a:latin typeface="Arial" panose="020B0604020202020204" pitchFamily="34" charset="0"/>
+              <a:cs typeface="Arial" panose="020B0604020202020204" pitchFamily="34" charset="0"/>
+            </a:endParaRPr>
+          </a:p>
+        </p:txBody>
+      </p:sp>
+      <p:sp>
+        <p:nvSpPr>
+          <p:cNvPr id="31" name="Text 5">
+            <a:extLst>
+              <a:ext uri="{FF2B5EF4-FFF2-40B4-BE49-F238E27FC236}">
+                <a16:creationId xmlns:a16="http://schemas.microsoft.com/office/drawing/2014/main" id="{BF545353-267D-447F-F1E0-4F1AAEE6949F}"/>
+              </a:ext>
+            </a:extLst>
+          </p:cNvPr>
+          <p:cNvSpPr/>
+          <p:nvPr/>
+        </p:nvSpPr>
+        <p:spPr>
+          <a:xfrm>
+            <a:off x="1047483" y="1856587"/>
+            <a:ext cx="9571434" cy="447794"/>
+          </a:xfrm>
+          <a:prstGeom prst="rect">
+            <a:avLst/>
+          </a:prstGeom>
+          <a:noFill/>
+          <a:ln/>
+        </p:spPr>
+        <p:txBody>
+          <a:bodyPr wrap="square" lIns="0" tIns="0" rIns="0" bIns="0" rtlCol="0" anchor="t"/>
+          <a:lstStyle>
+            <a:defPPr>
+              <a:defRPr lang="de-DE"/>
+            </a:defPPr>
+            <a:lvl1pPr marL="0" algn="l" defTabSz="914400" rtl="0" eaLnBrk="1" latinLnBrk="0" hangingPunct="1">
+              <a:defRPr sz="1800" kern="1200">
+                <a:solidFill>
+                  <a:schemeClr val="tx1"/>
+                </a:solidFill>
+                <a:latin typeface="+mn-lt"/>
+                <a:ea typeface="+mn-ea"/>
+                <a:cs typeface="+mn-cs"/>
+              </a:defRPr>
+            </a:lvl1pPr>
+            <a:lvl2pPr marL="457200" algn="l" defTabSz="914400" rtl="0" eaLnBrk="1" latinLnBrk="0" hangingPunct="1">
+              <a:defRPr sz="1800" kern="1200">
+                <a:solidFill>
+                  <a:schemeClr val="tx1"/>
+                </a:solidFill>
+                <a:latin typeface="+mn-lt"/>
+                <a:ea typeface="+mn-ea"/>
+                <a:cs typeface="+mn-cs"/>
+              </a:defRPr>
+            </a:lvl2pPr>
+            <a:lvl3pPr marL="914400" algn="l" defTabSz="914400" rtl="0" eaLnBrk="1" latinLnBrk="0" hangingPunct="1">
+              <a:defRPr sz="1800" kern="1200">
+                <a:solidFill>
+                  <a:schemeClr val="tx1"/>
+                </a:solidFill>
+                <a:latin typeface="+mn-lt"/>
+                <a:ea typeface="+mn-ea"/>
+                <a:cs typeface="+mn-cs"/>
+              </a:defRPr>
+            </a:lvl3pPr>
+            <a:lvl4pPr marL="1371600" algn="l" defTabSz="914400" rtl="0" eaLnBrk="1" latinLnBrk="0" hangingPunct="1">
+              <a:defRPr sz="1800" kern="1200">
+                <a:solidFill>
+                  <a:schemeClr val="tx1"/>
+                </a:solidFill>
+                <a:latin typeface="+mn-lt"/>
+                <a:ea typeface="+mn-ea"/>
+                <a:cs typeface="+mn-cs"/>
+              </a:defRPr>
+            </a:lvl4pPr>
+            <a:lvl5pPr marL="1828800" algn="l" defTabSz="914400" rtl="0" eaLnBrk="1" latinLnBrk="0" hangingPunct="1">
+              <a:defRPr sz="1800" kern="1200">
+                <a:solidFill>
+                  <a:schemeClr val="tx1"/>
+                </a:solidFill>
+                <a:latin typeface="+mn-lt"/>
+                <a:ea typeface="+mn-ea"/>
+                <a:cs typeface="+mn-cs"/>
+              </a:defRPr>
+            </a:lvl5pPr>
+            <a:lvl6pPr marL="2286000" algn="l" defTabSz="914400" rtl="0" eaLnBrk="1" latinLnBrk="0" hangingPunct="1">
+              <a:defRPr sz="1800" kern="1200">
+                <a:solidFill>
+                  <a:schemeClr val="tx1"/>
+                </a:solidFill>
+                <a:latin typeface="+mn-lt"/>
+                <a:ea typeface="+mn-ea"/>
+                <a:cs typeface="+mn-cs"/>
+              </a:defRPr>
+            </a:lvl6pPr>
+            <a:lvl7pPr marL="2743200" algn="l" defTabSz="914400" rtl="0" eaLnBrk="1" latinLnBrk="0" hangingPunct="1">
+              <a:defRPr sz="1800" kern="1200">
+                <a:solidFill>
+                  <a:schemeClr val="tx1"/>
+                </a:solidFill>
+                <a:latin typeface="+mn-lt"/>
+                <a:ea typeface="+mn-ea"/>
+                <a:cs typeface="+mn-cs"/>
+              </a:defRPr>
+            </a:lvl7pPr>
+            <a:lvl8pPr marL="3200400" algn="l" defTabSz="914400" rtl="0" eaLnBrk="1" latinLnBrk="0" hangingPunct="1">
+              <a:defRPr sz="1800" kern="1200">
+                <a:solidFill>
+                  <a:schemeClr val="tx1"/>
+                </a:solidFill>
+                <a:latin typeface="+mn-lt"/>
+                <a:ea typeface="+mn-ea"/>
+                <a:cs typeface="+mn-cs"/>
+              </a:defRPr>
+            </a:lvl8pPr>
+            <a:lvl9pPr marL="3657600" algn="l" defTabSz="914400" rtl="0" eaLnBrk="1" latinLnBrk="0" hangingPunct="1">
+              <a:defRPr sz="1800" kern="1200">
+                <a:solidFill>
+                  <a:schemeClr val="tx1"/>
+                </a:solidFill>
+                <a:latin typeface="+mn-lt"/>
+                <a:ea typeface="+mn-ea"/>
+                <a:cs typeface="+mn-cs"/>
+              </a:defRPr>
+            </a:lvl9pPr>
+          </a:lstStyle>
+          <a:p>
+            <a:pPr marL="0" indent="0" algn="l">
+              <a:lnSpc>
+                <a:spcPts val="1550"/>
+              </a:lnSpc>
+              <a:buNone/>
+            </a:pPr>
+            <a:endParaRPr lang="en-US" sz="1200" dirty="0">
+              <a:latin typeface="Arial" panose="020B0604020202020204" pitchFamily="34" charset="0"/>
+              <a:cs typeface="Arial" panose="020B0604020202020204" pitchFamily="34" charset="0"/>
+            </a:endParaRPr>
+          </a:p>
+        </p:txBody>
+      </p:sp>
+      <p:pic>
+        <p:nvPicPr>
+          <p:cNvPr id="32" name="Image 0">
+            <a:extLst>
+              <a:ext uri="{FF2B5EF4-FFF2-40B4-BE49-F238E27FC236}">
+                <a16:creationId xmlns:a16="http://schemas.microsoft.com/office/drawing/2014/main" id="{8FF3F173-ECEF-79D6-7C4A-BB89DCEE2852}"/>
+              </a:ext>
+            </a:extLst>
+          </p:cNvPr>
+          <p:cNvPicPr>
+            <a:picLocks noChangeAspect="1"/>
+          </p:cNvPicPr>
+          <p:nvPr/>
+        </p:nvPicPr>
+        <p:blipFill>
+          <a:blip r:embed="rId2"/>
+          <a:stretch>
+            <a:fillRect/>
+          </a:stretch>
+        </p:blipFill>
+        <p:spPr>
+          <a:xfrm>
+            <a:off x="1047483" y="1856587"/>
+            <a:ext cx="9571434" cy="447794"/>
+          </a:xfrm>
+          <a:prstGeom prst="rect">
+            <a:avLst/>
+          </a:prstGeom>
+        </p:spPr>
+      </p:pic>
+      <p:sp>
+        <p:nvSpPr>
+          <p:cNvPr id="33" name="Text 6">
+            <a:extLst>
+              <a:ext uri="{FF2B5EF4-FFF2-40B4-BE49-F238E27FC236}">
+                <a16:creationId xmlns:a16="http://schemas.microsoft.com/office/drawing/2014/main" id="{6A3DF424-C0D6-AEEB-4F77-C602D4B29BF8}"/>
+              </a:ext>
+            </a:extLst>
+          </p:cNvPr>
+          <p:cNvSpPr/>
+          <p:nvPr/>
+        </p:nvSpPr>
+        <p:spPr>
+          <a:xfrm>
+            <a:off x="1047483" y="2431540"/>
+            <a:ext cx="2529721" cy="260152"/>
+          </a:xfrm>
+          <a:prstGeom prst="rect">
+            <a:avLst/>
+          </a:prstGeom>
+          <a:noFill/>
+          <a:ln/>
+        </p:spPr>
+        <p:txBody>
+          <a:bodyPr wrap="none" lIns="0" tIns="0" rIns="0" bIns="0" rtlCol="0" anchor="t"/>
+          <a:lstStyle>
+            <a:defPPr>
+              <a:defRPr lang="de-DE"/>
+            </a:defPPr>
+            <a:lvl1pPr marL="0" algn="l" defTabSz="914400" rtl="0" eaLnBrk="1" latinLnBrk="0" hangingPunct="1">
+              <a:defRPr sz="1800" kern="1200">
+                <a:solidFill>
+                  <a:schemeClr val="tx1"/>
+                </a:solidFill>
+                <a:latin typeface="+mn-lt"/>
+                <a:ea typeface="+mn-ea"/>
+                <a:cs typeface="+mn-cs"/>
+              </a:defRPr>
+            </a:lvl1pPr>
+            <a:lvl2pPr marL="457200" algn="l" defTabSz="914400" rtl="0" eaLnBrk="1" latinLnBrk="0" hangingPunct="1">
+              <a:defRPr sz="1800" kern="1200">
+                <a:solidFill>
+                  <a:schemeClr val="tx1"/>
+                </a:solidFill>
+                <a:latin typeface="+mn-lt"/>
+                <a:ea typeface="+mn-ea"/>
+                <a:cs typeface="+mn-cs"/>
+              </a:defRPr>
+            </a:lvl2pPr>
+            <a:lvl3pPr marL="914400" algn="l" defTabSz="914400" rtl="0" eaLnBrk="1" latinLnBrk="0" hangingPunct="1">
+              <a:defRPr sz="1800" kern="1200">
+                <a:solidFill>
+                  <a:schemeClr val="tx1"/>
+                </a:solidFill>
+                <a:latin typeface="+mn-lt"/>
+                <a:ea typeface="+mn-ea"/>
+                <a:cs typeface="+mn-cs"/>
+              </a:defRPr>
+            </a:lvl3pPr>
+            <a:lvl4pPr marL="1371600" algn="l" defTabSz="914400" rtl="0" eaLnBrk="1" latinLnBrk="0" hangingPunct="1">
+              <a:defRPr sz="1800" kern="1200">
+                <a:solidFill>
+                  <a:schemeClr val="tx1"/>
+                </a:solidFill>
+                <a:latin typeface="+mn-lt"/>
+                <a:ea typeface="+mn-ea"/>
+                <a:cs typeface="+mn-cs"/>
+              </a:defRPr>
+            </a:lvl4pPr>
+            <a:lvl5pPr marL="1828800" algn="l" defTabSz="914400" rtl="0" eaLnBrk="1" latinLnBrk="0" hangingPunct="1">
+              <a:defRPr sz="1800" kern="1200">
+                <a:solidFill>
+                  <a:schemeClr val="tx1"/>
+                </a:solidFill>
+                <a:latin typeface="+mn-lt"/>
+                <a:ea typeface="+mn-ea"/>
+                <a:cs typeface="+mn-cs"/>
+              </a:defRPr>
+            </a:lvl5pPr>
+            <a:lvl6pPr marL="2286000" algn="l" defTabSz="914400" rtl="0" eaLnBrk="1" latinLnBrk="0" hangingPunct="1">
+              <a:defRPr sz="1800" kern="1200">
+                <a:solidFill>
+                  <a:schemeClr val="tx1"/>
+                </a:solidFill>
+                <a:latin typeface="+mn-lt"/>
+                <a:ea typeface="+mn-ea"/>
+                <a:cs typeface="+mn-cs"/>
+              </a:defRPr>
+            </a:lvl6pPr>
+            <a:lvl7pPr marL="2743200" algn="l" defTabSz="914400" rtl="0" eaLnBrk="1" latinLnBrk="0" hangingPunct="1">
+              <a:defRPr sz="1800" kern="1200">
+                <a:solidFill>
+                  <a:schemeClr val="tx1"/>
+                </a:solidFill>
+                <a:latin typeface="+mn-lt"/>
+                <a:ea typeface="+mn-ea"/>
+                <a:cs typeface="+mn-cs"/>
+              </a:defRPr>
+            </a:lvl7pPr>
+            <a:lvl8pPr marL="3200400" algn="l" defTabSz="914400" rtl="0" eaLnBrk="1" latinLnBrk="0" hangingPunct="1">
+              <a:defRPr sz="1800" kern="1200">
+                <a:solidFill>
+                  <a:schemeClr val="tx1"/>
+                </a:solidFill>
+                <a:latin typeface="+mn-lt"/>
+                <a:ea typeface="+mn-ea"/>
+                <a:cs typeface="+mn-cs"/>
+              </a:defRPr>
+            </a:lvl8pPr>
+            <a:lvl9pPr marL="3657600" algn="l" defTabSz="914400" rtl="0" eaLnBrk="1" latinLnBrk="0" hangingPunct="1">
+              <a:defRPr sz="1800" kern="1200">
+                <a:solidFill>
+                  <a:schemeClr val="tx1"/>
+                </a:solidFill>
+                <a:latin typeface="+mn-lt"/>
+                <a:ea typeface="+mn-ea"/>
+                <a:cs typeface="+mn-cs"/>
+              </a:defRPr>
+            </a:lvl9pPr>
+          </a:lstStyle>
+          <a:p>
+            <a:pPr marL="0" indent="0" algn="l">
+              <a:lnSpc>
+                <a:spcPts val="2000"/>
+              </a:lnSpc>
+              <a:buNone/>
+            </a:pPr>
+            <a:r>
+              <a:rPr lang="en-US" b="1" dirty="0">
+                <a:solidFill>
+                  <a:srgbClr val="1B1B27"/>
+                </a:solidFill>
+                <a:latin typeface="Arial" panose="020B0604020202020204" pitchFamily="34" charset="0"/>
+                <a:ea typeface="Alexandria" pitchFamily="34" charset="-122"/>
+                <a:cs typeface="Arial" panose="020B0604020202020204" pitchFamily="34" charset="0"/>
+              </a:rPr>
+              <a:t>Power Gating Constraint</a:t>
+            </a:r>
+            <a:endParaRPr lang="en-US" b="1" dirty="0">
+              <a:latin typeface="Arial" panose="020B0604020202020204" pitchFamily="34" charset="0"/>
+              <a:cs typeface="Arial" panose="020B0604020202020204" pitchFamily="34" charset="0"/>
+            </a:endParaRPr>
+          </a:p>
+        </p:txBody>
+      </p:sp>
+      <p:sp>
+        <p:nvSpPr>
+          <p:cNvPr id="34" name="Text 7">
+            <a:extLst>
+              <a:ext uri="{FF2B5EF4-FFF2-40B4-BE49-F238E27FC236}">
+                <a16:creationId xmlns:a16="http://schemas.microsoft.com/office/drawing/2014/main" id="{DD762A5D-DCE1-A9B1-B8D1-45735992C8B2}"/>
+              </a:ext>
+            </a:extLst>
+          </p:cNvPr>
+          <p:cNvSpPr/>
+          <p:nvPr/>
+        </p:nvSpPr>
+        <p:spPr>
+          <a:xfrm>
+            <a:off x="1047483" y="2818850"/>
+            <a:ext cx="9571434" cy="234196"/>
+          </a:xfrm>
+          <a:prstGeom prst="rect">
+            <a:avLst/>
+          </a:prstGeom>
+          <a:noFill/>
+          <a:ln/>
+        </p:spPr>
+        <p:txBody>
+          <a:bodyPr wrap="none" lIns="0" tIns="0" rIns="0" bIns="0" rtlCol="0" anchor="t"/>
+          <a:lstStyle>
+            <a:defPPr>
+              <a:defRPr lang="de-DE"/>
+            </a:defPPr>
+            <a:lvl1pPr marL="0" algn="l" defTabSz="914400" rtl="0" eaLnBrk="1" latinLnBrk="0" hangingPunct="1">
+              <a:defRPr sz="1800" kern="1200">
+                <a:solidFill>
+                  <a:schemeClr val="tx1"/>
+                </a:solidFill>
+                <a:latin typeface="+mn-lt"/>
+                <a:ea typeface="+mn-ea"/>
+                <a:cs typeface="+mn-cs"/>
+              </a:defRPr>
+            </a:lvl1pPr>
+            <a:lvl2pPr marL="457200" algn="l" defTabSz="914400" rtl="0" eaLnBrk="1" latinLnBrk="0" hangingPunct="1">
+              <a:defRPr sz="1800" kern="1200">
+                <a:solidFill>
+                  <a:schemeClr val="tx1"/>
+                </a:solidFill>
+                <a:latin typeface="+mn-lt"/>
+                <a:ea typeface="+mn-ea"/>
+                <a:cs typeface="+mn-cs"/>
+              </a:defRPr>
+            </a:lvl2pPr>
+            <a:lvl3pPr marL="914400" algn="l" defTabSz="914400" rtl="0" eaLnBrk="1" latinLnBrk="0" hangingPunct="1">
+              <a:defRPr sz="1800" kern="1200">
+                <a:solidFill>
+                  <a:schemeClr val="tx1"/>
+                </a:solidFill>
+                <a:latin typeface="+mn-lt"/>
+                <a:ea typeface="+mn-ea"/>
+                <a:cs typeface="+mn-cs"/>
+              </a:defRPr>
+            </a:lvl3pPr>
+            <a:lvl4pPr marL="1371600" algn="l" defTabSz="914400" rtl="0" eaLnBrk="1" latinLnBrk="0" hangingPunct="1">
+              <a:defRPr sz="1800" kern="1200">
+                <a:solidFill>
+                  <a:schemeClr val="tx1"/>
+                </a:solidFill>
+                <a:latin typeface="+mn-lt"/>
+                <a:ea typeface="+mn-ea"/>
+                <a:cs typeface="+mn-cs"/>
+              </a:defRPr>
+            </a:lvl4pPr>
+            <a:lvl5pPr marL="1828800" algn="l" defTabSz="914400" rtl="0" eaLnBrk="1" latinLnBrk="0" hangingPunct="1">
+              <a:defRPr sz="1800" kern="1200">
+                <a:solidFill>
+                  <a:schemeClr val="tx1"/>
+                </a:solidFill>
+                <a:latin typeface="+mn-lt"/>
+                <a:ea typeface="+mn-ea"/>
+                <a:cs typeface="+mn-cs"/>
+              </a:defRPr>
+            </a:lvl5pPr>
+            <a:lvl6pPr marL="2286000" algn="l" defTabSz="914400" rtl="0" eaLnBrk="1" latinLnBrk="0" hangingPunct="1">
+              <a:defRPr sz="1800" kern="1200">
+                <a:solidFill>
+                  <a:schemeClr val="tx1"/>
+                </a:solidFill>
+                <a:latin typeface="+mn-lt"/>
+                <a:ea typeface="+mn-ea"/>
+                <a:cs typeface="+mn-cs"/>
+              </a:defRPr>
+            </a:lvl6pPr>
+            <a:lvl7pPr marL="2743200" algn="l" defTabSz="914400" rtl="0" eaLnBrk="1" latinLnBrk="0" hangingPunct="1">
+              <a:defRPr sz="1800" kern="1200">
+                <a:solidFill>
+                  <a:schemeClr val="tx1"/>
+                </a:solidFill>
+                <a:latin typeface="+mn-lt"/>
+                <a:ea typeface="+mn-ea"/>
+                <a:cs typeface="+mn-cs"/>
+              </a:defRPr>
+            </a:lvl7pPr>
+            <a:lvl8pPr marL="3200400" algn="l" defTabSz="914400" rtl="0" eaLnBrk="1" latinLnBrk="0" hangingPunct="1">
+              <a:defRPr sz="1800" kern="1200">
+                <a:solidFill>
+                  <a:schemeClr val="tx1"/>
+                </a:solidFill>
+                <a:latin typeface="+mn-lt"/>
+                <a:ea typeface="+mn-ea"/>
+                <a:cs typeface="+mn-cs"/>
+              </a:defRPr>
+            </a:lvl8pPr>
+            <a:lvl9pPr marL="3657600" algn="l" defTabSz="914400" rtl="0" eaLnBrk="1" latinLnBrk="0" hangingPunct="1">
+              <a:defRPr sz="1800" kern="1200">
+                <a:solidFill>
+                  <a:schemeClr val="tx1"/>
+                </a:solidFill>
+                <a:latin typeface="+mn-lt"/>
+                <a:ea typeface="+mn-ea"/>
+                <a:cs typeface="+mn-cs"/>
+              </a:defRPr>
+            </a:lvl9pPr>
+          </a:lstStyle>
+          <a:p>
+            <a:pPr marL="0" indent="0" algn="l">
+              <a:lnSpc>
+                <a:spcPts val="1550"/>
+              </a:lnSpc>
+              <a:buNone/>
+            </a:pPr>
+            <a:endParaRPr lang="en-US" sz="1200" dirty="0">
+              <a:latin typeface="Arial" panose="020B0604020202020204" pitchFamily="34" charset="0"/>
+              <a:cs typeface="Arial" panose="020B0604020202020204" pitchFamily="34" charset="0"/>
+            </a:endParaRPr>
+          </a:p>
+        </p:txBody>
+      </p:sp>
+      <p:pic>
+        <p:nvPicPr>
+          <p:cNvPr id="35" name="Image 1">
+            <a:extLst>
+              <a:ext uri="{FF2B5EF4-FFF2-40B4-BE49-F238E27FC236}">
+                <a16:creationId xmlns:a16="http://schemas.microsoft.com/office/drawing/2014/main" id="{5B55AACB-99C1-2EA5-0BC9-688368D23AEC}"/>
+              </a:ext>
+            </a:extLst>
+          </p:cNvPr>
+          <p:cNvPicPr>
+            <a:picLocks noChangeAspect="1"/>
+          </p:cNvPicPr>
+          <p:nvPr/>
+        </p:nvPicPr>
+        <p:blipFill>
+          <a:blip r:embed="rId3"/>
+          <a:stretch>
+            <a:fillRect/>
+          </a:stretch>
+        </p:blipFill>
+        <p:spPr>
+          <a:xfrm>
+            <a:off x="1047483" y="2818850"/>
+            <a:ext cx="9571434" cy="234196"/>
+          </a:xfrm>
+          <a:prstGeom prst="rect">
+            <a:avLst/>
+          </a:prstGeom>
+        </p:spPr>
+      </p:pic>
+      <p:sp>
+        <p:nvSpPr>
+          <p:cNvPr id="36" name="Text 8">
+            <a:extLst>
+              <a:ext uri="{FF2B5EF4-FFF2-40B4-BE49-F238E27FC236}">
+                <a16:creationId xmlns:a16="http://schemas.microsoft.com/office/drawing/2014/main" id="{342AB95E-D50E-50CD-1349-3FE1FEB93087}"/>
+              </a:ext>
+            </a:extLst>
+          </p:cNvPr>
+          <p:cNvSpPr/>
+          <p:nvPr/>
+        </p:nvSpPr>
+        <p:spPr>
+          <a:xfrm>
+            <a:off x="1047483" y="3160322"/>
+            <a:ext cx="9571434" cy="178713"/>
+          </a:xfrm>
+          <a:prstGeom prst="rect">
+            <a:avLst/>
+          </a:prstGeom>
+          <a:noFill/>
+          <a:ln/>
+        </p:spPr>
+        <p:txBody>
+          <a:bodyPr wrap="none" lIns="0" tIns="0" rIns="0" bIns="0" rtlCol="0" anchor="t"/>
+          <a:lstStyle>
+            <a:defPPr>
+              <a:defRPr lang="de-DE"/>
+            </a:defPPr>
+            <a:lvl1pPr marL="0" algn="l" defTabSz="914400" rtl="0" eaLnBrk="1" latinLnBrk="0" hangingPunct="1">
+              <a:defRPr sz="1800" kern="1200">
+                <a:solidFill>
+                  <a:schemeClr val="tx1"/>
+                </a:solidFill>
+                <a:latin typeface="+mn-lt"/>
+                <a:ea typeface="+mn-ea"/>
+                <a:cs typeface="+mn-cs"/>
+              </a:defRPr>
+            </a:lvl1pPr>
+            <a:lvl2pPr marL="457200" algn="l" defTabSz="914400" rtl="0" eaLnBrk="1" latinLnBrk="0" hangingPunct="1">
+              <a:defRPr sz="1800" kern="1200">
+                <a:solidFill>
+                  <a:schemeClr val="tx1"/>
+                </a:solidFill>
+                <a:latin typeface="+mn-lt"/>
+                <a:ea typeface="+mn-ea"/>
+                <a:cs typeface="+mn-cs"/>
+              </a:defRPr>
+            </a:lvl2pPr>
+            <a:lvl3pPr marL="914400" algn="l" defTabSz="914400" rtl="0" eaLnBrk="1" latinLnBrk="0" hangingPunct="1">
+              <a:defRPr sz="1800" kern="1200">
+                <a:solidFill>
+                  <a:schemeClr val="tx1"/>
+                </a:solidFill>
+                <a:latin typeface="+mn-lt"/>
+                <a:ea typeface="+mn-ea"/>
+                <a:cs typeface="+mn-cs"/>
+              </a:defRPr>
+            </a:lvl3pPr>
+            <a:lvl4pPr marL="1371600" algn="l" defTabSz="914400" rtl="0" eaLnBrk="1" latinLnBrk="0" hangingPunct="1">
+              <a:defRPr sz="1800" kern="1200">
+                <a:solidFill>
+                  <a:schemeClr val="tx1"/>
+                </a:solidFill>
+                <a:latin typeface="+mn-lt"/>
+                <a:ea typeface="+mn-ea"/>
+                <a:cs typeface="+mn-cs"/>
+              </a:defRPr>
+            </a:lvl4pPr>
+            <a:lvl5pPr marL="1828800" algn="l" defTabSz="914400" rtl="0" eaLnBrk="1" latinLnBrk="0" hangingPunct="1">
+              <a:defRPr sz="1800" kern="1200">
+                <a:solidFill>
+                  <a:schemeClr val="tx1"/>
+                </a:solidFill>
+                <a:latin typeface="+mn-lt"/>
+                <a:ea typeface="+mn-ea"/>
+                <a:cs typeface="+mn-cs"/>
+              </a:defRPr>
+            </a:lvl5pPr>
+            <a:lvl6pPr marL="2286000" algn="l" defTabSz="914400" rtl="0" eaLnBrk="1" latinLnBrk="0" hangingPunct="1">
+              <a:defRPr sz="1800" kern="1200">
+                <a:solidFill>
+                  <a:schemeClr val="tx1"/>
+                </a:solidFill>
+                <a:latin typeface="+mn-lt"/>
+                <a:ea typeface="+mn-ea"/>
+                <a:cs typeface="+mn-cs"/>
+              </a:defRPr>
+            </a:lvl6pPr>
+            <a:lvl7pPr marL="2743200" algn="l" defTabSz="914400" rtl="0" eaLnBrk="1" latinLnBrk="0" hangingPunct="1">
+              <a:defRPr sz="1800" kern="1200">
+                <a:solidFill>
+                  <a:schemeClr val="tx1"/>
+                </a:solidFill>
+                <a:latin typeface="+mn-lt"/>
+                <a:ea typeface="+mn-ea"/>
+                <a:cs typeface="+mn-cs"/>
+              </a:defRPr>
+            </a:lvl7pPr>
+            <a:lvl8pPr marL="3200400" algn="l" defTabSz="914400" rtl="0" eaLnBrk="1" latinLnBrk="0" hangingPunct="1">
+              <a:defRPr sz="1800" kern="1200">
+                <a:solidFill>
+                  <a:schemeClr val="tx1"/>
+                </a:solidFill>
+                <a:latin typeface="+mn-lt"/>
+                <a:ea typeface="+mn-ea"/>
+                <a:cs typeface="+mn-cs"/>
+              </a:defRPr>
+            </a:lvl8pPr>
+            <a:lvl9pPr marL="3657600" algn="l" defTabSz="914400" rtl="0" eaLnBrk="1" latinLnBrk="0" hangingPunct="1">
+              <a:defRPr sz="1800" kern="1200">
+                <a:solidFill>
+                  <a:schemeClr val="tx1"/>
+                </a:solidFill>
+                <a:latin typeface="+mn-lt"/>
+                <a:ea typeface="+mn-ea"/>
+                <a:cs typeface="+mn-cs"/>
+              </a:defRPr>
+            </a:lvl9pPr>
+          </a:lstStyle>
+          <a:p>
+            <a:pPr marL="0" indent="0" algn="l">
+              <a:lnSpc>
+                <a:spcPts val="1400"/>
+              </a:lnSpc>
+              <a:buNone/>
+            </a:pPr>
+            <a:r>
+              <a:rPr lang="en-US" sz="1400" dirty="0">
+                <a:solidFill>
+                  <a:srgbClr val="404155"/>
+                </a:solidFill>
+                <a:latin typeface="Arial" panose="020B0604020202020204" pitchFamily="34" charset="0"/>
+                <a:ea typeface="Nobile" pitchFamily="34" charset="-122"/>
+                <a:cs typeface="Arial" panose="020B0604020202020204" pitchFamily="34" charset="0"/>
+              </a:rPr>
+              <a:t>Where the smoothing terms are defined as:</a:t>
+            </a:r>
+            <a:endParaRPr lang="en-US" sz="1400" dirty="0">
+              <a:latin typeface="Arial" panose="020B0604020202020204" pitchFamily="34" charset="0"/>
+              <a:cs typeface="Arial" panose="020B0604020202020204" pitchFamily="34" charset="0"/>
+            </a:endParaRPr>
+          </a:p>
+        </p:txBody>
+      </p:sp>
+      <p:sp>
+        <p:nvSpPr>
+          <p:cNvPr id="37" name="Text 9">
+            <a:extLst>
+              <a:ext uri="{FF2B5EF4-FFF2-40B4-BE49-F238E27FC236}">
+                <a16:creationId xmlns:a16="http://schemas.microsoft.com/office/drawing/2014/main" id="{CAC430F2-7283-343B-42F7-539E278EB2C3}"/>
+              </a:ext>
+            </a:extLst>
+          </p:cNvPr>
+          <p:cNvSpPr/>
+          <p:nvPr/>
+        </p:nvSpPr>
+        <p:spPr>
+          <a:xfrm>
+            <a:off x="1047483" y="3446310"/>
+            <a:ext cx="9571434" cy="1132880"/>
+          </a:xfrm>
+          <a:prstGeom prst="rect">
+            <a:avLst/>
+          </a:prstGeom>
+          <a:noFill/>
+          <a:ln/>
+        </p:spPr>
+        <p:txBody>
+          <a:bodyPr wrap="square" lIns="0" tIns="0" rIns="0" bIns="0" rtlCol="0" anchor="t"/>
+          <a:lstStyle>
+            <a:defPPr>
+              <a:defRPr lang="de-DE"/>
+            </a:defPPr>
+            <a:lvl1pPr marL="0" algn="l" defTabSz="914400" rtl="0" eaLnBrk="1" latinLnBrk="0" hangingPunct="1">
+              <a:defRPr sz="1800" kern="1200">
+                <a:solidFill>
+                  <a:schemeClr val="tx1"/>
+                </a:solidFill>
+                <a:latin typeface="+mn-lt"/>
+                <a:ea typeface="+mn-ea"/>
+                <a:cs typeface="+mn-cs"/>
+              </a:defRPr>
+            </a:lvl1pPr>
+            <a:lvl2pPr marL="457200" algn="l" defTabSz="914400" rtl="0" eaLnBrk="1" latinLnBrk="0" hangingPunct="1">
+              <a:defRPr sz="1800" kern="1200">
+                <a:solidFill>
+                  <a:schemeClr val="tx1"/>
+                </a:solidFill>
+                <a:latin typeface="+mn-lt"/>
+                <a:ea typeface="+mn-ea"/>
+                <a:cs typeface="+mn-cs"/>
+              </a:defRPr>
+            </a:lvl2pPr>
+            <a:lvl3pPr marL="914400" algn="l" defTabSz="914400" rtl="0" eaLnBrk="1" latinLnBrk="0" hangingPunct="1">
+              <a:defRPr sz="1800" kern="1200">
+                <a:solidFill>
+                  <a:schemeClr val="tx1"/>
+                </a:solidFill>
+                <a:latin typeface="+mn-lt"/>
+                <a:ea typeface="+mn-ea"/>
+                <a:cs typeface="+mn-cs"/>
+              </a:defRPr>
+            </a:lvl3pPr>
+            <a:lvl4pPr marL="1371600" algn="l" defTabSz="914400" rtl="0" eaLnBrk="1" latinLnBrk="0" hangingPunct="1">
+              <a:defRPr sz="1800" kern="1200">
+                <a:solidFill>
+                  <a:schemeClr val="tx1"/>
+                </a:solidFill>
+                <a:latin typeface="+mn-lt"/>
+                <a:ea typeface="+mn-ea"/>
+                <a:cs typeface="+mn-cs"/>
+              </a:defRPr>
+            </a:lvl4pPr>
+            <a:lvl5pPr marL="1828800" algn="l" defTabSz="914400" rtl="0" eaLnBrk="1" latinLnBrk="0" hangingPunct="1">
+              <a:defRPr sz="1800" kern="1200">
+                <a:solidFill>
+                  <a:schemeClr val="tx1"/>
+                </a:solidFill>
+                <a:latin typeface="+mn-lt"/>
+                <a:ea typeface="+mn-ea"/>
+                <a:cs typeface="+mn-cs"/>
+              </a:defRPr>
+            </a:lvl5pPr>
+            <a:lvl6pPr marL="2286000" algn="l" defTabSz="914400" rtl="0" eaLnBrk="1" latinLnBrk="0" hangingPunct="1">
+              <a:defRPr sz="1800" kern="1200">
+                <a:solidFill>
+                  <a:schemeClr val="tx1"/>
+                </a:solidFill>
+                <a:latin typeface="+mn-lt"/>
+                <a:ea typeface="+mn-ea"/>
+                <a:cs typeface="+mn-cs"/>
+              </a:defRPr>
+            </a:lvl6pPr>
+            <a:lvl7pPr marL="2743200" algn="l" defTabSz="914400" rtl="0" eaLnBrk="1" latinLnBrk="0" hangingPunct="1">
+              <a:defRPr sz="1800" kern="1200">
+                <a:solidFill>
+                  <a:schemeClr val="tx1"/>
+                </a:solidFill>
+                <a:latin typeface="+mn-lt"/>
+                <a:ea typeface="+mn-ea"/>
+                <a:cs typeface="+mn-cs"/>
+              </a:defRPr>
+            </a:lvl7pPr>
+            <a:lvl8pPr marL="3200400" algn="l" defTabSz="914400" rtl="0" eaLnBrk="1" latinLnBrk="0" hangingPunct="1">
+              <a:defRPr sz="1800" kern="1200">
+                <a:solidFill>
+                  <a:schemeClr val="tx1"/>
+                </a:solidFill>
+                <a:latin typeface="+mn-lt"/>
+                <a:ea typeface="+mn-ea"/>
+                <a:cs typeface="+mn-cs"/>
+              </a:defRPr>
+            </a:lvl8pPr>
+            <a:lvl9pPr marL="3657600" algn="l" defTabSz="914400" rtl="0" eaLnBrk="1" latinLnBrk="0" hangingPunct="1">
+              <a:defRPr sz="1800" kern="1200">
+                <a:solidFill>
+                  <a:schemeClr val="tx1"/>
+                </a:solidFill>
+                <a:latin typeface="+mn-lt"/>
+                <a:ea typeface="+mn-ea"/>
+                <a:cs typeface="+mn-cs"/>
+              </a:defRPr>
+            </a:lvl9pPr>
+          </a:lstStyle>
+          <a:p>
+            <a:pPr marL="0" indent="0" algn="l">
+              <a:lnSpc>
+                <a:spcPts val="1550"/>
+              </a:lnSpc>
+              <a:buNone/>
+            </a:pPr>
+            <a:endParaRPr lang="en-US" sz="1200" dirty="0">
+              <a:latin typeface="Arial" panose="020B0604020202020204" pitchFamily="34" charset="0"/>
+              <a:cs typeface="Arial" panose="020B0604020202020204" pitchFamily="34" charset="0"/>
+            </a:endParaRPr>
+          </a:p>
+        </p:txBody>
+      </p:sp>
+      <p:pic>
+        <p:nvPicPr>
+          <p:cNvPr id="38" name="Image 2">
+            <a:extLst>
+              <a:ext uri="{FF2B5EF4-FFF2-40B4-BE49-F238E27FC236}">
+                <a16:creationId xmlns:a16="http://schemas.microsoft.com/office/drawing/2014/main" id="{FFE99AD7-8D5A-2687-A65B-4C19FC281500}"/>
+              </a:ext>
+            </a:extLst>
+          </p:cNvPr>
+          <p:cNvPicPr>
+            <a:picLocks noChangeAspect="1"/>
+          </p:cNvPicPr>
+          <p:nvPr/>
+        </p:nvPicPr>
+        <p:blipFill>
+          <a:blip r:embed="rId4"/>
+          <a:stretch>
+            <a:fillRect/>
+          </a:stretch>
+        </p:blipFill>
+        <p:spPr>
+          <a:xfrm>
+            <a:off x="1047483" y="3446310"/>
+            <a:ext cx="9571434" cy="1132880"/>
+          </a:xfrm>
+          <a:prstGeom prst="rect">
+            <a:avLst/>
+          </a:prstGeom>
+        </p:spPr>
+      </p:pic>
+      <p:sp>
+        <p:nvSpPr>
+          <p:cNvPr id="39" name="Text 10">
+            <a:extLst>
+              <a:ext uri="{FF2B5EF4-FFF2-40B4-BE49-F238E27FC236}">
+                <a16:creationId xmlns:a16="http://schemas.microsoft.com/office/drawing/2014/main" id="{474BD66A-6697-A5AA-DC94-C08F1CC59C3F}"/>
+              </a:ext>
+            </a:extLst>
+          </p:cNvPr>
+          <p:cNvSpPr/>
+          <p:nvPr/>
+        </p:nvSpPr>
+        <p:spPr>
+          <a:xfrm>
+            <a:off x="1047483" y="4706348"/>
+            <a:ext cx="3406735" cy="260152"/>
+          </a:xfrm>
+          <a:prstGeom prst="rect">
+            <a:avLst/>
+          </a:prstGeom>
+          <a:noFill/>
+          <a:ln/>
+        </p:spPr>
+        <p:txBody>
+          <a:bodyPr wrap="none" lIns="0" tIns="0" rIns="0" bIns="0" rtlCol="0" anchor="t"/>
+          <a:lstStyle>
+            <a:defPPr>
+              <a:defRPr lang="de-DE"/>
+            </a:defPPr>
+            <a:lvl1pPr marL="0" algn="l" defTabSz="914400" rtl="0" eaLnBrk="1" latinLnBrk="0" hangingPunct="1">
+              <a:defRPr sz="1800" kern="1200">
+                <a:solidFill>
+                  <a:schemeClr val="tx1"/>
+                </a:solidFill>
+                <a:latin typeface="+mn-lt"/>
+                <a:ea typeface="+mn-ea"/>
+                <a:cs typeface="+mn-cs"/>
+              </a:defRPr>
+            </a:lvl1pPr>
+            <a:lvl2pPr marL="457200" algn="l" defTabSz="914400" rtl="0" eaLnBrk="1" latinLnBrk="0" hangingPunct="1">
+              <a:defRPr sz="1800" kern="1200">
+                <a:solidFill>
+                  <a:schemeClr val="tx1"/>
+                </a:solidFill>
+                <a:latin typeface="+mn-lt"/>
+                <a:ea typeface="+mn-ea"/>
+                <a:cs typeface="+mn-cs"/>
+              </a:defRPr>
+            </a:lvl2pPr>
+            <a:lvl3pPr marL="914400" algn="l" defTabSz="914400" rtl="0" eaLnBrk="1" latinLnBrk="0" hangingPunct="1">
+              <a:defRPr sz="1800" kern="1200">
+                <a:solidFill>
+                  <a:schemeClr val="tx1"/>
+                </a:solidFill>
+                <a:latin typeface="+mn-lt"/>
+                <a:ea typeface="+mn-ea"/>
+                <a:cs typeface="+mn-cs"/>
+              </a:defRPr>
+            </a:lvl3pPr>
+            <a:lvl4pPr marL="1371600" algn="l" defTabSz="914400" rtl="0" eaLnBrk="1" latinLnBrk="0" hangingPunct="1">
+              <a:defRPr sz="1800" kern="1200">
+                <a:solidFill>
+                  <a:schemeClr val="tx1"/>
+                </a:solidFill>
+                <a:latin typeface="+mn-lt"/>
+                <a:ea typeface="+mn-ea"/>
+                <a:cs typeface="+mn-cs"/>
+              </a:defRPr>
+            </a:lvl4pPr>
+            <a:lvl5pPr marL="1828800" algn="l" defTabSz="914400" rtl="0" eaLnBrk="1" latinLnBrk="0" hangingPunct="1">
+              <a:defRPr sz="1800" kern="1200">
+                <a:solidFill>
+                  <a:schemeClr val="tx1"/>
+                </a:solidFill>
+                <a:latin typeface="+mn-lt"/>
+                <a:ea typeface="+mn-ea"/>
+                <a:cs typeface="+mn-cs"/>
+              </a:defRPr>
+            </a:lvl5pPr>
+            <a:lvl6pPr marL="2286000" algn="l" defTabSz="914400" rtl="0" eaLnBrk="1" latinLnBrk="0" hangingPunct="1">
+              <a:defRPr sz="1800" kern="1200">
+                <a:solidFill>
+                  <a:schemeClr val="tx1"/>
+                </a:solidFill>
+                <a:latin typeface="+mn-lt"/>
+                <a:ea typeface="+mn-ea"/>
+                <a:cs typeface="+mn-cs"/>
+              </a:defRPr>
+            </a:lvl6pPr>
+            <a:lvl7pPr marL="2743200" algn="l" defTabSz="914400" rtl="0" eaLnBrk="1" latinLnBrk="0" hangingPunct="1">
+              <a:defRPr sz="1800" kern="1200">
+                <a:solidFill>
+                  <a:schemeClr val="tx1"/>
+                </a:solidFill>
+                <a:latin typeface="+mn-lt"/>
+                <a:ea typeface="+mn-ea"/>
+                <a:cs typeface="+mn-cs"/>
+              </a:defRPr>
+            </a:lvl7pPr>
+            <a:lvl8pPr marL="3200400" algn="l" defTabSz="914400" rtl="0" eaLnBrk="1" latinLnBrk="0" hangingPunct="1">
+              <a:defRPr sz="1800" kern="1200">
+                <a:solidFill>
+                  <a:schemeClr val="tx1"/>
+                </a:solidFill>
+                <a:latin typeface="+mn-lt"/>
+                <a:ea typeface="+mn-ea"/>
+                <a:cs typeface="+mn-cs"/>
+              </a:defRPr>
+            </a:lvl8pPr>
+            <a:lvl9pPr marL="3657600" algn="l" defTabSz="914400" rtl="0" eaLnBrk="1" latinLnBrk="0" hangingPunct="1">
+              <a:defRPr sz="1800" kern="1200">
+                <a:solidFill>
+                  <a:schemeClr val="tx1"/>
+                </a:solidFill>
+                <a:latin typeface="+mn-lt"/>
+                <a:ea typeface="+mn-ea"/>
+                <a:cs typeface="+mn-cs"/>
+              </a:defRPr>
+            </a:lvl9pPr>
+          </a:lstStyle>
+          <a:p>
+            <a:pPr marL="0" indent="0" algn="l">
+              <a:lnSpc>
+                <a:spcPts val="2000"/>
+              </a:lnSpc>
+              <a:buNone/>
+            </a:pPr>
+            <a:r>
+              <a:rPr lang="en-US" b="1" dirty="0">
+                <a:solidFill>
+                  <a:srgbClr val="1B1B27"/>
+                </a:solidFill>
+                <a:latin typeface="Arial" panose="020B0604020202020204" pitchFamily="34" charset="0"/>
+                <a:ea typeface="Alexandria" pitchFamily="34" charset="-122"/>
+                <a:cs typeface="Arial" panose="020B0604020202020204" pitchFamily="34" charset="0"/>
+              </a:rPr>
+              <a:t>Actual Power and SOC Dynamics</a:t>
+            </a:r>
+            <a:endParaRPr lang="en-US" b="1" dirty="0">
+              <a:latin typeface="Arial" panose="020B0604020202020204" pitchFamily="34" charset="0"/>
+              <a:cs typeface="Arial" panose="020B0604020202020204" pitchFamily="34" charset="0"/>
+            </a:endParaRPr>
+          </a:p>
+        </p:txBody>
+      </p:sp>
+      <p:sp>
+        <p:nvSpPr>
+          <p:cNvPr id="40" name="Text 11">
+            <a:extLst>
+              <a:ext uri="{FF2B5EF4-FFF2-40B4-BE49-F238E27FC236}">
+                <a16:creationId xmlns:a16="http://schemas.microsoft.com/office/drawing/2014/main" id="{7D5E3D45-8C97-A9D4-7A3E-48AA47E1B843}"/>
+              </a:ext>
+            </a:extLst>
+          </p:cNvPr>
+          <p:cNvSpPr/>
+          <p:nvPr/>
+        </p:nvSpPr>
+        <p:spPr>
+          <a:xfrm>
+            <a:off x="1047483" y="5093659"/>
+            <a:ext cx="9571434" cy="234196"/>
+          </a:xfrm>
+          <a:prstGeom prst="rect">
+            <a:avLst/>
+          </a:prstGeom>
+          <a:noFill/>
+          <a:ln/>
+        </p:spPr>
+        <p:txBody>
+          <a:bodyPr wrap="none" lIns="0" tIns="0" rIns="0" bIns="0" rtlCol="0" anchor="t"/>
+          <a:lstStyle>
+            <a:defPPr>
+              <a:defRPr lang="de-DE"/>
+            </a:defPPr>
+            <a:lvl1pPr marL="0" algn="l" defTabSz="914400" rtl="0" eaLnBrk="1" latinLnBrk="0" hangingPunct="1">
+              <a:defRPr sz="1800" kern="1200">
+                <a:solidFill>
+                  <a:schemeClr val="tx1"/>
+                </a:solidFill>
+                <a:latin typeface="+mn-lt"/>
+                <a:ea typeface="+mn-ea"/>
+                <a:cs typeface="+mn-cs"/>
+              </a:defRPr>
+            </a:lvl1pPr>
+            <a:lvl2pPr marL="457200" algn="l" defTabSz="914400" rtl="0" eaLnBrk="1" latinLnBrk="0" hangingPunct="1">
+              <a:defRPr sz="1800" kern="1200">
+                <a:solidFill>
+                  <a:schemeClr val="tx1"/>
+                </a:solidFill>
+                <a:latin typeface="+mn-lt"/>
+                <a:ea typeface="+mn-ea"/>
+                <a:cs typeface="+mn-cs"/>
+              </a:defRPr>
+            </a:lvl2pPr>
+            <a:lvl3pPr marL="914400" algn="l" defTabSz="914400" rtl="0" eaLnBrk="1" latinLnBrk="0" hangingPunct="1">
+              <a:defRPr sz="1800" kern="1200">
+                <a:solidFill>
+                  <a:schemeClr val="tx1"/>
+                </a:solidFill>
+                <a:latin typeface="+mn-lt"/>
+                <a:ea typeface="+mn-ea"/>
+                <a:cs typeface="+mn-cs"/>
+              </a:defRPr>
+            </a:lvl3pPr>
+            <a:lvl4pPr marL="1371600" algn="l" defTabSz="914400" rtl="0" eaLnBrk="1" latinLnBrk="0" hangingPunct="1">
+              <a:defRPr sz="1800" kern="1200">
+                <a:solidFill>
+                  <a:schemeClr val="tx1"/>
+                </a:solidFill>
+                <a:latin typeface="+mn-lt"/>
+                <a:ea typeface="+mn-ea"/>
+                <a:cs typeface="+mn-cs"/>
+              </a:defRPr>
+            </a:lvl4pPr>
+            <a:lvl5pPr marL="1828800" algn="l" defTabSz="914400" rtl="0" eaLnBrk="1" latinLnBrk="0" hangingPunct="1">
+              <a:defRPr sz="1800" kern="1200">
+                <a:solidFill>
+                  <a:schemeClr val="tx1"/>
+                </a:solidFill>
+                <a:latin typeface="+mn-lt"/>
+                <a:ea typeface="+mn-ea"/>
+                <a:cs typeface="+mn-cs"/>
+              </a:defRPr>
+            </a:lvl5pPr>
+            <a:lvl6pPr marL="2286000" algn="l" defTabSz="914400" rtl="0" eaLnBrk="1" latinLnBrk="0" hangingPunct="1">
+              <a:defRPr sz="1800" kern="1200">
+                <a:solidFill>
+                  <a:schemeClr val="tx1"/>
+                </a:solidFill>
+                <a:latin typeface="+mn-lt"/>
+                <a:ea typeface="+mn-ea"/>
+                <a:cs typeface="+mn-cs"/>
+              </a:defRPr>
+            </a:lvl6pPr>
+            <a:lvl7pPr marL="2743200" algn="l" defTabSz="914400" rtl="0" eaLnBrk="1" latinLnBrk="0" hangingPunct="1">
+              <a:defRPr sz="1800" kern="1200">
+                <a:solidFill>
+                  <a:schemeClr val="tx1"/>
+                </a:solidFill>
+                <a:latin typeface="+mn-lt"/>
+                <a:ea typeface="+mn-ea"/>
+                <a:cs typeface="+mn-cs"/>
+              </a:defRPr>
+            </a:lvl7pPr>
+            <a:lvl8pPr marL="3200400" algn="l" defTabSz="914400" rtl="0" eaLnBrk="1" latinLnBrk="0" hangingPunct="1">
+              <a:defRPr sz="1800" kern="1200">
+                <a:solidFill>
+                  <a:schemeClr val="tx1"/>
+                </a:solidFill>
+                <a:latin typeface="+mn-lt"/>
+                <a:ea typeface="+mn-ea"/>
+                <a:cs typeface="+mn-cs"/>
+              </a:defRPr>
+            </a:lvl8pPr>
+            <a:lvl9pPr marL="3657600" algn="l" defTabSz="914400" rtl="0" eaLnBrk="1" latinLnBrk="0" hangingPunct="1">
+              <a:defRPr sz="1800" kern="1200">
+                <a:solidFill>
+                  <a:schemeClr val="tx1"/>
+                </a:solidFill>
+                <a:latin typeface="+mn-lt"/>
+                <a:ea typeface="+mn-ea"/>
+                <a:cs typeface="+mn-cs"/>
+              </a:defRPr>
+            </a:lvl9pPr>
+          </a:lstStyle>
+          <a:p>
+            <a:pPr marL="0" indent="0" algn="l">
+              <a:lnSpc>
+                <a:spcPts val="1550"/>
+              </a:lnSpc>
+              <a:buNone/>
+            </a:pPr>
+            <a:endParaRPr lang="en-US" sz="1200" dirty="0">
+              <a:latin typeface="Arial" panose="020B0604020202020204" pitchFamily="34" charset="0"/>
+              <a:cs typeface="Arial" panose="020B0604020202020204" pitchFamily="34" charset="0"/>
+            </a:endParaRPr>
+          </a:p>
+        </p:txBody>
+      </p:sp>
+      <p:pic>
+        <p:nvPicPr>
+          <p:cNvPr id="41" name="Image 3">
+            <a:extLst>
+              <a:ext uri="{FF2B5EF4-FFF2-40B4-BE49-F238E27FC236}">
+                <a16:creationId xmlns:a16="http://schemas.microsoft.com/office/drawing/2014/main" id="{09B9ADA8-A5D7-58DB-163D-1248078F431A}"/>
+              </a:ext>
+            </a:extLst>
+          </p:cNvPr>
+          <p:cNvPicPr>
+            <a:picLocks noChangeAspect="1"/>
+          </p:cNvPicPr>
+          <p:nvPr/>
+        </p:nvPicPr>
+        <p:blipFill>
+          <a:blip r:embed="rId5"/>
+          <a:stretch>
+            <a:fillRect/>
+          </a:stretch>
+        </p:blipFill>
+        <p:spPr>
+          <a:xfrm>
+            <a:off x="1047483" y="5093659"/>
+            <a:ext cx="9571434" cy="234196"/>
+          </a:xfrm>
+          <a:prstGeom prst="rect">
+            <a:avLst/>
+          </a:prstGeom>
+        </p:spPr>
+      </p:pic>
+      <p:sp>
+        <p:nvSpPr>
+          <p:cNvPr id="42" name="Text 12">
+            <a:extLst>
+              <a:ext uri="{FF2B5EF4-FFF2-40B4-BE49-F238E27FC236}">
+                <a16:creationId xmlns:a16="http://schemas.microsoft.com/office/drawing/2014/main" id="{F078D753-4678-41EA-C1BC-C03301891336}"/>
+              </a:ext>
+            </a:extLst>
+          </p:cNvPr>
+          <p:cNvSpPr/>
+          <p:nvPr/>
+        </p:nvSpPr>
+        <p:spPr>
+          <a:xfrm>
+            <a:off x="1047483" y="5435130"/>
+            <a:ext cx="9571434" cy="414695"/>
+          </a:xfrm>
+          <a:prstGeom prst="rect">
+            <a:avLst/>
+          </a:prstGeom>
+          <a:noFill/>
+          <a:ln/>
+        </p:spPr>
+        <p:txBody>
+          <a:bodyPr wrap="square" lIns="0" tIns="0" rIns="0" bIns="0" rtlCol="0" anchor="t"/>
+          <a:lstStyle>
+            <a:defPPr>
+              <a:defRPr lang="de-DE"/>
+            </a:defPPr>
+            <a:lvl1pPr marL="0" algn="l" defTabSz="914400" rtl="0" eaLnBrk="1" latinLnBrk="0" hangingPunct="1">
+              <a:defRPr sz="1800" kern="1200">
+                <a:solidFill>
+                  <a:schemeClr val="tx1"/>
+                </a:solidFill>
+                <a:latin typeface="+mn-lt"/>
+                <a:ea typeface="+mn-ea"/>
+                <a:cs typeface="+mn-cs"/>
+              </a:defRPr>
+            </a:lvl1pPr>
+            <a:lvl2pPr marL="457200" algn="l" defTabSz="914400" rtl="0" eaLnBrk="1" latinLnBrk="0" hangingPunct="1">
+              <a:defRPr sz="1800" kern="1200">
+                <a:solidFill>
+                  <a:schemeClr val="tx1"/>
+                </a:solidFill>
+                <a:latin typeface="+mn-lt"/>
+                <a:ea typeface="+mn-ea"/>
+                <a:cs typeface="+mn-cs"/>
+              </a:defRPr>
+            </a:lvl2pPr>
+            <a:lvl3pPr marL="914400" algn="l" defTabSz="914400" rtl="0" eaLnBrk="1" latinLnBrk="0" hangingPunct="1">
+              <a:defRPr sz="1800" kern="1200">
+                <a:solidFill>
+                  <a:schemeClr val="tx1"/>
+                </a:solidFill>
+                <a:latin typeface="+mn-lt"/>
+                <a:ea typeface="+mn-ea"/>
+                <a:cs typeface="+mn-cs"/>
+              </a:defRPr>
+            </a:lvl3pPr>
+            <a:lvl4pPr marL="1371600" algn="l" defTabSz="914400" rtl="0" eaLnBrk="1" latinLnBrk="0" hangingPunct="1">
+              <a:defRPr sz="1800" kern="1200">
+                <a:solidFill>
+                  <a:schemeClr val="tx1"/>
+                </a:solidFill>
+                <a:latin typeface="+mn-lt"/>
+                <a:ea typeface="+mn-ea"/>
+                <a:cs typeface="+mn-cs"/>
+              </a:defRPr>
+            </a:lvl4pPr>
+            <a:lvl5pPr marL="1828800" algn="l" defTabSz="914400" rtl="0" eaLnBrk="1" latinLnBrk="0" hangingPunct="1">
+              <a:defRPr sz="1800" kern="1200">
+                <a:solidFill>
+                  <a:schemeClr val="tx1"/>
+                </a:solidFill>
+                <a:latin typeface="+mn-lt"/>
+                <a:ea typeface="+mn-ea"/>
+                <a:cs typeface="+mn-cs"/>
+              </a:defRPr>
+            </a:lvl5pPr>
+            <a:lvl6pPr marL="2286000" algn="l" defTabSz="914400" rtl="0" eaLnBrk="1" latinLnBrk="0" hangingPunct="1">
+              <a:defRPr sz="1800" kern="1200">
+                <a:solidFill>
+                  <a:schemeClr val="tx1"/>
+                </a:solidFill>
+                <a:latin typeface="+mn-lt"/>
+                <a:ea typeface="+mn-ea"/>
+                <a:cs typeface="+mn-cs"/>
+              </a:defRPr>
+            </a:lvl6pPr>
+            <a:lvl7pPr marL="2743200" algn="l" defTabSz="914400" rtl="0" eaLnBrk="1" latinLnBrk="0" hangingPunct="1">
+              <a:defRPr sz="1800" kern="1200">
+                <a:solidFill>
+                  <a:schemeClr val="tx1"/>
+                </a:solidFill>
+                <a:latin typeface="+mn-lt"/>
+                <a:ea typeface="+mn-ea"/>
+                <a:cs typeface="+mn-cs"/>
+              </a:defRPr>
+            </a:lvl7pPr>
+            <a:lvl8pPr marL="3200400" algn="l" defTabSz="914400" rtl="0" eaLnBrk="1" latinLnBrk="0" hangingPunct="1">
+              <a:defRPr sz="1800" kern="1200">
+                <a:solidFill>
+                  <a:schemeClr val="tx1"/>
+                </a:solidFill>
+                <a:latin typeface="+mn-lt"/>
+                <a:ea typeface="+mn-ea"/>
+                <a:cs typeface="+mn-cs"/>
+              </a:defRPr>
+            </a:lvl8pPr>
+            <a:lvl9pPr marL="3657600" algn="l" defTabSz="914400" rtl="0" eaLnBrk="1" latinLnBrk="0" hangingPunct="1">
+              <a:defRPr sz="1800" kern="1200">
+                <a:solidFill>
+                  <a:schemeClr val="tx1"/>
+                </a:solidFill>
+                <a:latin typeface="+mn-lt"/>
+                <a:ea typeface="+mn-ea"/>
+                <a:cs typeface="+mn-cs"/>
+              </a:defRPr>
+            </a:lvl9pPr>
+          </a:lstStyle>
+          <a:p>
+            <a:pPr marL="0" indent="0" algn="l">
+              <a:lnSpc>
+                <a:spcPts val="1550"/>
+              </a:lnSpc>
+              <a:buNone/>
+            </a:pPr>
+            <a:endParaRPr lang="en-US" sz="1200" dirty="0">
+              <a:latin typeface="Arial" panose="020B0604020202020204" pitchFamily="34" charset="0"/>
+              <a:cs typeface="Arial" panose="020B0604020202020204" pitchFamily="34" charset="0"/>
+            </a:endParaRPr>
+          </a:p>
+        </p:txBody>
+      </p:sp>
+      <p:pic>
+        <p:nvPicPr>
+          <p:cNvPr id="43" name="Image 4">
+            <a:extLst>
+              <a:ext uri="{FF2B5EF4-FFF2-40B4-BE49-F238E27FC236}">
+                <a16:creationId xmlns:a16="http://schemas.microsoft.com/office/drawing/2014/main" id="{7C04B5A2-1FCF-0CDF-37A6-692FFDF08E30}"/>
+              </a:ext>
+            </a:extLst>
+          </p:cNvPr>
+          <p:cNvPicPr>
+            <a:picLocks noChangeAspect="1"/>
+          </p:cNvPicPr>
+          <p:nvPr/>
+        </p:nvPicPr>
+        <p:blipFill>
+          <a:blip r:embed="rId6"/>
+          <a:stretch>
+            <a:fillRect/>
+          </a:stretch>
+        </p:blipFill>
+        <p:spPr>
+          <a:xfrm>
+            <a:off x="1047483" y="5435130"/>
+            <a:ext cx="9571434" cy="414695"/>
+          </a:xfrm>
+          <a:prstGeom prst="rect">
+            <a:avLst/>
+          </a:prstGeom>
+        </p:spPr>
+      </p:pic>
+      <p:sp>
+        <p:nvSpPr>
+          <p:cNvPr id="44" name="Text 13">
+            <a:extLst>
+              <a:ext uri="{FF2B5EF4-FFF2-40B4-BE49-F238E27FC236}">
+                <a16:creationId xmlns:a16="http://schemas.microsoft.com/office/drawing/2014/main" id="{08CEE8D0-6860-35CD-D119-87E2194A8918}"/>
+              </a:ext>
+            </a:extLst>
+          </p:cNvPr>
+          <p:cNvSpPr/>
+          <p:nvPr/>
+        </p:nvSpPr>
+        <p:spPr>
+          <a:xfrm>
+            <a:off x="1047483" y="5957100"/>
+            <a:ext cx="9571434" cy="414695"/>
+          </a:xfrm>
+          <a:prstGeom prst="rect">
+            <a:avLst/>
+          </a:prstGeom>
+          <a:noFill/>
+          <a:ln/>
+        </p:spPr>
+        <p:txBody>
+          <a:bodyPr wrap="square" lIns="0" tIns="0" rIns="0" bIns="0" rtlCol="0" anchor="t"/>
+          <a:lstStyle>
+            <a:defPPr>
+              <a:defRPr lang="de-DE"/>
+            </a:defPPr>
+            <a:lvl1pPr marL="0" algn="l" defTabSz="914400" rtl="0" eaLnBrk="1" latinLnBrk="0" hangingPunct="1">
+              <a:defRPr sz="1800" kern="1200">
+                <a:solidFill>
+                  <a:schemeClr val="tx1"/>
+                </a:solidFill>
+                <a:latin typeface="+mn-lt"/>
+                <a:ea typeface="+mn-ea"/>
+                <a:cs typeface="+mn-cs"/>
+              </a:defRPr>
+            </a:lvl1pPr>
+            <a:lvl2pPr marL="457200" algn="l" defTabSz="914400" rtl="0" eaLnBrk="1" latinLnBrk="0" hangingPunct="1">
+              <a:defRPr sz="1800" kern="1200">
+                <a:solidFill>
+                  <a:schemeClr val="tx1"/>
+                </a:solidFill>
+                <a:latin typeface="+mn-lt"/>
+                <a:ea typeface="+mn-ea"/>
+                <a:cs typeface="+mn-cs"/>
+              </a:defRPr>
+            </a:lvl2pPr>
+            <a:lvl3pPr marL="914400" algn="l" defTabSz="914400" rtl="0" eaLnBrk="1" latinLnBrk="0" hangingPunct="1">
+              <a:defRPr sz="1800" kern="1200">
+                <a:solidFill>
+                  <a:schemeClr val="tx1"/>
+                </a:solidFill>
+                <a:latin typeface="+mn-lt"/>
+                <a:ea typeface="+mn-ea"/>
+                <a:cs typeface="+mn-cs"/>
+              </a:defRPr>
+            </a:lvl3pPr>
+            <a:lvl4pPr marL="1371600" algn="l" defTabSz="914400" rtl="0" eaLnBrk="1" latinLnBrk="0" hangingPunct="1">
+              <a:defRPr sz="1800" kern="1200">
+                <a:solidFill>
+                  <a:schemeClr val="tx1"/>
+                </a:solidFill>
+                <a:latin typeface="+mn-lt"/>
+                <a:ea typeface="+mn-ea"/>
+                <a:cs typeface="+mn-cs"/>
+              </a:defRPr>
+            </a:lvl4pPr>
+            <a:lvl5pPr marL="1828800" algn="l" defTabSz="914400" rtl="0" eaLnBrk="1" latinLnBrk="0" hangingPunct="1">
+              <a:defRPr sz="1800" kern="1200">
+                <a:solidFill>
+                  <a:schemeClr val="tx1"/>
+                </a:solidFill>
+                <a:latin typeface="+mn-lt"/>
+                <a:ea typeface="+mn-ea"/>
+                <a:cs typeface="+mn-cs"/>
+              </a:defRPr>
+            </a:lvl5pPr>
+            <a:lvl6pPr marL="2286000" algn="l" defTabSz="914400" rtl="0" eaLnBrk="1" latinLnBrk="0" hangingPunct="1">
+              <a:defRPr sz="1800" kern="1200">
+                <a:solidFill>
+                  <a:schemeClr val="tx1"/>
+                </a:solidFill>
+                <a:latin typeface="+mn-lt"/>
+                <a:ea typeface="+mn-ea"/>
+                <a:cs typeface="+mn-cs"/>
+              </a:defRPr>
+            </a:lvl6pPr>
+            <a:lvl7pPr marL="2743200" algn="l" defTabSz="914400" rtl="0" eaLnBrk="1" latinLnBrk="0" hangingPunct="1">
+              <a:defRPr sz="1800" kern="1200">
+                <a:solidFill>
+                  <a:schemeClr val="tx1"/>
+                </a:solidFill>
+                <a:latin typeface="+mn-lt"/>
+                <a:ea typeface="+mn-ea"/>
+                <a:cs typeface="+mn-cs"/>
+              </a:defRPr>
+            </a:lvl7pPr>
+            <a:lvl8pPr marL="3200400" algn="l" defTabSz="914400" rtl="0" eaLnBrk="1" latinLnBrk="0" hangingPunct="1">
+              <a:defRPr sz="1800" kern="1200">
+                <a:solidFill>
+                  <a:schemeClr val="tx1"/>
+                </a:solidFill>
+                <a:latin typeface="+mn-lt"/>
+                <a:ea typeface="+mn-ea"/>
+                <a:cs typeface="+mn-cs"/>
+              </a:defRPr>
+            </a:lvl8pPr>
+            <a:lvl9pPr marL="3657600" algn="l" defTabSz="914400" rtl="0" eaLnBrk="1" latinLnBrk="0" hangingPunct="1">
+              <a:defRPr sz="1800" kern="1200">
+                <a:solidFill>
+                  <a:schemeClr val="tx1"/>
+                </a:solidFill>
+                <a:latin typeface="+mn-lt"/>
+                <a:ea typeface="+mn-ea"/>
+                <a:cs typeface="+mn-cs"/>
+              </a:defRPr>
+            </a:lvl9pPr>
+          </a:lstStyle>
+          <a:p>
+            <a:pPr marL="0" indent="0" algn="l">
+              <a:lnSpc>
+                <a:spcPts val="1550"/>
+              </a:lnSpc>
+              <a:buNone/>
+            </a:pPr>
+            <a:endParaRPr lang="en-US" sz="1200" dirty="0">
+              <a:latin typeface="Arial" panose="020B0604020202020204" pitchFamily="34" charset="0"/>
+              <a:cs typeface="Arial" panose="020B0604020202020204" pitchFamily="34" charset="0"/>
+            </a:endParaRPr>
+          </a:p>
+        </p:txBody>
+      </p:sp>
+      <p:pic>
+        <p:nvPicPr>
+          <p:cNvPr id="45" name="Image 5">
+            <a:extLst>
+              <a:ext uri="{FF2B5EF4-FFF2-40B4-BE49-F238E27FC236}">
+                <a16:creationId xmlns:a16="http://schemas.microsoft.com/office/drawing/2014/main" id="{E5A3B9B8-7814-A3B6-5960-E6BE2C573E99}"/>
+              </a:ext>
+            </a:extLst>
+          </p:cNvPr>
+          <p:cNvPicPr>
+            <a:picLocks noChangeAspect="1"/>
+          </p:cNvPicPr>
+          <p:nvPr/>
+        </p:nvPicPr>
+        <p:blipFill>
+          <a:blip r:embed="rId7"/>
+          <a:stretch>
+            <a:fillRect/>
+          </a:stretch>
+        </p:blipFill>
+        <p:spPr>
+          <a:xfrm>
+            <a:off x="1047483" y="5957100"/>
+            <a:ext cx="9571434" cy="414695"/>
+          </a:xfrm>
+          <a:prstGeom prst="rect">
+            <a:avLst/>
+          </a:prstGeom>
+        </p:spPr>
+      </p:pic>
+      <p:sp>
+        <p:nvSpPr>
+          <p:cNvPr id="3" name="TextBox 2">
+            <a:extLst>
+              <a:ext uri="{FF2B5EF4-FFF2-40B4-BE49-F238E27FC236}">
+                <a16:creationId xmlns:a16="http://schemas.microsoft.com/office/drawing/2014/main" id="{C866E4F7-43D7-4300-7D2B-A4F06BAE4F61}"/>
+              </a:ext>
+            </a:extLst>
+          </p:cNvPr>
+          <p:cNvSpPr txBox="1"/>
+          <p:nvPr/>
+        </p:nvSpPr>
+        <p:spPr>
+          <a:xfrm>
+            <a:off x="6559200" y="1856587"/>
+            <a:ext cx="3728906" cy="307777"/>
+          </a:xfrm>
+          <a:prstGeom prst="rect">
+            <a:avLst/>
+          </a:prstGeom>
+          <a:noFill/>
+        </p:spPr>
+        <p:txBody>
+          <a:bodyPr wrap="none" rtlCol="0">
+            <a:spAutoFit/>
+          </a:bodyPr>
+          <a:lstStyle/>
+          <a:p>
+            <a:r>
+              <a:rPr lang="de-DE" sz="1400" dirty="0"/>
+              <a:t>………………………………………………………………………(1)</a:t>
+            </a:r>
+          </a:p>
+        </p:txBody>
+      </p:sp>
+      <p:sp>
+        <p:nvSpPr>
+          <p:cNvPr id="4" name="TextBox 3">
+            <a:extLst>
+              <a:ext uri="{FF2B5EF4-FFF2-40B4-BE49-F238E27FC236}">
+                <a16:creationId xmlns:a16="http://schemas.microsoft.com/office/drawing/2014/main" id="{DB0EFE75-7533-4DF3-CD77-75B224E7424B}"/>
+              </a:ext>
+            </a:extLst>
+          </p:cNvPr>
+          <p:cNvSpPr txBox="1"/>
+          <p:nvPr/>
+        </p:nvSpPr>
+        <p:spPr>
+          <a:xfrm>
+            <a:off x="7460400" y="2788094"/>
+            <a:ext cx="2898550" cy="307777"/>
+          </a:xfrm>
+          <a:prstGeom prst="rect">
+            <a:avLst/>
+          </a:prstGeom>
+          <a:noFill/>
+        </p:spPr>
+        <p:txBody>
+          <a:bodyPr wrap="none" rtlCol="0">
+            <a:spAutoFit/>
+          </a:bodyPr>
+          <a:lstStyle/>
+          <a:p>
+            <a:r>
+              <a:rPr lang="de-DE" sz="1400" dirty="0"/>
+              <a:t>……………………………………………………(2)</a:t>
+            </a:r>
+          </a:p>
+        </p:txBody>
+      </p:sp>
+      <p:sp>
+        <p:nvSpPr>
+          <p:cNvPr id="5" name="TextBox 4">
+            <a:extLst>
+              <a:ext uri="{FF2B5EF4-FFF2-40B4-BE49-F238E27FC236}">
+                <a16:creationId xmlns:a16="http://schemas.microsoft.com/office/drawing/2014/main" id="{FFCF9E12-9A71-31F3-C762-E49DAEC65220}"/>
+              </a:ext>
+            </a:extLst>
+          </p:cNvPr>
+          <p:cNvSpPr txBox="1"/>
+          <p:nvPr/>
+        </p:nvSpPr>
+        <p:spPr>
+          <a:xfrm>
+            <a:off x="6487200" y="5073715"/>
+            <a:ext cx="3818674" cy="307777"/>
+          </a:xfrm>
+          <a:prstGeom prst="rect">
+            <a:avLst/>
+          </a:prstGeom>
+          <a:noFill/>
+        </p:spPr>
+        <p:txBody>
+          <a:bodyPr wrap="none" rtlCol="0">
+            <a:spAutoFit/>
+          </a:bodyPr>
+          <a:lstStyle/>
+          <a:p>
+            <a:r>
+              <a:rPr lang="de-DE" sz="1400" dirty="0"/>
+              <a:t>……………………………………..…………………………...……(3)</a:t>
+            </a:r>
+          </a:p>
+        </p:txBody>
+      </p:sp>
+      <p:sp>
+        <p:nvSpPr>
+          <p:cNvPr id="7" name="Slide Number Placeholder 6">
+            <a:extLst>
+              <a:ext uri="{FF2B5EF4-FFF2-40B4-BE49-F238E27FC236}">
+                <a16:creationId xmlns:a16="http://schemas.microsoft.com/office/drawing/2014/main" id="{D14BABEB-7065-7DD0-1419-1934C659074E}"/>
+              </a:ext>
+            </a:extLst>
+          </p:cNvPr>
+          <p:cNvSpPr>
+            <a:spLocks noGrp="1"/>
+          </p:cNvSpPr>
+          <p:nvPr>
+            <p:ph type="sldNum" sz="quarter" idx="10"/>
+          </p:nvPr>
+        </p:nvSpPr>
+        <p:spPr/>
+        <p:txBody>
+          <a:bodyPr/>
+          <a:lstStyle/>
+          <a:p>
+            <a:fld id="{A02D9A9C-251E-4686-914B-47E3F39F30D8}" type="slidenum">
+              <a:rPr lang="de-DE" smtClean="0"/>
+              <a:t>2</a:t>
+            </a:fld>
+            <a:endParaRPr lang="de-DE"/>
+          </a:p>
+        </p:txBody>
+      </p:sp>
+    </p:spTree>
+    <p:extLst>
+      <p:ext uri="{BB962C8B-B14F-4D97-AF65-F5344CB8AC3E}">
+        <p14:creationId xmlns:p14="http://schemas.microsoft.com/office/powerpoint/2010/main" val="713313515"/>
+      </p:ext>
+    </p:extLst>
+  </p:cSld>
+  <p:clrMapOvr>
+    <a:masterClrMapping/>
+  </p:clrMapOvr>
+</p:sld>
+</file>
+
+<file path=ppt/slides/slide20.xml><?xml version="1.0" encoding="utf-8"?>
+<p:sld xmlns:a="http://schemas.openxmlformats.org/drawingml/2006/main" xmlns:r="http://schemas.openxmlformats.org/officeDocument/2006/relationships" xmlns:p="http://schemas.openxmlformats.org/presentationml/2006/main">
+  <p:cSld>
+    <p:spTree>
+      <p:nvGrpSpPr>
+        <p:cNvPr id="1" name=""/>
+        <p:cNvGrpSpPr/>
+        <p:nvPr/>
+      </p:nvGrpSpPr>
+      <p:grpSpPr>
+        <a:xfrm>
+          <a:off x="0" y="0"/>
+          <a:ext cx="0" cy="0"/>
+          <a:chOff x="0" y="0"/>
+          <a:chExt cx="0" cy="0"/>
+        </a:xfrm>
+      </p:grpSpPr>
+      <p:sp>
+        <p:nvSpPr>
+          <p:cNvPr id="2" name="Text 0">
+            <a:extLst>
+              <a:ext uri="{FF2B5EF4-FFF2-40B4-BE49-F238E27FC236}">
                 <a16:creationId xmlns:a16="http://schemas.microsoft.com/office/drawing/2014/main" id="{5E9BDF97-2CEC-5516-F91C-C69A562E04EA}"/>
               </a:ext>
             </a:extLst>
@@ -2978,7 +5671,7 @@
           <a:p>
             <a:fld id="{A02D9A9C-251E-4686-914B-47E3F39F30D8}" type="slidenum">
               <a:rPr lang="de-DE" smtClean="0"/>
-              <a:t>15</a:t>
+              <a:t>20</a:t>
             </a:fld>
             <a:endParaRPr lang="de-DE"/>
           </a:p>
@@ -2997,7 +5690,7 @@
 </p:sld>
 </file>
 
-<file path=ppt/slides/slide16.xml><?xml version="1.0" encoding="utf-8"?>
+<file path=ppt/slides/slide21.xml><?xml version="1.0" encoding="utf-8"?>
 <p:sld xmlns:a="http://schemas.openxmlformats.org/drawingml/2006/main" xmlns:r="http://schemas.openxmlformats.org/officeDocument/2006/relationships" xmlns:p="http://schemas.openxmlformats.org/presentationml/2006/main" show="0">
   <p:cSld>
     <p:spTree>
@@ -3037,7 +5730,7 @@
           <a:p>
             <a:fld id="{A02D9A9C-251E-4686-914B-47E3F39F30D8}" type="slidenum">
               <a:rPr lang="de-DE" smtClean="0"/>
-              <a:t>16</a:t>
+              <a:t>21</a:t>
             </a:fld>
             <a:endParaRPr lang="de-DE"/>
           </a:p>
@@ -3267,7 +5960,7 @@
 </p:sld>
 </file>
 
-<file path=ppt/slides/slide17.xml><?xml version="1.0" encoding="utf-8"?>
+<file path=ppt/slides/slide22.xml><?xml version="1.0" encoding="utf-8"?>
 <p:sld xmlns:a="http://schemas.openxmlformats.org/drawingml/2006/main" xmlns:r="http://schemas.openxmlformats.org/officeDocument/2006/relationships" xmlns:p="http://schemas.openxmlformats.org/presentationml/2006/main" show="0">
   <p:cSld>
     <p:spTree>
@@ -3307,7 +6000,7 @@
           <a:p>
             <a:fld id="{A02D9A9C-251E-4686-914B-47E3F39F30D8}" type="slidenum">
               <a:rPr lang="de-DE" smtClean="0"/>
-              <a:t>17</a:t>
+              <a:t>22</a:t>
             </a:fld>
             <a:endParaRPr lang="de-DE"/>
           </a:p>
@@ -3540,7 +6233,7 @@
 </p:sld>
 </file>
 
-<file path=ppt/slides/slide18.xml><?xml version="1.0" encoding="utf-8"?>
+<file path=ppt/slides/slide23.xml><?xml version="1.0" encoding="utf-8"?>
 <p:sld xmlns:a="http://schemas.openxmlformats.org/drawingml/2006/main" xmlns:r="http://schemas.openxmlformats.org/officeDocument/2006/relationships" xmlns:p="http://schemas.openxmlformats.org/presentationml/2006/main" show="0">
   <p:cSld>
     <p:spTree>
@@ -3583,7 +6276,7 @@
                 <a:latin typeface="Arial" panose="020B0604020202020204" pitchFamily="34" charset="0"/>
                 <a:cs typeface="Arial" panose="020B0604020202020204" pitchFamily="34" charset="0"/>
               </a:rPr>
-              <a:t>18</a:t>
+              <a:t>23</a:t>
             </a:fld>
             <a:endParaRPr lang="de-DE">
               <a:latin typeface="Arial" panose="020B0604020202020204" pitchFamily="34" charset="0"/>
@@ -4259,7 +6952,7 @@
 </p:sld>
 </file>
 
-<file path=ppt/slides/slide19.xml><?xml version="1.0" encoding="utf-8"?>
+<file path=ppt/slides/slide24.xml><?xml version="1.0" encoding="utf-8"?>
 <p:sld xmlns:a="http://schemas.openxmlformats.org/drawingml/2006/main" xmlns:r="http://schemas.openxmlformats.org/officeDocument/2006/relationships" xmlns:p="http://schemas.openxmlformats.org/presentationml/2006/main" show="0">
   <p:cSld>
     <p:spTree>
@@ -4299,7 +6992,7 @@
           <a:p>
             <a:fld id="{A02D9A9C-251E-4686-914B-47E3F39F30D8}" type="slidenum">
               <a:rPr lang="de-DE" smtClean="0"/>
-              <a:t>19</a:t>
+              <a:t>24</a:t>
             </a:fld>
             <a:endParaRPr lang="de-DE"/>
           </a:p>
@@ -4407,1880 +7100,7 @@
 </p:sld>
 </file>
 
-<file path=ppt/slides/slide2.xml><?xml version="1.0" encoding="utf-8"?>
-<p:sld xmlns:a="http://schemas.openxmlformats.org/drawingml/2006/main" xmlns:r="http://schemas.openxmlformats.org/officeDocument/2006/relationships" xmlns:p="http://schemas.openxmlformats.org/presentationml/2006/main">
-  <p:cSld>
-    <p:spTree>
-      <p:nvGrpSpPr>
-        <p:cNvPr id="1" name=""/>
-        <p:cNvGrpSpPr/>
-        <p:nvPr/>
-      </p:nvGrpSpPr>
-      <p:grpSpPr>
-        <a:xfrm>
-          <a:off x="0" y="0"/>
-          <a:ext cx="0" cy="0"/>
-          <a:chOff x="0" y="0"/>
-          <a:chExt cx="0" cy="0"/>
-        </a:xfrm>
-      </p:grpSpPr>
-      <p:sp>
-        <p:nvSpPr>
-          <p:cNvPr id="2" name="Text 0">
-            <a:extLst>
-              <a:ext uri="{FF2B5EF4-FFF2-40B4-BE49-F238E27FC236}">
-                <a16:creationId xmlns:a16="http://schemas.microsoft.com/office/drawing/2014/main" id="{20334E38-ECDC-2251-1C9E-5E2E58818BC3}"/>
-              </a:ext>
-            </a:extLst>
-          </p:cNvPr>
-          <p:cNvSpPr/>
-          <p:nvPr/>
-        </p:nvSpPr>
-        <p:spPr>
-          <a:xfrm>
-            <a:off x="994906" y="578615"/>
-            <a:ext cx="9858256" cy="485775"/>
-          </a:xfrm>
-          <a:prstGeom prst="rect">
-            <a:avLst/>
-          </a:prstGeom>
-          <a:noFill/>
-          <a:ln/>
-        </p:spPr>
-        <p:txBody>
-          <a:bodyPr wrap="none" lIns="0" tIns="0" rIns="0" bIns="0" rtlCol="0" anchor="t"/>
-          <a:lstStyle>
-            <a:defPPr>
-              <a:defRPr lang="de-DE"/>
-            </a:defPPr>
-            <a:lvl1pPr marL="0" algn="l" defTabSz="914400" rtl="0" eaLnBrk="1" latinLnBrk="0" hangingPunct="1">
-              <a:defRPr sz="1800" kern="1200">
-                <a:solidFill>
-                  <a:schemeClr val="tx1"/>
-                </a:solidFill>
-                <a:latin typeface="+mn-lt"/>
-                <a:ea typeface="+mn-ea"/>
-                <a:cs typeface="+mn-cs"/>
-              </a:defRPr>
-            </a:lvl1pPr>
-            <a:lvl2pPr marL="457200" algn="l" defTabSz="914400" rtl="0" eaLnBrk="1" latinLnBrk="0" hangingPunct="1">
-              <a:defRPr sz="1800" kern="1200">
-                <a:solidFill>
-                  <a:schemeClr val="tx1"/>
-                </a:solidFill>
-                <a:latin typeface="+mn-lt"/>
-                <a:ea typeface="+mn-ea"/>
-                <a:cs typeface="+mn-cs"/>
-              </a:defRPr>
-            </a:lvl2pPr>
-            <a:lvl3pPr marL="914400" algn="l" defTabSz="914400" rtl="0" eaLnBrk="1" latinLnBrk="0" hangingPunct="1">
-              <a:defRPr sz="1800" kern="1200">
-                <a:solidFill>
-                  <a:schemeClr val="tx1"/>
-                </a:solidFill>
-                <a:latin typeface="+mn-lt"/>
-                <a:ea typeface="+mn-ea"/>
-                <a:cs typeface="+mn-cs"/>
-              </a:defRPr>
-            </a:lvl3pPr>
-            <a:lvl4pPr marL="1371600" algn="l" defTabSz="914400" rtl="0" eaLnBrk="1" latinLnBrk="0" hangingPunct="1">
-              <a:defRPr sz="1800" kern="1200">
-                <a:solidFill>
-                  <a:schemeClr val="tx1"/>
-                </a:solidFill>
-                <a:latin typeface="+mn-lt"/>
-                <a:ea typeface="+mn-ea"/>
-                <a:cs typeface="+mn-cs"/>
-              </a:defRPr>
-            </a:lvl4pPr>
-            <a:lvl5pPr marL="1828800" algn="l" defTabSz="914400" rtl="0" eaLnBrk="1" latinLnBrk="0" hangingPunct="1">
-              <a:defRPr sz="1800" kern="1200">
-                <a:solidFill>
-                  <a:schemeClr val="tx1"/>
-                </a:solidFill>
-                <a:latin typeface="+mn-lt"/>
-                <a:ea typeface="+mn-ea"/>
-                <a:cs typeface="+mn-cs"/>
-              </a:defRPr>
-            </a:lvl5pPr>
-            <a:lvl6pPr marL="2286000" algn="l" defTabSz="914400" rtl="0" eaLnBrk="1" latinLnBrk="0" hangingPunct="1">
-              <a:defRPr sz="1800" kern="1200">
-                <a:solidFill>
-                  <a:schemeClr val="tx1"/>
-                </a:solidFill>
-                <a:latin typeface="+mn-lt"/>
-                <a:ea typeface="+mn-ea"/>
-                <a:cs typeface="+mn-cs"/>
-              </a:defRPr>
-            </a:lvl6pPr>
-            <a:lvl7pPr marL="2743200" algn="l" defTabSz="914400" rtl="0" eaLnBrk="1" latinLnBrk="0" hangingPunct="1">
-              <a:defRPr sz="1800" kern="1200">
-                <a:solidFill>
-                  <a:schemeClr val="tx1"/>
-                </a:solidFill>
-                <a:latin typeface="+mn-lt"/>
-                <a:ea typeface="+mn-ea"/>
-                <a:cs typeface="+mn-cs"/>
-              </a:defRPr>
-            </a:lvl7pPr>
-            <a:lvl8pPr marL="3200400" algn="l" defTabSz="914400" rtl="0" eaLnBrk="1" latinLnBrk="0" hangingPunct="1">
-              <a:defRPr sz="1800" kern="1200">
-                <a:solidFill>
-                  <a:schemeClr val="tx1"/>
-                </a:solidFill>
-                <a:latin typeface="+mn-lt"/>
-                <a:ea typeface="+mn-ea"/>
-                <a:cs typeface="+mn-cs"/>
-              </a:defRPr>
-            </a:lvl8pPr>
-            <a:lvl9pPr marL="3657600" algn="l" defTabSz="914400" rtl="0" eaLnBrk="1" latinLnBrk="0" hangingPunct="1">
-              <a:defRPr sz="1800" kern="1200">
-                <a:solidFill>
-                  <a:schemeClr val="tx1"/>
-                </a:solidFill>
-                <a:latin typeface="+mn-lt"/>
-                <a:ea typeface="+mn-ea"/>
-                <a:cs typeface="+mn-cs"/>
-              </a:defRPr>
-            </a:lvl9pPr>
-          </a:lstStyle>
-          <a:p>
-            <a:pPr marL="0" indent="0" algn="l">
-              <a:lnSpc>
-                <a:spcPts val="3800"/>
-              </a:lnSpc>
-              <a:buNone/>
-            </a:pPr>
-            <a:r>
-              <a:rPr lang="en-US" sz="3600" dirty="0">
-                <a:solidFill>
-                  <a:srgbClr val="1B1B27"/>
-                </a:solidFill>
-                <a:latin typeface="Arial" panose="020B0604020202020204" pitchFamily="34" charset="0"/>
-                <a:ea typeface="Alexandria" pitchFamily="34" charset="-122"/>
-                <a:cs typeface="Arial" panose="020B0604020202020204" pitchFamily="34" charset="0"/>
-              </a:rPr>
-              <a:t>Battery Model Mathematical Formulation</a:t>
-            </a:r>
-            <a:endParaRPr lang="en-US" sz="3600" dirty="0">
-              <a:latin typeface="Arial" panose="020B0604020202020204" pitchFamily="34" charset="0"/>
-              <a:cs typeface="Arial" panose="020B0604020202020204" pitchFamily="34" charset="0"/>
-            </a:endParaRPr>
-          </a:p>
-        </p:txBody>
-      </p:sp>
-      <p:sp>
-        <p:nvSpPr>
-          <p:cNvPr id="30" name="Text 4">
-            <a:extLst>
-              <a:ext uri="{FF2B5EF4-FFF2-40B4-BE49-F238E27FC236}">
-                <a16:creationId xmlns:a16="http://schemas.microsoft.com/office/drawing/2014/main" id="{2005AAC9-6078-3B0F-B66D-D712A272CEB8}"/>
-              </a:ext>
-            </a:extLst>
-          </p:cNvPr>
-          <p:cNvSpPr/>
-          <p:nvPr/>
-        </p:nvSpPr>
-        <p:spPr>
-          <a:xfrm>
-            <a:off x="1047483" y="1469277"/>
-            <a:ext cx="2080736" cy="260152"/>
-          </a:xfrm>
-          <a:prstGeom prst="rect">
-            <a:avLst/>
-          </a:prstGeom>
-          <a:noFill/>
-          <a:ln/>
-        </p:spPr>
-        <p:txBody>
-          <a:bodyPr wrap="none" lIns="0" tIns="0" rIns="0" bIns="0" rtlCol="0" anchor="t"/>
-          <a:lstStyle>
-            <a:defPPr>
-              <a:defRPr lang="de-DE"/>
-            </a:defPPr>
-            <a:lvl1pPr marL="0" algn="l" defTabSz="914400" rtl="0" eaLnBrk="1" latinLnBrk="0" hangingPunct="1">
-              <a:defRPr sz="1800" kern="1200">
-                <a:solidFill>
-                  <a:schemeClr val="tx1"/>
-                </a:solidFill>
-                <a:latin typeface="+mn-lt"/>
-                <a:ea typeface="+mn-ea"/>
-                <a:cs typeface="+mn-cs"/>
-              </a:defRPr>
-            </a:lvl1pPr>
-            <a:lvl2pPr marL="457200" algn="l" defTabSz="914400" rtl="0" eaLnBrk="1" latinLnBrk="0" hangingPunct="1">
-              <a:defRPr sz="1800" kern="1200">
-                <a:solidFill>
-                  <a:schemeClr val="tx1"/>
-                </a:solidFill>
-                <a:latin typeface="+mn-lt"/>
-                <a:ea typeface="+mn-ea"/>
-                <a:cs typeface="+mn-cs"/>
-              </a:defRPr>
-            </a:lvl2pPr>
-            <a:lvl3pPr marL="914400" algn="l" defTabSz="914400" rtl="0" eaLnBrk="1" latinLnBrk="0" hangingPunct="1">
-              <a:defRPr sz="1800" kern="1200">
-                <a:solidFill>
-                  <a:schemeClr val="tx1"/>
-                </a:solidFill>
-                <a:latin typeface="+mn-lt"/>
-                <a:ea typeface="+mn-ea"/>
-                <a:cs typeface="+mn-cs"/>
-              </a:defRPr>
-            </a:lvl3pPr>
-            <a:lvl4pPr marL="1371600" algn="l" defTabSz="914400" rtl="0" eaLnBrk="1" latinLnBrk="0" hangingPunct="1">
-              <a:defRPr sz="1800" kern="1200">
-                <a:solidFill>
-                  <a:schemeClr val="tx1"/>
-                </a:solidFill>
-                <a:latin typeface="+mn-lt"/>
-                <a:ea typeface="+mn-ea"/>
-                <a:cs typeface="+mn-cs"/>
-              </a:defRPr>
-            </a:lvl4pPr>
-            <a:lvl5pPr marL="1828800" algn="l" defTabSz="914400" rtl="0" eaLnBrk="1" latinLnBrk="0" hangingPunct="1">
-              <a:defRPr sz="1800" kern="1200">
-                <a:solidFill>
-                  <a:schemeClr val="tx1"/>
-                </a:solidFill>
-                <a:latin typeface="+mn-lt"/>
-                <a:ea typeface="+mn-ea"/>
-                <a:cs typeface="+mn-cs"/>
-              </a:defRPr>
-            </a:lvl5pPr>
-            <a:lvl6pPr marL="2286000" algn="l" defTabSz="914400" rtl="0" eaLnBrk="1" latinLnBrk="0" hangingPunct="1">
-              <a:defRPr sz="1800" kern="1200">
-                <a:solidFill>
-                  <a:schemeClr val="tx1"/>
-                </a:solidFill>
-                <a:latin typeface="+mn-lt"/>
-                <a:ea typeface="+mn-ea"/>
-                <a:cs typeface="+mn-cs"/>
-              </a:defRPr>
-            </a:lvl6pPr>
-            <a:lvl7pPr marL="2743200" algn="l" defTabSz="914400" rtl="0" eaLnBrk="1" latinLnBrk="0" hangingPunct="1">
-              <a:defRPr sz="1800" kern="1200">
-                <a:solidFill>
-                  <a:schemeClr val="tx1"/>
-                </a:solidFill>
-                <a:latin typeface="+mn-lt"/>
-                <a:ea typeface="+mn-ea"/>
-                <a:cs typeface="+mn-cs"/>
-              </a:defRPr>
-            </a:lvl7pPr>
-            <a:lvl8pPr marL="3200400" algn="l" defTabSz="914400" rtl="0" eaLnBrk="1" latinLnBrk="0" hangingPunct="1">
-              <a:defRPr sz="1800" kern="1200">
-                <a:solidFill>
-                  <a:schemeClr val="tx1"/>
-                </a:solidFill>
-                <a:latin typeface="+mn-lt"/>
-                <a:ea typeface="+mn-ea"/>
-                <a:cs typeface="+mn-cs"/>
-              </a:defRPr>
-            </a:lvl8pPr>
-            <a:lvl9pPr marL="3657600" algn="l" defTabSz="914400" rtl="0" eaLnBrk="1" latinLnBrk="0" hangingPunct="1">
-              <a:defRPr sz="1800" kern="1200">
-                <a:solidFill>
-                  <a:schemeClr val="tx1"/>
-                </a:solidFill>
-                <a:latin typeface="+mn-lt"/>
-                <a:ea typeface="+mn-ea"/>
-                <a:cs typeface="+mn-cs"/>
-              </a:defRPr>
-            </a:lvl9pPr>
-          </a:lstStyle>
-          <a:p>
-            <a:pPr marL="0" indent="0" algn="l">
-              <a:lnSpc>
-                <a:spcPts val="2000"/>
-              </a:lnSpc>
-              <a:buNone/>
-            </a:pPr>
-            <a:r>
-              <a:rPr lang="en-US" b="1" dirty="0">
-                <a:solidFill>
-                  <a:srgbClr val="1B1B27"/>
-                </a:solidFill>
-                <a:latin typeface="Arial" panose="020B0604020202020204" pitchFamily="34" charset="0"/>
-                <a:ea typeface="Alexandria" pitchFamily="34" charset="-122"/>
-                <a:cs typeface="Arial" panose="020B0604020202020204" pitchFamily="34" charset="0"/>
-              </a:rPr>
-              <a:t>Objective Function</a:t>
-            </a:r>
-            <a:endParaRPr lang="en-US" b="1" dirty="0">
-              <a:latin typeface="Arial" panose="020B0604020202020204" pitchFamily="34" charset="0"/>
-              <a:cs typeface="Arial" panose="020B0604020202020204" pitchFamily="34" charset="0"/>
-            </a:endParaRPr>
-          </a:p>
-        </p:txBody>
-      </p:sp>
-      <p:sp>
-        <p:nvSpPr>
-          <p:cNvPr id="31" name="Text 5">
-            <a:extLst>
-              <a:ext uri="{FF2B5EF4-FFF2-40B4-BE49-F238E27FC236}">
-                <a16:creationId xmlns:a16="http://schemas.microsoft.com/office/drawing/2014/main" id="{BF545353-267D-447F-F1E0-4F1AAEE6949F}"/>
-              </a:ext>
-            </a:extLst>
-          </p:cNvPr>
-          <p:cNvSpPr/>
-          <p:nvPr/>
-        </p:nvSpPr>
-        <p:spPr>
-          <a:xfrm>
-            <a:off x="1047483" y="1856587"/>
-            <a:ext cx="9571434" cy="447794"/>
-          </a:xfrm>
-          <a:prstGeom prst="rect">
-            <a:avLst/>
-          </a:prstGeom>
-          <a:noFill/>
-          <a:ln/>
-        </p:spPr>
-        <p:txBody>
-          <a:bodyPr wrap="square" lIns="0" tIns="0" rIns="0" bIns="0" rtlCol="0" anchor="t"/>
-          <a:lstStyle>
-            <a:defPPr>
-              <a:defRPr lang="de-DE"/>
-            </a:defPPr>
-            <a:lvl1pPr marL="0" algn="l" defTabSz="914400" rtl="0" eaLnBrk="1" latinLnBrk="0" hangingPunct="1">
-              <a:defRPr sz="1800" kern="1200">
-                <a:solidFill>
-                  <a:schemeClr val="tx1"/>
-                </a:solidFill>
-                <a:latin typeface="+mn-lt"/>
-                <a:ea typeface="+mn-ea"/>
-                <a:cs typeface="+mn-cs"/>
-              </a:defRPr>
-            </a:lvl1pPr>
-            <a:lvl2pPr marL="457200" algn="l" defTabSz="914400" rtl="0" eaLnBrk="1" latinLnBrk="0" hangingPunct="1">
-              <a:defRPr sz="1800" kern="1200">
-                <a:solidFill>
-                  <a:schemeClr val="tx1"/>
-                </a:solidFill>
-                <a:latin typeface="+mn-lt"/>
-                <a:ea typeface="+mn-ea"/>
-                <a:cs typeface="+mn-cs"/>
-              </a:defRPr>
-            </a:lvl2pPr>
-            <a:lvl3pPr marL="914400" algn="l" defTabSz="914400" rtl="0" eaLnBrk="1" latinLnBrk="0" hangingPunct="1">
-              <a:defRPr sz="1800" kern="1200">
-                <a:solidFill>
-                  <a:schemeClr val="tx1"/>
-                </a:solidFill>
-                <a:latin typeface="+mn-lt"/>
-                <a:ea typeface="+mn-ea"/>
-                <a:cs typeface="+mn-cs"/>
-              </a:defRPr>
-            </a:lvl3pPr>
-            <a:lvl4pPr marL="1371600" algn="l" defTabSz="914400" rtl="0" eaLnBrk="1" latinLnBrk="0" hangingPunct="1">
-              <a:defRPr sz="1800" kern="1200">
-                <a:solidFill>
-                  <a:schemeClr val="tx1"/>
-                </a:solidFill>
-                <a:latin typeface="+mn-lt"/>
-                <a:ea typeface="+mn-ea"/>
-                <a:cs typeface="+mn-cs"/>
-              </a:defRPr>
-            </a:lvl4pPr>
-            <a:lvl5pPr marL="1828800" algn="l" defTabSz="914400" rtl="0" eaLnBrk="1" latinLnBrk="0" hangingPunct="1">
-              <a:defRPr sz="1800" kern="1200">
-                <a:solidFill>
-                  <a:schemeClr val="tx1"/>
-                </a:solidFill>
-                <a:latin typeface="+mn-lt"/>
-                <a:ea typeface="+mn-ea"/>
-                <a:cs typeface="+mn-cs"/>
-              </a:defRPr>
-            </a:lvl5pPr>
-            <a:lvl6pPr marL="2286000" algn="l" defTabSz="914400" rtl="0" eaLnBrk="1" latinLnBrk="0" hangingPunct="1">
-              <a:defRPr sz="1800" kern="1200">
-                <a:solidFill>
-                  <a:schemeClr val="tx1"/>
-                </a:solidFill>
-                <a:latin typeface="+mn-lt"/>
-                <a:ea typeface="+mn-ea"/>
-                <a:cs typeface="+mn-cs"/>
-              </a:defRPr>
-            </a:lvl6pPr>
-            <a:lvl7pPr marL="2743200" algn="l" defTabSz="914400" rtl="0" eaLnBrk="1" latinLnBrk="0" hangingPunct="1">
-              <a:defRPr sz="1800" kern="1200">
-                <a:solidFill>
-                  <a:schemeClr val="tx1"/>
-                </a:solidFill>
-                <a:latin typeface="+mn-lt"/>
-                <a:ea typeface="+mn-ea"/>
-                <a:cs typeface="+mn-cs"/>
-              </a:defRPr>
-            </a:lvl7pPr>
-            <a:lvl8pPr marL="3200400" algn="l" defTabSz="914400" rtl="0" eaLnBrk="1" latinLnBrk="0" hangingPunct="1">
-              <a:defRPr sz="1800" kern="1200">
-                <a:solidFill>
-                  <a:schemeClr val="tx1"/>
-                </a:solidFill>
-                <a:latin typeface="+mn-lt"/>
-                <a:ea typeface="+mn-ea"/>
-                <a:cs typeface="+mn-cs"/>
-              </a:defRPr>
-            </a:lvl8pPr>
-            <a:lvl9pPr marL="3657600" algn="l" defTabSz="914400" rtl="0" eaLnBrk="1" latinLnBrk="0" hangingPunct="1">
-              <a:defRPr sz="1800" kern="1200">
-                <a:solidFill>
-                  <a:schemeClr val="tx1"/>
-                </a:solidFill>
-                <a:latin typeface="+mn-lt"/>
-                <a:ea typeface="+mn-ea"/>
-                <a:cs typeface="+mn-cs"/>
-              </a:defRPr>
-            </a:lvl9pPr>
-          </a:lstStyle>
-          <a:p>
-            <a:pPr marL="0" indent="0" algn="l">
-              <a:lnSpc>
-                <a:spcPts val="1550"/>
-              </a:lnSpc>
-              <a:buNone/>
-            </a:pPr>
-            <a:endParaRPr lang="en-US" sz="1200" dirty="0">
-              <a:latin typeface="Arial" panose="020B0604020202020204" pitchFamily="34" charset="0"/>
-              <a:cs typeface="Arial" panose="020B0604020202020204" pitchFamily="34" charset="0"/>
-            </a:endParaRPr>
-          </a:p>
-        </p:txBody>
-      </p:sp>
-      <p:pic>
-        <p:nvPicPr>
-          <p:cNvPr id="32" name="Image 0">
-            <a:extLst>
-              <a:ext uri="{FF2B5EF4-FFF2-40B4-BE49-F238E27FC236}">
-                <a16:creationId xmlns:a16="http://schemas.microsoft.com/office/drawing/2014/main" id="{8FF3F173-ECEF-79D6-7C4A-BB89DCEE2852}"/>
-              </a:ext>
-            </a:extLst>
-          </p:cNvPr>
-          <p:cNvPicPr>
-            <a:picLocks noChangeAspect="1"/>
-          </p:cNvPicPr>
-          <p:nvPr/>
-        </p:nvPicPr>
-        <p:blipFill>
-          <a:blip r:embed="rId2"/>
-          <a:stretch>
-            <a:fillRect/>
-          </a:stretch>
-        </p:blipFill>
-        <p:spPr>
-          <a:xfrm>
-            <a:off x="1047483" y="1856587"/>
-            <a:ext cx="9571434" cy="447794"/>
-          </a:xfrm>
-          <a:prstGeom prst="rect">
-            <a:avLst/>
-          </a:prstGeom>
-        </p:spPr>
-      </p:pic>
-      <p:sp>
-        <p:nvSpPr>
-          <p:cNvPr id="33" name="Text 6">
-            <a:extLst>
-              <a:ext uri="{FF2B5EF4-FFF2-40B4-BE49-F238E27FC236}">
-                <a16:creationId xmlns:a16="http://schemas.microsoft.com/office/drawing/2014/main" id="{6A3DF424-C0D6-AEEB-4F77-C602D4B29BF8}"/>
-              </a:ext>
-            </a:extLst>
-          </p:cNvPr>
-          <p:cNvSpPr/>
-          <p:nvPr/>
-        </p:nvSpPr>
-        <p:spPr>
-          <a:xfrm>
-            <a:off x="1047483" y="2431540"/>
-            <a:ext cx="2529721" cy="260152"/>
-          </a:xfrm>
-          <a:prstGeom prst="rect">
-            <a:avLst/>
-          </a:prstGeom>
-          <a:noFill/>
-          <a:ln/>
-        </p:spPr>
-        <p:txBody>
-          <a:bodyPr wrap="none" lIns="0" tIns="0" rIns="0" bIns="0" rtlCol="0" anchor="t"/>
-          <a:lstStyle>
-            <a:defPPr>
-              <a:defRPr lang="de-DE"/>
-            </a:defPPr>
-            <a:lvl1pPr marL="0" algn="l" defTabSz="914400" rtl="0" eaLnBrk="1" latinLnBrk="0" hangingPunct="1">
-              <a:defRPr sz="1800" kern="1200">
-                <a:solidFill>
-                  <a:schemeClr val="tx1"/>
-                </a:solidFill>
-                <a:latin typeface="+mn-lt"/>
-                <a:ea typeface="+mn-ea"/>
-                <a:cs typeface="+mn-cs"/>
-              </a:defRPr>
-            </a:lvl1pPr>
-            <a:lvl2pPr marL="457200" algn="l" defTabSz="914400" rtl="0" eaLnBrk="1" latinLnBrk="0" hangingPunct="1">
-              <a:defRPr sz="1800" kern="1200">
-                <a:solidFill>
-                  <a:schemeClr val="tx1"/>
-                </a:solidFill>
-                <a:latin typeface="+mn-lt"/>
-                <a:ea typeface="+mn-ea"/>
-                <a:cs typeface="+mn-cs"/>
-              </a:defRPr>
-            </a:lvl2pPr>
-            <a:lvl3pPr marL="914400" algn="l" defTabSz="914400" rtl="0" eaLnBrk="1" latinLnBrk="0" hangingPunct="1">
-              <a:defRPr sz="1800" kern="1200">
-                <a:solidFill>
-                  <a:schemeClr val="tx1"/>
-                </a:solidFill>
-                <a:latin typeface="+mn-lt"/>
-                <a:ea typeface="+mn-ea"/>
-                <a:cs typeface="+mn-cs"/>
-              </a:defRPr>
-            </a:lvl3pPr>
-            <a:lvl4pPr marL="1371600" algn="l" defTabSz="914400" rtl="0" eaLnBrk="1" latinLnBrk="0" hangingPunct="1">
-              <a:defRPr sz="1800" kern="1200">
-                <a:solidFill>
-                  <a:schemeClr val="tx1"/>
-                </a:solidFill>
-                <a:latin typeface="+mn-lt"/>
-                <a:ea typeface="+mn-ea"/>
-                <a:cs typeface="+mn-cs"/>
-              </a:defRPr>
-            </a:lvl4pPr>
-            <a:lvl5pPr marL="1828800" algn="l" defTabSz="914400" rtl="0" eaLnBrk="1" latinLnBrk="0" hangingPunct="1">
-              <a:defRPr sz="1800" kern="1200">
-                <a:solidFill>
-                  <a:schemeClr val="tx1"/>
-                </a:solidFill>
-                <a:latin typeface="+mn-lt"/>
-                <a:ea typeface="+mn-ea"/>
-                <a:cs typeface="+mn-cs"/>
-              </a:defRPr>
-            </a:lvl5pPr>
-            <a:lvl6pPr marL="2286000" algn="l" defTabSz="914400" rtl="0" eaLnBrk="1" latinLnBrk="0" hangingPunct="1">
-              <a:defRPr sz="1800" kern="1200">
-                <a:solidFill>
-                  <a:schemeClr val="tx1"/>
-                </a:solidFill>
-                <a:latin typeface="+mn-lt"/>
-                <a:ea typeface="+mn-ea"/>
-                <a:cs typeface="+mn-cs"/>
-              </a:defRPr>
-            </a:lvl6pPr>
-            <a:lvl7pPr marL="2743200" algn="l" defTabSz="914400" rtl="0" eaLnBrk="1" latinLnBrk="0" hangingPunct="1">
-              <a:defRPr sz="1800" kern="1200">
-                <a:solidFill>
-                  <a:schemeClr val="tx1"/>
-                </a:solidFill>
-                <a:latin typeface="+mn-lt"/>
-                <a:ea typeface="+mn-ea"/>
-                <a:cs typeface="+mn-cs"/>
-              </a:defRPr>
-            </a:lvl7pPr>
-            <a:lvl8pPr marL="3200400" algn="l" defTabSz="914400" rtl="0" eaLnBrk="1" latinLnBrk="0" hangingPunct="1">
-              <a:defRPr sz="1800" kern="1200">
-                <a:solidFill>
-                  <a:schemeClr val="tx1"/>
-                </a:solidFill>
-                <a:latin typeface="+mn-lt"/>
-                <a:ea typeface="+mn-ea"/>
-                <a:cs typeface="+mn-cs"/>
-              </a:defRPr>
-            </a:lvl8pPr>
-            <a:lvl9pPr marL="3657600" algn="l" defTabSz="914400" rtl="0" eaLnBrk="1" latinLnBrk="0" hangingPunct="1">
-              <a:defRPr sz="1800" kern="1200">
-                <a:solidFill>
-                  <a:schemeClr val="tx1"/>
-                </a:solidFill>
-                <a:latin typeface="+mn-lt"/>
-                <a:ea typeface="+mn-ea"/>
-                <a:cs typeface="+mn-cs"/>
-              </a:defRPr>
-            </a:lvl9pPr>
-          </a:lstStyle>
-          <a:p>
-            <a:pPr marL="0" indent="0" algn="l">
-              <a:lnSpc>
-                <a:spcPts val="2000"/>
-              </a:lnSpc>
-              <a:buNone/>
-            </a:pPr>
-            <a:r>
-              <a:rPr lang="en-US" b="1" dirty="0">
-                <a:solidFill>
-                  <a:srgbClr val="1B1B27"/>
-                </a:solidFill>
-                <a:latin typeface="Arial" panose="020B0604020202020204" pitchFamily="34" charset="0"/>
-                <a:ea typeface="Alexandria" pitchFamily="34" charset="-122"/>
-                <a:cs typeface="Arial" panose="020B0604020202020204" pitchFamily="34" charset="0"/>
-              </a:rPr>
-              <a:t>Power Gating Constraint</a:t>
-            </a:r>
-            <a:endParaRPr lang="en-US" b="1" dirty="0">
-              <a:latin typeface="Arial" panose="020B0604020202020204" pitchFamily="34" charset="0"/>
-              <a:cs typeface="Arial" panose="020B0604020202020204" pitchFamily="34" charset="0"/>
-            </a:endParaRPr>
-          </a:p>
-        </p:txBody>
-      </p:sp>
-      <p:sp>
-        <p:nvSpPr>
-          <p:cNvPr id="34" name="Text 7">
-            <a:extLst>
-              <a:ext uri="{FF2B5EF4-FFF2-40B4-BE49-F238E27FC236}">
-                <a16:creationId xmlns:a16="http://schemas.microsoft.com/office/drawing/2014/main" id="{DD762A5D-DCE1-A9B1-B8D1-45735992C8B2}"/>
-              </a:ext>
-            </a:extLst>
-          </p:cNvPr>
-          <p:cNvSpPr/>
-          <p:nvPr/>
-        </p:nvSpPr>
-        <p:spPr>
-          <a:xfrm>
-            <a:off x="1047483" y="2818850"/>
-            <a:ext cx="9571434" cy="234196"/>
-          </a:xfrm>
-          <a:prstGeom prst="rect">
-            <a:avLst/>
-          </a:prstGeom>
-          <a:noFill/>
-          <a:ln/>
-        </p:spPr>
-        <p:txBody>
-          <a:bodyPr wrap="none" lIns="0" tIns="0" rIns="0" bIns="0" rtlCol="0" anchor="t"/>
-          <a:lstStyle>
-            <a:defPPr>
-              <a:defRPr lang="de-DE"/>
-            </a:defPPr>
-            <a:lvl1pPr marL="0" algn="l" defTabSz="914400" rtl="0" eaLnBrk="1" latinLnBrk="0" hangingPunct="1">
-              <a:defRPr sz="1800" kern="1200">
-                <a:solidFill>
-                  <a:schemeClr val="tx1"/>
-                </a:solidFill>
-                <a:latin typeface="+mn-lt"/>
-                <a:ea typeface="+mn-ea"/>
-                <a:cs typeface="+mn-cs"/>
-              </a:defRPr>
-            </a:lvl1pPr>
-            <a:lvl2pPr marL="457200" algn="l" defTabSz="914400" rtl="0" eaLnBrk="1" latinLnBrk="0" hangingPunct="1">
-              <a:defRPr sz="1800" kern="1200">
-                <a:solidFill>
-                  <a:schemeClr val="tx1"/>
-                </a:solidFill>
-                <a:latin typeface="+mn-lt"/>
-                <a:ea typeface="+mn-ea"/>
-                <a:cs typeface="+mn-cs"/>
-              </a:defRPr>
-            </a:lvl2pPr>
-            <a:lvl3pPr marL="914400" algn="l" defTabSz="914400" rtl="0" eaLnBrk="1" latinLnBrk="0" hangingPunct="1">
-              <a:defRPr sz="1800" kern="1200">
-                <a:solidFill>
-                  <a:schemeClr val="tx1"/>
-                </a:solidFill>
-                <a:latin typeface="+mn-lt"/>
-                <a:ea typeface="+mn-ea"/>
-                <a:cs typeface="+mn-cs"/>
-              </a:defRPr>
-            </a:lvl3pPr>
-            <a:lvl4pPr marL="1371600" algn="l" defTabSz="914400" rtl="0" eaLnBrk="1" latinLnBrk="0" hangingPunct="1">
-              <a:defRPr sz="1800" kern="1200">
-                <a:solidFill>
-                  <a:schemeClr val="tx1"/>
-                </a:solidFill>
-                <a:latin typeface="+mn-lt"/>
-                <a:ea typeface="+mn-ea"/>
-                <a:cs typeface="+mn-cs"/>
-              </a:defRPr>
-            </a:lvl4pPr>
-            <a:lvl5pPr marL="1828800" algn="l" defTabSz="914400" rtl="0" eaLnBrk="1" latinLnBrk="0" hangingPunct="1">
-              <a:defRPr sz="1800" kern="1200">
-                <a:solidFill>
-                  <a:schemeClr val="tx1"/>
-                </a:solidFill>
-                <a:latin typeface="+mn-lt"/>
-                <a:ea typeface="+mn-ea"/>
-                <a:cs typeface="+mn-cs"/>
-              </a:defRPr>
-            </a:lvl5pPr>
-            <a:lvl6pPr marL="2286000" algn="l" defTabSz="914400" rtl="0" eaLnBrk="1" latinLnBrk="0" hangingPunct="1">
-              <a:defRPr sz="1800" kern="1200">
-                <a:solidFill>
-                  <a:schemeClr val="tx1"/>
-                </a:solidFill>
-                <a:latin typeface="+mn-lt"/>
-                <a:ea typeface="+mn-ea"/>
-                <a:cs typeface="+mn-cs"/>
-              </a:defRPr>
-            </a:lvl6pPr>
-            <a:lvl7pPr marL="2743200" algn="l" defTabSz="914400" rtl="0" eaLnBrk="1" latinLnBrk="0" hangingPunct="1">
-              <a:defRPr sz="1800" kern="1200">
-                <a:solidFill>
-                  <a:schemeClr val="tx1"/>
-                </a:solidFill>
-                <a:latin typeface="+mn-lt"/>
-                <a:ea typeface="+mn-ea"/>
-                <a:cs typeface="+mn-cs"/>
-              </a:defRPr>
-            </a:lvl7pPr>
-            <a:lvl8pPr marL="3200400" algn="l" defTabSz="914400" rtl="0" eaLnBrk="1" latinLnBrk="0" hangingPunct="1">
-              <a:defRPr sz="1800" kern="1200">
-                <a:solidFill>
-                  <a:schemeClr val="tx1"/>
-                </a:solidFill>
-                <a:latin typeface="+mn-lt"/>
-                <a:ea typeface="+mn-ea"/>
-                <a:cs typeface="+mn-cs"/>
-              </a:defRPr>
-            </a:lvl8pPr>
-            <a:lvl9pPr marL="3657600" algn="l" defTabSz="914400" rtl="0" eaLnBrk="1" latinLnBrk="0" hangingPunct="1">
-              <a:defRPr sz="1800" kern="1200">
-                <a:solidFill>
-                  <a:schemeClr val="tx1"/>
-                </a:solidFill>
-                <a:latin typeface="+mn-lt"/>
-                <a:ea typeface="+mn-ea"/>
-                <a:cs typeface="+mn-cs"/>
-              </a:defRPr>
-            </a:lvl9pPr>
-          </a:lstStyle>
-          <a:p>
-            <a:pPr marL="0" indent="0" algn="l">
-              <a:lnSpc>
-                <a:spcPts val="1550"/>
-              </a:lnSpc>
-              <a:buNone/>
-            </a:pPr>
-            <a:endParaRPr lang="en-US" sz="1200" dirty="0">
-              <a:latin typeface="Arial" panose="020B0604020202020204" pitchFamily="34" charset="0"/>
-              <a:cs typeface="Arial" panose="020B0604020202020204" pitchFamily="34" charset="0"/>
-            </a:endParaRPr>
-          </a:p>
-        </p:txBody>
-      </p:sp>
-      <p:pic>
-        <p:nvPicPr>
-          <p:cNvPr id="35" name="Image 1">
-            <a:extLst>
-              <a:ext uri="{FF2B5EF4-FFF2-40B4-BE49-F238E27FC236}">
-                <a16:creationId xmlns:a16="http://schemas.microsoft.com/office/drawing/2014/main" id="{5B55AACB-99C1-2EA5-0BC9-688368D23AEC}"/>
-              </a:ext>
-            </a:extLst>
-          </p:cNvPr>
-          <p:cNvPicPr>
-            <a:picLocks noChangeAspect="1"/>
-          </p:cNvPicPr>
-          <p:nvPr/>
-        </p:nvPicPr>
-        <p:blipFill>
-          <a:blip r:embed="rId3"/>
-          <a:stretch>
-            <a:fillRect/>
-          </a:stretch>
-        </p:blipFill>
-        <p:spPr>
-          <a:xfrm>
-            <a:off x="1047483" y="2818850"/>
-            <a:ext cx="9571434" cy="234196"/>
-          </a:xfrm>
-          <a:prstGeom prst="rect">
-            <a:avLst/>
-          </a:prstGeom>
-        </p:spPr>
-      </p:pic>
-      <p:sp>
-        <p:nvSpPr>
-          <p:cNvPr id="36" name="Text 8">
-            <a:extLst>
-              <a:ext uri="{FF2B5EF4-FFF2-40B4-BE49-F238E27FC236}">
-                <a16:creationId xmlns:a16="http://schemas.microsoft.com/office/drawing/2014/main" id="{342AB95E-D50E-50CD-1349-3FE1FEB93087}"/>
-              </a:ext>
-            </a:extLst>
-          </p:cNvPr>
-          <p:cNvSpPr/>
-          <p:nvPr/>
-        </p:nvSpPr>
-        <p:spPr>
-          <a:xfrm>
-            <a:off x="1047483" y="3160322"/>
-            <a:ext cx="9571434" cy="178713"/>
-          </a:xfrm>
-          <a:prstGeom prst="rect">
-            <a:avLst/>
-          </a:prstGeom>
-          <a:noFill/>
-          <a:ln/>
-        </p:spPr>
-        <p:txBody>
-          <a:bodyPr wrap="none" lIns="0" tIns="0" rIns="0" bIns="0" rtlCol="0" anchor="t"/>
-          <a:lstStyle>
-            <a:defPPr>
-              <a:defRPr lang="de-DE"/>
-            </a:defPPr>
-            <a:lvl1pPr marL="0" algn="l" defTabSz="914400" rtl="0" eaLnBrk="1" latinLnBrk="0" hangingPunct="1">
-              <a:defRPr sz="1800" kern="1200">
-                <a:solidFill>
-                  <a:schemeClr val="tx1"/>
-                </a:solidFill>
-                <a:latin typeface="+mn-lt"/>
-                <a:ea typeface="+mn-ea"/>
-                <a:cs typeface="+mn-cs"/>
-              </a:defRPr>
-            </a:lvl1pPr>
-            <a:lvl2pPr marL="457200" algn="l" defTabSz="914400" rtl="0" eaLnBrk="1" latinLnBrk="0" hangingPunct="1">
-              <a:defRPr sz="1800" kern="1200">
-                <a:solidFill>
-                  <a:schemeClr val="tx1"/>
-                </a:solidFill>
-                <a:latin typeface="+mn-lt"/>
-                <a:ea typeface="+mn-ea"/>
-                <a:cs typeface="+mn-cs"/>
-              </a:defRPr>
-            </a:lvl2pPr>
-            <a:lvl3pPr marL="914400" algn="l" defTabSz="914400" rtl="0" eaLnBrk="1" latinLnBrk="0" hangingPunct="1">
-              <a:defRPr sz="1800" kern="1200">
-                <a:solidFill>
-                  <a:schemeClr val="tx1"/>
-                </a:solidFill>
-                <a:latin typeface="+mn-lt"/>
-                <a:ea typeface="+mn-ea"/>
-                <a:cs typeface="+mn-cs"/>
-              </a:defRPr>
-            </a:lvl3pPr>
-            <a:lvl4pPr marL="1371600" algn="l" defTabSz="914400" rtl="0" eaLnBrk="1" latinLnBrk="0" hangingPunct="1">
-              <a:defRPr sz="1800" kern="1200">
-                <a:solidFill>
-                  <a:schemeClr val="tx1"/>
-                </a:solidFill>
-                <a:latin typeface="+mn-lt"/>
-                <a:ea typeface="+mn-ea"/>
-                <a:cs typeface="+mn-cs"/>
-              </a:defRPr>
-            </a:lvl4pPr>
-            <a:lvl5pPr marL="1828800" algn="l" defTabSz="914400" rtl="0" eaLnBrk="1" latinLnBrk="0" hangingPunct="1">
-              <a:defRPr sz="1800" kern="1200">
-                <a:solidFill>
-                  <a:schemeClr val="tx1"/>
-                </a:solidFill>
-                <a:latin typeface="+mn-lt"/>
-                <a:ea typeface="+mn-ea"/>
-                <a:cs typeface="+mn-cs"/>
-              </a:defRPr>
-            </a:lvl5pPr>
-            <a:lvl6pPr marL="2286000" algn="l" defTabSz="914400" rtl="0" eaLnBrk="1" latinLnBrk="0" hangingPunct="1">
-              <a:defRPr sz="1800" kern="1200">
-                <a:solidFill>
-                  <a:schemeClr val="tx1"/>
-                </a:solidFill>
-                <a:latin typeface="+mn-lt"/>
-                <a:ea typeface="+mn-ea"/>
-                <a:cs typeface="+mn-cs"/>
-              </a:defRPr>
-            </a:lvl6pPr>
-            <a:lvl7pPr marL="2743200" algn="l" defTabSz="914400" rtl="0" eaLnBrk="1" latinLnBrk="0" hangingPunct="1">
-              <a:defRPr sz="1800" kern="1200">
-                <a:solidFill>
-                  <a:schemeClr val="tx1"/>
-                </a:solidFill>
-                <a:latin typeface="+mn-lt"/>
-                <a:ea typeface="+mn-ea"/>
-                <a:cs typeface="+mn-cs"/>
-              </a:defRPr>
-            </a:lvl7pPr>
-            <a:lvl8pPr marL="3200400" algn="l" defTabSz="914400" rtl="0" eaLnBrk="1" latinLnBrk="0" hangingPunct="1">
-              <a:defRPr sz="1800" kern="1200">
-                <a:solidFill>
-                  <a:schemeClr val="tx1"/>
-                </a:solidFill>
-                <a:latin typeface="+mn-lt"/>
-                <a:ea typeface="+mn-ea"/>
-                <a:cs typeface="+mn-cs"/>
-              </a:defRPr>
-            </a:lvl8pPr>
-            <a:lvl9pPr marL="3657600" algn="l" defTabSz="914400" rtl="0" eaLnBrk="1" latinLnBrk="0" hangingPunct="1">
-              <a:defRPr sz="1800" kern="1200">
-                <a:solidFill>
-                  <a:schemeClr val="tx1"/>
-                </a:solidFill>
-                <a:latin typeface="+mn-lt"/>
-                <a:ea typeface="+mn-ea"/>
-                <a:cs typeface="+mn-cs"/>
-              </a:defRPr>
-            </a:lvl9pPr>
-          </a:lstStyle>
-          <a:p>
-            <a:pPr marL="0" indent="0" algn="l">
-              <a:lnSpc>
-                <a:spcPts val="1400"/>
-              </a:lnSpc>
-              <a:buNone/>
-            </a:pPr>
-            <a:r>
-              <a:rPr lang="en-US" sz="1400" dirty="0">
-                <a:solidFill>
-                  <a:srgbClr val="404155"/>
-                </a:solidFill>
-                <a:latin typeface="Arial" panose="020B0604020202020204" pitchFamily="34" charset="0"/>
-                <a:ea typeface="Nobile" pitchFamily="34" charset="-122"/>
-                <a:cs typeface="Arial" panose="020B0604020202020204" pitchFamily="34" charset="0"/>
-              </a:rPr>
-              <a:t>Where the smoothing terms are defined as:</a:t>
-            </a:r>
-            <a:endParaRPr lang="en-US" sz="1400" dirty="0">
-              <a:latin typeface="Arial" panose="020B0604020202020204" pitchFamily="34" charset="0"/>
-              <a:cs typeface="Arial" panose="020B0604020202020204" pitchFamily="34" charset="0"/>
-            </a:endParaRPr>
-          </a:p>
-        </p:txBody>
-      </p:sp>
-      <p:sp>
-        <p:nvSpPr>
-          <p:cNvPr id="37" name="Text 9">
-            <a:extLst>
-              <a:ext uri="{FF2B5EF4-FFF2-40B4-BE49-F238E27FC236}">
-                <a16:creationId xmlns:a16="http://schemas.microsoft.com/office/drawing/2014/main" id="{CAC430F2-7283-343B-42F7-539E278EB2C3}"/>
-              </a:ext>
-            </a:extLst>
-          </p:cNvPr>
-          <p:cNvSpPr/>
-          <p:nvPr/>
-        </p:nvSpPr>
-        <p:spPr>
-          <a:xfrm>
-            <a:off x="1047483" y="3446310"/>
-            <a:ext cx="9571434" cy="1132880"/>
-          </a:xfrm>
-          <a:prstGeom prst="rect">
-            <a:avLst/>
-          </a:prstGeom>
-          <a:noFill/>
-          <a:ln/>
-        </p:spPr>
-        <p:txBody>
-          <a:bodyPr wrap="square" lIns="0" tIns="0" rIns="0" bIns="0" rtlCol="0" anchor="t"/>
-          <a:lstStyle>
-            <a:defPPr>
-              <a:defRPr lang="de-DE"/>
-            </a:defPPr>
-            <a:lvl1pPr marL="0" algn="l" defTabSz="914400" rtl="0" eaLnBrk="1" latinLnBrk="0" hangingPunct="1">
-              <a:defRPr sz="1800" kern="1200">
-                <a:solidFill>
-                  <a:schemeClr val="tx1"/>
-                </a:solidFill>
-                <a:latin typeface="+mn-lt"/>
-                <a:ea typeface="+mn-ea"/>
-                <a:cs typeface="+mn-cs"/>
-              </a:defRPr>
-            </a:lvl1pPr>
-            <a:lvl2pPr marL="457200" algn="l" defTabSz="914400" rtl="0" eaLnBrk="1" latinLnBrk="0" hangingPunct="1">
-              <a:defRPr sz="1800" kern="1200">
-                <a:solidFill>
-                  <a:schemeClr val="tx1"/>
-                </a:solidFill>
-                <a:latin typeface="+mn-lt"/>
-                <a:ea typeface="+mn-ea"/>
-                <a:cs typeface="+mn-cs"/>
-              </a:defRPr>
-            </a:lvl2pPr>
-            <a:lvl3pPr marL="914400" algn="l" defTabSz="914400" rtl="0" eaLnBrk="1" latinLnBrk="0" hangingPunct="1">
-              <a:defRPr sz="1800" kern="1200">
-                <a:solidFill>
-                  <a:schemeClr val="tx1"/>
-                </a:solidFill>
-                <a:latin typeface="+mn-lt"/>
-                <a:ea typeface="+mn-ea"/>
-                <a:cs typeface="+mn-cs"/>
-              </a:defRPr>
-            </a:lvl3pPr>
-            <a:lvl4pPr marL="1371600" algn="l" defTabSz="914400" rtl="0" eaLnBrk="1" latinLnBrk="0" hangingPunct="1">
-              <a:defRPr sz="1800" kern="1200">
-                <a:solidFill>
-                  <a:schemeClr val="tx1"/>
-                </a:solidFill>
-                <a:latin typeface="+mn-lt"/>
-                <a:ea typeface="+mn-ea"/>
-                <a:cs typeface="+mn-cs"/>
-              </a:defRPr>
-            </a:lvl4pPr>
-            <a:lvl5pPr marL="1828800" algn="l" defTabSz="914400" rtl="0" eaLnBrk="1" latinLnBrk="0" hangingPunct="1">
-              <a:defRPr sz="1800" kern="1200">
-                <a:solidFill>
-                  <a:schemeClr val="tx1"/>
-                </a:solidFill>
-                <a:latin typeface="+mn-lt"/>
-                <a:ea typeface="+mn-ea"/>
-                <a:cs typeface="+mn-cs"/>
-              </a:defRPr>
-            </a:lvl5pPr>
-            <a:lvl6pPr marL="2286000" algn="l" defTabSz="914400" rtl="0" eaLnBrk="1" latinLnBrk="0" hangingPunct="1">
-              <a:defRPr sz="1800" kern="1200">
-                <a:solidFill>
-                  <a:schemeClr val="tx1"/>
-                </a:solidFill>
-                <a:latin typeface="+mn-lt"/>
-                <a:ea typeface="+mn-ea"/>
-                <a:cs typeface="+mn-cs"/>
-              </a:defRPr>
-            </a:lvl6pPr>
-            <a:lvl7pPr marL="2743200" algn="l" defTabSz="914400" rtl="0" eaLnBrk="1" latinLnBrk="0" hangingPunct="1">
-              <a:defRPr sz="1800" kern="1200">
-                <a:solidFill>
-                  <a:schemeClr val="tx1"/>
-                </a:solidFill>
-                <a:latin typeface="+mn-lt"/>
-                <a:ea typeface="+mn-ea"/>
-                <a:cs typeface="+mn-cs"/>
-              </a:defRPr>
-            </a:lvl7pPr>
-            <a:lvl8pPr marL="3200400" algn="l" defTabSz="914400" rtl="0" eaLnBrk="1" latinLnBrk="0" hangingPunct="1">
-              <a:defRPr sz="1800" kern="1200">
-                <a:solidFill>
-                  <a:schemeClr val="tx1"/>
-                </a:solidFill>
-                <a:latin typeface="+mn-lt"/>
-                <a:ea typeface="+mn-ea"/>
-                <a:cs typeface="+mn-cs"/>
-              </a:defRPr>
-            </a:lvl8pPr>
-            <a:lvl9pPr marL="3657600" algn="l" defTabSz="914400" rtl="0" eaLnBrk="1" latinLnBrk="0" hangingPunct="1">
-              <a:defRPr sz="1800" kern="1200">
-                <a:solidFill>
-                  <a:schemeClr val="tx1"/>
-                </a:solidFill>
-                <a:latin typeface="+mn-lt"/>
-                <a:ea typeface="+mn-ea"/>
-                <a:cs typeface="+mn-cs"/>
-              </a:defRPr>
-            </a:lvl9pPr>
-          </a:lstStyle>
-          <a:p>
-            <a:pPr marL="0" indent="0" algn="l">
-              <a:lnSpc>
-                <a:spcPts val="1550"/>
-              </a:lnSpc>
-              <a:buNone/>
-            </a:pPr>
-            <a:endParaRPr lang="en-US" sz="1200" dirty="0">
-              <a:latin typeface="Arial" panose="020B0604020202020204" pitchFamily="34" charset="0"/>
-              <a:cs typeface="Arial" panose="020B0604020202020204" pitchFamily="34" charset="0"/>
-            </a:endParaRPr>
-          </a:p>
-        </p:txBody>
-      </p:sp>
-      <p:pic>
-        <p:nvPicPr>
-          <p:cNvPr id="38" name="Image 2">
-            <a:extLst>
-              <a:ext uri="{FF2B5EF4-FFF2-40B4-BE49-F238E27FC236}">
-                <a16:creationId xmlns:a16="http://schemas.microsoft.com/office/drawing/2014/main" id="{FFE99AD7-8D5A-2687-A65B-4C19FC281500}"/>
-              </a:ext>
-            </a:extLst>
-          </p:cNvPr>
-          <p:cNvPicPr>
-            <a:picLocks noChangeAspect="1"/>
-          </p:cNvPicPr>
-          <p:nvPr/>
-        </p:nvPicPr>
-        <p:blipFill>
-          <a:blip r:embed="rId4"/>
-          <a:stretch>
-            <a:fillRect/>
-          </a:stretch>
-        </p:blipFill>
-        <p:spPr>
-          <a:xfrm>
-            <a:off x="1047483" y="3446310"/>
-            <a:ext cx="9571434" cy="1132880"/>
-          </a:xfrm>
-          <a:prstGeom prst="rect">
-            <a:avLst/>
-          </a:prstGeom>
-        </p:spPr>
-      </p:pic>
-      <p:sp>
-        <p:nvSpPr>
-          <p:cNvPr id="39" name="Text 10">
-            <a:extLst>
-              <a:ext uri="{FF2B5EF4-FFF2-40B4-BE49-F238E27FC236}">
-                <a16:creationId xmlns:a16="http://schemas.microsoft.com/office/drawing/2014/main" id="{474BD66A-6697-A5AA-DC94-C08F1CC59C3F}"/>
-              </a:ext>
-            </a:extLst>
-          </p:cNvPr>
-          <p:cNvSpPr/>
-          <p:nvPr/>
-        </p:nvSpPr>
-        <p:spPr>
-          <a:xfrm>
-            <a:off x="1047483" y="4706348"/>
-            <a:ext cx="3406735" cy="260152"/>
-          </a:xfrm>
-          <a:prstGeom prst="rect">
-            <a:avLst/>
-          </a:prstGeom>
-          <a:noFill/>
-          <a:ln/>
-        </p:spPr>
-        <p:txBody>
-          <a:bodyPr wrap="none" lIns="0" tIns="0" rIns="0" bIns="0" rtlCol="0" anchor="t"/>
-          <a:lstStyle>
-            <a:defPPr>
-              <a:defRPr lang="de-DE"/>
-            </a:defPPr>
-            <a:lvl1pPr marL="0" algn="l" defTabSz="914400" rtl="0" eaLnBrk="1" latinLnBrk="0" hangingPunct="1">
-              <a:defRPr sz="1800" kern="1200">
-                <a:solidFill>
-                  <a:schemeClr val="tx1"/>
-                </a:solidFill>
-                <a:latin typeface="+mn-lt"/>
-                <a:ea typeface="+mn-ea"/>
-                <a:cs typeface="+mn-cs"/>
-              </a:defRPr>
-            </a:lvl1pPr>
-            <a:lvl2pPr marL="457200" algn="l" defTabSz="914400" rtl="0" eaLnBrk="1" latinLnBrk="0" hangingPunct="1">
-              <a:defRPr sz="1800" kern="1200">
-                <a:solidFill>
-                  <a:schemeClr val="tx1"/>
-                </a:solidFill>
-                <a:latin typeface="+mn-lt"/>
-                <a:ea typeface="+mn-ea"/>
-                <a:cs typeface="+mn-cs"/>
-              </a:defRPr>
-            </a:lvl2pPr>
-            <a:lvl3pPr marL="914400" algn="l" defTabSz="914400" rtl="0" eaLnBrk="1" latinLnBrk="0" hangingPunct="1">
-              <a:defRPr sz="1800" kern="1200">
-                <a:solidFill>
-                  <a:schemeClr val="tx1"/>
-                </a:solidFill>
-                <a:latin typeface="+mn-lt"/>
-                <a:ea typeface="+mn-ea"/>
-                <a:cs typeface="+mn-cs"/>
-              </a:defRPr>
-            </a:lvl3pPr>
-            <a:lvl4pPr marL="1371600" algn="l" defTabSz="914400" rtl="0" eaLnBrk="1" latinLnBrk="0" hangingPunct="1">
-              <a:defRPr sz="1800" kern="1200">
-                <a:solidFill>
-                  <a:schemeClr val="tx1"/>
-                </a:solidFill>
-                <a:latin typeface="+mn-lt"/>
-                <a:ea typeface="+mn-ea"/>
-                <a:cs typeface="+mn-cs"/>
-              </a:defRPr>
-            </a:lvl4pPr>
-            <a:lvl5pPr marL="1828800" algn="l" defTabSz="914400" rtl="0" eaLnBrk="1" latinLnBrk="0" hangingPunct="1">
-              <a:defRPr sz="1800" kern="1200">
-                <a:solidFill>
-                  <a:schemeClr val="tx1"/>
-                </a:solidFill>
-                <a:latin typeface="+mn-lt"/>
-                <a:ea typeface="+mn-ea"/>
-                <a:cs typeface="+mn-cs"/>
-              </a:defRPr>
-            </a:lvl5pPr>
-            <a:lvl6pPr marL="2286000" algn="l" defTabSz="914400" rtl="0" eaLnBrk="1" latinLnBrk="0" hangingPunct="1">
-              <a:defRPr sz="1800" kern="1200">
-                <a:solidFill>
-                  <a:schemeClr val="tx1"/>
-                </a:solidFill>
-                <a:latin typeface="+mn-lt"/>
-                <a:ea typeface="+mn-ea"/>
-                <a:cs typeface="+mn-cs"/>
-              </a:defRPr>
-            </a:lvl6pPr>
-            <a:lvl7pPr marL="2743200" algn="l" defTabSz="914400" rtl="0" eaLnBrk="1" latinLnBrk="0" hangingPunct="1">
-              <a:defRPr sz="1800" kern="1200">
-                <a:solidFill>
-                  <a:schemeClr val="tx1"/>
-                </a:solidFill>
-                <a:latin typeface="+mn-lt"/>
-                <a:ea typeface="+mn-ea"/>
-                <a:cs typeface="+mn-cs"/>
-              </a:defRPr>
-            </a:lvl7pPr>
-            <a:lvl8pPr marL="3200400" algn="l" defTabSz="914400" rtl="0" eaLnBrk="1" latinLnBrk="0" hangingPunct="1">
-              <a:defRPr sz="1800" kern="1200">
-                <a:solidFill>
-                  <a:schemeClr val="tx1"/>
-                </a:solidFill>
-                <a:latin typeface="+mn-lt"/>
-                <a:ea typeface="+mn-ea"/>
-                <a:cs typeface="+mn-cs"/>
-              </a:defRPr>
-            </a:lvl8pPr>
-            <a:lvl9pPr marL="3657600" algn="l" defTabSz="914400" rtl="0" eaLnBrk="1" latinLnBrk="0" hangingPunct="1">
-              <a:defRPr sz="1800" kern="1200">
-                <a:solidFill>
-                  <a:schemeClr val="tx1"/>
-                </a:solidFill>
-                <a:latin typeface="+mn-lt"/>
-                <a:ea typeface="+mn-ea"/>
-                <a:cs typeface="+mn-cs"/>
-              </a:defRPr>
-            </a:lvl9pPr>
-          </a:lstStyle>
-          <a:p>
-            <a:pPr marL="0" indent="0" algn="l">
-              <a:lnSpc>
-                <a:spcPts val="2000"/>
-              </a:lnSpc>
-              <a:buNone/>
-            </a:pPr>
-            <a:r>
-              <a:rPr lang="en-US" b="1" dirty="0">
-                <a:solidFill>
-                  <a:srgbClr val="1B1B27"/>
-                </a:solidFill>
-                <a:latin typeface="Arial" panose="020B0604020202020204" pitchFamily="34" charset="0"/>
-                <a:ea typeface="Alexandria" pitchFamily="34" charset="-122"/>
-                <a:cs typeface="Arial" panose="020B0604020202020204" pitchFamily="34" charset="0"/>
-              </a:rPr>
-              <a:t>Actual Power and SOC Dynamics</a:t>
-            </a:r>
-            <a:endParaRPr lang="en-US" b="1" dirty="0">
-              <a:latin typeface="Arial" panose="020B0604020202020204" pitchFamily="34" charset="0"/>
-              <a:cs typeface="Arial" panose="020B0604020202020204" pitchFamily="34" charset="0"/>
-            </a:endParaRPr>
-          </a:p>
-        </p:txBody>
-      </p:sp>
-      <p:sp>
-        <p:nvSpPr>
-          <p:cNvPr id="40" name="Text 11">
-            <a:extLst>
-              <a:ext uri="{FF2B5EF4-FFF2-40B4-BE49-F238E27FC236}">
-                <a16:creationId xmlns:a16="http://schemas.microsoft.com/office/drawing/2014/main" id="{7D5E3D45-8C97-A9D4-7A3E-48AA47E1B843}"/>
-              </a:ext>
-            </a:extLst>
-          </p:cNvPr>
-          <p:cNvSpPr/>
-          <p:nvPr/>
-        </p:nvSpPr>
-        <p:spPr>
-          <a:xfrm>
-            <a:off x="1047483" y="5093659"/>
-            <a:ext cx="9571434" cy="234196"/>
-          </a:xfrm>
-          <a:prstGeom prst="rect">
-            <a:avLst/>
-          </a:prstGeom>
-          <a:noFill/>
-          <a:ln/>
-        </p:spPr>
-        <p:txBody>
-          <a:bodyPr wrap="none" lIns="0" tIns="0" rIns="0" bIns="0" rtlCol="0" anchor="t"/>
-          <a:lstStyle>
-            <a:defPPr>
-              <a:defRPr lang="de-DE"/>
-            </a:defPPr>
-            <a:lvl1pPr marL="0" algn="l" defTabSz="914400" rtl="0" eaLnBrk="1" latinLnBrk="0" hangingPunct="1">
-              <a:defRPr sz="1800" kern="1200">
-                <a:solidFill>
-                  <a:schemeClr val="tx1"/>
-                </a:solidFill>
-                <a:latin typeface="+mn-lt"/>
-                <a:ea typeface="+mn-ea"/>
-                <a:cs typeface="+mn-cs"/>
-              </a:defRPr>
-            </a:lvl1pPr>
-            <a:lvl2pPr marL="457200" algn="l" defTabSz="914400" rtl="0" eaLnBrk="1" latinLnBrk="0" hangingPunct="1">
-              <a:defRPr sz="1800" kern="1200">
-                <a:solidFill>
-                  <a:schemeClr val="tx1"/>
-                </a:solidFill>
-                <a:latin typeface="+mn-lt"/>
-                <a:ea typeface="+mn-ea"/>
-                <a:cs typeface="+mn-cs"/>
-              </a:defRPr>
-            </a:lvl2pPr>
-            <a:lvl3pPr marL="914400" algn="l" defTabSz="914400" rtl="0" eaLnBrk="1" latinLnBrk="0" hangingPunct="1">
-              <a:defRPr sz="1800" kern="1200">
-                <a:solidFill>
-                  <a:schemeClr val="tx1"/>
-                </a:solidFill>
-                <a:latin typeface="+mn-lt"/>
-                <a:ea typeface="+mn-ea"/>
-                <a:cs typeface="+mn-cs"/>
-              </a:defRPr>
-            </a:lvl3pPr>
-            <a:lvl4pPr marL="1371600" algn="l" defTabSz="914400" rtl="0" eaLnBrk="1" latinLnBrk="0" hangingPunct="1">
-              <a:defRPr sz="1800" kern="1200">
-                <a:solidFill>
-                  <a:schemeClr val="tx1"/>
-                </a:solidFill>
-                <a:latin typeface="+mn-lt"/>
-                <a:ea typeface="+mn-ea"/>
-                <a:cs typeface="+mn-cs"/>
-              </a:defRPr>
-            </a:lvl4pPr>
-            <a:lvl5pPr marL="1828800" algn="l" defTabSz="914400" rtl="0" eaLnBrk="1" latinLnBrk="0" hangingPunct="1">
-              <a:defRPr sz="1800" kern="1200">
-                <a:solidFill>
-                  <a:schemeClr val="tx1"/>
-                </a:solidFill>
-                <a:latin typeface="+mn-lt"/>
-                <a:ea typeface="+mn-ea"/>
-                <a:cs typeface="+mn-cs"/>
-              </a:defRPr>
-            </a:lvl5pPr>
-            <a:lvl6pPr marL="2286000" algn="l" defTabSz="914400" rtl="0" eaLnBrk="1" latinLnBrk="0" hangingPunct="1">
-              <a:defRPr sz="1800" kern="1200">
-                <a:solidFill>
-                  <a:schemeClr val="tx1"/>
-                </a:solidFill>
-                <a:latin typeface="+mn-lt"/>
-                <a:ea typeface="+mn-ea"/>
-                <a:cs typeface="+mn-cs"/>
-              </a:defRPr>
-            </a:lvl6pPr>
-            <a:lvl7pPr marL="2743200" algn="l" defTabSz="914400" rtl="0" eaLnBrk="1" latinLnBrk="0" hangingPunct="1">
-              <a:defRPr sz="1800" kern="1200">
-                <a:solidFill>
-                  <a:schemeClr val="tx1"/>
-                </a:solidFill>
-                <a:latin typeface="+mn-lt"/>
-                <a:ea typeface="+mn-ea"/>
-                <a:cs typeface="+mn-cs"/>
-              </a:defRPr>
-            </a:lvl7pPr>
-            <a:lvl8pPr marL="3200400" algn="l" defTabSz="914400" rtl="0" eaLnBrk="1" latinLnBrk="0" hangingPunct="1">
-              <a:defRPr sz="1800" kern="1200">
-                <a:solidFill>
-                  <a:schemeClr val="tx1"/>
-                </a:solidFill>
-                <a:latin typeface="+mn-lt"/>
-                <a:ea typeface="+mn-ea"/>
-                <a:cs typeface="+mn-cs"/>
-              </a:defRPr>
-            </a:lvl8pPr>
-            <a:lvl9pPr marL="3657600" algn="l" defTabSz="914400" rtl="0" eaLnBrk="1" latinLnBrk="0" hangingPunct="1">
-              <a:defRPr sz="1800" kern="1200">
-                <a:solidFill>
-                  <a:schemeClr val="tx1"/>
-                </a:solidFill>
-                <a:latin typeface="+mn-lt"/>
-                <a:ea typeface="+mn-ea"/>
-                <a:cs typeface="+mn-cs"/>
-              </a:defRPr>
-            </a:lvl9pPr>
-          </a:lstStyle>
-          <a:p>
-            <a:pPr marL="0" indent="0" algn="l">
-              <a:lnSpc>
-                <a:spcPts val="1550"/>
-              </a:lnSpc>
-              <a:buNone/>
-            </a:pPr>
-            <a:endParaRPr lang="en-US" sz="1200" dirty="0">
-              <a:latin typeface="Arial" panose="020B0604020202020204" pitchFamily="34" charset="0"/>
-              <a:cs typeface="Arial" panose="020B0604020202020204" pitchFamily="34" charset="0"/>
-            </a:endParaRPr>
-          </a:p>
-        </p:txBody>
-      </p:sp>
-      <p:pic>
-        <p:nvPicPr>
-          <p:cNvPr id="41" name="Image 3">
-            <a:extLst>
-              <a:ext uri="{FF2B5EF4-FFF2-40B4-BE49-F238E27FC236}">
-                <a16:creationId xmlns:a16="http://schemas.microsoft.com/office/drawing/2014/main" id="{09B9ADA8-A5D7-58DB-163D-1248078F431A}"/>
-              </a:ext>
-            </a:extLst>
-          </p:cNvPr>
-          <p:cNvPicPr>
-            <a:picLocks noChangeAspect="1"/>
-          </p:cNvPicPr>
-          <p:nvPr/>
-        </p:nvPicPr>
-        <p:blipFill>
-          <a:blip r:embed="rId5"/>
-          <a:stretch>
-            <a:fillRect/>
-          </a:stretch>
-        </p:blipFill>
-        <p:spPr>
-          <a:xfrm>
-            <a:off x="1047483" y="5093659"/>
-            <a:ext cx="9571434" cy="234196"/>
-          </a:xfrm>
-          <a:prstGeom prst="rect">
-            <a:avLst/>
-          </a:prstGeom>
-        </p:spPr>
-      </p:pic>
-      <p:sp>
-        <p:nvSpPr>
-          <p:cNvPr id="42" name="Text 12">
-            <a:extLst>
-              <a:ext uri="{FF2B5EF4-FFF2-40B4-BE49-F238E27FC236}">
-                <a16:creationId xmlns:a16="http://schemas.microsoft.com/office/drawing/2014/main" id="{F078D753-4678-41EA-C1BC-C03301891336}"/>
-              </a:ext>
-            </a:extLst>
-          </p:cNvPr>
-          <p:cNvSpPr/>
-          <p:nvPr/>
-        </p:nvSpPr>
-        <p:spPr>
-          <a:xfrm>
-            <a:off x="1047483" y="5435130"/>
-            <a:ext cx="9571434" cy="414695"/>
-          </a:xfrm>
-          <a:prstGeom prst="rect">
-            <a:avLst/>
-          </a:prstGeom>
-          <a:noFill/>
-          <a:ln/>
-        </p:spPr>
-        <p:txBody>
-          <a:bodyPr wrap="square" lIns="0" tIns="0" rIns="0" bIns="0" rtlCol="0" anchor="t"/>
-          <a:lstStyle>
-            <a:defPPr>
-              <a:defRPr lang="de-DE"/>
-            </a:defPPr>
-            <a:lvl1pPr marL="0" algn="l" defTabSz="914400" rtl="0" eaLnBrk="1" latinLnBrk="0" hangingPunct="1">
-              <a:defRPr sz="1800" kern="1200">
-                <a:solidFill>
-                  <a:schemeClr val="tx1"/>
-                </a:solidFill>
-                <a:latin typeface="+mn-lt"/>
-                <a:ea typeface="+mn-ea"/>
-                <a:cs typeface="+mn-cs"/>
-              </a:defRPr>
-            </a:lvl1pPr>
-            <a:lvl2pPr marL="457200" algn="l" defTabSz="914400" rtl="0" eaLnBrk="1" latinLnBrk="0" hangingPunct="1">
-              <a:defRPr sz="1800" kern="1200">
-                <a:solidFill>
-                  <a:schemeClr val="tx1"/>
-                </a:solidFill>
-                <a:latin typeface="+mn-lt"/>
-                <a:ea typeface="+mn-ea"/>
-                <a:cs typeface="+mn-cs"/>
-              </a:defRPr>
-            </a:lvl2pPr>
-            <a:lvl3pPr marL="914400" algn="l" defTabSz="914400" rtl="0" eaLnBrk="1" latinLnBrk="0" hangingPunct="1">
-              <a:defRPr sz="1800" kern="1200">
-                <a:solidFill>
-                  <a:schemeClr val="tx1"/>
-                </a:solidFill>
-                <a:latin typeface="+mn-lt"/>
-                <a:ea typeface="+mn-ea"/>
-                <a:cs typeface="+mn-cs"/>
-              </a:defRPr>
-            </a:lvl3pPr>
-            <a:lvl4pPr marL="1371600" algn="l" defTabSz="914400" rtl="0" eaLnBrk="1" latinLnBrk="0" hangingPunct="1">
-              <a:defRPr sz="1800" kern="1200">
-                <a:solidFill>
-                  <a:schemeClr val="tx1"/>
-                </a:solidFill>
-                <a:latin typeface="+mn-lt"/>
-                <a:ea typeface="+mn-ea"/>
-                <a:cs typeface="+mn-cs"/>
-              </a:defRPr>
-            </a:lvl4pPr>
-            <a:lvl5pPr marL="1828800" algn="l" defTabSz="914400" rtl="0" eaLnBrk="1" latinLnBrk="0" hangingPunct="1">
-              <a:defRPr sz="1800" kern="1200">
-                <a:solidFill>
-                  <a:schemeClr val="tx1"/>
-                </a:solidFill>
-                <a:latin typeface="+mn-lt"/>
-                <a:ea typeface="+mn-ea"/>
-                <a:cs typeface="+mn-cs"/>
-              </a:defRPr>
-            </a:lvl5pPr>
-            <a:lvl6pPr marL="2286000" algn="l" defTabSz="914400" rtl="0" eaLnBrk="1" latinLnBrk="0" hangingPunct="1">
-              <a:defRPr sz="1800" kern="1200">
-                <a:solidFill>
-                  <a:schemeClr val="tx1"/>
-                </a:solidFill>
-                <a:latin typeface="+mn-lt"/>
-                <a:ea typeface="+mn-ea"/>
-                <a:cs typeface="+mn-cs"/>
-              </a:defRPr>
-            </a:lvl6pPr>
-            <a:lvl7pPr marL="2743200" algn="l" defTabSz="914400" rtl="0" eaLnBrk="1" latinLnBrk="0" hangingPunct="1">
-              <a:defRPr sz="1800" kern="1200">
-                <a:solidFill>
-                  <a:schemeClr val="tx1"/>
-                </a:solidFill>
-                <a:latin typeface="+mn-lt"/>
-                <a:ea typeface="+mn-ea"/>
-                <a:cs typeface="+mn-cs"/>
-              </a:defRPr>
-            </a:lvl7pPr>
-            <a:lvl8pPr marL="3200400" algn="l" defTabSz="914400" rtl="0" eaLnBrk="1" latinLnBrk="0" hangingPunct="1">
-              <a:defRPr sz="1800" kern="1200">
-                <a:solidFill>
-                  <a:schemeClr val="tx1"/>
-                </a:solidFill>
-                <a:latin typeface="+mn-lt"/>
-                <a:ea typeface="+mn-ea"/>
-                <a:cs typeface="+mn-cs"/>
-              </a:defRPr>
-            </a:lvl8pPr>
-            <a:lvl9pPr marL="3657600" algn="l" defTabSz="914400" rtl="0" eaLnBrk="1" latinLnBrk="0" hangingPunct="1">
-              <a:defRPr sz="1800" kern="1200">
-                <a:solidFill>
-                  <a:schemeClr val="tx1"/>
-                </a:solidFill>
-                <a:latin typeface="+mn-lt"/>
-                <a:ea typeface="+mn-ea"/>
-                <a:cs typeface="+mn-cs"/>
-              </a:defRPr>
-            </a:lvl9pPr>
-          </a:lstStyle>
-          <a:p>
-            <a:pPr marL="0" indent="0" algn="l">
-              <a:lnSpc>
-                <a:spcPts val="1550"/>
-              </a:lnSpc>
-              <a:buNone/>
-            </a:pPr>
-            <a:endParaRPr lang="en-US" sz="1200" dirty="0">
-              <a:latin typeface="Arial" panose="020B0604020202020204" pitchFamily="34" charset="0"/>
-              <a:cs typeface="Arial" panose="020B0604020202020204" pitchFamily="34" charset="0"/>
-            </a:endParaRPr>
-          </a:p>
-        </p:txBody>
-      </p:sp>
-      <p:pic>
-        <p:nvPicPr>
-          <p:cNvPr id="43" name="Image 4">
-            <a:extLst>
-              <a:ext uri="{FF2B5EF4-FFF2-40B4-BE49-F238E27FC236}">
-                <a16:creationId xmlns:a16="http://schemas.microsoft.com/office/drawing/2014/main" id="{7C04B5A2-1FCF-0CDF-37A6-692FFDF08E30}"/>
-              </a:ext>
-            </a:extLst>
-          </p:cNvPr>
-          <p:cNvPicPr>
-            <a:picLocks noChangeAspect="1"/>
-          </p:cNvPicPr>
-          <p:nvPr/>
-        </p:nvPicPr>
-        <p:blipFill>
-          <a:blip r:embed="rId6"/>
-          <a:stretch>
-            <a:fillRect/>
-          </a:stretch>
-        </p:blipFill>
-        <p:spPr>
-          <a:xfrm>
-            <a:off x="1047483" y="5435130"/>
-            <a:ext cx="9571434" cy="414695"/>
-          </a:xfrm>
-          <a:prstGeom prst="rect">
-            <a:avLst/>
-          </a:prstGeom>
-        </p:spPr>
-      </p:pic>
-      <p:sp>
-        <p:nvSpPr>
-          <p:cNvPr id="44" name="Text 13">
-            <a:extLst>
-              <a:ext uri="{FF2B5EF4-FFF2-40B4-BE49-F238E27FC236}">
-                <a16:creationId xmlns:a16="http://schemas.microsoft.com/office/drawing/2014/main" id="{08CEE8D0-6860-35CD-D119-87E2194A8918}"/>
-              </a:ext>
-            </a:extLst>
-          </p:cNvPr>
-          <p:cNvSpPr/>
-          <p:nvPr/>
-        </p:nvSpPr>
-        <p:spPr>
-          <a:xfrm>
-            <a:off x="1047483" y="5957100"/>
-            <a:ext cx="9571434" cy="414695"/>
-          </a:xfrm>
-          <a:prstGeom prst="rect">
-            <a:avLst/>
-          </a:prstGeom>
-          <a:noFill/>
-          <a:ln/>
-        </p:spPr>
-        <p:txBody>
-          <a:bodyPr wrap="square" lIns="0" tIns="0" rIns="0" bIns="0" rtlCol="0" anchor="t"/>
-          <a:lstStyle>
-            <a:defPPr>
-              <a:defRPr lang="de-DE"/>
-            </a:defPPr>
-            <a:lvl1pPr marL="0" algn="l" defTabSz="914400" rtl="0" eaLnBrk="1" latinLnBrk="0" hangingPunct="1">
-              <a:defRPr sz="1800" kern="1200">
-                <a:solidFill>
-                  <a:schemeClr val="tx1"/>
-                </a:solidFill>
-                <a:latin typeface="+mn-lt"/>
-                <a:ea typeface="+mn-ea"/>
-                <a:cs typeface="+mn-cs"/>
-              </a:defRPr>
-            </a:lvl1pPr>
-            <a:lvl2pPr marL="457200" algn="l" defTabSz="914400" rtl="0" eaLnBrk="1" latinLnBrk="0" hangingPunct="1">
-              <a:defRPr sz="1800" kern="1200">
-                <a:solidFill>
-                  <a:schemeClr val="tx1"/>
-                </a:solidFill>
-                <a:latin typeface="+mn-lt"/>
-                <a:ea typeface="+mn-ea"/>
-                <a:cs typeface="+mn-cs"/>
-              </a:defRPr>
-            </a:lvl2pPr>
-            <a:lvl3pPr marL="914400" algn="l" defTabSz="914400" rtl="0" eaLnBrk="1" latinLnBrk="0" hangingPunct="1">
-              <a:defRPr sz="1800" kern="1200">
-                <a:solidFill>
-                  <a:schemeClr val="tx1"/>
-                </a:solidFill>
-                <a:latin typeface="+mn-lt"/>
-                <a:ea typeface="+mn-ea"/>
-                <a:cs typeface="+mn-cs"/>
-              </a:defRPr>
-            </a:lvl3pPr>
-            <a:lvl4pPr marL="1371600" algn="l" defTabSz="914400" rtl="0" eaLnBrk="1" latinLnBrk="0" hangingPunct="1">
-              <a:defRPr sz="1800" kern="1200">
-                <a:solidFill>
-                  <a:schemeClr val="tx1"/>
-                </a:solidFill>
-                <a:latin typeface="+mn-lt"/>
-                <a:ea typeface="+mn-ea"/>
-                <a:cs typeface="+mn-cs"/>
-              </a:defRPr>
-            </a:lvl4pPr>
-            <a:lvl5pPr marL="1828800" algn="l" defTabSz="914400" rtl="0" eaLnBrk="1" latinLnBrk="0" hangingPunct="1">
-              <a:defRPr sz="1800" kern="1200">
-                <a:solidFill>
-                  <a:schemeClr val="tx1"/>
-                </a:solidFill>
-                <a:latin typeface="+mn-lt"/>
-                <a:ea typeface="+mn-ea"/>
-                <a:cs typeface="+mn-cs"/>
-              </a:defRPr>
-            </a:lvl5pPr>
-            <a:lvl6pPr marL="2286000" algn="l" defTabSz="914400" rtl="0" eaLnBrk="1" latinLnBrk="0" hangingPunct="1">
-              <a:defRPr sz="1800" kern="1200">
-                <a:solidFill>
-                  <a:schemeClr val="tx1"/>
-                </a:solidFill>
-                <a:latin typeface="+mn-lt"/>
-                <a:ea typeface="+mn-ea"/>
-                <a:cs typeface="+mn-cs"/>
-              </a:defRPr>
-            </a:lvl6pPr>
-            <a:lvl7pPr marL="2743200" algn="l" defTabSz="914400" rtl="0" eaLnBrk="1" latinLnBrk="0" hangingPunct="1">
-              <a:defRPr sz="1800" kern="1200">
-                <a:solidFill>
-                  <a:schemeClr val="tx1"/>
-                </a:solidFill>
-                <a:latin typeface="+mn-lt"/>
-                <a:ea typeface="+mn-ea"/>
-                <a:cs typeface="+mn-cs"/>
-              </a:defRPr>
-            </a:lvl7pPr>
-            <a:lvl8pPr marL="3200400" algn="l" defTabSz="914400" rtl="0" eaLnBrk="1" latinLnBrk="0" hangingPunct="1">
-              <a:defRPr sz="1800" kern="1200">
-                <a:solidFill>
-                  <a:schemeClr val="tx1"/>
-                </a:solidFill>
-                <a:latin typeface="+mn-lt"/>
-                <a:ea typeface="+mn-ea"/>
-                <a:cs typeface="+mn-cs"/>
-              </a:defRPr>
-            </a:lvl8pPr>
-            <a:lvl9pPr marL="3657600" algn="l" defTabSz="914400" rtl="0" eaLnBrk="1" latinLnBrk="0" hangingPunct="1">
-              <a:defRPr sz="1800" kern="1200">
-                <a:solidFill>
-                  <a:schemeClr val="tx1"/>
-                </a:solidFill>
-                <a:latin typeface="+mn-lt"/>
-                <a:ea typeface="+mn-ea"/>
-                <a:cs typeface="+mn-cs"/>
-              </a:defRPr>
-            </a:lvl9pPr>
-          </a:lstStyle>
-          <a:p>
-            <a:pPr marL="0" indent="0" algn="l">
-              <a:lnSpc>
-                <a:spcPts val="1550"/>
-              </a:lnSpc>
-              <a:buNone/>
-            </a:pPr>
-            <a:endParaRPr lang="en-US" sz="1200" dirty="0">
-              <a:latin typeface="Arial" panose="020B0604020202020204" pitchFamily="34" charset="0"/>
-              <a:cs typeface="Arial" panose="020B0604020202020204" pitchFamily="34" charset="0"/>
-            </a:endParaRPr>
-          </a:p>
-        </p:txBody>
-      </p:sp>
-      <p:pic>
-        <p:nvPicPr>
-          <p:cNvPr id="45" name="Image 5">
-            <a:extLst>
-              <a:ext uri="{FF2B5EF4-FFF2-40B4-BE49-F238E27FC236}">
-                <a16:creationId xmlns:a16="http://schemas.microsoft.com/office/drawing/2014/main" id="{E5A3B9B8-7814-A3B6-5960-E6BE2C573E99}"/>
-              </a:ext>
-            </a:extLst>
-          </p:cNvPr>
-          <p:cNvPicPr>
-            <a:picLocks noChangeAspect="1"/>
-          </p:cNvPicPr>
-          <p:nvPr/>
-        </p:nvPicPr>
-        <p:blipFill>
-          <a:blip r:embed="rId7"/>
-          <a:stretch>
-            <a:fillRect/>
-          </a:stretch>
-        </p:blipFill>
-        <p:spPr>
-          <a:xfrm>
-            <a:off x="1047483" y="5957100"/>
-            <a:ext cx="9571434" cy="414695"/>
-          </a:xfrm>
-          <a:prstGeom prst="rect">
-            <a:avLst/>
-          </a:prstGeom>
-        </p:spPr>
-      </p:pic>
-      <p:sp>
-        <p:nvSpPr>
-          <p:cNvPr id="3" name="TextBox 2">
-            <a:extLst>
-              <a:ext uri="{FF2B5EF4-FFF2-40B4-BE49-F238E27FC236}">
-                <a16:creationId xmlns:a16="http://schemas.microsoft.com/office/drawing/2014/main" id="{C866E4F7-43D7-4300-7D2B-A4F06BAE4F61}"/>
-              </a:ext>
-            </a:extLst>
-          </p:cNvPr>
-          <p:cNvSpPr txBox="1"/>
-          <p:nvPr/>
-        </p:nvSpPr>
-        <p:spPr>
-          <a:xfrm>
-            <a:off x="6559200" y="1856587"/>
-            <a:ext cx="3728906" cy="307777"/>
-          </a:xfrm>
-          <a:prstGeom prst="rect">
-            <a:avLst/>
-          </a:prstGeom>
-          <a:noFill/>
-        </p:spPr>
-        <p:txBody>
-          <a:bodyPr wrap="none" rtlCol="0">
-            <a:spAutoFit/>
-          </a:bodyPr>
-          <a:lstStyle/>
-          <a:p>
-            <a:r>
-              <a:rPr lang="de-DE" sz="1400" dirty="0"/>
-              <a:t>………………………………………………………………………(1)</a:t>
-            </a:r>
-          </a:p>
-        </p:txBody>
-      </p:sp>
-      <p:sp>
-        <p:nvSpPr>
-          <p:cNvPr id="4" name="TextBox 3">
-            <a:extLst>
-              <a:ext uri="{FF2B5EF4-FFF2-40B4-BE49-F238E27FC236}">
-                <a16:creationId xmlns:a16="http://schemas.microsoft.com/office/drawing/2014/main" id="{DB0EFE75-7533-4DF3-CD77-75B224E7424B}"/>
-              </a:ext>
-            </a:extLst>
-          </p:cNvPr>
-          <p:cNvSpPr txBox="1"/>
-          <p:nvPr/>
-        </p:nvSpPr>
-        <p:spPr>
-          <a:xfrm>
-            <a:off x="7460400" y="2788094"/>
-            <a:ext cx="2898550" cy="307777"/>
-          </a:xfrm>
-          <a:prstGeom prst="rect">
-            <a:avLst/>
-          </a:prstGeom>
-          <a:noFill/>
-        </p:spPr>
-        <p:txBody>
-          <a:bodyPr wrap="none" rtlCol="0">
-            <a:spAutoFit/>
-          </a:bodyPr>
-          <a:lstStyle/>
-          <a:p>
-            <a:r>
-              <a:rPr lang="de-DE" sz="1400" dirty="0"/>
-              <a:t>……………………………………………………(2)</a:t>
-            </a:r>
-          </a:p>
-        </p:txBody>
-      </p:sp>
-      <p:sp>
-        <p:nvSpPr>
-          <p:cNvPr id="5" name="TextBox 4">
-            <a:extLst>
-              <a:ext uri="{FF2B5EF4-FFF2-40B4-BE49-F238E27FC236}">
-                <a16:creationId xmlns:a16="http://schemas.microsoft.com/office/drawing/2014/main" id="{FFCF9E12-9A71-31F3-C762-E49DAEC65220}"/>
-              </a:ext>
-            </a:extLst>
-          </p:cNvPr>
-          <p:cNvSpPr txBox="1"/>
-          <p:nvPr/>
-        </p:nvSpPr>
-        <p:spPr>
-          <a:xfrm>
-            <a:off x="6487200" y="5073715"/>
-            <a:ext cx="3818674" cy="307777"/>
-          </a:xfrm>
-          <a:prstGeom prst="rect">
-            <a:avLst/>
-          </a:prstGeom>
-          <a:noFill/>
-        </p:spPr>
-        <p:txBody>
-          <a:bodyPr wrap="none" rtlCol="0">
-            <a:spAutoFit/>
-          </a:bodyPr>
-          <a:lstStyle/>
-          <a:p>
-            <a:r>
-              <a:rPr lang="de-DE" sz="1400" dirty="0"/>
-              <a:t>……………………………………..…………………………...……(3)</a:t>
-            </a:r>
-          </a:p>
-        </p:txBody>
-      </p:sp>
-      <p:sp>
-        <p:nvSpPr>
-          <p:cNvPr id="7" name="Slide Number Placeholder 6">
-            <a:extLst>
-              <a:ext uri="{FF2B5EF4-FFF2-40B4-BE49-F238E27FC236}">
-                <a16:creationId xmlns:a16="http://schemas.microsoft.com/office/drawing/2014/main" id="{D14BABEB-7065-7DD0-1419-1934C659074E}"/>
-              </a:ext>
-            </a:extLst>
-          </p:cNvPr>
-          <p:cNvSpPr>
-            <a:spLocks noGrp="1"/>
-          </p:cNvSpPr>
-          <p:nvPr>
-            <p:ph type="sldNum" sz="quarter" idx="10"/>
-          </p:nvPr>
-        </p:nvSpPr>
-        <p:spPr/>
-        <p:txBody>
-          <a:bodyPr/>
-          <a:lstStyle/>
-          <a:p>
-            <a:fld id="{A02D9A9C-251E-4686-914B-47E3F39F30D8}" type="slidenum">
-              <a:rPr lang="de-DE" smtClean="0"/>
-              <a:t>2</a:t>
-            </a:fld>
-            <a:endParaRPr lang="de-DE"/>
-          </a:p>
-        </p:txBody>
-      </p:sp>
-    </p:spTree>
-    <p:extLst>
-      <p:ext uri="{BB962C8B-B14F-4D97-AF65-F5344CB8AC3E}">
-        <p14:creationId xmlns:p14="http://schemas.microsoft.com/office/powerpoint/2010/main" val="713313515"/>
-      </p:ext>
-    </p:extLst>
-  </p:cSld>
-  <p:clrMapOvr>
-    <a:masterClrMapping/>
-  </p:clrMapOvr>
-</p:sld>
-</file>
-
-<file path=ppt/slides/slide20.xml><?xml version="1.0" encoding="utf-8"?>
+<file path=ppt/slides/slide25.xml><?xml version="1.0" encoding="utf-8"?>
 <p:sld xmlns:a="http://schemas.openxmlformats.org/drawingml/2006/main" xmlns:r="http://schemas.openxmlformats.org/officeDocument/2006/relationships" xmlns:p="http://schemas.openxmlformats.org/presentationml/2006/main" show="0">
   <p:cSld>
     <p:spTree>
@@ -6320,7 +7140,7 @@
           <a:p>
             <a:fld id="{A02D9A9C-251E-4686-914B-47E3F39F30D8}" type="slidenum">
               <a:rPr lang="de-DE" smtClean="0"/>
-              <a:t>20</a:t>
+              <a:t>25</a:t>
             </a:fld>
             <a:endParaRPr lang="de-DE"/>
           </a:p>
@@ -6469,7 +7289,7 @@
 </p:sld>
 </file>
 
-<file path=ppt/slides/slide21.xml><?xml version="1.0" encoding="utf-8"?>
+<file path=ppt/slides/slide26.xml><?xml version="1.0" encoding="utf-8"?>
 <p:sld xmlns:a="http://schemas.openxmlformats.org/drawingml/2006/main" xmlns:r="http://schemas.openxmlformats.org/officeDocument/2006/relationships" xmlns:p="http://schemas.openxmlformats.org/presentationml/2006/main" show="0">
   <p:cSld>
     <p:spTree>
@@ -6894,7 +7714,7 @@
           <a:p>
             <a:fld id="{A02D9A9C-251E-4686-914B-47E3F39F30D8}" type="slidenum">
               <a:rPr lang="de-DE" smtClean="0"/>
-              <a:t>21</a:t>
+              <a:t>26</a:t>
             </a:fld>
             <a:endParaRPr lang="de-DE"/>
           </a:p>
@@ -15412,6 +16232,991 @@
       </p:grpSpPr>
       <p:sp>
         <p:nvSpPr>
+          <p:cNvPr id="2" name="Slide Number Placeholder 1">
+            <a:extLst>
+              <a:ext uri="{FF2B5EF4-FFF2-40B4-BE49-F238E27FC236}">
+                <a16:creationId xmlns:a16="http://schemas.microsoft.com/office/drawing/2014/main" id="{1C9B70E8-7837-0421-FE64-12BE2ABFDA07}"/>
+              </a:ext>
+            </a:extLst>
+          </p:cNvPr>
+          <p:cNvSpPr>
+            <a:spLocks noGrp="1"/>
+          </p:cNvSpPr>
+          <p:nvPr>
+            <p:ph type="sldNum" sz="quarter" idx="10"/>
+          </p:nvPr>
+        </p:nvSpPr>
+        <p:spPr/>
+        <p:txBody>
+          <a:bodyPr/>
+          <a:lstStyle/>
+          <a:p>
+            <a:fld id="{A02D9A9C-251E-4686-914B-47E3F39F30D8}" type="slidenum">
+              <a:rPr lang="de-DE" smtClean="0"/>
+              <a:t>7</a:t>
+            </a:fld>
+            <a:endParaRPr lang="de-DE"/>
+          </a:p>
+        </p:txBody>
+      </p:sp>
+      <p:sp>
+        <p:nvSpPr>
+          <p:cNvPr id="3" name="Title">
+            <a:extLst>
+              <a:ext uri="{FF2B5EF4-FFF2-40B4-BE49-F238E27FC236}">
+                <a16:creationId xmlns:a16="http://schemas.microsoft.com/office/drawing/2014/main" id="{8830FF17-0067-1AAE-72A4-F1E3CA296F2E}"/>
+              </a:ext>
+            </a:extLst>
+          </p:cNvPr>
+          <p:cNvSpPr/>
+          <p:nvPr/>
+        </p:nvSpPr>
+        <p:spPr>
+          <a:xfrm>
+            <a:off x="807623" y="827300"/>
+            <a:ext cx="12000000" cy="620000"/>
+          </a:xfrm>
+          <a:prstGeom prst="rect">
+            <a:avLst/>
+          </a:prstGeom>
+          <a:noFill/>
+          <a:ln/>
+        </p:spPr>
+        <p:txBody>
+          <a:bodyPr wrap="none" lIns="0" tIns="0" rIns="0" bIns="0" anchor="t"/>
+          <a:lstStyle>
+            <a:defPPr>
+              <a:defRPr lang="de-DE"/>
+            </a:defPPr>
+            <a:lvl1pPr marL="0" algn="l" defTabSz="914400" rtl="0" eaLnBrk="1" latinLnBrk="0" hangingPunct="1">
+              <a:defRPr sz="1800" kern="1200">
+                <a:solidFill>
+                  <a:schemeClr val="tx1"/>
+                </a:solidFill>
+                <a:latin typeface="+mn-lt"/>
+                <a:ea typeface="+mn-ea"/>
+                <a:cs typeface="+mn-cs"/>
+              </a:defRPr>
+            </a:lvl1pPr>
+            <a:lvl2pPr marL="457200" algn="l" defTabSz="914400" rtl="0" eaLnBrk="1" latinLnBrk="0" hangingPunct="1">
+              <a:defRPr sz="1800" kern="1200">
+                <a:solidFill>
+                  <a:schemeClr val="tx1"/>
+                </a:solidFill>
+                <a:latin typeface="+mn-lt"/>
+                <a:ea typeface="+mn-ea"/>
+                <a:cs typeface="+mn-cs"/>
+              </a:defRPr>
+            </a:lvl2pPr>
+            <a:lvl3pPr marL="914400" algn="l" defTabSz="914400" rtl="0" eaLnBrk="1" latinLnBrk="0" hangingPunct="1">
+              <a:defRPr sz="1800" kern="1200">
+                <a:solidFill>
+                  <a:schemeClr val="tx1"/>
+                </a:solidFill>
+                <a:latin typeface="+mn-lt"/>
+                <a:ea typeface="+mn-ea"/>
+                <a:cs typeface="+mn-cs"/>
+              </a:defRPr>
+            </a:lvl3pPr>
+            <a:lvl4pPr marL="1371600" algn="l" defTabSz="914400" rtl="0" eaLnBrk="1" latinLnBrk="0" hangingPunct="1">
+              <a:defRPr sz="1800" kern="1200">
+                <a:solidFill>
+                  <a:schemeClr val="tx1"/>
+                </a:solidFill>
+                <a:latin typeface="+mn-lt"/>
+                <a:ea typeface="+mn-ea"/>
+                <a:cs typeface="+mn-cs"/>
+              </a:defRPr>
+            </a:lvl4pPr>
+            <a:lvl5pPr marL="1828800" algn="l" defTabSz="914400" rtl="0" eaLnBrk="1" latinLnBrk="0" hangingPunct="1">
+              <a:defRPr sz="1800" kern="1200">
+                <a:solidFill>
+                  <a:schemeClr val="tx1"/>
+                </a:solidFill>
+                <a:latin typeface="+mn-lt"/>
+                <a:ea typeface="+mn-ea"/>
+                <a:cs typeface="+mn-cs"/>
+              </a:defRPr>
+            </a:lvl5pPr>
+            <a:lvl6pPr marL="2286000" algn="l" defTabSz="914400" rtl="0" eaLnBrk="1" latinLnBrk="0" hangingPunct="1">
+              <a:defRPr sz="1800" kern="1200">
+                <a:solidFill>
+                  <a:schemeClr val="tx1"/>
+                </a:solidFill>
+                <a:latin typeface="+mn-lt"/>
+                <a:ea typeface="+mn-ea"/>
+                <a:cs typeface="+mn-cs"/>
+              </a:defRPr>
+            </a:lvl6pPr>
+            <a:lvl7pPr marL="2743200" algn="l" defTabSz="914400" rtl="0" eaLnBrk="1" latinLnBrk="0" hangingPunct="1">
+              <a:defRPr sz="1800" kern="1200">
+                <a:solidFill>
+                  <a:schemeClr val="tx1"/>
+                </a:solidFill>
+                <a:latin typeface="+mn-lt"/>
+                <a:ea typeface="+mn-ea"/>
+                <a:cs typeface="+mn-cs"/>
+              </a:defRPr>
+            </a:lvl7pPr>
+            <a:lvl8pPr marL="3200400" algn="l" defTabSz="914400" rtl="0" eaLnBrk="1" latinLnBrk="0" hangingPunct="1">
+              <a:defRPr sz="1800" kern="1200">
+                <a:solidFill>
+                  <a:schemeClr val="tx1"/>
+                </a:solidFill>
+                <a:latin typeface="+mn-lt"/>
+                <a:ea typeface="+mn-ea"/>
+                <a:cs typeface="+mn-cs"/>
+              </a:defRPr>
+            </a:lvl8pPr>
+            <a:lvl9pPr marL="3657600" algn="l" defTabSz="914400" rtl="0" eaLnBrk="1" latinLnBrk="0" hangingPunct="1">
+              <a:defRPr sz="1800" kern="1200">
+                <a:solidFill>
+                  <a:schemeClr val="tx1"/>
+                </a:solidFill>
+                <a:latin typeface="+mn-lt"/>
+                <a:ea typeface="+mn-ea"/>
+                <a:cs typeface="+mn-cs"/>
+              </a:defRPr>
+            </a:lvl9pPr>
+          </a:lstStyle>
+          <a:p>
+            <a:pPr marL="0" indent="0">
+              <a:buNone/>
+            </a:pPr>
+            <a:r>
+              <a:rPr lang="en-US" sz="3600" b="1">
+                <a:solidFill>
+                  <a:srgbClr val="1B1B27"/>
+                </a:solidFill>
+                <a:latin typeface="Arial"/>
+                <a:cs typeface="Arial"/>
+              </a:rPr>
+              <a:t>New Constraint: Terminal SOC Bound</a:t>
+            </a:r>
+          </a:p>
+        </p:txBody>
+      </p:sp>
+      <p:sp>
+        <p:nvSpPr>
+          <p:cNvPr id="4" name="Subtitle">
+            <a:extLst>
+              <a:ext uri="{FF2B5EF4-FFF2-40B4-BE49-F238E27FC236}">
+                <a16:creationId xmlns:a16="http://schemas.microsoft.com/office/drawing/2014/main" id="{898A5E9E-CC0D-4E83-C297-429FC0118A6C}"/>
+              </a:ext>
+            </a:extLst>
+          </p:cNvPr>
+          <p:cNvSpPr/>
+          <p:nvPr/>
+        </p:nvSpPr>
+        <p:spPr>
+          <a:xfrm>
+            <a:off x="807623" y="1462300"/>
+            <a:ext cx="12800000" cy="460000"/>
+          </a:xfrm>
+          <a:prstGeom prst="rect">
+            <a:avLst/>
+          </a:prstGeom>
+          <a:noFill/>
+          <a:ln/>
+        </p:spPr>
+        <p:txBody>
+          <a:bodyPr wrap="square" lIns="0" tIns="0" rIns="0" bIns="0" anchor="t"/>
+          <a:lstStyle>
+            <a:defPPr>
+              <a:defRPr lang="de-DE"/>
+            </a:defPPr>
+            <a:lvl1pPr marL="0" algn="l" defTabSz="914400" rtl="0" eaLnBrk="1" latinLnBrk="0" hangingPunct="1">
+              <a:defRPr sz="1800" kern="1200">
+                <a:solidFill>
+                  <a:schemeClr val="tx1"/>
+                </a:solidFill>
+                <a:latin typeface="+mn-lt"/>
+                <a:ea typeface="+mn-ea"/>
+                <a:cs typeface="+mn-cs"/>
+              </a:defRPr>
+            </a:lvl1pPr>
+            <a:lvl2pPr marL="457200" algn="l" defTabSz="914400" rtl="0" eaLnBrk="1" latinLnBrk="0" hangingPunct="1">
+              <a:defRPr sz="1800" kern="1200">
+                <a:solidFill>
+                  <a:schemeClr val="tx1"/>
+                </a:solidFill>
+                <a:latin typeface="+mn-lt"/>
+                <a:ea typeface="+mn-ea"/>
+                <a:cs typeface="+mn-cs"/>
+              </a:defRPr>
+            </a:lvl2pPr>
+            <a:lvl3pPr marL="914400" algn="l" defTabSz="914400" rtl="0" eaLnBrk="1" latinLnBrk="0" hangingPunct="1">
+              <a:defRPr sz="1800" kern="1200">
+                <a:solidFill>
+                  <a:schemeClr val="tx1"/>
+                </a:solidFill>
+                <a:latin typeface="+mn-lt"/>
+                <a:ea typeface="+mn-ea"/>
+                <a:cs typeface="+mn-cs"/>
+              </a:defRPr>
+            </a:lvl3pPr>
+            <a:lvl4pPr marL="1371600" algn="l" defTabSz="914400" rtl="0" eaLnBrk="1" latinLnBrk="0" hangingPunct="1">
+              <a:defRPr sz="1800" kern="1200">
+                <a:solidFill>
+                  <a:schemeClr val="tx1"/>
+                </a:solidFill>
+                <a:latin typeface="+mn-lt"/>
+                <a:ea typeface="+mn-ea"/>
+                <a:cs typeface="+mn-cs"/>
+              </a:defRPr>
+            </a:lvl4pPr>
+            <a:lvl5pPr marL="1828800" algn="l" defTabSz="914400" rtl="0" eaLnBrk="1" latinLnBrk="0" hangingPunct="1">
+              <a:defRPr sz="1800" kern="1200">
+                <a:solidFill>
+                  <a:schemeClr val="tx1"/>
+                </a:solidFill>
+                <a:latin typeface="+mn-lt"/>
+                <a:ea typeface="+mn-ea"/>
+                <a:cs typeface="+mn-cs"/>
+              </a:defRPr>
+            </a:lvl5pPr>
+            <a:lvl6pPr marL="2286000" algn="l" defTabSz="914400" rtl="0" eaLnBrk="1" latinLnBrk="0" hangingPunct="1">
+              <a:defRPr sz="1800" kern="1200">
+                <a:solidFill>
+                  <a:schemeClr val="tx1"/>
+                </a:solidFill>
+                <a:latin typeface="+mn-lt"/>
+                <a:ea typeface="+mn-ea"/>
+                <a:cs typeface="+mn-cs"/>
+              </a:defRPr>
+            </a:lvl6pPr>
+            <a:lvl7pPr marL="2743200" algn="l" defTabSz="914400" rtl="0" eaLnBrk="1" latinLnBrk="0" hangingPunct="1">
+              <a:defRPr sz="1800" kern="1200">
+                <a:solidFill>
+                  <a:schemeClr val="tx1"/>
+                </a:solidFill>
+                <a:latin typeface="+mn-lt"/>
+                <a:ea typeface="+mn-ea"/>
+                <a:cs typeface="+mn-cs"/>
+              </a:defRPr>
+            </a:lvl7pPr>
+            <a:lvl8pPr marL="3200400" algn="l" defTabSz="914400" rtl="0" eaLnBrk="1" latinLnBrk="0" hangingPunct="1">
+              <a:defRPr sz="1800" kern="1200">
+                <a:solidFill>
+                  <a:schemeClr val="tx1"/>
+                </a:solidFill>
+                <a:latin typeface="+mn-lt"/>
+                <a:ea typeface="+mn-ea"/>
+                <a:cs typeface="+mn-cs"/>
+              </a:defRPr>
+            </a:lvl8pPr>
+            <a:lvl9pPr marL="3657600" algn="l" defTabSz="914400" rtl="0" eaLnBrk="1" latinLnBrk="0" hangingPunct="1">
+              <a:defRPr sz="1800" kern="1200">
+                <a:solidFill>
+                  <a:schemeClr val="tx1"/>
+                </a:solidFill>
+                <a:latin typeface="+mn-lt"/>
+                <a:ea typeface="+mn-ea"/>
+                <a:cs typeface="+mn-cs"/>
+              </a:defRPr>
+            </a:lvl9pPr>
+          </a:lstStyle>
+          <a:p>
+            <a:pPr>
+              <a:buNone/>
+            </a:pPr>
+            <a:r>
+              <a:rPr lang="en-US" sz="2000">
+                <a:solidFill>
+                  <a:srgbClr val="42485A"/>
+                </a:solidFill>
+                <a:latin typeface="Arial"/>
+                <a:cs typeface="Arial"/>
+              </a:rPr>
+              <a:t>The battery must not finish the optimization horizon below the minimum reserve level.</a:t>
+            </a:r>
+          </a:p>
+        </p:txBody>
+      </p:sp>
+      <p:sp>
+        <p:nvSpPr>
+          <p:cNvPr id="5" name="Formula Panel">
+            <a:extLst>
+              <a:ext uri="{FF2B5EF4-FFF2-40B4-BE49-F238E27FC236}">
+                <a16:creationId xmlns:a16="http://schemas.microsoft.com/office/drawing/2014/main" id="{F4C72DE1-5A83-D48E-5A7D-1B8E2C12B01A}"/>
+              </a:ext>
+            </a:extLst>
+          </p:cNvPr>
+          <p:cNvSpPr/>
+          <p:nvPr/>
+        </p:nvSpPr>
+        <p:spPr>
+          <a:xfrm>
+            <a:off x="807623" y="2252300"/>
+            <a:ext cx="6150000" cy="2250000"/>
+          </a:xfrm>
+          <a:prstGeom prst="roundRect">
+            <a:avLst/>
+          </a:prstGeom>
+          <a:solidFill>
+            <a:srgbClr val="F8FAFC"/>
+          </a:solidFill>
+          <a:ln w="12700">
+            <a:solidFill>
+              <a:srgbClr val="D2DDF9"/>
+            </a:solidFill>
+          </a:ln>
+        </p:spPr>
+        <p:txBody>
+          <a:bodyPr wrap="square" lIns="260000" tIns="220000" rIns="260000" bIns="180000" anchor="t">
+            <a:spAutoFit/>
+          </a:bodyPr>
+          <a:lstStyle>
+            <a:defPPr>
+              <a:defRPr lang="de-DE"/>
+            </a:defPPr>
+            <a:lvl1pPr marL="0" algn="l" defTabSz="914400" rtl="0" eaLnBrk="1" latinLnBrk="0" hangingPunct="1">
+              <a:defRPr sz="1800" kern="1200">
+                <a:solidFill>
+                  <a:schemeClr val="tx1"/>
+                </a:solidFill>
+                <a:latin typeface="+mn-lt"/>
+                <a:ea typeface="+mn-ea"/>
+                <a:cs typeface="+mn-cs"/>
+              </a:defRPr>
+            </a:lvl1pPr>
+            <a:lvl2pPr marL="457200" algn="l" defTabSz="914400" rtl="0" eaLnBrk="1" latinLnBrk="0" hangingPunct="1">
+              <a:defRPr sz="1800" kern="1200">
+                <a:solidFill>
+                  <a:schemeClr val="tx1"/>
+                </a:solidFill>
+                <a:latin typeface="+mn-lt"/>
+                <a:ea typeface="+mn-ea"/>
+                <a:cs typeface="+mn-cs"/>
+              </a:defRPr>
+            </a:lvl2pPr>
+            <a:lvl3pPr marL="914400" algn="l" defTabSz="914400" rtl="0" eaLnBrk="1" latinLnBrk="0" hangingPunct="1">
+              <a:defRPr sz="1800" kern="1200">
+                <a:solidFill>
+                  <a:schemeClr val="tx1"/>
+                </a:solidFill>
+                <a:latin typeface="+mn-lt"/>
+                <a:ea typeface="+mn-ea"/>
+                <a:cs typeface="+mn-cs"/>
+              </a:defRPr>
+            </a:lvl3pPr>
+            <a:lvl4pPr marL="1371600" algn="l" defTabSz="914400" rtl="0" eaLnBrk="1" latinLnBrk="0" hangingPunct="1">
+              <a:defRPr sz="1800" kern="1200">
+                <a:solidFill>
+                  <a:schemeClr val="tx1"/>
+                </a:solidFill>
+                <a:latin typeface="+mn-lt"/>
+                <a:ea typeface="+mn-ea"/>
+                <a:cs typeface="+mn-cs"/>
+              </a:defRPr>
+            </a:lvl4pPr>
+            <a:lvl5pPr marL="1828800" algn="l" defTabSz="914400" rtl="0" eaLnBrk="1" latinLnBrk="0" hangingPunct="1">
+              <a:defRPr sz="1800" kern="1200">
+                <a:solidFill>
+                  <a:schemeClr val="tx1"/>
+                </a:solidFill>
+                <a:latin typeface="+mn-lt"/>
+                <a:ea typeface="+mn-ea"/>
+                <a:cs typeface="+mn-cs"/>
+              </a:defRPr>
+            </a:lvl5pPr>
+            <a:lvl6pPr marL="2286000" algn="l" defTabSz="914400" rtl="0" eaLnBrk="1" latinLnBrk="0" hangingPunct="1">
+              <a:defRPr sz="1800" kern="1200">
+                <a:solidFill>
+                  <a:schemeClr val="tx1"/>
+                </a:solidFill>
+                <a:latin typeface="+mn-lt"/>
+                <a:ea typeface="+mn-ea"/>
+                <a:cs typeface="+mn-cs"/>
+              </a:defRPr>
+            </a:lvl6pPr>
+            <a:lvl7pPr marL="2743200" algn="l" defTabSz="914400" rtl="0" eaLnBrk="1" latinLnBrk="0" hangingPunct="1">
+              <a:defRPr sz="1800" kern="1200">
+                <a:solidFill>
+                  <a:schemeClr val="tx1"/>
+                </a:solidFill>
+                <a:latin typeface="+mn-lt"/>
+                <a:ea typeface="+mn-ea"/>
+                <a:cs typeface="+mn-cs"/>
+              </a:defRPr>
+            </a:lvl7pPr>
+            <a:lvl8pPr marL="3200400" algn="l" defTabSz="914400" rtl="0" eaLnBrk="1" latinLnBrk="0" hangingPunct="1">
+              <a:defRPr sz="1800" kern="1200">
+                <a:solidFill>
+                  <a:schemeClr val="tx1"/>
+                </a:solidFill>
+                <a:latin typeface="+mn-lt"/>
+                <a:ea typeface="+mn-ea"/>
+                <a:cs typeface="+mn-cs"/>
+              </a:defRPr>
+            </a:lvl8pPr>
+            <a:lvl9pPr marL="3657600" algn="l" defTabSz="914400" rtl="0" eaLnBrk="1" latinLnBrk="0" hangingPunct="1">
+              <a:defRPr sz="1800" kern="1200">
+                <a:solidFill>
+                  <a:schemeClr val="tx1"/>
+                </a:solidFill>
+                <a:latin typeface="+mn-lt"/>
+                <a:ea typeface="+mn-ea"/>
+                <a:cs typeface="+mn-cs"/>
+              </a:defRPr>
+            </a:lvl9pPr>
+          </a:lstStyle>
+          <a:p>
+            <a:pPr>
+              <a:buNone/>
+            </a:pPr>
+            <a:r>
+              <a:rPr lang="en-US" sz="1900" b="1">
+                <a:solidFill>
+                  <a:srgbClr val="3B5BDB"/>
+                </a:solidFill>
+                <a:latin typeface="Arial"/>
+                <a:cs typeface="Arial"/>
+              </a:rPr>
+              <a:t>Mathematical form</a:t>
+            </a:r>
+          </a:p>
+          <a:p>
+            <a:pPr>
+              <a:buNone/>
+            </a:pPr>
+            <a:r>
+              <a:rPr lang="en-US" sz="3400" b="1">
+                <a:solidFill>
+                  <a:srgbClr val="1B1B27"/>
+                </a:solidFill>
+                <a:latin typeface="Cambria Math"/>
+                <a:cs typeface="Cambria Math"/>
+              </a:rPr>
+              <a:t>0.5 &lt;= SOC(T-1) &lt;= 1.0</a:t>
+            </a:r>
+          </a:p>
+          <a:p>
+            <a:pPr>
+              <a:buNone/>
+            </a:pPr>
+            <a:r>
+              <a:rPr lang="en-US" sz="2200">
+                <a:solidFill>
+                  <a:srgbClr val="1B1B27"/>
+                </a:solidFill>
+                <a:latin typeface="Cambria Math"/>
+                <a:cs typeface="Cambria Math"/>
+              </a:rPr>
+              <a:t>equivalently: SOC(T-1) &gt;= SOC_min,  SOC_min = 0.5</a:t>
+            </a:r>
+          </a:p>
+        </p:txBody>
+      </p:sp>
+      <p:sp>
+        <p:nvSpPr>
+          <p:cNvPr id="6" name="Pyomo Panel">
+            <a:extLst>
+              <a:ext uri="{FF2B5EF4-FFF2-40B4-BE49-F238E27FC236}">
+                <a16:creationId xmlns:a16="http://schemas.microsoft.com/office/drawing/2014/main" id="{43210780-5898-1991-C990-069FABDD9CAE}"/>
+              </a:ext>
+            </a:extLst>
+          </p:cNvPr>
+          <p:cNvSpPr/>
+          <p:nvPr/>
+        </p:nvSpPr>
+        <p:spPr>
+          <a:xfrm>
+            <a:off x="7207623" y="2302300"/>
+            <a:ext cx="6200000" cy="2575117"/>
+          </a:xfrm>
+          <a:prstGeom prst="roundRect">
+            <a:avLst/>
+          </a:prstGeom>
+          <a:solidFill>
+            <a:srgbClr val="F8FAFC"/>
+          </a:solidFill>
+          <a:ln w="12700">
+            <a:solidFill>
+              <a:srgbClr val="D2DDF9"/>
+            </a:solidFill>
+          </a:ln>
+        </p:spPr>
+        <p:txBody>
+          <a:bodyPr wrap="square" lIns="260000" tIns="220000" rIns="260000" bIns="180000" anchor="t">
+            <a:spAutoFit/>
+          </a:bodyPr>
+          <a:lstStyle>
+            <a:defPPr>
+              <a:defRPr lang="de-DE"/>
+            </a:defPPr>
+            <a:lvl1pPr marL="0" algn="l" defTabSz="914400" rtl="0" eaLnBrk="1" latinLnBrk="0" hangingPunct="1">
+              <a:defRPr sz="1800" kern="1200">
+                <a:solidFill>
+                  <a:schemeClr val="tx1"/>
+                </a:solidFill>
+                <a:latin typeface="+mn-lt"/>
+                <a:ea typeface="+mn-ea"/>
+                <a:cs typeface="+mn-cs"/>
+              </a:defRPr>
+            </a:lvl1pPr>
+            <a:lvl2pPr marL="457200" algn="l" defTabSz="914400" rtl="0" eaLnBrk="1" latinLnBrk="0" hangingPunct="1">
+              <a:defRPr sz="1800" kern="1200">
+                <a:solidFill>
+                  <a:schemeClr val="tx1"/>
+                </a:solidFill>
+                <a:latin typeface="+mn-lt"/>
+                <a:ea typeface="+mn-ea"/>
+                <a:cs typeface="+mn-cs"/>
+              </a:defRPr>
+            </a:lvl2pPr>
+            <a:lvl3pPr marL="914400" algn="l" defTabSz="914400" rtl="0" eaLnBrk="1" latinLnBrk="0" hangingPunct="1">
+              <a:defRPr sz="1800" kern="1200">
+                <a:solidFill>
+                  <a:schemeClr val="tx1"/>
+                </a:solidFill>
+                <a:latin typeface="+mn-lt"/>
+                <a:ea typeface="+mn-ea"/>
+                <a:cs typeface="+mn-cs"/>
+              </a:defRPr>
+            </a:lvl3pPr>
+            <a:lvl4pPr marL="1371600" algn="l" defTabSz="914400" rtl="0" eaLnBrk="1" latinLnBrk="0" hangingPunct="1">
+              <a:defRPr sz="1800" kern="1200">
+                <a:solidFill>
+                  <a:schemeClr val="tx1"/>
+                </a:solidFill>
+                <a:latin typeface="+mn-lt"/>
+                <a:ea typeface="+mn-ea"/>
+                <a:cs typeface="+mn-cs"/>
+              </a:defRPr>
+            </a:lvl4pPr>
+            <a:lvl5pPr marL="1828800" algn="l" defTabSz="914400" rtl="0" eaLnBrk="1" latinLnBrk="0" hangingPunct="1">
+              <a:defRPr sz="1800" kern="1200">
+                <a:solidFill>
+                  <a:schemeClr val="tx1"/>
+                </a:solidFill>
+                <a:latin typeface="+mn-lt"/>
+                <a:ea typeface="+mn-ea"/>
+                <a:cs typeface="+mn-cs"/>
+              </a:defRPr>
+            </a:lvl5pPr>
+            <a:lvl6pPr marL="2286000" algn="l" defTabSz="914400" rtl="0" eaLnBrk="1" latinLnBrk="0" hangingPunct="1">
+              <a:defRPr sz="1800" kern="1200">
+                <a:solidFill>
+                  <a:schemeClr val="tx1"/>
+                </a:solidFill>
+                <a:latin typeface="+mn-lt"/>
+                <a:ea typeface="+mn-ea"/>
+                <a:cs typeface="+mn-cs"/>
+              </a:defRPr>
+            </a:lvl6pPr>
+            <a:lvl7pPr marL="2743200" algn="l" defTabSz="914400" rtl="0" eaLnBrk="1" latinLnBrk="0" hangingPunct="1">
+              <a:defRPr sz="1800" kern="1200">
+                <a:solidFill>
+                  <a:schemeClr val="tx1"/>
+                </a:solidFill>
+                <a:latin typeface="+mn-lt"/>
+                <a:ea typeface="+mn-ea"/>
+                <a:cs typeface="+mn-cs"/>
+              </a:defRPr>
+            </a:lvl7pPr>
+            <a:lvl8pPr marL="3200400" algn="l" defTabSz="914400" rtl="0" eaLnBrk="1" latinLnBrk="0" hangingPunct="1">
+              <a:defRPr sz="1800" kern="1200">
+                <a:solidFill>
+                  <a:schemeClr val="tx1"/>
+                </a:solidFill>
+                <a:latin typeface="+mn-lt"/>
+                <a:ea typeface="+mn-ea"/>
+                <a:cs typeface="+mn-cs"/>
+              </a:defRPr>
+            </a:lvl8pPr>
+            <a:lvl9pPr marL="3657600" algn="l" defTabSz="914400" rtl="0" eaLnBrk="1" latinLnBrk="0" hangingPunct="1">
+              <a:defRPr sz="1800" kern="1200">
+                <a:solidFill>
+                  <a:schemeClr val="tx1"/>
+                </a:solidFill>
+                <a:latin typeface="+mn-lt"/>
+                <a:ea typeface="+mn-ea"/>
+                <a:cs typeface="+mn-cs"/>
+              </a:defRPr>
+            </a:lvl9pPr>
+          </a:lstStyle>
+          <a:p>
+            <a:pPr>
+              <a:buNone/>
+            </a:pPr>
+            <a:r>
+              <a:rPr lang="en-US" sz="1900" b="1" dirty="0" err="1">
+                <a:solidFill>
+                  <a:srgbClr val="3B5BDB"/>
+                </a:solidFill>
+                <a:latin typeface="Arial"/>
+                <a:cs typeface="Arial"/>
+              </a:rPr>
+              <a:t>Pyomo</a:t>
+            </a:r>
+            <a:r>
+              <a:rPr lang="en-US" sz="1900" b="1" dirty="0">
+                <a:solidFill>
+                  <a:srgbClr val="3B5BDB"/>
+                </a:solidFill>
+                <a:latin typeface="Arial"/>
+                <a:cs typeface="Arial"/>
+              </a:rPr>
+              <a:t> implementation</a:t>
+            </a:r>
+          </a:p>
+          <a:p>
+            <a:pPr>
+              <a:buNone/>
+            </a:pPr>
+            <a:r>
+              <a:rPr lang="en-US" sz="1800" dirty="0" err="1">
+                <a:solidFill>
+                  <a:srgbClr val="1B1B27"/>
+                </a:solidFill>
+                <a:latin typeface="Consolas"/>
+                <a:cs typeface="Consolas"/>
+              </a:rPr>
+              <a:t>model.SOC</a:t>
+            </a:r>
+            <a:r>
+              <a:rPr lang="en-US" sz="1800" dirty="0">
+                <a:solidFill>
+                  <a:srgbClr val="1B1B27"/>
+                </a:solidFill>
+                <a:latin typeface="Consolas"/>
+                <a:cs typeface="Consolas"/>
+              </a:rPr>
+              <a:t>[</a:t>
+            </a:r>
+            <a:r>
+              <a:rPr lang="en-US" sz="1800" dirty="0" err="1">
+                <a:solidFill>
+                  <a:srgbClr val="1B1B27"/>
+                </a:solidFill>
+                <a:latin typeface="Consolas"/>
+                <a:cs typeface="Consolas"/>
+              </a:rPr>
+              <a:t>len</a:t>
+            </a:r>
+            <a:r>
+              <a:rPr lang="en-US" sz="1800" dirty="0">
+                <a:solidFill>
+                  <a:srgbClr val="1B1B27"/>
+                </a:solidFill>
+                <a:latin typeface="Consolas"/>
+                <a:cs typeface="Consolas"/>
+              </a:rPr>
+              <a:t>(</a:t>
+            </a:r>
+            <a:r>
+              <a:rPr lang="en-US" sz="1800" dirty="0" err="1">
+                <a:solidFill>
+                  <a:srgbClr val="1B1B27"/>
+                </a:solidFill>
+                <a:latin typeface="Consolas"/>
+                <a:cs typeface="Consolas"/>
+              </a:rPr>
+              <a:t>model.SOC</a:t>
+            </a:r>
+            <a:r>
+              <a:rPr lang="en-US" sz="1800" dirty="0">
+                <a:solidFill>
+                  <a:srgbClr val="1B1B27"/>
+                </a:solidFill>
+                <a:latin typeface="Consolas"/>
+                <a:cs typeface="Consolas"/>
+              </a:rPr>
+              <a:t>)-1].bounds = (0.5, 1.0)</a:t>
+            </a:r>
+          </a:p>
+          <a:p>
+            <a:pPr marL="342900" indent="-285750">
+              <a:buFontTx/>
+              <a:buChar char="-"/>
+            </a:pPr>
+            <a:r>
+              <a:rPr lang="en-US" sz="1750" dirty="0">
+                <a:solidFill>
+                  <a:srgbClr val="42485A"/>
+                </a:solidFill>
+                <a:latin typeface="Arial"/>
+                <a:cs typeface="Arial"/>
+              </a:rPr>
+              <a:t>Prevents exploiting the final step by emptying the battery.</a:t>
+            </a:r>
+          </a:p>
+          <a:p>
+            <a:pPr marL="342900" indent="-285750">
+              <a:buFontTx/>
+              <a:buChar char="-"/>
+            </a:pPr>
+            <a:r>
+              <a:rPr lang="en-US" sz="1750" dirty="0">
+                <a:solidFill>
+                  <a:srgbClr val="42485A"/>
+                </a:solidFill>
+                <a:latin typeface="Arial"/>
+                <a:cs typeface="Arial"/>
+              </a:rPr>
+              <a:t>Keeps the battery ready for the next 24 h operating window.</a:t>
+            </a:r>
+          </a:p>
+        </p:txBody>
+      </p:sp>
+      <p:sp>
+        <p:nvSpPr>
+          <p:cNvPr id="7" name="RL Counterpart">
+            <a:extLst>
+              <a:ext uri="{FF2B5EF4-FFF2-40B4-BE49-F238E27FC236}">
+                <a16:creationId xmlns:a16="http://schemas.microsoft.com/office/drawing/2014/main" id="{95E8F7F4-B535-FF4E-3A67-F64C94756C2C}"/>
+              </a:ext>
+            </a:extLst>
+          </p:cNvPr>
+          <p:cNvSpPr/>
+          <p:nvPr/>
+        </p:nvSpPr>
+        <p:spPr>
+          <a:xfrm>
+            <a:off x="3961789" y="5128876"/>
+            <a:ext cx="6150000" cy="1850000"/>
+          </a:xfrm>
+          <a:prstGeom prst="roundRect">
+            <a:avLst/>
+          </a:prstGeom>
+          <a:solidFill>
+            <a:srgbClr val="EEF7F2"/>
+          </a:solidFill>
+          <a:ln w="12700">
+            <a:solidFill>
+              <a:srgbClr val="B8E0C7"/>
+            </a:solidFill>
+          </a:ln>
+        </p:spPr>
+        <p:txBody>
+          <a:bodyPr wrap="square" lIns="260000" tIns="220000" rIns="260000" bIns="180000" anchor="t">
+            <a:spAutoFit/>
+          </a:bodyPr>
+          <a:lstStyle>
+            <a:defPPr>
+              <a:defRPr lang="de-DE"/>
+            </a:defPPr>
+            <a:lvl1pPr marL="0" algn="l" defTabSz="914400" rtl="0" eaLnBrk="1" latinLnBrk="0" hangingPunct="1">
+              <a:defRPr sz="1800" kern="1200">
+                <a:solidFill>
+                  <a:schemeClr val="tx1"/>
+                </a:solidFill>
+                <a:latin typeface="+mn-lt"/>
+                <a:ea typeface="+mn-ea"/>
+                <a:cs typeface="+mn-cs"/>
+              </a:defRPr>
+            </a:lvl1pPr>
+            <a:lvl2pPr marL="457200" algn="l" defTabSz="914400" rtl="0" eaLnBrk="1" latinLnBrk="0" hangingPunct="1">
+              <a:defRPr sz="1800" kern="1200">
+                <a:solidFill>
+                  <a:schemeClr val="tx1"/>
+                </a:solidFill>
+                <a:latin typeface="+mn-lt"/>
+                <a:ea typeface="+mn-ea"/>
+                <a:cs typeface="+mn-cs"/>
+              </a:defRPr>
+            </a:lvl2pPr>
+            <a:lvl3pPr marL="914400" algn="l" defTabSz="914400" rtl="0" eaLnBrk="1" latinLnBrk="0" hangingPunct="1">
+              <a:defRPr sz="1800" kern="1200">
+                <a:solidFill>
+                  <a:schemeClr val="tx1"/>
+                </a:solidFill>
+                <a:latin typeface="+mn-lt"/>
+                <a:ea typeface="+mn-ea"/>
+                <a:cs typeface="+mn-cs"/>
+              </a:defRPr>
+            </a:lvl3pPr>
+            <a:lvl4pPr marL="1371600" algn="l" defTabSz="914400" rtl="0" eaLnBrk="1" latinLnBrk="0" hangingPunct="1">
+              <a:defRPr sz="1800" kern="1200">
+                <a:solidFill>
+                  <a:schemeClr val="tx1"/>
+                </a:solidFill>
+                <a:latin typeface="+mn-lt"/>
+                <a:ea typeface="+mn-ea"/>
+                <a:cs typeface="+mn-cs"/>
+              </a:defRPr>
+            </a:lvl4pPr>
+            <a:lvl5pPr marL="1828800" algn="l" defTabSz="914400" rtl="0" eaLnBrk="1" latinLnBrk="0" hangingPunct="1">
+              <a:defRPr sz="1800" kern="1200">
+                <a:solidFill>
+                  <a:schemeClr val="tx1"/>
+                </a:solidFill>
+                <a:latin typeface="+mn-lt"/>
+                <a:ea typeface="+mn-ea"/>
+                <a:cs typeface="+mn-cs"/>
+              </a:defRPr>
+            </a:lvl5pPr>
+            <a:lvl6pPr marL="2286000" algn="l" defTabSz="914400" rtl="0" eaLnBrk="1" latinLnBrk="0" hangingPunct="1">
+              <a:defRPr sz="1800" kern="1200">
+                <a:solidFill>
+                  <a:schemeClr val="tx1"/>
+                </a:solidFill>
+                <a:latin typeface="+mn-lt"/>
+                <a:ea typeface="+mn-ea"/>
+                <a:cs typeface="+mn-cs"/>
+              </a:defRPr>
+            </a:lvl6pPr>
+            <a:lvl7pPr marL="2743200" algn="l" defTabSz="914400" rtl="0" eaLnBrk="1" latinLnBrk="0" hangingPunct="1">
+              <a:defRPr sz="1800" kern="1200">
+                <a:solidFill>
+                  <a:schemeClr val="tx1"/>
+                </a:solidFill>
+                <a:latin typeface="+mn-lt"/>
+                <a:ea typeface="+mn-ea"/>
+                <a:cs typeface="+mn-cs"/>
+              </a:defRPr>
+            </a:lvl7pPr>
+            <a:lvl8pPr marL="3200400" algn="l" defTabSz="914400" rtl="0" eaLnBrk="1" latinLnBrk="0" hangingPunct="1">
+              <a:defRPr sz="1800" kern="1200">
+                <a:solidFill>
+                  <a:schemeClr val="tx1"/>
+                </a:solidFill>
+                <a:latin typeface="+mn-lt"/>
+                <a:ea typeface="+mn-ea"/>
+                <a:cs typeface="+mn-cs"/>
+              </a:defRPr>
+            </a:lvl8pPr>
+            <a:lvl9pPr marL="3657600" algn="l" defTabSz="914400" rtl="0" eaLnBrk="1" latinLnBrk="0" hangingPunct="1">
+              <a:defRPr sz="1800" kern="1200">
+                <a:solidFill>
+                  <a:schemeClr val="tx1"/>
+                </a:solidFill>
+                <a:latin typeface="+mn-lt"/>
+                <a:ea typeface="+mn-ea"/>
+                <a:cs typeface="+mn-cs"/>
+              </a:defRPr>
+            </a:lvl9pPr>
+          </a:lstStyle>
+          <a:p>
+            <a:pPr>
+              <a:buNone/>
+            </a:pPr>
+            <a:r>
+              <a:rPr lang="en-US" sz="1900" b="1" dirty="0">
+                <a:solidFill>
+                  <a:srgbClr val="2F7A4F"/>
+                </a:solidFill>
+                <a:latin typeface="Arial"/>
+                <a:cs typeface="Arial"/>
+              </a:rPr>
+              <a:t>RL counterpart</a:t>
+            </a:r>
+          </a:p>
+          <a:p>
+            <a:pPr>
+              <a:buNone/>
+            </a:pPr>
+            <a:r>
+              <a:rPr lang="en-US" sz="2200" b="1" dirty="0" err="1">
+                <a:solidFill>
+                  <a:srgbClr val="1B1B27"/>
+                </a:solidFill>
+                <a:latin typeface="Cambria Math"/>
+                <a:cs typeface="Cambria Math"/>
+              </a:rPr>
+              <a:t>penalty_T</a:t>
+            </a:r>
+            <a:r>
+              <a:rPr lang="en-US" sz="2200" b="1" dirty="0">
+                <a:solidFill>
+                  <a:srgbClr val="1B1B27"/>
+                </a:solidFill>
+                <a:latin typeface="Cambria Math"/>
+                <a:cs typeface="Cambria Math"/>
+              </a:rPr>
+              <a:t> = </a:t>
+            </a:r>
+            <a:r>
+              <a:rPr lang="en-US" sz="2200" b="1" dirty="0" err="1">
+                <a:solidFill>
+                  <a:srgbClr val="1B1B27"/>
+                </a:solidFill>
+                <a:latin typeface="Cambria Math"/>
+                <a:cs typeface="Cambria Math"/>
+              </a:rPr>
+              <a:t>lambda_T</a:t>
+            </a:r>
+            <a:r>
+              <a:rPr lang="en-US" sz="2200" b="1" dirty="0">
+                <a:solidFill>
+                  <a:srgbClr val="1B1B27"/>
+                </a:solidFill>
+                <a:latin typeface="Cambria Math"/>
+                <a:cs typeface="Cambria Math"/>
+              </a:rPr>
+              <a:t> * max(</a:t>
+            </a:r>
+            <a:r>
+              <a:rPr lang="en-US" sz="2200" b="1" dirty="0" err="1">
+                <a:solidFill>
+                  <a:srgbClr val="1B1B27"/>
+                </a:solidFill>
+                <a:latin typeface="Cambria Math"/>
+                <a:cs typeface="Cambria Math"/>
+              </a:rPr>
+              <a:t>SOC_min</a:t>
+            </a:r>
+            <a:r>
+              <a:rPr lang="en-US" sz="2200" b="1" dirty="0">
+                <a:solidFill>
+                  <a:srgbClr val="1B1B27"/>
+                </a:solidFill>
+                <a:latin typeface="Cambria Math"/>
+                <a:cs typeface="Cambria Math"/>
+              </a:rPr>
+              <a:t> - SOC_T, 0)</a:t>
+            </a:r>
+          </a:p>
+          <a:p>
+            <a:pPr>
+              <a:buNone/>
+            </a:pPr>
+            <a:r>
+              <a:rPr lang="en-US" sz="1650" dirty="0">
+                <a:solidFill>
+                  <a:srgbClr val="42485A"/>
+                </a:solidFill>
+                <a:latin typeface="Arial"/>
+                <a:cs typeface="Arial"/>
+              </a:rPr>
+              <a:t>The learned policy is penalized only when terminal SOC is below the same minimum reserve.</a:t>
+            </a:r>
+          </a:p>
+        </p:txBody>
+      </p:sp>
+    </p:spTree>
+    <p:extLst>
+      <p:ext uri="{BB962C8B-B14F-4D97-AF65-F5344CB8AC3E}">
+        <p14:creationId xmlns:p14="http://schemas.microsoft.com/office/powerpoint/2010/main" val="398717581"/>
+      </p:ext>
+    </p:extLst>
+  </p:cSld>
+  <p:clrMapOvr>
+    <a:masterClrMapping/>
+  </p:clrMapOvr>
+</p:sld>
+</file>
+
+<file path=ppt/slides/slide8.xml><?xml version="1.0" encoding="utf-8"?>
+<p:sld xmlns:a="http://schemas.openxmlformats.org/drawingml/2006/main" xmlns:r="http://schemas.openxmlformats.org/officeDocument/2006/relationships" xmlns:p="http://schemas.openxmlformats.org/presentationml/2006/main">
+  <p:cSld>
+    <p:spTree>
+      <p:nvGrpSpPr>
+        <p:cNvPr id="1" name=""/>
+        <p:cNvGrpSpPr/>
+        <p:nvPr/>
+      </p:nvGrpSpPr>
+      <p:grpSpPr>
+        <a:xfrm>
+          <a:off x="0" y="0"/>
+          <a:ext cx="0" cy="0"/>
+          <a:chOff x="0" y="0"/>
+          <a:chExt cx="0" cy="0"/>
+        </a:xfrm>
+      </p:grpSpPr>
+      <p:sp>
+        <p:nvSpPr>
           <p:cNvPr id="17" name="Shape 4">
             <a:extLst>
               <a:ext uri="{FF2B5EF4-FFF2-40B4-BE49-F238E27FC236}">
@@ -17259,7 +19064,7 @@
           <a:p>
             <a:fld id="{A02D9A9C-251E-4686-914B-47E3F39F30D8}" type="slidenum">
               <a:rPr lang="de-DE" smtClean="0"/>
-              <a:t>7</a:t>
+              <a:t>8</a:t>
             </a:fld>
             <a:endParaRPr lang="de-DE"/>
           </a:p>
@@ -17269,1179 +19074,6 @@
     <p:extLst>
       <p:ext uri="{BB962C8B-B14F-4D97-AF65-F5344CB8AC3E}">
         <p14:creationId xmlns:p14="http://schemas.microsoft.com/office/powerpoint/2010/main" val="3828837966"/>
-      </p:ext>
-    </p:extLst>
-  </p:cSld>
-  <p:clrMapOvr>
-    <a:masterClrMapping/>
-  </p:clrMapOvr>
-</p:sld>
-</file>
-
-<file path=ppt/slides/slide8.xml><?xml version="1.0" encoding="utf-8"?>
-<p:sld xmlns:a="http://schemas.openxmlformats.org/drawingml/2006/main" xmlns:r="http://schemas.openxmlformats.org/officeDocument/2006/relationships" xmlns:p="http://schemas.openxmlformats.org/presentationml/2006/main">
-  <p:cSld>
-    <p:spTree>
-      <p:nvGrpSpPr>
-        <p:cNvPr id="1" name=""/>
-        <p:cNvGrpSpPr/>
-        <p:nvPr/>
-      </p:nvGrpSpPr>
-      <p:grpSpPr>
-        <a:xfrm>
-          <a:off x="0" y="0"/>
-          <a:ext cx="0" cy="0"/>
-          <a:chOff x="0" y="0"/>
-          <a:chExt cx="0" cy="0"/>
-        </a:xfrm>
-      </p:grpSpPr>
-      <p:sp>
-        <p:nvSpPr>
-          <p:cNvPr id="2" name="Slide Number Placeholder 1">
-            <a:extLst>
-              <a:ext uri="{FF2B5EF4-FFF2-40B4-BE49-F238E27FC236}">
-                <a16:creationId xmlns:a16="http://schemas.microsoft.com/office/drawing/2014/main" id="{73F3B640-ED4D-C8B4-EBAC-701A73132A1E}"/>
-              </a:ext>
-            </a:extLst>
-          </p:cNvPr>
-          <p:cNvSpPr>
-            <a:spLocks noGrp="1"/>
-          </p:cNvSpPr>
-          <p:nvPr>
-            <p:ph type="sldNum" sz="quarter" idx="10"/>
-          </p:nvPr>
-        </p:nvSpPr>
-        <p:spPr/>
-        <p:txBody>
-          <a:bodyPr/>
-          <a:lstStyle/>
-          <a:p>
-            <a:fld id="{A02D9A9C-251E-4686-914B-47E3F39F30D8}" type="slidenum">
-              <a:rPr lang="de-DE" smtClean="0">
-                <a:latin typeface="Arial" panose="020B0604020202020204" pitchFamily="34" charset="0"/>
-                <a:cs typeface="Arial" panose="020B0604020202020204" pitchFamily="34" charset="0"/>
-              </a:rPr>
-              <a:t>8</a:t>
-            </a:fld>
-            <a:endParaRPr lang="de-DE">
-              <a:latin typeface="Arial" panose="020B0604020202020204" pitchFamily="34" charset="0"/>
-              <a:cs typeface="Arial" panose="020B0604020202020204" pitchFamily="34" charset="0"/>
-            </a:endParaRPr>
-          </a:p>
-        </p:txBody>
-      </p:sp>
-      <p:sp>
-        <p:nvSpPr>
-          <p:cNvPr id="6" name="table panel">
-            <a:extLst>
-              <a:ext uri="{FF2B5EF4-FFF2-40B4-BE49-F238E27FC236}">
-                <a16:creationId xmlns:a16="http://schemas.microsoft.com/office/drawing/2014/main" id="{1B00AB32-72F7-541D-4A71-543F6BB7979C}"/>
-              </a:ext>
-            </a:extLst>
-          </p:cNvPr>
-          <p:cNvSpPr/>
-          <p:nvPr/>
-        </p:nvSpPr>
-        <p:spPr>
-          <a:xfrm>
-            <a:off x="500249" y="1716757"/>
-            <a:ext cx="7230643" cy="5282561"/>
-          </a:xfrm>
-          <a:prstGeom prst="roundRect">
-            <a:avLst/>
-          </a:prstGeom>
-          <a:solidFill>
-            <a:srgbClr val="FFFFFF"/>
-          </a:solidFill>
-          <a:ln w="9525">
-            <a:solidFill>
-              <a:srgbClr val="CBD5E1"/>
-            </a:solidFill>
-          </a:ln>
-        </p:spPr>
-        <p:txBody>
-          <a:bodyPr/>
-          <a:lstStyle/>
-          <a:p>
-            <a:endParaRPr sz="1200">
-              <a:latin typeface="Arial" panose="020B0604020202020204" pitchFamily="34" charset="0"/>
-              <a:cs typeface="Arial" panose="020B0604020202020204" pitchFamily="34" charset="0"/>
-            </a:endParaRPr>
-          </a:p>
-        </p:txBody>
-      </p:sp>
-      <p:sp>
-        <p:nvSpPr>
-          <p:cNvPr id="7" name="sac panel">
-            <a:extLst>
-              <a:ext uri="{FF2B5EF4-FFF2-40B4-BE49-F238E27FC236}">
-                <a16:creationId xmlns:a16="http://schemas.microsoft.com/office/drawing/2014/main" id="{FC042166-572C-14C1-32EF-46056912F166}"/>
-              </a:ext>
-            </a:extLst>
-          </p:cNvPr>
-          <p:cNvSpPr/>
-          <p:nvPr/>
-        </p:nvSpPr>
-        <p:spPr>
-          <a:xfrm>
-            <a:off x="8910262" y="1857154"/>
-            <a:ext cx="4251960" cy="5120640"/>
-          </a:xfrm>
-          <a:prstGeom prst="roundRect">
-            <a:avLst/>
-          </a:prstGeom>
-          <a:solidFill>
-            <a:srgbClr val="EFF6FF"/>
-          </a:solidFill>
-          <a:ln w="9525">
-            <a:solidFill>
-              <a:srgbClr val="BFDBFE"/>
-            </a:solidFill>
-          </a:ln>
-        </p:spPr>
-        <p:txBody>
-          <a:bodyPr/>
-          <a:lstStyle/>
-          <a:p>
-            <a:endParaRPr sz="1200">
-              <a:latin typeface="Arial" panose="020B0604020202020204" pitchFamily="34" charset="0"/>
-              <a:cs typeface="Arial" panose="020B0604020202020204" pitchFamily="34" charset="0"/>
-            </a:endParaRPr>
-          </a:p>
-        </p:txBody>
-      </p:sp>
-      <p:sp>
-        <p:nvSpPr>
-          <p:cNvPr id="8" name="title">
-            <a:extLst>
-              <a:ext uri="{FF2B5EF4-FFF2-40B4-BE49-F238E27FC236}">
-                <a16:creationId xmlns:a16="http://schemas.microsoft.com/office/drawing/2014/main" id="{B13BEFEE-FB5A-3F3A-1F03-678A1920915B}"/>
-              </a:ext>
-            </a:extLst>
-          </p:cNvPr>
-          <p:cNvSpPr txBox="1"/>
-          <p:nvPr/>
-        </p:nvSpPr>
-        <p:spPr>
-          <a:xfrm>
-            <a:off x="671724" y="676656"/>
-            <a:ext cx="11155680" cy="502920"/>
-          </a:xfrm>
-          <a:prstGeom prst="rect">
-            <a:avLst/>
-          </a:prstGeom>
-          <a:noFill/>
-          <a:ln w="0">
-            <a:noFill/>
-          </a:ln>
-        </p:spPr>
-        <p:txBody>
-          <a:bodyPr wrap="square" lIns="18288" tIns="18288" rIns="18288" bIns="18288" anchor="t"/>
-          <a:lstStyle/>
-          <a:p>
-            <a:r>
-              <a:rPr lang="en-US" sz="3000">
-                <a:solidFill>
-                  <a:srgbClr val="0F172A"/>
-                </a:solidFill>
-                <a:latin typeface="Arial" panose="020B0604020202020204" pitchFamily="34" charset="0"/>
-                <a:cs typeface="Arial" panose="020B0604020202020204" pitchFamily="34" charset="0"/>
-              </a:rPr>
-              <a:t>Why Soft Actor-Critic (SAC)?</a:t>
-            </a:r>
-            <a:endParaRPr lang="en-US" sz="3000">
-              <a:latin typeface="Arial" panose="020B0604020202020204" pitchFamily="34" charset="0"/>
-              <a:cs typeface="Arial" panose="020B0604020202020204" pitchFamily="34" charset="0"/>
-            </a:endParaRPr>
-          </a:p>
-        </p:txBody>
-      </p:sp>
-      <p:sp>
-        <p:nvSpPr>
-          <p:cNvPr id="9" name="subtitle">
-            <a:extLst>
-              <a:ext uri="{FF2B5EF4-FFF2-40B4-BE49-F238E27FC236}">
-                <a16:creationId xmlns:a16="http://schemas.microsoft.com/office/drawing/2014/main" id="{9F5497E0-FAF2-3293-F8A7-C798B63721B6}"/>
-              </a:ext>
-            </a:extLst>
-          </p:cNvPr>
-          <p:cNvSpPr txBox="1"/>
-          <p:nvPr/>
-        </p:nvSpPr>
-        <p:spPr>
-          <a:xfrm>
-            <a:off x="690012" y="1345090"/>
-            <a:ext cx="11155680" cy="301752"/>
-          </a:xfrm>
-          <a:prstGeom prst="rect">
-            <a:avLst/>
-          </a:prstGeom>
-          <a:noFill/>
-          <a:ln w="0">
-            <a:noFill/>
-          </a:ln>
-        </p:spPr>
-        <p:txBody>
-          <a:bodyPr wrap="square" lIns="18288" tIns="18288" rIns="18288" bIns="18288" anchor="t"/>
-          <a:lstStyle/>
-          <a:p>
-            <a:r>
-              <a:rPr lang="en-US" sz="1200" dirty="0">
-                <a:solidFill>
-                  <a:srgbClr val="475569"/>
-                </a:solidFill>
-                <a:latin typeface="Arial" panose="020B0604020202020204" pitchFamily="34" charset="0"/>
-                <a:cs typeface="Arial" panose="020B0604020202020204" pitchFamily="34" charset="0"/>
-              </a:rPr>
-              <a:t>The control task needs continuous setpoints, sample-efficient learning, and stable exploration under changing electricity prices</a:t>
-            </a:r>
-            <a:endParaRPr lang="en-US" sz="1200" dirty="0">
-              <a:latin typeface="Arial" panose="020B0604020202020204" pitchFamily="34" charset="0"/>
-              <a:cs typeface="Arial" panose="020B0604020202020204" pitchFamily="34" charset="0"/>
-            </a:endParaRPr>
-          </a:p>
-        </p:txBody>
-      </p:sp>
-      <p:sp>
-        <p:nvSpPr>
-          <p:cNvPr id="10" name="header fill">
-            <a:extLst>
-              <a:ext uri="{FF2B5EF4-FFF2-40B4-BE49-F238E27FC236}">
-                <a16:creationId xmlns:a16="http://schemas.microsoft.com/office/drawing/2014/main" id="{2209A134-51B3-005F-34D0-9CD5B6DF1A88}"/>
-              </a:ext>
-            </a:extLst>
-          </p:cNvPr>
-          <p:cNvSpPr/>
-          <p:nvPr/>
-        </p:nvSpPr>
-        <p:spPr>
-          <a:xfrm>
-            <a:off x="909468" y="2040034"/>
-            <a:ext cx="6446520" cy="384048"/>
-          </a:xfrm>
-          <a:prstGeom prst="roundRect">
-            <a:avLst/>
-          </a:prstGeom>
-          <a:solidFill>
-            <a:srgbClr val="E2E8F0"/>
-          </a:solidFill>
-          <a:ln w="9525">
-            <a:solidFill>
-              <a:srgbClr val="E2E8F0"/>
-            </a:solidFill>
-          </a:ln>
-        </p:spPr>
-        <p:txBody>
-          <a:bodyPr/>
-          <a:lstStyle/>
-          <a:p>
-            <a:endParaRPr sz="1200">
-              <a:latin typeface="Arial" panose="020B0604020202020204" pitchFamily="34" charset="0"/>
-              <a:cs typeface="Arial" panose="020B0604020202020204" pitchFamily="34" charset="0"/>
-            </a:endParaRPr>
-          </a:p>
-        </p:txBody>
-      </p:sp>
-      <p:sp>
-        <p:nvSpPr>
-          <p:cNvPr id="11" name="header left">
-            <a:extLst>
-              <a:ext uri="{FF2B5EF4-FFF2-40B4-BE49-F238E27FC236}">
-                <a16:creationId xmlns:a16="http://schemas.microsoft.com/office/drawing/2014/main" id="{1CE8518F-6A8C-7702-55E9-33FC2E18307B}"/>
-              </a:ext>
-            </a:extLst>
-          </p:cNvPr>
-          <p:cNvSpPr txBox="1"/>
-          <p:nvPr/>
-        </p:nvSpPr>
-        <p:spPr>
-          <a:xfrm>
-            <a:off x="1000908" y="2104042"/>
-            <a:ext cx="1664208" cy="201168"/>
-          </a:xfrm>
-          <a:prstGeom prst="rect">
-            <a:avLst/>
-          </a:prstGeom>
-          <a:solidFill>
-            <a:srgbClr val="E2E8F0"/>
-          </a:solidFill>
-          <a:ln w="0">
-            <a:solidFill>
-              <a:srgbClr val="E2E8F0"/>
-            </a:solidFill>
-          </a:ln>
-        </p:spPr>
-        <p:txBody>
-          <a:bodyPr wrap="square" lIns="9144" tIns="9144" rIns="9144" bIns="9144" anchor="t"/>
-          <a:lstStyle/>
-          <a:p>
-            <a:r>
-              <a:rPr lang="en-US" sz="1200">
-                <a:solidFill>
-                  <a:srgbClr val="0F172A"/>
-                </a:solidFill>
-                <a:latin typeface="Arial" panose="020B0604020202020204" pitchFamily="34" charset="0"/>
-                <a:cs typeface="Arial" panose="020B0604020202020204" pitchFamily="34" charset="0"/>
-              </a:rPr>
-              <a:t>Algorithm</a:t>
-            </a:r>
-            <a:endParaRPr lang="en-US" sz="1200">
-              <a:latin typeface="Arial" panose="020B0604020202020204" pitchFamily="34" charset="0"/>
-              <a:cs typeface="Arial" panose="020B0604020202020204" pitchFamily="34" charset="0"/>
-            </a:endParaRPr>
-          </a:p>
-        </p:txBody>
-      </p:sp>
-      <p:sp>
-        <p:nvSpPr>
-          <p:cNvPr id="12" name="header right">
-            <a:extLst>
-              <a:ext uri="{FF2B5EF4-FFF2-40B4-BE49-F238E27FC236}">
-                <a16:creationId xmlns:a16="http://schemas.microsoft.com/office/drawing/2014/main" id="{C0DD0CD9-D7A5-2DC6-7864-A2181E68C525}"/>
-              </a:ext>
-            </a:extLst>
-          </p:cNvPr>
-          <p:cNvSpPr txBox="1"/>
-          <p:nvPr/>
-        </p:nvSpPr>
-        <p:spPr>
-          <a:xfrm>
-            <a:off x="2500524" y="2104042"/>
-            <a:ext cx="4645152" cy="201168"/>
-          </a:xfrm>
-          <a:prstGeom prst="rect">
-            <a:avLst/>
-          </a:prstGeom>
-          <a:solidFill>
-            <a:srgbClr val="E2E8F0"/>
-          </a:solidFill>
-          <a:ln w="0">
-            <a:solidFill>
-              <a:srgbClr val="E2E8F0"/>
-            </a:solidFill>
-          </a:ln>
-        </p:spPr>
-        <p:txBody>
-          <a:bodyPr wrap="square" lIns="9144" tIns="9144" rIns="9144" bIns="9144" anchor="t"/>
-          <a:lstStyle/>
-          <a:p>
-            <a:r>
-              <a:rPr lang="en-US" sz="1200">
-                <a:solidFill>
-                  <a:srgbClr val="0F172A"/>
-                </a:solidFill>
-                <a:latin typeface="Arial" panose="020B0604020202020204" pitchFamily="34" charset="0"/>
-                <a:cs typeface="Arial" panose="020B0604020202020204" pitchFamily="34" charset="0"/>
-              </a:rPr>
-              <a:t>Why it was not the main choice</a:t>
-            </a:r>
-            <a:endParaRPr lang="en-US" sz="1200">
-              <a:latin typeface="Arial" panose="020B0604020202020204" pitchFamily="34" charset="0"/>
-              <a:cs typeface="Arial" panose="020B0604020202020204" pitchFamily="34" charset="0"/>
-            </a:endParaRPr>
-          </a:p>
-        </p:txBody>
-      </p:sp>
-      <p:cxnSp>
-        <p:nvCxnSpPr>
-          <p:cNvPr id="13" name="header line">
-            <a:extLst>
-              <a:ext uri="{FF2B5EF4-FFF2-40B4-BE49-F238E27FC236}">
-                <a16:creationId xmlns:a16="http://schemas.microsoft.com/office/drawing/2014/main" id="{D8CB2E3A-A2D3-B2A8-75A9-D4F1B55B5DB1}"/>
-              </a:ext>
-            </a:extLst>
-          </p:cNvPr>
-          <p:cNvCxnSpPr>
-            <a:cxnSpLocks/>
-          </p:cNvCxnSpPr>
-          <p:nvPr/>
-        </p:nvCxnSpPr>
-        <p:spPr>
-          <a:xfrm>
-            <a:off x="2390796" y="2049178"/>
-            <a:ext cx="13357" cy="3227832"/>
-          </a:xfrm>
-          <a:prstGeom prst="line">
-            <a:avLst/>
-          </a:prstGeom>
-          <a:ln w="12700">
-            <a:solidFill>
-              <a:srgbClr val="CBD5E1"/>
-            </a:solidFill>
-          </a:ln>
-        </p:spPr>
-      </p:cxnSp>
-      <p:sp>
-        <p:nvSpPr>
-          <p:cNvPr id="14" name="alg Q-learning">
-            <a:extLst>
-              <a:ext uri="{FF2B5EF4-FFF2-40B4-BE49-F238E27FC236}">
-                <a16:creationId xmlns:a16="http://schemas.microsoft.com/office/drawing/2014/main" id="{C8E68977-4072-1B75-7D50-D9F6A88BEA6C}"/>
-              </a:ext>
-            </a:extLst>
-          </p:cNvPr>
-          <p:cNvSpPr txBox="1"/>
-          <p:nvPr/>
-        </p:nvSpPr>
-        <p:spPr>
-          <a:xfrm>
-            <a:off x="1000908" y="2561242"/>
-            <a:ext cx="1261872" cy="411480"/>
-          </a:xfrm>
-          <a:prstGeom prst="rect">
-            <a:avLst/>
-          </a:prstGeom>
-          <a:solidFill>
-            <a:srgbClr val="FFFFFF"/>
-          </a:solidFill>
-          <a:ln w="0">
-            <a:solidFill>
-              <a:srgbClr val="FFFFFF"/>
-            </a:solidFill>
-          </a:ln>
-        </p:spPr>
-        <p:txBody>
-          <a:bodyPr wrap="square" lIns="9144" tIns="9144" rIns="9144" bIns="9144" anchor="t"/>
-          <a:lstStyle/>
-          <a:p>
-            <a:r>
-              <a:rPr lang="en-US" sz="1200">
-                <a:solidFill>
-                  <a:srgbClr val="1E3A8A"/>
-                </a:solidFill>
-                <a:latin typeface="Arial" panose="020B0604020202020204" pitchFamily="34" charset="0"/>
-                <a:cs typeface="Arial" panose="020B0604020202020204" pitchFamily="34" charset="0"/>
-              </a:rPr>
-              <a:t>Q-learning</a:t>
-            </a:r>
-            <a:endParaRPr lang="en-US" sz="1200">
-              <a:latin typeface="Arial" panose="020B0604020202020204" pitchFamily="34" charset="0"/>
-              <a:cs typeface="Arial" panose="020B0604020202020204" pitchFamily="34" charset="0"/>
-            </a:endParaRPr>
-          </a:p>
-        </p:txBody>
-      </p:sp>
-      <p:sp>
-        <p:nvSpPr>
-          <p:cNvPr id="15" name="why Q-learning">
-            <a:extLst>
-              <a:ext uri="{FF2B5EF4-FFF2-40B4-BE49-F238E27FC236}">
-                <a16:creationId xmlns:a16="http://schemas.microsoft.com/office/drawing/2014/main" id="{E1E05F8E-576A-E579-519D-91063C0E8951}"/>
-              </a:ext>
-            </a:extLst>
-          </p:cNvPr>
-          <p:cNvSpPr txBox="1"/>
-          <p:nvPr/>
-        </p:nvSpPr>
-        <p:spPr>
-          <a:xfrm>
-            <a:off x="2500524" y="2552098"/>
-            <a:ext cx="4617720" cy="502920"/>
-          </a:xfrm>
-          <a:prstGeom prst="rect">
-            <a:avLst/>
-          </a:prstGeom>
-          <a:solidFill>
-            <a:srgbClr val="FFFFFF"/>
-          </a:solidFill>
-          <a:ln w="0">
-            <a:solidFill>
-              <a:srgbClr val="FFFFFF"/>
-            </a:solidFill>
-          </a:ln>
-        </p:spPr>
-        <p:txBody>
-          <a:bodyPr wrap="square" lIns="9144" tIns="9144" rIns="9144" bIns="9144" anchor="t"/>
-          <a:lstStyle/>
-          <a:p>
-            <a:r>
-              <a:rPr lang="en-US" sz="1200" dirty="0">
-                <a:solidFill>
-                  <a:srgbClr val="334155"/>
-                </a:solidFill>
-                <a:latin typeface="Arial" panose="020B0604020202020204" pitchFamily="34" charset="0"/>
-                <a:cs typeface="Arial" panose="020B0604020202020204" pitchFamily="34" charset="0"/>
-              </a:rPr>
-              <a:t>Works best for small discrete states/actions; continuous battery power would need coarse discretization.</a:t>
-            </a:r>
-            <a:endParaRPr lang="en-US" sz="1200" dirty="0">
-              <a:latin typeface="Arial" panose="020B0604020202020204" pitchFamily="34" charset="0"/>
-              <a:cs typeface="Arial" panose="020B0604020202020204" pitchFamily="34" charset="0"/>
-            </a:endParaRPr>
-          </a:p>
-        </p:txBody>
-      </p:sp>
-      <p:cxnSp>
-        <p:nvCxnSpPr>
-          <p:cNvPr id="16" name="row line 0">
-            <a:extLst>
-              <a:ext uri="{FF2B5EF4-FFF2-40B4-BE49-F238E27FC236}">
-                <a16:creationId xmlns:a16="http://schemas.microsoft.com/office/drawing/2014/main" id="{D90AEB32-430B-CB73-0DFD-F8A77A50C9E5}"/>
-              </a:ext>
-            </a:extLst>
-          </p:cNvPr>
-          <p:cNvCxnSpPr/>
-          <p:nvPr/>
-        </p:nvCxnSpPr>
-        <p:spPr>
-          <a:xfrm>
-            <a:off x="927756" y="3137314"/>
-            <a:ext cx="6419088" cy="0"/>
-          </a:xfrm>
-          <a:prstGeom prst="line">
-            <a:avLst/>
-          </a:prstGeom>
-          <a:ln w="6350">
-            <a:solidFill>
-              <a:srgbClr val="E2E8F0"/>
-            </a:solidFill>
-          </a:ln>
-        </p:spPr>
-      </p:cxnSp>
-      <p:sp>
-        <p:nvSpPr>
-          <p:cNvPr id="17" name="row shade 1">
-            <a:extLst>
-              <a:ext uri="{FF2B5EF4-FFF2-40B4-BE49-F238E27FC236}">
-                <a16:creationId xmlns:a16="http://schemas.microsoft.com/office/drawing/2014/main" id="{F8743495-A1F5-7B91-20E2-6E0CB6D82973}"/>
-              </a:ext>
-            </a:extLst>
-          </p:cNvPr>
-          <p:cNvSpPr/>
-          <p:nvPr/>
-        </p:nvSpPr>
-        <p:spPr>
-          <a:xfrm>
-            <a:off x="909468" y="3201322"/>
-            <a:ext cx="6446520" cy="658368"/>
-          </a:xfrm>
-          <a:prstGeom prst="rect">
-            <a:avLst/>
-          </a:prstGeom>
-          <a:solidFill>
-            <a:srgbClr val="F8FAFC"/>
-          </a:solidFill>
-          <a:ln w="9525">
-            <a:solidFill>
-              <a:srgbClr val="F8FAFC"/>
-            </a:solidFill>
-          </a:ln>
-        </p:spPr>
-        <p:txBody>
-          <a:bodyPr/>
-          <a:lstStyle/>
-          <a:p>
-            <a:endParaRPr sz="1200">
-              <a:latin typeface="Arial" panose="020B0604020202020204" pitchFamily="34" charset="0"/>
-              <a:cs typeface="Arial" panose="020B0604020202020204" pitchFamily="34" charset="0"/>
-            </a:endParaRPr>
-          </a:p>
-        </p:txBody>
-      </p:sp>
-      <p:sp>
-        <p:nvSpPr>
-          <p:cNvPr id="18" name="alg DQN">
-            <a:extLst>
-              <a:ext uri="{FF2B5EF4-FFF2-40B4-BE49-F238E27FC236}">
-                <a16:creationId xmlns:a16="http://schemas.microsoft.com/office/drawing/2014/main" id="{A9C59F2D-075D-08B7-DDF9-EFF04B190F2E}"/>
-              </a:ext>
-            </a:extLst>
-          </p:cNvPr>
-          <p:cNvSpPr txBox="1"/>
-          <p:nvPr/>
-        </p:nvSpPr>
-        <p:spPr>
-          <a:xfrm>
-            <a:off x="1000908" y="3274474"/>
-            <a:ext cx="1261872" cy="411480"/>
-          </a:xfrm>
-          <a:prstGeom prst="rect">
-            <a:avLst/>
-          </a:prstGeom>
-          <a:solidFill>
-            <a:srgbClr val="F8FAFC"/>
-          </a:solidFill>
-          <a:ln w="0">
-            <a:solidFill>
-              <a:srgbClr val="FFFFFF"/>
-            </a:solidFill>
-          </a:ln>
-        </p:spPr>
-        <p:txBody>
-          <a:bodyPr wrap="square" lIns="9144" tIns="9144" rIns="9144" bIns="9144" anchor="t"/>
-          <a:lstStyle/>
-          <a:p>
-            <a:r>
-              <a:rPr lang="en-US" sz="1200">
-                <a:solidFill>
-                  <a:srgbClr val="1E3A8A"/>
-                </a:solidFill>
-                <a:latin typeface="Arial" panose="020B0604020202020204" pitchFamily="34" charset="0"/>
-                <a:cs typeface="Arial" panose="020B0604020202020204" pitchFamily="34" charset="0"/>
-              </a:rPr>
-              <a:t>DQN</a:t>
-            </a:r>
-            <a:endParaRPr lang="en-US" sz="1200">
-              <a:latin typeface="Arial" panose="020B0604020202020204" pitchFamily="34" charset="0"/>
-              <a:cs typeface="Arial" panose="020B0604020202020204" pitchFamily="34" charset="0"/>
-            </a:endParaRPr>
-          </a:p>
-        </p:txBody>
-      </p:sp>
-      <p:sp>
-        <p:nvSpPr>
-          <p:cNvPr id="19" name="why DQN">
-            <a:extLst>
-              <a:ext uri="{FF2B5EF4-FFF2-40B4-BE49-F238E27FC236}">
-                <a16:creationId xmlns:a16="http://schemas.microsoft.com/office/drawing/2014/main" id="{C8CEA801-DC53-D98A-0A7A-6ABEA14ED48E}"/>
-              </a:ext>
-            </a:extLst>
-          </p:cNvPr>
-          <p:cNvSpPr txBox="1"/>
-          <p:nvPr/>
-        </p:nvSpPr>
-        <p:spPr>
-          <a:xfrm>
-            <a:off x="2500524" y="3265330"/>
-            <a:ext cx="4617720" cy="502920"/>
-          </a:xfrm>
-          <a:prstGeom prst="rect">
-            <a:avLst/>
-          </a:prstGeom>
-          <a:solidFill>
-            <a:srgbClr val="F8FAFC"/>
-          </a:solidFill>
-          <a:ln w="0">
-            <a:solidFill>
-              <a:srgbClr val="FFFFFF"/>
-            </a:solidFill>
-          </a:ln>
-        </p:spPr>
-        <p:txBody>
-          <a:bodyPr wrap="square" lIns="9144" tIns="9144" rIns="9144" bIns="9144" anchor="t"/>
-          <a:lstStyle/>
-          <a:p>
-            <a:r>
-              <a:rPr lang="en-US" sz="1200" dirty="0">
-                <a:solidFill>
-                  <a:srgbClr val="334155"/>
-                </a:solidFill>
-                <a:latin typeface="Arial" panose="020B0604020202020204" pitchFamily="34" charset="0"/>
-                <a:cs typeface="Arial" panose="020B0604020202020204" pitchFamily="34" charset="0"/>
-              </a:rPr>
-              <a:t>Deep version of Q-learning, but still mainly discrete-action; </a:t>
-            </a:r>
-            <a:endParaRPr lang="en-US" sz="1200" dirty="0">
-              <a:latin typeface="Arial" panose="020B0604020202020204" pitchFamily="34" charset="0"/>
-              <a:cs typeface="Arial" panose="020B0604020202020204" pitchFamily="34" charset="0"/>
-            </a:endParaRPr>
-          </a:p>
-        </p:txBody>
-      </p:sp>
-      <p:cxnSp>
-        <p:nvCxnSpPr>
-          <p:cNvPr id="20" name="row line 1">
-            <a:extLst>
-              <a:ext uri="{FF2B5EF4-FFF2-40B4-BE49-F238E27FC236}">
-                <a16:creationId xmlns:a16="http://schemas.microsoft.com/office/drawing/2014/main" id="{31B7A52A-4BF1-2E75-EC63-5E5C3C86D88B}"/>
-              </a:ext>
-            </a:extLst>
-          </p:cNvPr>
-          <p:cNvCxnSpPr/>
-          <p:nvPr/>
-        </p:nvCxnSpPr>
-        <p:spPr>
-          <a:xfrm>
-            <a:off x="927756" y="3850546"/>
-            <a:ext cx="6419088" cy="0"/>
-          </a:xfrm>
-          <a:prstGeom prst="line">
-            <a:avLst/>
-          </a:prstGeom>
-          <a:ln w="6350">
-            <a:solidFill>
-              <a:srgbClr val="E2E8F0"/>
-            </a:solidFill>
-          </a:ln>
-        </p:spPr>
-      </p:cxnSp>
-      <p:sp>
-        <p:nvSpPr>
-          <p:cNvPr id="21" name="alg PPO">
-            <a:extLst>
-              <a:ext uri="{FF2B5EF4-FFF2-40B4-BE49-F238E27FC236}">
-                <a16:creationId xmlns:a16="http://schemas.microsoft.com/office/drawing/2014/main" id="{21044B98-C7B3-DEF1-AE04-6E26A438161E}"/>
-              </a:ext>
-            </a:extLst>
-          </p:cNvPr>
-          <p:cNvSpPr txBox="1"/>
-          <p:nvPr/>
-        </p:nvSpPr>
-        <p:spPr>
-          <a:xfrm>
-            <a:off x="1000908" y="3987706"/>
-            <a:ext cx="1261872" cy="411480"/>
-          </a:xfrm>
-          <a:prstGeom prst="rect">
-            <a:avLst/>
-          </a:prstGeom>
-          <a:solidFill>
-            <a:srgbClr val="FFFFFF"/>
-          </a:solidFill>
-          <a:ln w="0">
-            <a:solidFill>
-              <a:srgbClr val="FFFFFF"/>
-            </a:solidFill>
-          </a:ln>
-        </p:spPr>
-        <p:txBody>
-          <a:bodyPr wrap="square" lIns="9144" tIns="9144" rIns="9144" bIns="9144" anchor="t"/>
-          <a:lstStyle/>
-          <a:p>
-            <a:r>
-              <a:rPr lang="en-US" sz="1200">
-                <a:solidFill>
-                  <a:srgbClr val="1E3A8A"/>
-                </a:solidFill>
-                <a:latin typeface="Arial" panose="020B0604020202020204" pitchFamily="34" charset="0"/>
-                <a:cs typeface="Arial" panose="020B0604020202020204" pitchFamily="34" charset="0"/>
-              </a:rPr>
-              <a:t>PPO</a:t>
-            </a:r>
-            <a:endParaRPr lang="en-US" sz="1200">
-              <a:latin typeface="Arial" panose="020B0604020202020204" pitchFamily="34" charset="0"/>
-              <a:cs typeface="Arial" panose="020B0604020202020204" pitchFamily="34" charset="0"/>
-            </a:endParaRPr>
-          </a:p>
-        </p:txBody>
-      </p:sp>
-      <p:sp>
-        <p:nvSpPr>
-          <p:cNvPr id="22" name="why PPO">
-            <a:extLst>
-              <a:ext uri="{FF2B5EF4-FFF2-40B4-BE49-F238E27FC236}">
-                <a16:creationId xmlns:a16="http://schemas.microsoft.com/office/drawing/2014/main" id="{7DBD0F20-1283-3D64-8E8E-74CFE588D4F6}"/>
-              </a:ext>
-            </a:extLst>
-          </p:cNvPr>
-          <p:cNvSpPr txBox="1"/>
-          <p:nvPr/>
-        </p:nvSpPr>
-        <p:spPr>
-          <a:xfrm>
-            <a:off x="2500524" y="3978562"/>
-            <a:ext cx="4617720" cy="502920"/>
-          </a:xfrm>
-          <a:prstGeom prst="rect">
-            <a:avLst/>
-          </a:prstGeom>
-          <a:solidFill>
-            <a:srgbClr val="FFFFFF"/>
-          </a:solidFill>
-          <a:ln w="0">
-            <a:solidFill>
-              <a:srgbClr val="FFFFFF"/>
-            </a:solidFill>
-          </a:ln>
-        </p:spPr>
-        <p:txBody>
-          <a:bodyPr wrap="square" lIns="9144" tIns="9144" rIns="9144" bIns="9144" anchor="t"/>
-          <a:lstStyle/>
-          <a:p>
-            <a:r>
-              <a:rPr lang="en-US" sz="1200" dirty="0">
-                <a:solidFill>
-                  <a:srgbClr val="334155"/>
-                </a:solidFill>
-                <a:latin typeface="Arial" panose="020B0604020202020204" pitchFamily="34" charset="0"/>
-                <a:cs typeface="Arial" panose="020B0604020202020204" pitchFamily="34" charset="0"/>
-              </a:rPr>
-              <a:t>Can handle continuous actions and is stable, but on-policy learning usually needs more fresh simulation data.</a:t>
-            </a:r>
-            <a:endParaRPr lang="en-US" sz="1200" dirty="0">
-              <a:latin typeface="Arial" panose="020B0604020202020204" pitchFamily="34" charset="0"/>
-              <a:cs typeface="Arial" panose="020B0604020202020204" pitchFamily="34" charset="0"/>
-            </a:endParaRPr>
-          </a:p>
-        </p:txBody>
-      </p:sp>
-      <p:cxnSp>
-        <p:nvCxnSpPr>
-          <p:cNvPr id="23" name="row line 2">
-            <a:extLst>
-              <a:ext uri="{FF2B5EF4-FFF2-40B4-BE49-F238E27FC236}">
-                <a16:creationId xmlns:a16="http://schemas.microsoft.com/office/drawing/2014/main" id="{EF453E85-3395-830A-93B5-E5A3599399B8}"/>
-              </a:ext>
-            </a:extLst>
-          </p:cNvPr>
-          <p:cNvCxnSpPr/>
-          <p:nvPr/>
-        </p:nvCxnSpPr>
-        <p:spPr>
-          <a:xfrm>
-            <a:off x="927756" y="4563778"/>
-            <a:ext cx="6419088" cy="0"/>
-          </a:xfrm>
-          <a:prstGeom prst="line">
-            <a:avLst/>
-          </a:prstGeom>
-          <a:ln w="6350">
-            <a:solidFill>
-              <a:srgbClr val="E2E8F0"/>
-            </a:solidFill>
-          </a:ln>
-        </p:spPr>
-      </p:cxnSp>
-      <p:sp>
-        <p:nvSpPr>
-          <p:cNvPr id="24" name="row shade 3">
-            <a:extLst>
-              <a:ext uri="{FF2B5EF4-FFF2-40B4-BE49-F238E27FC236}">
-                <a16:creationId xmlns:a16="http://schemas.microsoft.com/office/drawing/2014/main" id="{DDD2462F-D465-E771-CE41-AC93FF87498E}"/>
-              </a:ext>
-            </a:extLst>
-          </p:cNvPr>
-          <p:cNvSpPr/>
-          <p:nvPr/>
-        </p:nvSpPr>
-        <p:spPr>
-          <a:xfrm>
-            <a:off x="909468" y="4627786"/>
-            <a:ext cx="6446520" cy="658368"/>
-          </a:xfrm>
-          <a:prstGeom prst="rect">
-            <a:avLst/>
-          </a:prstGeom>
-          <a:solidFill>
-            <a:srgbClr val="F8FAFC"/>
-          </a:solidFill>
-          <a:ln w="9525">
-            <a:solidFill>
-              <a:srgbClr val="F8FAFC"/>
-            </a:solidFill>
-          </a:ln>
-        </p:spPr>
-        <p:txBody>
-          <a:bodyPr/>
-          <a:lstStyle/>
-          <a:p>
-            <a:endParaRPr sz="1200">
-              <a:latin typeface="Arial" panose="020B0604020202020204" pitchFamily="34" charset="0"/>
-              <a:cs typeface="Arial" panose="020B0604020202020204" pitchFamily="34" charset="0"/>
-            </a:endParaRPr>
-          </a:p>
-        </p:txBody>
-      </p:sp>
-      <p:cxnSp>
-        <p:nvCxnSpPr>
-          <p:cNvPr id="27" name="row line 3">
-            <a:extLst>
-              <a:ext uri="{FF2B5EF4-FFF2-40B4-BE49-F238E27FC236}">
-                <a16:creationId xmlns:a16="http://schemas.microsoft.com/office/drawing/2014/main" id="{E4EC5775-A992-D09A-6CEF-108377E76E96}"/>
-              </a:ext>
-            </a:extLst>
-          </p:cNvPr>
-          <p:cNvCxnSpPr/>
-          <p:nvPr/>
-        </p:nvCxnSpPr>
-        <p:spPr>
-          <a:xfrm>
-            <a:off x="927756" y="5277010"/>
-            <a:ext cx="6419088" cy="0"/>
-          </a:xfrm>
-          <a:prstGeom prst="line">
-            <a:avLst/>
-          </a:prstGeom>
-          <a:ln w="6350">
-            <a:solidFill>
-              <a:srgbClr val="E2E8F0"/>
-            </a:solidFill>
-          </a:ln>
-        </p:spPr>
-      </p:cxnSp>
-      <p:sp>
-        <p:nvSpPr>
-          <p:cNvPr id="28" name="alg TD3">
-            <a:extLst>
-              <a:ext uri="{FF2B5EF4-FFF2-40B4-BE49-F238E27FC236}">
-                <a16:creationId xmlns:a16="http://schemas.microsoft.com/office/drawing/2014/main" id="{2B632C48-F9A0-E6C2-789C-692C1D746E8E}"/>
-              </a:ext>
-            </a:extLst>
-          </p:cNvPr>
-          <p:cNvSpPr txBox="1"/>
-          <p:nvPr/>
-        </p:nvSpPr>
-        <p:spPr>
-          <a:xfrm>
-            <a:off x="1000908" y="4736076"/>
-            <a:ext cx="1261872" cy="411480"/>
-          </a:xfrm>
-          <a:prstGeom prst="rect">
-            <a:avLst/>
-          </a:prstGeom>
-          <a:solidFill>
-            <a:srgbClr val="F8FAFC"/>
-          </a:solidFill>
-          <a:ln w="0">
-            <a:solidFill>
-              <a:srgbClr val="FFFFFF"/>
-            </a:solidFill>
-          </a:ln>
-        </p:spPr>
-        <p:txBody>
-          <a:bodyPr wrap="square" lIns="9144" tIns="9144" rIns="9144" bIns="9144" anchor="t"/>
-          <a:lstStyle/>
-          <a:p>
-            <a:r>
-              <a:rPr lang="en-US" sz="1200" dirty="0">
-                <a:solidFill>
-                  <a:srgbClr val="1E3A8A"/>
-                </a:solidFill>
-                <a:latin typeface="Arial" panose="020B0604020202020204" pitchFamily="34" charset="0"/>
-                <a:cs typeface="Arial" panose="020B0604020202020204" pitchFamily="34" charset="0"/>
-              </a:rPr>
-              <a:t>TD3</a:t>
-            </a:r>
-            <a:endParaRPr lang="en-US" sz="1200" dirty="0">
-              <a:latin typeface="Arial" panose="020B0604020202020204" pitchFamily="34" charset="0"/>
-              <a:cs typeface="Arial" panose="020B0604020202020204" pitchFamily="34" charset="0"/>
-            </a:endParaRPr>
-          </a:p>
-        </p:txBody>
-      </p:sp>
-      <p:sp>
-        <p:nvSpPr>
-          <p:cNvPr id="29" name="why TD3">
-            <a:extLst>
-              <a:ext uri="{FF2B5EF4-FFF2-40B4-BE49-F238E27FC236}">
-                <a16:creationId xmlns:a16="http://schemas.microsoft.com/office/drawing/2014/main" id="{6AAFEDEE-0CDA-F166-8E37-CF9FF8C9B734}"/>
-              </a:ext>
-            </a:extLst>
-          </p:cNvPr>
-          <p:cNvSpPr txBox="1"/>
-          <p:nvPr/>
-        </p:nvSpPr>
-        <p:spPr>
-          <a:xfrm>
-            <a:off x="2500524" y="4716661"/>
-            <a:ext cx="4617720" cy="502920"/>
-          </a:xfrm>
-          <a:prstGeom prst="rect">
-            <a:avLst/>
-          </a:prstGeom>
-          <a:solidFill>
-            <a:srgbClr val="F8FAFC"/>
-          </a:solidFill>
-          <a:ln w="0">
-            <a:solidFill>
-              <a:srgbClr val="FFFFFF"/>
-            </a:solidFill>
-          </a:ln>
-        </p:spPr>
-        <p:txBody>
-          <a:bodyPr wrap="square" lIns="9144" tIns="9144" rIns="9144" bIns="9144" anchor="t"/>
-          <a:lstStyle/>
-          <a:p>
-            <a:r>
-              <a:rPr lang="en-US" sz="1200" dirty="0">
-                <a:solidFill>
-                  <a:srgbClr val="334155"/>
-                </a:solidFill>
-                <a:latin typeface="Arial" panose="020B0604020202020204" pitchFamily="34" charset="0"/>
-                <a:cs typeface="Arial" panose="020B0604020202020204" pitchFamily="34" charset="0"/>
-              </a:rPr>
-              <a:t>Strong deterministic baseline, but SAC gives more deliberate exploration through entropy regularization.</a:t>
-            </a:r>
-            <a:endParaRPr lang="en-US" sz="1200" dirty="0">
-              <a:latin typeface="Arial" panose="020B0604020202020204" pitchFamily="34" charset="0"/>
-              <a:cs typeface="Arial" panose="020B0604020202020204" pitchFamily="34" charset="0"/>
-            </a:endParaRPr>
-          </a:p>
-        </p:txBody>
-      </p:sp>
-      <p:sp>
-        <p:nvSpPr>
-          <p:cNvPr id="31" name="sac fit title">
-            <a:extLst>
-              <a:ext uri="{FF2B5EF4-FFF2-40B4-BE49-F238E27FC236}">
-                <a16:creationId xmlns:a16="http://schemas.microsoft.com/office/drawing/2014/main" id="{E33DBC0C-023F-320E-D055-FC74885ED0AE}"/>
-              </a:ext>
-            </a:extLst>
-          </p:cNvPr>
-          <p:cNvSpPr txBox="1"/>
-          <p:nvPr/>
-        </p:nvSpPr>
-        <p:spPr>
-          <a:xfrm>
-            <a:off x="9152578" y="2178427"/>
-            <a:ext cx="3794760" cy="320040"/>
-          </a:xfrm>
-          <a:prstGeom prst="rect">
-            <a:avLst/>
-          </a:prstGeom>
-          <a:solidFill>
-            <a:srgbClr val="EFF6FF"/>
-          </a:solidFill>
-          <a:ln w="0">
-            <a:solidFill>
-              <a:srgbClr val="EFF6FF"/>
-            </a:solidFill>
-          </a:ln>
-        </p:spPr>
-        <p:txBody>
-          <a:bodyPr wrap="square" lIns="18288" tIns="18288" rIns="18288" bIns="18288" anchor="t"/>
-          <a:lstStyle/>
-          <a:p>
-            <a:r>
-              <a:rPr lang="en-US" sz="1200" dirty="0">
-                <a:solidFill>
-                  <a:srgbClr val="1E3A8A"/>
-                </a:solidFill>
-                <a:latin typeface="Arial" panose="020B0604020202020204" pitchFamily="34" charset="0"/>
-                <a:cs typeface="Arial" panose="020B0604020202020204" pitchFamily="34" charset="0"/>
-              </a:rPr>
-              <a:t>Why SAC fits this thesis</a:t>
-            </a:r>
-            <a:endParaRPr lang="en-US" sz="1200" dirty="0">
-              <a:latin typeface="Arial" panose="020B0604020202020204" pitchFamily="34" charset="0"/>
-              <a:cs typeface="Arial" panose="020B0604020202020204" pitchFamily="34" charset="0"/>
-            </a:endParaRPr>
-          </a:p>
-        </p:txBody>
-      </p:sp>
-      <p:sp>
-        <p:nvSpPr>
-          <p:cNvPr id="32" name="sac bullets">
-            <a:extLst>
-              <a:ext uri="{FF2B5EF4-FFF2-40B4-BE49-F238E27FC236}">
-                <a16:creationId xmlns:a16="http://schemas.microsoft.com/office/drawing/2014/main" id="{AA1E59B0-582B-BA52-17B3-5A73B3C47632}"/>
-              </a:ext>
-            </a:extLst>
-          </p:cNvPr>
-          <p:cNvSpPr txBox="1"/>
-          <p:nvPr/>
-        </p:nvSpPr>
-        <p:spPr>
-          <a:xfrm>
-            <a:off x="9120574" y="2533810"/>
-            <a:ext cx="3730752" cy="2697480"/>
-          </a:xfrm>
-          <a:prstGeom prst="rect">
-            <a:avLst/>
-          </a:prstGeom>
-          <a:solidFill>
-            <a:srgbClr val="EFF6FF"/>
-          </a:solidFill>
-          <a:ln w="0">
-            <a:solidFill>
-              <a:srgbClr val="EFF6FF"/>
-            </a:solidFill>
-          </a:ln>
-        </p:spPr>
-        <p:txBody>
-          <a:bodyPr wrap="square" lIns="18288" tIns="18288" rIns="18288" bIns="18288" anchor="t"/>
-          <a:lstStyle/>
-          <a:p>
-            <a:pPr marL="228600" indent="-171450">
-              <a:buChar char="•"/>
-            </a:pPr>
-            <a:r>
-              <a:rPr lang="en-US" sz="1200" dirty="0">
-                <a:solidFill>
-                  <a:srgbClr val="334155"/>
-                </a:solidFill>
-                <a:latin typeface="Arial" panose="020B0604020202020204" pitchFamily="34" charset="0"/>
-                <a:cs typeface="Arial" panose="020B0604020202020204" pitchFamily="34" charset="0"/>
-              </a:rPr>
-              <a:t>Continuous actor outputs the charge/discharge setpoint directly</a:t>
-            </a:r>
-            <a:endParaRPr lang="en-US" sz="1200" dirty="0">
-              <a:latin typeface="Arial" panose="020B0604020202020204" pitchFamily="34" charset="0"/>
-              <a:cs typeface="Arial" panose="020B0604020202020204" pitchFamily="34" charset="0"/>
-            </a:endParaRPr>
-          </a:p>
-          <a:p>
-            <a:pPr marL="228600" indent="-171450">
-              <a:buChar char="•"/>
-            </a:pPr>
-            <a:r>
-              <a:rPr lang="en-US" sz="1200" dirty="0">
-                <a:solidFill>
-                  <a:srgbClr val="334155"/>
-                </a:solidFill>
-                <a:latin typeface="Arial" panose="020B0604020202020204" pitchFamily="34" charset="0"/>
-                <a:cs typeface="Arial" panose="020B0604020202020204" pitchFamily="34" charset="0"/>
-              </a:rPr>
-              <a:t>Off-policy replay reuses simulation data efficiently</a:t>
-            </a:r>
-            <a:endParaRPr lang="en-US" sz="1200" dirty="0">
-              <a:latin typeface="Arial" panose="020B0604020202020204" pitchFamily="34" charset="0"/>
-              <a:cs typeface="Arial" panose="020B0604020202020204" pitchFamily="34" charset="0"/>
-            </a:endParaRPr>
-          </a:p>
-          <a:p>
-            <a:pPr marL="228600" indent="-171450">
-              <a:buChar char="•"/>
-            </a:pPr>
-            <a:r>
-              <a:rPr lang="en-US" sz="1200" dirty="0">
-                <a:solidFill>
-                  <a:srgbClr val="334155"/>
-                </a:solidFill>
-                <a:latin typeface="Arial" panose="020B0604020202020204" pitchFamily="34" charset="0"/>
-                <a:cs typeface="Arial" panose="020B0604020202020204" pitchFamily="34" charset="0"/>
-              </a:rPr>
-              <a:t>Entropy term keeps exploration alive during price spikes and SOC trade-offs</a:t>
-            </a:r>
-            <a:endParaRPr lang="en-US" sz="1200" dirty="0">
-              <a:latin typeface="Arial" panose="020B0604020202020204" pitchFamily="34" charset="0"/>
-              <a:cs typeface="Arial" panose="020B0604020202020204" pitchFamily="34" charset="0"/>
-            </a:endParaRPr>
-          </a:p>
-          <a:p>
-            <a:pPr marL="228600" indent="-171450">
-              <a:buChar char="•"/>
-            </a:pPr>
-            <a:r>
-              <a:rPr lang="en-US" sz="1200" dirty="0">
-                <a:solidFill>
-                  <a:srgbClr val="334155"/>
-                </a:solidFill>
-                <a:latin typeface="Arial" panose="020B0604020202020204" pitchFamily="34" charset="0"/>
-                <a:cs typeface="Arial" panose="020B0604020202020204" pitchFamily="34" charset="0"/>
-              </a:rPr>
-              <a:t>After training, inference is a direct state-to-action mapping</a:t>
-            </a:r>
-            <a:endParaRPr lang="en-US" sz="1200" dirty="0">
-              <a:latin typeface="Arial" panose="020B0604020202020204" pitchFamily="34" charset="0"/>
-              <a:cs typeface="Arial" panose="020B0604020202020204" pitchFamily="34" charset="0"/>
-            </a:endParaRPr>
-          </a:p>
-          <a:p>
-            <a:pPr marL="228600" indent="-171450">
-              <a:buChar char="•"/>
-            </a:pPr>
-            <a:r>
-              <a:rPr lang="en-US" sz="1200" dirty="0">
-                <a:solidFill>
-                  <a:srgbClr val="334155"/>
-                </a:solidFill>
-                <a:latin typeface="Arial" panose="020B0604020202020204" pitchFamily="34" charset="0"/>
-                <a:cs typeface="Arial" panose="020B0604020202020204" pitchFamily="34" charset="0"/>
-              </a:rPr>
-              <a:t>Same algorithm family can scale from battery power to cookie-factory continuous controls</a:t>
-            </a:r>
-            <a:endParaRPr lang="en-US" sz="1200" dirty="0">
-              <a:latin typeface="Arial" panose="020B0604020202020204" pitchFamily="34" charset="0"/>
-              <a:cs typeface="Arial" panose="020B0604020202020204" pitchFamily="34" charset="0"/>
-            </a:endParaRPr>
-          </a:p>
-        </p:txBody>
-      </p:sp>
-    </p:spTree>
-    <p:extLst>
-      <p:ext uri="{BB962C8B-B14F-4D97-AF65-F5344CB8AC3E}">
-        <p14:creationId xmlns:p14="http://schemas.microsoft.com/office/powerpoint/2010/main" val="3583876653"/>
       </p:ext>
     </p:extLst>
   </p:cSld>
@@ -18470,147 +19102,10 @@
       </p:grpSpPr>
       <p:sp>
         <p:nvSpPr>
-          <p:cNvPr id="5" name="TextBox 4">
-            <a:extLst>
-              <a:ext uri="{FF2B5EF4-FFF2-40B4-BE49-F238E27FC236}">
-                <a16:creationId xmlns:a16="http://schemas.microsoft.com/office/drawing/2014/main" id="{CF4E0541-4C20-369B-A2DC-C7A49F11D4EB}"/>
-              </a:ext>
-            </a:extLst>
-          </p:cNvPr>
-          <p:cNvSpPr txBox="1"/>
-          <p:nvPr/>
-        </p:nvSpPr>
-        <p:spPr>
-          <a:xfrm>
-            <a:off x="1252800" y="634032"/>
-            <a:ext cx="8510400" cy="461665"/>
-          </a:xfrm>
-          <a:prstGeom prst="rect">
-            <a:avLst/>
-          </a:prstGeom>
-          <a:noFill/>
-        </p:spPr>
-        <p:txBody>
-          <a:bodyPr wrap="square" rtlCol="0">
-            <a:spAutoFit/>
-          </a:bodyPr>
-          <a:lstStyle/>
-          <a:p>
-            <a:r>
-              <a:rPr lang="en-US" sz="2400" b="1" i="0" dirty="0">
-                <a:effectLst/>
-                <a:latin typeface="Arial" panose="020B0604020202020204" pitchFamily="34" charset="0"/>
-                <a:cs typeface="Arial" panose="020B0604020202020204" pitchFamily="34" charset="0"/>
-              </a:rPr>
-              <a:t>Analysis of RL Battery Optimization Box Plot (32 Runs)</a:t>
-            </a:r>
-            <a:endParaRPr lang="de-DE" sz="2400" dirty="0">
-              <a:latin typeface="Arial" panose="020B0604020202020204" pitchFamily="34" charset="0"/>
-              <a:cs typeface="Arial" panose="020B0604020202020204" pitchFamily="34" charset="0"/>
-            </a:endParaRPr>
-          </a:p>
-        </p:txBody>
-      </p:sp>
-      <p:sp>
-        <p:nvSpPr>
-          <p:cNvPr id="4" name="TextBox 3">
-            <a:extLst>
-              <a:ext uri="{FF2B5EF4-FFF2-40B4-BE49-F238E27FC236}">
-                <a16:creationId xmlns:a16="http://schemas.microsoft.com/office/drawing/2014/main" id="{F5CDAD08-B60C-704E-5A81-EB6F890CE8F3}"/>
-              </a:ext>
-            </a:extLst>
-          </p:cNvPr>
-          <p:cNvSpPr txBox="1"/>
-          <p:nvPr/>
-        </p:nvSpPr>
-        <p:spPr>
-          <a:xfrm>
-            <a:off x="5162400" y="6889200"/>
-            <a:ext cx="4795200" cy="923330"/>
-          </a:xfrm>
-          <a:prstGeom prst="rect">
-            <a:avLst/>
-          </a:prstGeom>
-          <a:noFill/>
-        </p:spPr>
-        <p:txBody>
-          <a:bodyPr wrap="square" rtlCol="0">
-            <a:spAutoFit/>
-          </a:bodyPr>
-          <a:lstStyle/>
-          <a:p>
-            <a:r>
-              <a:rPr lang="en-US" dirty="0"/>
-              <a:t>Fig.: Distribution of total cost from 32 RL models trained with identical hyperparameters and evaluated over the same time horizon.</a:t>
-            </a:r>
-          </a:p>
-        </p:txBody>
-      </p:sp>
-      <p:sp>
-        <p:nvSpPr>
-          <p:cNvPr id="6" name="TextBox 5">
-            <a:extLst>
-              <a:ext uri="{FF2B5EF4-FFF2-40B4-BE49-F238E27FC236}">
-                <a16:creationId xmlns:a16="http://schemas.microsoft.com/office/drawing/2014/main" id="{6A508730-589C-B759-C491-7E80F65C4E93}"/>
-              </a:ext>
-            </a:extLst>
-          </p:cNvPr>
-          <p:cNvSpPr txBox="1"/>
-          <p:nvPr/>
-        </p:nvSpPr>
-        <p:spPr>
-          <a:xfrm>
-            <a:off x="10749600" y="7365976"/>
-            <a:ext cx="3910944" cy="338554"/>
-          </a:xfrm>
-          <a:prstGeom prst="rect">
-            <a:avLst/>
-          </a:prstGeom>
-          <a:noFill/>
-        </p:spPr>
-        <p:txBody>
-          <a:bodyPr wrap="square" rtlCol="0">
-            <a:spAutoFit/>
-          </a:bodyPr>
-          <a:lstStyle/>
-          <a:p>
-            <a:r>
-              <a:rPr lang="de-DE" sz="1600" dirty="0"/>
-              <a:t>* </a:t>
-            </a:r>
-            <a:r>
-              <a:rPr lang="de-DE" sz="1600" dirty="0" err="1"/>
-              <a:t>Mathematical</a:t>
-            </a:r>
-            <a:r>
-              <a:rPr lang="de-DE" sz="1600" dirty="0"/>
-              <a:t> </a:t>
-            </a:r>
-            <a:r>
-              <a:rPr lang="de-DE" sz="1600" dirty="0" err="1"/>
-              <a:t>Optimization</a:t>
-            </a:r>
-            <a:r>
-              <a:rPr lang="de-DE" sz="1600" dirty="0"/>
-              <a:t> </a:t>
-            </a:r>
-            <a:r>
-              <a:rPr lang="de-DE" sz="1600" dirty="0" err="1"/>
-              <a:t>Cost</a:t>
-            </a:r>
-            <a:r>
-              <a:rPr lang="de-DE" sz="1600" dirty="0"/>
-              <a:t>:  -10.12 €</a:t>
-            </a:r>
-          </a:p>
-        </p:txBody>
-      </p:sp>
-      <p:sp>
-        <p:nvSpPr>
-          <p:cNvPr id="8" name="Slide Number Placeholder 7">
-            <a:extLst>
-              <a:ext uri="{FF2B5EF4-FFF2-40B4-BE49-F238E27FC236}">
-                <a16:creationId xmlns:a16="http://schemas.microsoft.com/office/drawing/2014/main" id="{3679400A-F841-24FE-6153-DB33CCB19068}"/>
+          <p:cNvPr id="2" name="Slide Number Placeholder 1">
+            <a:extLst>
+              <a:ext uri="{FF2B5EF4-FFF2-40B4-BE49-F238E27FC236}">
+                <a16:creationId xmlns:a16="http://schemas.microsoft.com/office/drawing/2014/main" id="{73F3B640-ED4D-C8B4-EBAC-701A73132A1E}"/>
               </a:ext>
             </a:extLst>
           </p:cNvPr>
@@ -18627,47 +19122,1131 @@
           <a:lstStyle/>
           <a:p>
             <a:fld id="{A02D9A9C-251E-4686-914B-47E3F39F30D8}" type="slidenum">
-              <a:rPr lang="de-DE" smtClean="0"/>
+              <a:rPr lang="de-DE" smtClean="0">
+                <a:latin typeface="Arial" panose="020B0604020202020204" pitchFamily="34" charset="0"/>
+                <a:cs typeface="Arial" panose="020B0604020202020204" pitchFamily="34" charset="0"/>
+              </a:rPr>
               <a:t>9</a:t>
             </a:fld>
-            <a:endParaRPr lang="de-DE"/>
+            <a:endParaRPr lang="de-DE">
+              <a:latin typeface="Arial" panose="020B0604020202020204" pitchFamily="34" charset="0"/>
+              <a:cs typeface="Arial" panose="020B0604020202020204" pitchFamily="34" charset="0"/>
+            </a:endParaRPr>
           </a:p>
         </p:txBody>
       </p:sp>
-      <p:pic>
-        <p:nvPicPr>
-          <p:cNvPr id="10" name="Picture 9">
-            <a:extLst>
-              <a:ext uri="{FF2B5EF4-FFF2-40B4-BE49-F238E27FC236}">
-                <a16:creationId xmlns:a16="http://schemas.microsoft.com/office/drawing/2014/main" id="{045EC1E4-49CC-0CCB-76AF-2C2FE37C2263}"/>
-              </a:ext>
-            </a:extLst>
-          </p:cNvPr>
-          <p:cNvPicPr>
-            <a:picLocks noChangeAspect="1"/>
-          </p:cNvPicPr>
+      <p:sp>
+        <p:nvSpPr>
+          <p:cNvPr id="6" name="table panel">
+            <a:extLst>
+              <a:ext uri="{FF2B5EF4-FFF2-40B4-BE49-F238E27FC236}">
+                <a16:creationId xmlns:a16="http://schemas.microsoft.com/office/drawing/2014/main" id="{1B00AB32-72F7-541D-4A71-543F6BB7979C}"/>
+              </a:ext>
+            </a:extLst>
+          </p:cNvPr>
+          <p:cNvSpPr/>
           <p:nvPr/>
-        </p:nvPicPr>
-        <p:blipFill>
-          <a:blip r:embed="rId2"/>
-          <a:stretch>
-            <a:fillRect/>
-          </a:stretch>
-        </p:blipFill>
+        </p:nvSpPr>
         <p:spPr>
           <a:xfrm>
-            <a:off x="2908080" y="1419685"/>
-            <a:ext cx="7546320" cy="5390229"/>
+            <a:off x="500249" y="1716757"/>
+            <a:ext cx="7230643" cy="5282561"/>
+          </a:xfrm>
+          <a:prstGeom prst="roundRect">
+            <a:avLst/>
+          </a:prstGeom>
+          <a:solidFill>
+            <a:srgbClr val="FFFFFF"/>
+          </a:solidFill>
+          <a:ln w="9525">
+            <a:solidFill>
+              <a:srgbClr val="CBD5E1"/>
+            </a:solidFill>
+          </a:ln>
+        </p:spPr>
+        <p:txBody>
+          <a:bodyPr/>
+          <a:lstStyle/>
+          <a:p>
+            <a:endParaRPr sz="1200">
+              <a:latin typeface="Arial" panose="020B0604020202020204" pitchFamily="34" charset="0"/>
+              <a:cs typeface="Arial" panose="020B0604020202020204" pitchFamily="34" charset="0"/>
+            </a:endParaRPr>
+          </a:p>
+        </p:txBody>
+      </p:sp>
+      <p:sp>
+        <p:nvSpPr>
+          <p:cNvPr id="7" name="sac panel">
+            <a:extLst>
+              <a:ext uri="{FF2B5EF4-FFF2-40B4-BE49-F238E27FC236}">
+                <a16:creationId xmlns:a16="http://schemas.microsoft.com/office/drawing/2014/main" id="{FC042166-572C-14C1-32EF-46056912F166}"/>
+              </a:ext>
+            </a:extLst>
+          </p:cNvPr>
+          <p:cNvSpPr/>
+          <p:nvPr/>
+        </p:nvSpPr>
+        <p:spPr>
+          <a:xfrm>
+            <a:off x="8910262" y="1857154"/>
+            <a:ext cx="4251960" cy="5120640"/>
+          </a:xfrm>
+          <a:prstGeom prst="roundRect">
+            <a:avLst/>
+          </a:prstGeom>
+          <a:solidFill>
+            <a:srgbClr val="EFF6FF"/>
+          </a:solidFill>
+          <a:ln w="9525">
+            <a:solidFill>
+              <a:srgbClr val="BFDBFE"/>
+            </a:solidFill>
+          </a:ln>
+        </p:spPr>
+        <p:txBody>
+          <a:bodyPr/>
+          <a:lstStyle/>
+          <a:p>
+            <a:endParaRPr sz="1200">
+              <a:latin typeface="Arial" panose="020B0604020202020204" pitchFamily="34" charset="0"/>
+              <a:cs typeface="Arial" panose="020B0604020202020204" pitchFamily="34" charset="0"/>
+            </a:endParaRPr>
+          </a:p>
+        </p:txBody>
+      </p:sp>
+      <p:sp>
+        <p:nvSpPr>
+          <p:cNvPr id="8" name="title">
+            <a:extLst>
+              <a:ext uri="{FF2B5EF4-FFF2-40B4-BE49-F238E27FC236}">
+                <a16:creationId xmlns:a16="http://schemas.microsoft.com/office/drawing/2014/main" id="{B13BEFEE-FB5A-3F3A-1F03-678A1920915B}"/>
+              </a:ext>
+            </a:extLst>
+          </p:cNvPr>
+          <p:cNvSpPr txBox="1"/>
+          <p:nvPr/>
+        </p:nvSpPr>
+        <p:spPr>
+          <a:xfrm>
+            <a:off x="671724" y="676656"/>
+            <a:ext cx="11155680" cy="502920"/>
           </a:xfrm>
           <a:prstGeom prst="rect">
             <a:avLst/>
           </a:prstGeom>
+          <a:noFill/>
+          <a:ln w="0">
+            <a:noFill/>
+          </a:ln>
         </p:spPr>
-      </p:pic>
+        <p:txBody>
+          <a:bodyPr wrap="square" lIns="18288" tIns="18288" rIns="18288" bIns="18288" anchor="t"/>
+          <a:lstStyle/>
+          <a:p>
+            <a:r>
+              <a:rPr lang="en-US" sz="3000">
+                <a:solidFill>
+                  <a:srgbClr val="0F172A"/>
+                </a:solidFill>
+                <a:latin typeface="Arial" panose="020B0604020202020204" pitchFamily="34" charset="0"/>
+                <a:cs typeface="Arial" panose="020B0604020202020204" pitchFamily="34" charset="0"/>
+              </a:rPr>
+              <a:t>Why Soft Actor-Critic (SAC)?</a:t>
+            </a:r>
+            <a:endParaRPr lang="en-US" sz="3000">
+              <a:latin typeface="Arial" panose="020B0604020202020204" pitchFamily="34" charset="0"/>
+              <a:cs typeface="Arial" panose="020B0604020202020204" pitchFamily="34" charset="0"/>
+            </a:endParaRPr>
+          </a:p>
+        </p:txBody>
+      </p:sp>
+      <p:sp>
+        <p:nvSpPr>
+          <p:cNvPr id="9" name="subtitle">
+            <a:extLst>
+              <a:ext uri="{FF2B5EF4-FFF2-40B4-BE49-F238E27FC236}">
+                <a16:creationId xmlns:a16="http://schemas.microsoft.com/office/drawing/2014/main" id="{9F5497E0-FAF2-3293-F8A7-C798B63721B6}"/>
+              </a:ext>
+            </a:extLst>
+          </p:cNvPr>
+          <p:cNvSpPr txBox="1"/>
+          <p:nvPr/>
+        </p:nvSpPr>
+        <p:spPr>
+          <a:xfrm>
+            <a:off x="690012" y="1345090"/>
+            <a:ext cx="11155680" cy="301752"/>
+          </a:xfrm>
+          <a:prstGeom prst="rect">
+            <a:avLst/>
+          </a:prstGeom>
+          <a:noFill/>
+          <a:ln w="0">
+            <a:noFill/>
+          </a:ln>
+        </p:spPr>
+        <p:txBody>
+          <a:bodyPr wrap="square" lIns="18288" tIns="18288" rIns="18288" bIns="18288" anchor="t"/>
+          <a:lstStyle/>
+          <a:p>
+            <a:r>
+              <a:rPr lang="en-US" sz="1200" dirty="0">
+                <a:solidFill>
+                  <a:srgbClr val="475569"/>
+                </a:solidFill>
+                <a:latin typeface="Arial" panose="020B0604020202020204" pitchFamily="34" charset="0"/>
+                <a:cs typeface="Arial" panose="020B0604020202020204" pitchFamily="34" charset="0"/>
+              </a:rPr>
+              <a:t>The control task needs continuous setpoints, sample-efficient learning, and stable exploration under changing electricity prices</a:t>
+            </a:r>
+            <a:endParaRPr lang="en-US" sz="1200" dirty="0">
+              <a:latin typeface="Arial" panose="020B0604020202020204" pitchFamily="34" charset="0"/>
+              <a:cs typeface="Arial" panose="020B0604020202020204" pitchFamily="34" charset="0"/>
+            </a:endParaRPr>
+          </a:p>
+        </p:txBody>
+      </p:sp>
+      <p:sp>
+        <p:nvSpPr>
+          <p:cNvPr id="10" name="header fill">
+            <a:extLst>
+              <a:ext uri="{FF2B5EF4-FFF2-40B4-BE49-F238E27FC236}">
+                <a16:creationId xmlns:a16="http://schemas.microsoft.com/office/drawing/2014/main" id="{2209A134-51B3-005F-34D0-9CD5B6DF1A88}"/>
+              </a:ext>
+            </a:extLst>
+          </p:cNvPr>
+          <p:cNvSpPr/>
+          <p:nvPr/>
+        </p:nvSpPr>
+        <p:spPr>
+          <a:xfrm>
+            <a:off x="909468" y="2040034"/>
+            <a:ext cx="6446520" cy="384048"/>
+          </a:xfrm>
+          <a:prstGeom prst="roundRect">
+            <a:avLst/>
+          </a:prstGeom>
+          <a:solidFill>
+            <a:srgbClr val="E2E8F0"/>
+          </a:solidFill>
+          <a:ln w="9525">
+            <a:solidFill>
+              <a:srgbClr val="E2E8F0"/>
+            </a:solidFill>
+          </a:ln>
+        </p:spPr>
+        <p:txBody>
+          <a:bodyPr/>
+          <a:lstStyle/>
+          <a:p>
+            <a:endParaRPr sz="1200">
+              <a:latin typeface="Arial" panose="020B0604020202020204" pitchFamily="34" charset="0"/>
+              <a:cs typeface="Arial" panose="020B0604020202020204" pitchFamily="34" charset="0"/>
+            </a:endParaRPr>
+          </a:p>
+        </p:txBody>
+      </p:sp>
+      <p:sp>
+        <p:nvSpPr>
+          <p:cNvPr id="11" name="header left">
+            <a:extLst>
+              <a:ext uri="{FF2B5EF4-FFF2-40B4-BE49-F238E27FC236}">
+                <a16:creationId xmlns:a16="http://schemas.microsoft.com/office/drawing/2014/main" id="{1CE8518F-6A8C-7702-55E9-33FC2E18307B}"/>
+              </a:ext>
+            </a:extLst>
+          </p:cNvPr>
+          <p:cNvSpPr txBox="1"/>
+          <p:nvPr/>
+        </p:nvSpPr>
+        <p:spPr>
+          <a:xfrm>
+            <a:off x="1000908" y="2104042"/>
+            <a:ext cx="1664208" cy="201168"/>
+          </a:xfrm>
+          <a:prstGeom prst="rect">
+            <a:avLst/>
+          </a:prstGeom>
+          <a:solidFill>
+            <a:srgbClr val="E2E8F0"/>
+          </a:solidFill>
+          <a:ln w="0">
+            <a:solidFill>
+              <a:srgbClr val="E2E8F0"/>
+            </a:solidFill>
+          </a:ln>
+        </p:spPr>
+        <p:txBody>
+          <a:bodyPr wrap="square" lIns="9144" tIns="9144" rIns="9144" bIns="9144" anchor="t"/>
+          <a:lstStyle/>
+          <a:p>
+            <a:r>
+              <a:rPr lang="en-US" sz="1200">
+                <a:solidFill>
+                  <a:srgbClr val="0F172A"/>
+                </a:solidFill>
+                <a:latin typeface="Arial" panose="020B0604020202020204" pitchFamily="34" charset="0"/>
+                <a:cs typeface="Arial" panose="020B0604020202020204" pitchFamily="34" charset="0"/>
+              </a:rPr>
+              <a:t>Algorithm</a:t>
+            </a:r>
+            <a:endParaRPr lang="en-US" sz="1200">
+              <a:latin typeface="Arial" panose="020B0604020202020204" pitchFamily="34" charset="0"/>
+              <a:cs typeface="Arial" panose="020B0604020202020204" pitchFamily="34" charset="0"/>
+            </a:endParaRPr>
+          </a:p>
+        </p:txBody>
+      </p:sp>
+      <p:sp>
+        <p:nvSpPr>
+          <p:cNvPr id="12" name="header right">
+            <a:extLst>
+              <a:ext uri="{FF2B5EF4-FFF2-40B4-BE49-F238E27FC236}">
+                <a16:creationId xmlns:a16="http://schemas.microsoft.com/office/drawing/2014/main" id="{C0DD0CD9-D7A5-2DC6-7864-A2181E68C525}"/>
+              </a:ext>
+            </a:extLst>
+          </p:cNvPr>
+          <p:cNvSpPr txBox="1"/>
+          <p:nvPr/>
+        </p:nvSpPr>
+        <p:spPr>
+          <a:xfrm>
+            <a:off x="2500524" y="2104042"/>
+            <a:ext cx="4645152" cy="201168"/>
+          </a:xfrm>
+          <a:prstGeom prst="rect">
+            <a:avLst/>
+          </a:prstGeom>
+          <a:solidFill>
+            <a:srgbClr val="E2E8F0"/>
+          </a:solidFill>
+          <a:ln w="0">
+            <a:solidFill>
+              <a:srgbClr val="E2E8F0"/>
+            </a:solidFill>
+          </a:ln>
+        </p:spPr>
+        <p:txBody>
+          <a:bodyPr wrap="square" lIns="9144" tIns="9144" rIns="9144" bIns="9144" anchor="t"/>
+          <a:lstStyle/>
+          <a:p>
+            <a:r>
+              <a:rPr lang="en-US" sz="1200">
+                <a:solidFill>
+                  <a:srgbClr val="0F172A"/>
+                </a:solidFill>
+                <a:latin typeface="Arial" panose="020B0604020202020204" pitchFamily="34" charset="0"/>
+                <a:cs typeface="Arial" panose="020B0604020202020204" pitchFamily="34" charset="0"/>
+              </a:rPr>
+              <a:t>Why it was not the main choice</a:t>
+            </a:r>
+            <a:endParaRPr lang="en-US" sz="1200">
+              <a:latin typeface="Arial" panose="020B0604020202020204" pitchFamily="34" charset="0"/>
+              <a:cs typeface="Arial" panose="020B0604020202020204" pitchFamily="34" charset="0"/>
+            </a:endParaRPr>
+          </a:p>
+        </p:txBody>
+      </p:sp>
+      <p:cxnSp>
+        <p:nvCxnSpPr>
+          <p:cNvPr id="13" name="header line">
+            <a:extLst>
+              <a:ext uri="{FF2B5EF4-FFF2-40B4-BE49-F238E27FC236}">
+                <a16:creationId xmlns:a16="http://schemas.microsoft.com/office/drawing/2014/main" id="{D8CB2E3A-A2D3-B2A8-75A9-D4F1B55B5DB1}"/>
+              </a:ext>
+            </a:extLst>
+          </p:cNvPr>
+          <p:cNvCxnSpPr>
+            <a:cxnSpLocks/>
+          </p:cNvCxnSpPr>
+          <p:nvPr/>
+        </p:nvCxnSpPr>
+        <p:spPr>
+          <a:xfrm>
+            <a:off x="2390796" y="2049178"/>
+            <a:ext cx="13357" cy="3227832"/>
+          </a:xfrm>
+          <a:prstGeom prst="line">
+            <a:avLst/>
+          </a:prstGeom>
+          <a:ln w="12700">
+            <a:solidFill>
+              <a:srgbClr val="CBD5E1"/>
+            </a:solidFill>
+          </a:ln>
+        </p:spPr>
+      </p:cxnSp>
+      <p:sp>
+        <p:nvSpPr>
+          <p:cNvPr id="14" name="alg Q-learning">
+            <a:extLst>
+              <a:ext uri="{FF2B5EF4-FFF2-40B4-BE49-F238E27FC236}">
+                <a16:creationId xmlns:a16="http://schemas.microsoft.com/office/drawing/2014/main" id="{C8E68977-4072-1B75-7D50-D9F6A88BEA6C}"/>
+              </a:ext>
+            </a:extLst>
+          </p:cNvPr>
+          <p:cNvSpPr txBox="1"/>
+          <p:nvPr/>
+        </p:nvSpPr>
+        <p:spPr>
+          <a:xfrm>
+            <a:off x="1000908" y="2561242"/>
+            <a:ext cx="1261872" cy="411480"/>
+          </a:xfrm>
+          <a:prstGeom prst="rect">
+            <a:avLst/>
+          </a:prstGeom>
+          <a:solidFill>
+            <a:srgbClr val="FFFFFF"/>
+          </a:solidFill>
+          <a:ln w="0">
+            <a:solidFill>
+              <a:srgbClr val="FFFFFF"/>
+            </a:solidFill>
+          </a:ln>
+        </p:spPr>
+        <p:txBody>
+          <a:bodyPr wrap="square" lIns="9144" tIns="9144" rIns="9144" bIns="9144" anchor="t"/>
+          <a:lstStyle/>
+          <a:p>
+            <a:r>
+              <a:rPr lang="en-US" sz="1200">
+                <a:solidFill>
+                  <a:srgbClr val="1E3A8A"/>
+                </a:solidFill>
+                <a:latin typeface="Arial" panose="020B0604020202020204" pitchFamily="34" charset="0"/>
+                <a:cs typeface="Arial" panose="020B0604020202020204" pitchFamily="34" charset="0"/>
+              </a:rPr>
+              <a:t>Q-learning</a:t>
+            </a:r>
+            <a:endParaRPr lang="en-US" sz="1200">
+              <a:latin typeface="Arial" panose="020B0604020202020204" pitchFamily="34" charset="0"/>
+              <a:cs typeface="Arial" panose="020B0604020202020204" pitchFamily="34" charset="0"/>
+            </a:endParaRPr>
+          </a:p>
+        </p:txBody>
+      </p:sp>
+      <p:sp>
+        <p:nvSpPr>
+          <p:cNvPr id="15" name="why Q-learning">
+            <a:extLst>
+              <a:ext uri="{FF2B5EF4-FFF2-40B4-BE49-F238E27FC236}">
+                <a16:creationId xmlns:a16="http://schemas.microsoft.com/office/drawing/2014/main" id="{E1E05F8E-576A-E579-519D-91063C0E8951}"/>
+              </a:ext>
+            </a:extLst>
+          </p:cNvPr>
+          <p:cNvSpPr txBox="1"/>
+          <p:nvPr/>
+        </p:nvSpPr>
+        <p:spPr>
+          <a:xfrm>
+            <a:off x="2500524" y="2552098"/>
+            <a:ext cx="4617720" cy="502920"/>
+          </a:xfrm>
+          <a:prstGeom prst="rect">
+            <a:avLst/>
+          </a:prstGeom>
+          <a:solidFill>
+            <a:srgbClr val="FFFFFF"/>
+          </a:solidFill>
+          <a:ln w="0">
+            <a:solidFill>
+              <a:srgbClr val="FFFFFF"/>
+            </a:solidFill>
+          </a:ln>
+        </p:spPr>
+        <p:txBody>
+          <a:bodyPr wrap="square" lIns="9144" tIns="9144" rIns="9144" bIns="9144" anchor="t"/>
+          <a:lstStyle/>
+          <a:p>
+            <a:r>
+              <a:rPr lang="en-US" sz="1200" dirty="0">
+                <a:solidFill>
+                  <a:srgbClr val="334155"/>
+                </a:solidFill>
+                <a:latin typeface="Arial" panose="020B0604020202020204" pitchFamily="34" charset="0"/>
+                <a:cs typeface="Arial" panose="020B0604020202020204" pitchFamily="34" charset="0"/>
+              </a:rPr>
+              <a:t>Works best for small discrete states/actions; continuous battery power would need coarse discretization.</a:t>
+            </a:r>
+            <a:endParaRPr lang="en-US" sz="1200" dirty="0">
+              <a:latin typeface="Arial" panose="020B0604020202020204" pitchFamily="34" charset="0"/>
+              <a:cs typeface="Arial" panose="020B0604020202020204" pitchFamily="34" charset="0"/>
+            </a:endParaRPr>
+          </a:p>
+        </p:txBody>
+      </p:sp>
+      <p:cxnSp>
+        <p:nvCxnSpPr>
+          <p:cNvPr id="16" name="row line 0">
+            <a:extLst>
+              <a:ext uri="{FF2B5EF4-FFF2-40B4-BE49-F238E27FC236}">
+                <a16:creationId xmlns:a16="http://schemas.microsoft.com/office/drawing/2014/main" id="{D90AEB32-430B-CB73-0DFD-F8A77A50C9E5}"/>
+              </a:ext>
+            </a:extLst>
+          </p:cNvPr>
+          <p:cNvCxnSpPr/>
+          <p:nvPr/>
+        </p:nvCxnSpPr>
+        <p:spPr>
+          <a:xfrm>
+            <a:off x="927756" y="3137314"/>
+            <a:ext cx="6419088" cy="0"/>
+          </a:xfrm>
+          <a:prstGeom prst="line">
+            <a:avLst/>
+          </a:prstGeom>
+          <a:ln w="6350">
+            <a:solidFill>
+              <a:srgbClr val="E2E8F0"/>
+            </a:solidFill>
+          </a:ln>
+        </p:spPr>
+      </p:cxnSp>
+      <p:sp>
+        <p:nvSpPr>
+          <p:cNvPr id="17" name="row shade 1">
+            <a:extLst>
+              <a:ext uri="{FF2B5EF4-FFF2-40B4-BE49-F238E27FC236}">
+                <a16:creationId xmlns:a16="http://schemas.microsoft.com/office/drawing/2014/main" id="{F8743495-A1F5-7B91-20E2-6E0CB6D82973}"/>
+              </a:ext>
+            </a:extLst>
+          </p:cNvPr>
+          <p:cNvSpPr/>
+          <p:nvPr/>
+        </p:nvSpPr>
+        <p:spPr>
+          <a:xfrm>
+            <a:off x="909468" y="3201322"/>
+            <a:ext cx="6446520" cy="658368"/>
+          </a:xfrm>
+          <a:prstGeom prst="rect">
+            <a:avLst/>
+          </a:prstGeom>
+          <a:solidFill>
+            <a:srgbClr val="F8FAFC"/>
+          </a:solidFill>
+          <a:ln w="9525">
+            <a:solidFill>
+              <a:srgbClr val="F8FAFC"/>
+            </a:solidFill>
+          </a:ln>
+        </p:spPr>
+        <p:txBody>
+          <a:bodyPr/>
+          <a:lstStyle/>
+          <a:p>
+            <a:endParaRPr sz="1200">
+              <a:latin typeface="Arial" panose="020B0604020202020204" pitchFamily="34" charset="0"/>
+              <a:cs typeface="Arial" panose="020B0604020202020204" pitchFamily="34" charset="0"/>
+            </a:endParaRPr>
+          </a:p>
+        </p:txBody>
+      </p:sp>
+      <p:sp>
+        <p:nvSpPr>
+          <p:cNvPr id="18" name="alg DQN">
+            <a:extLst>
+              <a:ext uri="{FF2B5EF4-FFF2-40B4-BE49-F238E27FC236}">
+                <a16:creationId xmlns:a16="http://schemas.microsoft.com/office/drawing/2014/main" id="{A9C59F2D-075D-08B7-DDF9-EFF04B190F2E}"/>
+              </a:ext>
+            </a:extLst>
+          </p:cNvPr>
+          <p:cNvSpPr txBox="1"/>
+          <p:nvPr/>
+        </p:nvSpPr>
+        <p:spPr>
+          <a:xfrm>
+            <a:off x="1000908" y="3274474"/>
+            <a:ext cx="1261872" cy="411480"/>
+          </a:xfrm>
+          <a:prstGeom prst="rect">
+            <a:avLst/>
+          </a:prstGeom>
+          <a:solidFill>
+            <a:srgbClr val="F8FAFC"/>
+          </a:solidFill>
+          <a:ln w="0">
+            <a:solidFill>
+              <a:srgbClr val="FFFFFF"/>
+            </a:solidFill>
+          </a:ln>
+        </p:spPr>
+        <p:txBody>
+          <a:bodyPr wrap="square" lIns="9144" tIns="9144" rIns="9144" bIns="9144" anchor="t"/>
+          <a:lstStyle/>
+          <a:p>
+            <a:r>
+              <a:rPr lang="en-US" sz="1200">
+                <a:solidFill>
+                  <a:srgbClr val="1E3A8A"/>
+                </a:solidFill>
+                <a:latin typeface="Arial" panose="020B0604020202020204" pitchFamily="34" charset="0"/>
+                <a:cs typeface="Arial" panose="020B0604020202020204" pitchFamily="34" charset="0"/>
+              </a:rPr>
+              <a:t>DQN</a:t>
+            </a:r>
+            <a:endParaRPr lang="en-US" sz="1200">
+              <a:latin typeface="Arial" panose="020B0604020202020204" pitchFamily="34" charset="0"/>
+              <a:cs typeface="Arial" panose="020B0604020202020204" pitchFamily="34" charset="0"/>
+            </a:endParaRPr>
+          </a:p>
+        </p:txBody>
+      </p:sp>
+      <p:sp>
+        <p:nvSpPr>
+          <p:cNvPr id="19" name="why DQN">
+            <a:extLst>
+              <a:ext uri="{FF2B5EF4-FFF2-40B4-BE49-F238E27FC236}">
+                <a16:creationId xmlns:a16="http://schemas.microsoft.com/office/drawing/2014/main" id="{C8CEA801-DC53-D98A-0A7A-6ABEA14ED48E}"/>
+              </a:ext>
+            </a:extLst>
+          </p:cNvPr>
+          <p:cNvSpPr txBox="1"/>
+          <p:nvPr/>
+        </p:nvSpPr>
+        <p:spPr>
+          <a:xfrm>
+            <a:off x="2500524" y="3265330"/>
+            <a:ext cx="4617720" cy="502920"/>
+          </a:xfrm>
+          <a:prstGeom prst="rect">
+            <a:avLst/>
+          </a:prstGeom>
+          <a:solidFill>
+            <a:srgbClr val="F8FAFC"/>
+          </a:solidFill>
+          <a:ln w="0">
+            <a:solidFill>
+              <a:srgbClr val="FFFFFF"/>
+            </a:solidFill>
+          </a:ln>
+        </p:spPr>
+        <p:txBody>
+          <a:bodyPr wrap="square" lIns="9144" tIns="9144" rIns="9144" bIns="9144" anchor="t"/>
+          <a:lstStyle/>
+          <a:p>
+            <a:r>
+              <a:rPr lang="en-US" sz="1200" dirty="0">
+                <a:solidFill>
+                  <a:srgbClr val="334155"/>
+                </a:solidFill>
+                <a:latin typeface="Arial" panose="020B0604020202020204" pitchFamily="34" charset="0"/>
+                <a:cs typeface="Arial" panose="020B0604020202020204" pitchFamily="34" charset="0"/>
+              </a:rPr>
+              <a:t>Deep version of Q-learning, but still mainly discrete-action; </a:t>
+            </a:r>
+            <a:endParaRPr lang="en-US" sz="1200" dirty="0">
+              <a:latin typeface="Arial" panose="020B0604020202020204" pitchFamily="34" charset="0"/>
+              <a:cs typeface="Arial" panose="020B0604020202020204" pitchFamily="34" charset="0"/>
+            </a:endParaRPr>
+          </a:p>
+        </p:txBody>
+      </p:sp>
+      <p:cxnSp>
+        <p:nvCxnSpPr>
+          <p:cNvPr id="20" name="row line 1">
+            <a:extLst>
+              <a:ext uri="{FF2B5EF4-FFF2-40B4-BE49-F238E27FC236}">
+                <a16:creationId xmlns:a16="http://schemas.microsoft.com/office/drawing/2014/main" id="{31B7A52A-4BF1-2E75-EC63-5E5C3C86D88B}"/>
+              </a:ext>
+            </a:extLst>
+          </p:cNvPr>
+          <p:cNvCxnSpPr/>
+          <p:nvPr/>
+        </p:nvCxnSpPr>
+        <p:spPr>
+          <a:xfrm>
+            <a:off x="927756" y="3850546"/>
+            <a:ext cx="6419088" cy="0"/>
+          </a:xfrm>
+          <a:prstGeom prst="line">
+            <a:avLst/>
+          </a:prstGeom>
+          <a:ln w="6350">
+            <a:solidFill>
+              <a:srgbClr val="E2E8F0"/>
+            </a:solidFill>
+          </a:ln>
+        </p:spPr>
+      </p:cxnSp>
+      <p:sp>
+        <p:nvSpPr>
+          <p:cNvPr id="21" name="alg PPO">
+            <a:extLst>
+              <a:ext uri="{FF2B5EF4-FFF2-40B4-BE49-F238E27FC236}">
+                <a16:creationId xmlns:a16="http://schemas.microsoft.com/office/drawing/2014/main" id="{21044B98-C7B3-DEF1-AE04-6E26A438161E}"/>
+              </a:ext>
+            </a:extLst>
+          </p:cNvPr>
+          <p:cNvSpPr txBox="1"/>
+          <p:nvPr/>
+        </p:nvSpPr>
+        <p:spPr>
+          <a:xfrm>
+            <a:off x="1000908" y="3987706"/>
+            <a:ext cx="1261872" cy="411480"/>
+          </a:xfrm>
+          <a:prstGeom prst="rect">
+            <a:avLst/>
+          </a:prstGeom>
+          <a:solidFill>
+            <a:srgbClr val="FFFFFF"/>
+          </a:solidFill>
+          <a:ln w="0">
+            <a:solidFill>
+              <a:srgbClr val="FFFFFF"/>
+            </a:solidFill>
+          </a:ln>
+        </p:spPr>
+        <p:txBody>
+          <a:bodyPr wrap="square" lIns="9144" tIns="9144" rIns="9144" bIns="9144" anchor="t"/>
+          <a:lstStyle/>
+          <a:p>
+            <a:r>
+              <a:rPr lang="en-US" sz="1200">
+                <a:solidFill>
+                  <a:srgbClr val="1E3A8A"/>
+                </a:solidFill>
+                <a:latin typeface="Arial" panose="020B0604020202020204" pitchFamily="34" charset="0"/>
+                <a:cs typeface="Arial" panose="020B0604020202020204" pitchFamily="34" charset="0"/>
+              </a:rPr>
+              <a:t>PPO</a:t>
+            </a:r>
+            <a:endParaRPr lang="en-US" sz="1200">
+              <a:latin typeface="Arial" panose="020B0604020202020204" pitchFamily="34" charset="0"/>
+              <a:cs typeface="Arial" panose="020B0604020202020204" pitchFamily="34" charset="0"/>
+            </a:endParaRPr>
+          </a:p>
+        </p:txBody>
+      </p:sp>
+      <p:sp>
+        <p:nvSpPr>
+          <p:cNvPr id="22" name="why PPO">
+            <a:extLst>
+              <a:ext uri="{FF2B5EF4-FFF2-40B4-BE49-F238E27FC236}">
+                <a16:creationId xmlns:a16="http://schemas.microsoft.com/office/drawing/2014/main" id="{7DBD0F20-1283-3D64-8E8E-74CFE588D4F6}"/>
+              </a:ext>
+            </a:extLst>
+          </p:cNvPr>
+          <p:cNvSpPr txBox="1"/>
+          <p:nvPr/>
+        </p:nvSpPr>
+        <p:spPr>
+          <a:xfrm>
+            <a:off x="2500524" y="3978562"/>
+            <a:ext cx="4617720" cy="502920"/>
+          </a:xfrm>
+          <a:prstGeom prst="rect">
+            <a:avLst/>
+          </a:prstGeom>
+          <a:solidFill>
+            <a:srgbClr val="FFFFFF"/>
+          </a:solidFill>
+          <a:ln w="0">
+            <a:solidFill>
+              <a:srgbClr val="FFFFFF"/>
+            </a:solidFill>
+          </a:ln>
+        </p:spPr>
+        <p:txBody>
+          <a:bodyPr wrap="square" lIns="9144" tIns="9144" rIns="9144" bIns="9144" anchor="t"/>
+          <a:lstStyle/>
+          <a:p>
+            <a:r>
+              <a:rPr lang="en-US" sz="1200" dirty="0">
+                <a:solidFill>
+                  <a:srgbClr val="334155"/>
+                </a:solidFill>
+                <a:latin typeface="Arial" panose="020B0604020202020204" pitchFamily="34" charset="0"/>
+                <a:cs typeface="Arial" panose="020B0604020202020204" pitchFamily="34" charset="0"/>
+              </a:rPr>
+              <a:t>Can handle continuous actions and is stable, but on-policy learning usually needs more fresh simulation data.</a:t>
+            </a:r>
+            <a:endParaRPr lang="en-US" sz="1200" dirty="0">
+              <a:latin typeface="Arial" panose="020B0604020202020204" pitchFamily="34" charset="0"/>
+              <a:cs typeface="Arial" panose="020B0604020202020204" pitchFamily="34" charset="0"/>
+            </a:endParaRPr>
+          </a:p>
+        </p:txBody>
+      </p:sp>
+      <p:cxnSp>
+        <p:nvCxnSpPr>
+          <p:cNvPr id="23" name="row line 2">
+            <a:extLst>
+              <a:ext uri="{FF2B5EF4-FFF2-40B4-BE49-F238E27FC236}">
+                <a16:creationId xmlns:a16="http://schemas.microsoft.com/office/drawing/2014/main" id="{EF453E85-3395-830A-93B5-E5A3599399B8}"/>
+              </a:ext>
+            </a:extLst>
+          </p:cNvPr>
+          <p:cNvCxnSpPr/>
+          <p:nvPr/>
+        </p:nvCxnSpPr>
+        <p:spPr>
+          <a:xfrm>
+            <a:off x="927756" y="4563778"/>
+            <a:ext cx="6419088" cy="0"/>
+          </a:xfrm>
+          <a:prstGeom prst="line">
+            <a:avLst/>
+          </a:prstGeom>
+          <a:ln w="6350">
+            <a:solidFill>
+              <a:srgbClr val="E2E8F0"/>
+            </a:solidFill>
+          </a:ln>
+        </p:spPr>
+      </p:cxnSp>
+      <p:sp>
+        <p:nvSpPr>
+          <p:cNvPr id="24" name="row shade 3">
+            <a:extLst>
+              <a:ext uri="{FF2B5EF4-FFF2-40B4-BE49-F238E27FC236}">
+                <a16:creationId xmlns:a16="http://schemas.microsoft.com/office/drawing/2014/main" id="{DDD2462F-D465-E771-CE41-AC93FF87498E}"/>
+              </a:ext>
+            </a:extLst>
+          </p:cNvPr>
+          <p:cNvSpPr/>
+          <p:nvPr/>
+        </p:nvSpPr>
+        <p:spPr>
+          <a:xfrm>
+            <a:off x="909468" y="4627786"/>
+            <a:ext cx="6446520" cy="658368"/>
+          </a:xfrm>
+          <a:prstGeom prst="rect">
+            <a:avLst/>
+          </a:prstGeom>
+          <a:solidFill>
+            <a:srgbClr val="F8FAFC"/>
+          </a:solidFill>
+          <a:ln w="9525">
+            <a:solidFill>
+              <a:srgbClr val="F8FAFC"/>
+            </a:solidFill>
+          </a:ln>
+        </p:spPr>
+        <p:txBody>
+          <a:bodyPr/>
+          <a:lstStyle/>
+          <a:p>
+            <a:endParaRPr sz="1200">
+              <a:latin typeface="Arial" panose="020B0604020202020204" pitchFamily="34" charset="0"/>
+              <a:cs typeface="Arial" panose="020B0604020202020204" pitchFamily="34" charset="0"/>
+            </a:endParaRPr>
+          </a:p>
+        </p:txBody>
+      </p:sp>
+      <p:cxnSp>
+        <p:nvCxnSpPr>
+          <p:cNvPr id="27" name="row line 3">
+            <a:extLst>
+              <a:ext uri="{FF2B5EF4-FFF2-40B4-BE49-F238E27FC236}">
+                <a16:creationId xmlns:a16="http://schemas.microsoft.com/office/drawing/2014/main" id="{E4EC5775-A992-D09A-6CEF-108377E76E96}"/>
+              </a:ext>
+            </a:extLst>
+          </p:cNvPr>
+          <p:cNvCxnSpPr/>
+          <p:nvPr/>
+        </p:nvCxnSpPr>
+        <p:spPr>
+          <a:xfrm>
+            <a:off x="927756" y="5277010"/>
+            <a:ext cx="6419088" cy="0"/>
+          </a:xfrm>
+          <a:prstGeom prst="line">
+            <a:avLst/>
+          </a:prstGeom>
+          <a:ln w="6350">
+            <a:solidFill>
+              <a:srgbClr val="E2E8F0"/>
+            </a:solidFill>
+          </a:ln>
+        </p:spPr>
+      </p:cxnSp>
+      <p:sp>
+        <p:nvSpPr>
+          <p:cNvPr id="28" name="alg TD3">
+            <a:extLst>
+              <a:ext uri="{FF2B5EF4-FFF2-40B4-BE49-F238E27FC236}">
+                <a16:creationId xmlns:a16="http://schemas.microsoft.com/office/drawing/2014/main" id="{2B632C48-F9A0-E6C2-789C-692C1D746E8E}"/>
+              </a:ext>
+            </a:extLst>
+          </p:cNvPr>
+          <p:cNvSpPr txBox="1"/>
+          <p:nvPr/>
+        </p:nvSpPr>
+        <p:spPr>
+          <a:xfrm>
+            <a:off x="1000908" y="4736076"/>
+            <a:ext cx="1261872" cy="411480"/>
+          </a:xfrm>
+          <a:prstGeom prst="rect">
+            <a:avLst/>
+          </a:prstGeom>
+          <a:solidFill>
+            <a:srgbClr val="F8FAFC"/>
+          </a:solidFill>
+          <a:ln w="0">
+            <a:solidFill>
+              <a:srgbClr val="FFFFFF"/>
+            </a:solidFill>
+          </a:ln>
+        </p:spPr>
+        <p:txBody>
+          <a:bodyPr wrap="square" lIns="9144" tIns="9144" rIns="9144" bIns="9144" anchor="t"/>
+          <a:lstStyle/>
+          <a:p>
+            <a:r>
+              <a:rPr lang="en-US" sz="1200" dirty="0">
+                <a:solidFill>
+                  <a:srgbClr val="1E3A8A"/>
+                </a:solidFill>
+                <a:latin typeface="Arial" panose="020B0604020202020204" pitchFamily="34" charset="0"/>
+                <a:cs typeface="Arial" panose="020B0604020202020204" pitchFamily="34" charset="0"/>
+              </a:rPr>
+              <a:t>TD3</a:t>
+            </a:r>
+            <a:endParaRPr lang="en-US" sz="1200" dirty="0">
+              <a:latin typeface="Arial" panose="020B0604020202020204" pitchFamily="34" charset="0"/>
+              <a:cs typeface="Arial" panose="020B0604020202020204" pitchFamily="34" charset="0"/>
+            </a:endParaRPr>
+          </a:p>
+        </p:txBody>
+      </p:sp>
+      <p:sp>
+        <p:nvSpPr>
+          <p:cNvPr id="29" name="why TD3">
+            <a:extLst>
+              <a:ext uri="{FF2B5EF4-FFF2-40B4-BE49-F238E27FC236}">
+                <a16:creationId xmlns:a16="http://schemas.microsoft.com/office/drawing/2014/main" id="{6AAFEDEE-0CDA-F166-8E37-CF9FF8C9B734}"/>
+              </a:ext>
+            </a:extLst>
+          </p:cNvPr>
+          <p:cNvSpPr txBox="1"/>
+          <p:nvPr/>
+        </p:nvSpPr>
+        <p:spPr>
+          <a:xfrm>
+            <a:off x="2500524" y="4716661"/>
+            <a:ext cx="4617720" cy="502920"/>
+          </a:xfrm>
+          <a:prstGeom prst="rect">
+            <a:avLst/>
+          </a:prstGeom>
+          <a:solidFill>
+            <a:srgbClr val="F8FAFC"/>
+          </a:solidFill>
+          <a:ln w="0">
+            <a:solidFill>
+              <a:srgbClr val="FFFFFF"/>
+            </a:solidFill>
+          </a:ln>
+        </p:spPr>
+        <p:txBody>
+          <a:bodyPr wrap="square" lIns="9144" tIns="9144" rIns="9144" bIns="9144" anchor="t"/>
+          <a:lstStyle/>
+          <a:p>
+            <a:r>
+              <a:rPr lang="en-US" sz="1200" dirty="0">
+                <a:solidFill>
+                  <a:srgbClr val="334155"/>
+                </a:solidFill>
+                <a:latin typeface="Arial" panose="020B0604020202020204" pitchFamily="34" charset="0"/>
+                <a:cs typeface="Arial" panose="020B0604020202020204" pitchFamily="34" charset="0"/>
+              </a:rPr>
+              <a:t>Strong deterministic baseline, but SAC gives more deliberate exploration through entropy regularization.</a:t>
+            </a:r>
+            <a:endParaRPr lang="en-US" sz="1200" dirty="0">
+              <a:latin typeface="Arial" panose="020B0604020202020204" pitchFamily="34" charset="0"/>
+              <a:cs typeface="Arial" panose="020B0604020202020204" pitchFamily="34" charset="0"/>
+            </a:endParaRPr>
+          </a:p>
+        </p:txBody>
+      </p:sp>
+      <p:sp>
+        <p:nvSpPr>
+          <p:cNvPr id="31" name="sac fit title">
+            <a:extLst>
+              <a:ext uri="{FF2B5EF4-FFF2-40B4-BE49-F238E27FC236}">
+                <a16:creationId xmlns:a16="http://schemas.microsoft.com/office/drawing/2014/main" id="{E33DBC0C-023F-320E-D055-FC74885ED0AE}"/>
+              </a:ext>
+            </a:extLst>
+          </p:cNvPr>
+          <p:cNvSpPr txBox="1"/>
+          <p:nvPr/>
+        </p:nvSpPr>
+        <p:spPr>
+          <a:xfrm>
+            <a:off x="9152578" y="2178427"/>
+            <a:ext cx="3794760" cy="320040"/>
+          </a:xfrm>
+          <a:prstGeom prst="rect">
+            <a:avLst/>
+          </a:prstGeom>
+          <a:solidFill>
+            <a:srgbClr val="EFF6FF"/>
+          </a:solidFill>
+          <a:ln w="0">
+            <a:solidFill>
+              <a:srgbClr val="EFF6FF"/>
+            </a:solidFill>
+          </a:ln>
+        </p:spPr>
+        <p:txBody>
+          <a:bodyPr wrap="square" lIns="18288" tIns="18288" rIns="18288" bIns="18288" anchor="t"/>
+          <a:lstStyle/>
+          <a:p>
+            <a:r>
+              <a:rPr lang="en-US" sz="1200" dirty="0">
+                <a:solidFill>
+                  <a:srgbClr val="1E3A8A"/>
+                </a:solidFill>
+                <a:latin typeface="Arial" panose="020B0604020202020204" pitchFamily="34" charset="0"/>
+                <a:cs typeface="Arial" panose="020B0604020202020204" pitchFamily="34" charset="0"/>
+              </a:rPr>
+              <a:t>Why SAC fits this thesis</a:t>
+            </a:r>
+            <a:endParaRPr lang="en-US" sz="1200" dirty="0">
+              <a:latin typeface="Arial" panose="020B0604020202020204" pitchFamily="34" charset="0"/>
+              <a:cs typeface="Arial" panose="020B0604020202020204" pitchFamily="34" charset="0"/>
+            </a:endParaRPr>
+          </a:p>
+        </p:txBody>
+      </p:sp>
+      <p:sp>
+        <p:nvSpPr>
+          <p:cNvPr id="32" name="sac bullets">
+            <a:extLst>
+              <a:ext uri="{FF2B5EF4-FFF2-40B4-BE49-F238E27FC236}">
+                <a16:creationId xmlns:a16="http://schemas.microsoft.com/office/drawing/2014/main" id="{AA1E59B0-582B-BA52-17B3-5A73B3C47632}"/>
+              </a:ext>
+            </a:extLst>
+          </p:cNvPr>
+          <p:cNvSpPr txBox="1"/>
+          <p:nvPr/>
+        </p:nvSpPr>
+        <p:spPr>
+          <a:xfrm>
+            <a:off x="9120574" y="2533810"/>
+            <a:ext cx="3730752" cy="2697480"/>
+          </a:xfrm>
+          <a:prstGeom prst="rect">
+            <a:avLst/>
+          </a:prstGeom>
+          <a:solidFill>
+            <a:srgbClr val="EFF6FF"/>
+          </a:solidFill>
+          <a:ln w="0">
+            <a:solidFill>
+              <a:srgbClr val="EFF6FF"/>
+            </a:solidFill>
+          </a:ln>
+        </p:spPr>
+        <p:txBody>
+          <a:bodyPr wrap="square" lIns="18288" tIns="18288" rIns="18288" bIns="18288" anchor="t"/>
+          <a:lstStyle/>
+          <a:p>
+            <a:pPr marL="228600" indent="-171450">
+              <a:buChar char="•"/>
+            </a:pPr>
+            <a:r>
+              <a:rPr lang="en-US" sz="1200" dirty="0">
+                <a:solidFill>
+                  <a:srgbClr val="334155"/>
+                </a:solidFill>
+                <a:latin typeface="Arial" panose="020B0604020202020204" pitchFamily="34" charset="0"/>
+                <a:cs typeface="Arial" panose="020B0604020202020204" pitchFamily="34" charset="0"/>
+              </a:rPr>
+              <a:t>Continuous actor outputs the charge/discharge setpoint directly</a:t>
+            </a:r>
+            <a:endParaRPr lang="en-US" sz="1200" dirty="0">
+              <a:latin typeface="Arial" panose="020B0604020202020204" pitchFamily="34" charset="0"/>
+              <a:cs typeface="Arial" panose="020B0604020202020204" pitchFamily="34" charset="0"/>
+            </a:endParaRPr>
+          </a:p>
+          <a:p>
+            <a:pPr marL="228600" indent="-171450">
+              <a:buChar char="•"/>
+            </a:pPr>
+            <a:r>
+              <a:rPr lang="en-US" sz="1200" dirty="0">
+                <a:solidFill>
+                  <a:srgbClr val="334155"/>
+                </a:solidFill>
+                <a:latin typeface="Arial" panose="020B0604020202020204" pitchFamily="34" charset="0"/>
+                <a:cs typeface="Arial" panose="020B0604020202020204" pitchFamily="34" charset="0"/>
+              </a:rPr>
+              <a:t>Off-policy replay reuses simulation data efficiently</a:t>
+            </a:r>
+            <a:endParaRPr lang="en-US" sz="1200" dirty="0">
+              <a:latin typeface="Arial" panose="020B0604020202020204" pitchFamily="34" charset="0"/>
+              <a:cs typeface="Arial" panose="020B0604020202020204" pitchFamily="34" charset="0"/>
+            </a:endParaRPr>
+          </a:p>
+          <a:p>
+            <a:pPr marL="228600" indent="-171450">
+              <a:buChar char="•"/>
+            </a:pPr>
+            <a:r>
+              <a:rPr lang="en-US" sz="1200" dirty="0">
+                <a:solidFill>
+                  <a:srgbClr val="334155"/>
+                </a:solidFill>
+                <a:latin typeface="Arial" panose="020B0604020202020204" pitchFamily="34" charset="0"/>
+                <a:cs typeface="Arial" panose="020B0604020202020204" pitchFamily="34" charset="0"/>
+              </a:rPr>
+              <a:t>Entropy term keeps exploration alive during price spikes and SOC trade-offs</a:t>
+            </a:r>
+            <a:endParaRPr lang="en-US" sz="1200" dirty="0">
+              <a:latin typeface="Arial" panose="020B0604020202020204" pitchFamily="34" charset="0"/>
+              <a:cs typeface="Arial" panose="020B0604020202020204" pitchFamily="34" charset="0"/>
+            </a:endParaRPr>
+          </a:p>
+          <a:p>
+            <a:pPr marL="228600" indent="-171450">
+              <a:buChar char="•"/>
+            </a:pPr>
+            <a:r>
+              <a:rPr lang="en-US" sz="1200" dirty="0">
+                <a:solidFill>
+                  <a:srgbClr val="334155"/>
+                </a:solidFill>
+                <a:latin typeface="Arial" panose="020B0604020202020204" pitchFamily="34" charset="0"/>
+                <a:cs typeface="Arial" panose="020B0604020202020204" pitchFamily="34" charset="0"/>
+              </a:rPr>
+              <a:t>After training, inference is a direct state-to-action mapping</a:t>
+            </a:r>
+            <a:endParaRPr lang="en-US" sz="1200" dirty="0">
+              <a:latin typeface="Arial" panose="020B0604020202020204" pitchFamily="34" charset="0"/>
+              <a:cs typeface="Arial" panose="020B0604020202020204" pitchFamily="34" charset="0"/>
+            </a:endParaRPr>
+          </a:p>
+          <a:p>
+            <a:pPr marL="228600" indent="-171450">
+              <a:buChar char="•"/>
+            </a:pPr>
+            <a:r>
+              <a:rPr lang="en-US" sz="1200" dirty="0">
+                <a:solidFill>
+                  <a:srgbClr val="334155"/>
+                </a:solidFill>
+                <a:latin typeface="Arial" panose="020B0604020202020204" pitchFamily="34" charset="0"/>
+                <a:cs typeface="Arial" panose="020B0604020202020204" pitchFamily="34" charset="0"/>
+              </a:rPr>
+              <a:t>Same algorithm family can scale from battery power to cookie-factory continuous controls</a:t>
+            </a:r>
+            <a:endParaRPr lang="en-US" sz="1200" dirty="0">
+              <a:latin typeface="Arial" panose="020B0604020202020204" pitchFamily="34" charset="0"/>
+              <a:cs typeface="Arial" panose="020B0604020202020204" pitchFamily="34" charset="0"/>
+            </a:endParaRPr>
+          </a:p>
+        </p:txBody>
+      </p:sp>
     </p:spTree>
     <p:extLst>
       <p:ext uri="{BB962C8B-B14F-4D97-AF65-F5344CB8AC3E}">
-        <p14:creationId xmlns:p14="http://schemas.microsoft.com/office/powerpoint/2010/main" val="444764384"/>
+        <p14:creationId xmlns:p14="http://schemas.microsoft.com/office/powerpoint/2010/main" val="3583876653"/>
       </p:ext>
     </p:extLst>
   </p:cSld>
